--- a/1차 프로젝트/기획/화면 설계서.pptx
+++ b/1차 프로젝트/기획/화면 설계서.pptx
@@ -9,6 +9,8 @@
     <p:sldId id="282" r:id="rId3"/>
     <p:sldId id="283" r:id="rId4"/>
     <p:sldId id="284" r:id="rId5"/>
+    <p:sldId id="285" r:id="rId6"/>
+    <p:sldId id="286" r:id="rId7"/>
   </p:sldIdLst>
   <p:sldSz cx="12192000" cy="6858000"/>
   <p:notesSz cx="6858000" cy="9144000"/>
@@ -107,6 +109,11 @@
       </a:defRPr>
     </a:lvl9pPr>
   </p:defaultTextStyle>
+  <p:extLst>
+    <p:ext uri="{EFAFB233-063F-42B5-8137-9DF3F51BA10A}">
+      <p15:sldGuideLst xmlns:p15="http://schemas.microsoft.com/office/powerpoint/2012/main"/>
+    </p:ext>
+  </p:extLst>
 </p:presentation>
 </file>
 
@@ -257,7 +264,7 @@
           <a:p>
             <a:fld id="{086E833D-714E-4D65-B923-5C68908BA676}" type="datetimeFigureOut">
               <a:rPr lang="ko-KR" altLang="en-US" smtClean="0"/>
-              <a:t>2026-03-27</a:t>
+              <a:t>2026-04-10</a:t>
             </a:fld>
             <a:endParaRPr lang="ko-KR" altLang="en-US"/>
           </a:p>
@@ -455,7 +462,7 @@
           <a:p>
             <a:fld id="{086E833D-714E-4D65-B923-5C68908BA676}" type="datetimeFigureOut">
               <a:rPr lang="ko-KR" altLang="en-US" smtClean="0"/>
-              <a:t>2026-03-27</a:t>
+              <a:t>2026-04-10</a:t>
             </a:fld>
             <a:endParaRPr lang="ko-KR" altLang="en-US"/>
           </a:p>
@@ -663,7 +670,7 @@
           <a:p>
             <a:fld id="{086E833D-714E-4D65-B923-5C68908BA676}" type="datetimeFigureOut">
               <a:rPr lang="ko-KR" altLang="en-US" smtClean="0"/>
-              <a:t>2026-03-27</a:t>
+              <a:t>2026-04-10</a:t>
             </a:fld>
             <a:endParaRPr lang="ko-KR" altLang="en-US"/>
           </a:p>
@@ -861,7 +868,7 @@
           <a:p>
             <a:fld id="{086E833D-714E-4D65-B923-5C68908BA676}" type="datetimeFigureOut">
               <a:rPr lang="ko-KR" altLang="en-US" smtClean="0"/>
-              <a:t>2026-03-27</a:t>
+              <a:t>2026-04-10</a:t>
             </a:fld>
             <a:endParaRPr lang="ko-KR" altLang="en-US"/>
           </a:p>
@@ -1136,7 +1143,7 @@
           <a:p>
             <a:fld id="{086E833D-714E-4D65-B923-5C68908BA676}" type="datetimeFigureOut">
               <a:rPr lang="ko-KR" altLang="en-US" smtClean="0"/>
-              <a:t>2026-03-27</a:t>
+              <a:t>2026-04-10</a:t>
             </a:fld>
             <a:endParaRPr lang="ko-KR" altLang="en-US"/>
           </a:p>
@@ -1401,7 +1408,7 @@
           <a:p>
             <a:fld id="{086E833D-714E-4D65-B923-5C68908BA676}" type="datetimeFigureOut">
               <a:rPr lang="ko-KR" altLang="en-US" smtClean="0"/>
-              <a:t>2026-03-27</a:t>
+              <a:t>2026-04-10</a:t>
             </a:fld>
             <a:endParaRPr lang="ko-KR" altLang="en-US"/>
           </a:p>
@@ -1813,7 +1820,7 @@
           <a:p>
             <a:fld id="{086E833D-714E-4D65-B923-5C68908BA676}" type="datetimeFigureOut">
               <a:rPr lang="ko-KR" altLang="en-US" smtClean="0"/>
-              <a:t>2026-03-27</a:t>
+              <a:t>2026-04-10</a:t>
             </a:fld>
             <a:endParaRPr lang="ko-KR" altLang="en-US"/>
           </a:p>
@@ -1954,7 +1961,7 @@
           <a:p>
             <a:fld id="{086E833D-714E-4D65-B923-5C68908BA676}" type="datetimeFigureOut">
               <a:rPr lang="ko-KR" altLang="en-US" smtClean="0"/>
-              <a:t>2026-03-27</a:t>
+              <a:t>2026-04-10</a:t>
             </a:fld>
             <a:endParaRPr lang="ko-KR" altLang="en-US"/>
           </a:p>
@@ -2067,7 +2074,7 @@
           <a:p>
             <a:fld id="{086E833D-714E-4D65-B923-5C68908BA676}" type="datetimeFigureOut">
               <a:rPr lang="ko-KR" altLang="en-US" smtClean="0"/>
-              <a:t>2026-03-27</a:t>
+              <a:t>2026-04-10</a:t>
             </a:fld>
             <a:endParaRPr lang="ko-KR" altLang="en-US"/>
           </a:p>
@@ -2378,7 +2385,7 @@
           <a:p>
             <a:fld id="{086E833D-714E-4D65-B923-5C68908BA676}" type="datetimeFigureOut">
               <a:rPr lang="ko-KR" altLang="en-US" smtClean="0"/>
-              <a:t>2026-03-27</a:t>
+              <a:t>2026-04-10</a:t>
             </a:fld>
             <a:endParaRPr lang="ko-KR" altLang="en-US"/>
           </a:p>
@@ -2666,7 +2673,7 @@
           <a:p>
             <a:fld id="{086E833D-714E-4D65-B923-5C68908BA676}" type="datetimeFigureOut">
               <a:rPr lang="ko-KR" altLang="en-US" smtClean="0"/>
-              <a:t>2026-03-27</a:t>
+              <a:t>2026-04-10</a:t>
             </a:fld>
             <a:endParaRPr lang="ko-KR" altLang="en-US"/>
           </a:p>
@@ -2907,7 +2914,7 @@
           <a:p>
             <a:fld id="{086E833D-714E-4D65-B923-5C68908BA676}" type="datetimeFigureOut">
               <a:rPr lang="ko-KR" altLang="en-US" smtClean="0"/>
-              <a:t>2026-03-27</a:t>
+              <a:t>2026-04-10</a:t>
             </a:fld>
             <a:endParaRPr lang="ko-KR" altLang="en-US"/>
           </a:p>
@@ -3326,10 +3333,10 @@
       </p:grpSpPr>
       <p:pic>
         <p:nvPicPr>
-          <p:cNvPr id="3" name="그림 2" descr="텍스트, 스크린샷, 폰트, 번호이(가) 표시된 사진&#10;&#10;AI가 생성한 콘텐츠는 부정확할 수 있습니다.">
+          <p:cNvPr id="10" name="그림 9" descr="실내, 벽, 가구, 인테리어 디자인이(가) 표시된 사진&#10;&#10;AI가 생성한 콘텐츠는 부정확할 수 있습니다.">
             <a:extLst>
               <a:ext uri="{FF2B5EF4-FFF2-40B4-BE49-F238E27FC236}">
-                <a16:creationId xmlns:a16="http://schemas.microsoft.com/office/drawing/2014/main" id="{6D5E5EEB-C914-F0C1-6A7C-72E37E4E7406}"/>
+                <a16:creationId xmlns:a16="http://schemas.microsoft.com/office/drawing/2014/main" id="{08207204-0CDA-0EAB-2C4B-4292E2476009}"/>
               </a:ext>
             </a:extLst>
           </p:cNvPr>
@@ -3352,17 +3359,12 @@
         </p:blipFill>
         <p:spPr>
           <a:xfrm>
-            <a:off x="363516" y="1980000"/>
-            <a:ext cx="8640000" cy="4296417"/>
+            <a:off x="1009000" y="1825222"/>
+            <a:ext cx="7349031" cy="4447008"/>
           </a:xfrm>
           <a:prstGeom prst="rect">
             <a:avLst/>
           </a:prstGeom>
-          <a:ln>
-            <a:solidFill>
-              <a:schemeClr val="tx1"/>
-            </a:solidFill>
-          </a:ln>
         </p:spPr>
       </p:pic>
       <p:graphicFrame>
@@ -3377,7 +3379,13 @@
           <p:cNvGraphicFramePr>
             <a:graphicFrameLocks noGrp="1"/>
           </p:cNvGraphicFramePr>
-          <p:nvPr/>
+          <p:nvPr>
+            <p:extLst>
+              <p:ext uri="{D42A27DB-BD31-4B8C-83A1-F6EECF244321}">
+                <p14:modId xmlns:p14="http://schemas.microsoft.com/office/powerpoint/2010/main" val="2591827434"/>
+              </p:ext>
+            </p:extLst>
+          </p:nvPr>
         </p:nvGraphicFramePr>
         <p:xfrm>
           <a:off x="363516" y="826547"/>
@@ -3524,15 +3532,22 @@
                     <a:p>
                       <a:pPr algn="l" latinLnBrk="1"/>
                       <a:r>
-                        <a:rPr lang="ko-KR" altLang="en-US" sz="1200" b="0">
+                        <a:rPr lang="en-US" altLang="ko-KR" sz="1200" b="0">
                           <a:solidFill>
                             <a:schemeClr val="tx1"/>
                           </a:solidFill>
                           <a:latin typeface="+mn-ea"/>
                           <a:ea typeface="+mn-ea"/>
                         </a:rPr>
-                        <a:t>데이터 입력</a:t>
-                      </a:r>
+                        <a:t>main</a:t>
+                      </a:r>
+                      <a:endParaRPr lang="ko-KR" altLang="en-US" sz="1200" b="0">
+                        <a:solidFill>
+                          <a:schemeClr val="tx1"/>
+                        </a:solidFill>
+                        <a:latin typeface="+mn-ea"/>
+                        <a:ea typeface="+mn-ea"/>
+                      </a:endParaRPr>
                     </a:p>
                   </a:txBody>
                   <a:tcPr anchor="ctr">
@@ -3660,7 +3675,7 @@
                           <a:latin typeface="+mn-ea"/>
                           <a:ea typeface="+mn-ea"/>
                         </a:rPr>
-                        <a:t>UI-Input</a:t>
+                        <a:t>UI-main</a:t>
                       </a:r>
                       <a:endParaRPr lang="ko-KR" altLang="en-US" sz="1200" b="0">
                         <a:solidFill>
@@ -3925,7 +3940,7 @@
                           <a:latin typeface="+mn-ea"/>
                           <a:ea typeface="+mn-ea"/>
                         </a:rPr>
-                        <a:t>2026.03.27</a:t>
+                        <a:t>2026.04.09</a:t>
                       </a:r>
                       <a:endParaRPr lang="ko-KR" altLang="en-US" sz="1200" b="0">
                         <a:solidFill>
@@ -4068,7 +4083,7 @@
                           <a:latin typeface="+mn-ea"/>
                           <a:ea typeface="+mn-ea"/>
                         </a:rPr>
-                        <a:t>Input_data</a:t>
+                        <a:t>main</a:t>
                       </a:r>
                       <a:endParaRPr lang="ko-KR" altLang="en-US" sz="1200" b="0">
                         <a:solidFill>
@@ -4350,7 +4365,13 @@
           <p:cNvGraphicFramePr>
             <a:graphicFrameLocks noGrp="1"/>
           </p:cNvGraphicFramePr>
-          <p:nvPr/>
+          <p:nvPr>
+            <p:extLst>
+              <p:ext uri="{D42A27DB-BD31-4B8C-83A1-F6EECF244321}">
+                <p14:modId xmlns:p14="http://schemas.microsoft.com/office/powerpoint/2010/main" val="3076166798"/>
+              </p:ext>
+            </p:extLst>
+          </p:nvPr>
         </p:nvGraphicFramePr>
         <p:xfrm>
           <a:off x="9221188" y="826547"/>
@@ -4525,15 +4546,15 @@
                       <a:pPr algn="l" latinLnBrk="1"/>
                       <a:r>
                         <a:rPr lang="ko-KR" altLang="en-US" sz="1200"/>
-                        <a:t>최근 </a:t>
+                        <a:t>로고</a:t>
                       </a:r>
                       <a:r>
                         <a:rPr lang="en-US" altLang="ko-KR" sz="1200"/>
-                        <a:t>24</a:t>
+                        <a:t>. </a:t>
                       </a:r>
                       <a:r>
                         <a:rPr lang="ko-KR" altLang="en-US" sz="1200"/>
-                        <a:t>시간 섭취한 음식 영양소 수치 입력</a:t>
+                        <a:t>메인페이지 이동</a:t>
                       </a:r>
                     </a:p>
                   </a:txBody>
@@ -4649,15 +4670,15 @@
                       <a:pPr algn="l" latinLnBrk="1"/>
                       <a:r>
                         <a:rPr lang="ko-KR" altLang="en-US" sz="1200"/>
-                        <a:t>현재 사용 대상의 소득 수준</a:t>
+                        <a:t>미리 예측한 사용자의 </a:t>
                       </a:r>
                       <a:r>
                         <a:rPr lang="en-US" altLang="ko-KR" sz="1200"/>
-                        <a:t>, </a:t>
+                        <a:t>ID </a:t>
                       </a:r>
                       <a:r>
                         <a:rPr lang="ko-KR" altLang="en-US" sz="1200"/>
-                        <a:t>교육 수준 입력</a:t>
+                        <a:t>입력</a:t>
                       </a:r>
                     </a:p>
                   </a:txBody>
@@ -4772,8 +4793,20 @@
                     <a:p>
                       <a:pPr algn="l" latinLnBrk="1"/>
                       <a:r>
+                        <a:rPr lang="en-US" altLang="ko-KR" sz="1200"/>
+                        <a:t>2</a:t>
+                      </a:r>
+                      <a:r>
                         <a:rPr lang="ko-KR" altLang="en-US" sz="1200"/>
-                        <a:t>운동과 흡연 여부 확인</a:t>
+                        <a:t>번에서 입력한 </a:t>
+                      </a:r>
+                      <a:r>
+                        <a:rPr lang="en-US" altLang="ko-KR" sz="1200"/>
+                        <a:t>ID </a:t>
+                      </a:r>
+                      <a:r>
+                        <a:rPr lang="ko-KR" altLang="en-US" sz="1200"/>
+                        <a:t>조회</a:t>
                       </a:r>
                     </a:p>
                   </a:txBody>
@@ -4889,7 +4922,7 @@
                       <a:pPr algn="l" latinLnBrk="1"/>
                       <a:r>
                         <a:rPr lang="ko-KR" altLang="en-US" sz="1200"/>
-                        <a:t>입력한 정보에 대한 분석 결과 페이지로 이동</a:t>
+                        <a:t>신규 사용자는 예측 데이터 입력 페이지로 이동</a:t>
                       </a:r>
                     </a:p>
                   </a:txBody>
@@ -5080,19 +5113,27 @@
                       <a:pPr algn="ctr" latinLnBrk="1"/>
                       <a:r>
                         <a:rPr lang="en-US" altLang="ko-KR" sz="1200"/>
-                        <a:t>‘</a:t>
+                        <a:t>2</a:t>
                       </a:r>
                       <a:r>
                         <a:rPr lang="ko-KR" altLang="en-US" sz="1200"/>
-                        <a:t>분석 결과 확인하기</a:t>
+                        <a:t>번 입력하고 </a:t>
                       </a:r>
                       <a:r>
                         <a:rPr lang="en-US" altLang="ko-KR" sz="1200"/>
-                        <a:t>’</a:t>
+                        <a:t>3</a:t>
                       </a:r>
                       <a:r>
                         <a:rPr lang="ko-KR" altLang="en-US" sz="1200"/>
-                        <a:t>를 눌러 입력 데이터에 대한 결과 페이지로 이동</a:t>
+                        <a:t>번 누르면 해당 </a:t>
+                      </a:r>
+                      <a:r>
+                        <a:rPr lang="en-US" altLang="ko-KR" sz="1200"/>
+                        <a:t>ID</a:t>
+                      </a:r>
+                      <a:r>
+                        <a:rPr lang="ko-KR" altLang="en-US" sz="1200"/>
+                        <a:t>의 사용자 데이터 결과 페이지로 이동</a:t>
                       </a:r>
                     </a:p>
                   </a:txBody>
@@ -5215,8 +5256,8 @@
         </p:nvSpPr>
         <p:spPr>
           <a:xfrm>
-            <a:off x="380895" y="2748597"/>
-            <a:ext cx="360000" cy="360000"/>
+            <a:off x="2113534" y="2176701"/>
+            <a:ext cx="324000" cy="324000"/>
           </a:xfrm>
           <a:prstGeom prst="ellipse">
             <a:avLst/>
@@ -5262,10 +5303,10 @@
       </p:sp>
       <p:sp>
         <p:nvSpPr>
-          <p:cNvPr id="6" name="타원 5">
+          <p:cNvPr id="11" name="타원 10">
             <a:extLst>
               <a:ext uri="{FF2B5EF4-FFF2-40B4-BE49-F238E27FC236}">
-                <a16:creationId xmlns:a16="http://schemas.microsoft.com/office/drawing/2014/main" id="{36530CCA-5A69-2CF3-5C54-34468856DFB6}"/>
+                <a16:creationId xmlns:a16="http://schemas.microsoft.com/office/drawing/2014/main" id="{9A3BB0EB-242E-A779-AFF3-0102738FDD5E}"/>
               </a:ext>
             </a:extLst>
           </p:cNvPr>
@@ -5276,8 +5317,8 @@
         </p:nvSpPr>
         <p:spPr>
           <a:xfrm>
-            <a:off x="3249774" y="2748597"/>
-            <a:ext cx="360000" cy="360000"/>
+            <a:off x="6357552" y="2176701"/>
+            <a:ext cx="324000" cy="324000"/>
           </a:xfrm>
           <a:prstGeom prst="ellipse">
             <a:avLst/>
@@ -5323,20 +5364,22 @@
       </p:sp>
       <p:sp>
         <p:nvSpPr>
-          <p:cNvPr id="7" name="타원 6">
+          <p:cNvPr id="12" name="타원 11">
             <a:extLst>
               <a:ext uri="{FF2B5EF4-FFF2-40B4-BE49-F238E27FC236}">
-                <a16:creationId xmlns:a16="http://schemas.microsoft.com/office/drawing/2014/main" id="{3194E283-4A82-FAAF-D7D6-6A6BB04817AF}"/>
+                <a16:creationId xmlns:a16="http://schemas.microsoft.com/office/drawing/2014/main" id="{F0C34912-9764-30A1-077E-DC0388AA7999}"/>
               </a:ext>
             </a:extLst>
           </p:cNvPr>
-          <p:cNvSpPr/>
+          <p:cNvSpPr>
+            <a:spLocks noChangeAspect="1"/>
+          </p:cNvSpPr>
           <p:nvPr/>
         </p:nvSpPr>
         <p:spPr>
           <a:xfrm>
-            <a:off x="6096000" y="2748597"/>
-            <a:ext cx="360000" cy="360000"/>
+            <a:off x="7220709" y="2176701"/>
+            <a:ext cx="324000" cy="324000"/>
           </a:xfrm>
           <a:prstGeom prst="ellipse">
             <a:avLst/>
@@ -5382,10 +5425,10 @@
       </p:sp>
       <p:sp>
         <p:nvSpPr>
-          <p:cNvPr id="8" name="타원 7">
+          <p:cNvPr id="13" name="타원 12">
             <a:extLst>
               <a:ext uri="{FF2B5EF4-FFF2-40B4-BE49-F238E27FC236}">
-                <a16:creationId xmlns:a16="http://schemas.microsoft.com/office/drawing/2014/main" id="{DD2E26A3-53FD-07AE-4CED-A337E917CD15}"/>
+                <a16:creationId xmlns:a16="http://schemas.microsoft.com/office/drawing/2014/main" id="{24645F31-AEAE-E037-7697-747173F0D5E0}"/>
               </a:ext>
             </a:extLst>
           </p:cNvPr>
@@ -5396,8 +5439,8 @@
         </p:nvSpPr>
         <p:spPr>
           <a:xfrm>
-            <a:off x="3626056" y="5472112"/>
-            <a:ext cx="360000" cy="360000"/>
+            <a:off x="7789370" y="2177911"/>
+            <a:ext cx="324000" cy="324000"/>
           </a:xfrm>
           <a:prstGeom prst="ellipse">
             <a:avLst/>
@@ -5473,10 +5516,10 @@
       </p:grpSpPr>
       <p:pic>
         <p:nvPicPr>
-          <p:cNvPr id="10" name="그림 9" descr="텍스트, 스크린샷, 폰트, 로고이(가) 표시된 사진&#10;&#10;AI가 생성한 콘텐츠는 부정확할 수 있습니다.">
+          <p:cNvPr id="6" name="그림 5" descr="텍스트, 스크린샷, 소프트웨어, 컴퓨터 아이콘이(가) 표시된 사진&#10;&#10;AI가 생성한 콘텐츠는 부정확할 수 있습니다.">
             <a:extLst>
               <a:ext uri="{FF2B5EF4-FFF2-40B4-BE49-F238E27FC236}">
-                <a16:creationId xmlns:a16="http://schemas.microsoft.com/office/drawing/2014/main" id="{FB42D041-C1E9-D3B8-368E-3B76ECA64D70}"/>
+                <a16:creationId xmlns:a16="http://schemas.microsoft.com/office/drawing/2014/main" id="{EE3BC58B-D548-E5EA-CF2D-4D872053AE50}"/>
               </a:ext>
             </a:extLst>
           </p:cNvPr>
@@ -5499,17 +5542,12 @@
         </p:blipFill>
         <p:spPr>
           <a:xfrm>
-            <a:off x="363516" y="1980000"/>
-            <a:ext cx="8640000" cy="4401590"/>
+            <a:off x="363516" y="1745672"/>
+            <a:ext cx="8641587" cy="4862946"/>
           </a:xfrm>
           <a:prstGeom prst="rect">
             <a:avLst/>
           </a:prstGeom>
-          <a:ln>
-            <a:solidFill>
-              <a:schemeClr val="tx1"/>
-            </a:solidFill>
-          </a:ln>
         </p:spPr>
       </p:pic>
       <p:graphicFrame>
@@ -5524,7 +5562,13 @@
           <p:cNvGraphicFramePr>
             <a:graphicFrameLocks noGrp="1"/>
           </p:cNvGraphicFramePr>
-          <p:nvPr/>
+          <p:nvPr>
+            <p:extLst>
+              <p:ext uri="{D42A27DB-BD31-4B8C-83A1-F6EECF244321}">
+                <p14:modId xmlns:p14="http://schemas.microsoft.com/office/powerpoint/2010/main" val="2826733415"/>
+              </p:ext>
+            </p:extLst>
+          </p:nvPr>
         </p:nvGraphicFramePr>
         <p:xfrm>
           <a:off x="363516" y="826547"/>
@@ -5671,15 +5715,22 @@
                     <a:p>
                       <a:pPr algn="l" latinLnBrk="1"/>
                       <a:r>
-                        <a:rPr lang="ko-KR" altLang="en-US" sz="1200" b="0">
+                        <a:rPr lang="en-US" altLang="ko-KR" sz="1200" b="0">
                           <a:solidFill>
                             <a:schemeClr val="tx1"/>
                           </a:solidFill>
                           <a:latin typeface="+mn-ea"/>
                           <a:ea typeface="+mn-ea"/>
                         </a:rPr>
-                        <a:t>데이터 결과</a:t>
-                      </a:r>
+                        <a:t>Predict</a:t>
+                      </a:r>
+                      <a:endParaRPr lang="ko-KR" altLang="en-US" sz="1200" b="0">
+                        <a:solidFill>
+                          <a:schemeClr val="tx1"/>
+                        </a:solidFill>
+                        <a:latin typeface="+mn-ea"/>
+                        <a:ea typeface="+mn-ea"/>
+                      </a:endParaRPr>
                     </a:p>
                   </a:txBody>
                   <a:tcPr anchor="ctr">
@@ -5807,7 +5858,7 @@
                           <a:latin typeface="+mn-ea"/>
                           <a:ea typeface="+mn-ea"/>
                         </a:rPr>
-                        <a:t>UI-Output_1</a:t>
+                        <a:t>UI-predict_1</a:t>
                       </a:r>
                       <a:endParaRPr lang="ko-KR" altLang="en-US" sz="1200" b="0">
                         <a:solidFill>
@@ -6072,7 +6123,7 @@
                           <a:latin typeface="+mn-ea"/>
                           <a:ea typeface="+mn-ea"/>
                         </a:rPr>
-                        <a:t>2026.03.27</a:t>
+                        <a:t>2026.04.09</a:t>
                       </a:r>
                       <a:endParaRPr lang="ko-KR" altLang="en-US" sz="1200" b="0">
                         <a:solidFill>
@@ -6215,7 +6266,7 @@
                           <a:latin typeface="+mn-ea"/>
                           <a:ea typeface="+mn-ea"/>
                         </a:rPr>
-                        <a:t>Input_data – Output_data</a:t>
+                        <a:t>main - predict</a:t>
                       </a:r>
                       <a:endParaRPr lang="ko-KR" altLang="en-US" sz="1200" b="0">
                         <a:solidFill>
@@ -6497,11 +6548,17 @@
           <p:cNvGraphicFramePr>
             <a:graphicFrameLocks noGrp="1"/>
           </p:cNvGraphicFramePr>
-          <p:nvPr/>
+          <p:nvPr>
+            <p:extLst>
+              <p:ext uri="{D42A27DB-BD31-4B8C-83A1-F6EECF244321}">
+                <p14:modId xmlns:p14="http://schemas.microsoft.com/office/powerpoint/2010/main" val="3191102460"/>
+              </p:ext>
+            </p:extLst>
+          </p:nvPr>
         </p:nvGraphicFramePr>
         <p:xfrm>
           <a:off x="9221188" y="826547"/>
-          <a:ext cx="2607296" cy="2556000"/>
+          <a:ext cx="2607296" cy="2766960"/>
         </p:xfrm>
         <a:graphic>
           <a:graphicData uri="http://schemas.openxmlformats.org/drawingml/2006/table">
@@ -6672,7 +6729,47 @@
                       <a:pPr algn="l" latinLnBrk="1"/>
                       <a:r>
                         <a:rPr lang="ko-KR" altLang="en-US" sz="1200"/>
-                        <a:t>사용자 입력 데이터에 대한 고콜레스테롤 발생 위험도 시각화</a:t>
+                        <a:t>성별</a:t>
+                      </a:r>
+                      <a:r>
+                        <a:rPr lang="en-US" altLang="ko-KR" sz="1200"/>
+                        <a:t>, </a:t>
+                      </a:r>
+                      <a:r>
+                        <a:rPr lang="ko-KR" altLang="en-US" sz="1200"/>
+                        <a:t>연령</a:t>
+                      </a:r>
+                      <a:r>
+                        <a:rPr lang="en-US" altLang="ko-KR" sz="1200"/>
+                        <a:t>, </a:t>
+                      </a:r>
+                      <a:r>
+                        <a:rPr lang="ko-KR" altLang="en-US" sz="1200"/>
+                        <a:t>가구소득분위</a:t>
+                      </a:r>
+                      <a:r>
+                        <a:rPr lang="en-US" altLang="ko-KR" sz="1200"/>
+                        <a:t>, </a:t>
+                      </a:r>
+                      <a:r>
+                        <a:rPr lang="ko-KR" altLang="en-US" sz="1200"/>
+                        <a:t>교육수준</a:t>
+                      </a:r>
+                      <a:r>
+                        <a:rPr lang="en-US" altLang="ko-KR" sz="1200"/>
+                        <a:t>, </a:t>
+                      </a:r>
+                      <a:r>
+                        <a:rPr lang="ko-KR" altLang="en-US" sz="1200"/>
+                        <a:t>신장</a:t>
+                      </a:r>
+                      <a:r>
+                        <a:rPr lang="en-US" altLang="ko-KR" sz="1200"/>
+                        <a:t>, </a:t>
+                      </a:r>
+                      <a:r>
+                        <a:rPr lang="ko-KR" altLang="en-US" sz="1200"/>
+                        <a:t>체중 입력</a:t>
                       </a:r>
                     </a:p>
                   </a:txBody>
@@ -6788,7 +6885,7 @@
                       <a:pPr algn="l" latinLnBrk="1"/>
                       <a:r>
                         <a:rPr lang="ko-KR" altLang="en-US" sz="1200"/>
-                        <a:t>위험도에 따라 위험 등급 표시</a:t>
+                        <a:t>다음 정보 입력으로 넘어감</a:t>
                       </a:r>
                     </a:p>
                   </a:txBody>
@@ -6846,7 +6943,23 @@
                     <a:bodyPr/>
                     <a:lstStyle/>
                     <a:p>
-                      <a:pPr algn="ctr" latinLnBrk="1"/>
+                      <a:pPr marL="0" marR="0" lvl="0" indent="0" algn="ctr" defTabSz="914400" rtl="0" eaLnBrk="1" fontAlgn="auto" latinLnBrk="1" hangingPunct="1">
+                        <a:lnSpc>
+                          <a:spcPct val="100000"/>
+                        </a:lnSpc>
+                        <a:spcBef>
+                          <a:spcPts val="0"/>
+                        </a:spcBef>
+                        <a:spcAft>
+                          <a:spcPts val="0"/>
+                        </a:spcAft>
+                        <a:buClrTx/>
+                        <a:buSzTx/>
+                        <a:buFontTx/>
+                        <a:buNone/>
+                        <a:tabLst/>
+                        <a:defRPr/>
+                      </a:pPr>
                       <a:r>
                         <a:rPr lang="en-US" altLang="ko-KR" sz="1200"/>
                         <a:t>Check Point</a:t>
@@ -6902,7 +7015,8 @@
                     <a:bodyPr/>
                     <a:lstStyle/>
                     <a:p>
-                      <a:endParaRPr/>
+                      <a:pPr algn="l" latinLnBrk="1"/>
+                      <a:endParaRPr lang="ko-KR" altLang="en-US" sz="1200"/>
                     </a:p>
                   </a:txBody>
                   <a:tcPr anchor="ctr">
@@ -6949,7 +7063,7 @@
                 </a:tc>
                 <a:extLst>
                   <a:ext uri="{0D108BD9-81ED-4DB2-BD59-A6C34878D82A}">
-                    <a16:rowId xmlns:a16="http://schemas.microsoft.com/office/drawing/2014/main" val="3718604235"/>
+                    <a16:rowId xmlns:a16="http://schemas.microsoft.com/office/drawing/2014/main" val="2275643079"/>
                   </a:ext>
                 </a:extLst>
               </a:tr>
@@ -6959,14 +7073,34 @@
                     <a:bodyPr/>
                     <a:lstStyle/>
                     <a:p>
-                      <a:pPr algn="just" latinLnBrk="1"/>
+                      <a:pPr algn="ctr" latinLnBrk="1"/>
                       <a:r>
                         <a:rPr lang="ko-KR" altLang="en-US" sz="1200"/>
-                        <a:t>스크롤을 내려서 다음 화면으로 이동</a:t>
-                      </a:r>
-                    </a:p>
-                  </a:txBody>
-                  <a:tcPr anchor="ctr">
+                        <a:t>위에 </a:t>
+                      </a:r>
+                      <a:r>
+                        <a:rPr lang="en-US" altLang="ko-KR" sz="1200"/>
+                        <a:t>Look up, Predict</a:t>
+                      </a:r>
+                      <a:r>
+                        <a:rPr lang="ko-KR" altLang="en-US" sz="1200"/>
+                        <a:t>는 메인 페이지의 기능과 동일</a:t>
+                      </a:r>
+                      <a:endParaRPr lang="en-US" altLang="ko-KR" sz="1200"/>
+                    </a:p>
+                    <a:p>
+                      <a:pPr algn="ctr" latinLnBrk="1"/>
+                      <a:r>
+                        <a:rPr lang="en-US" altLang="ko-KR" sz="1200"/>
+                        <a:t>BMI</a:t>
+                      </a:r>
+                      <a:r>
+                        <a:rPr lang="ko-KR" altLang="en-US" sz="1200"/>
+                        <a:t>수치는 입력받은 신장과 체중 값으로 자동 계산</a:t>
+                      </a:r>
+                    </a:p>
+                  </a:txBody>
+                  <a:tcPr>
                     <a:lnL w="12700" cap="flat" cmpd="sng" algn="ctr">
                       <a:solidFill>
                         <a:schemeClr val="tx1"/>
@@ -7013,7 +7147,8 @@
                     <a:bodyPr/>
                     <a:lstStyle/>
                     <a:p>
-                      <a:endParaRPr/>
+                      <a:pPr algn="l" latinLnBrk="1"/>
+                      <a:endParaRPr lang="ko-KR" altLang="en-US" sz="1200"/>
                     </a:p>
                   </a:txBody>
                   <a:tcPr anchor="ctr">
@@ -7060,7 +7195,7 @@
                 </a:tc>
                 <a:extLst>
                   <a:ext uri="{0D108BD9-81ED-4DB2-BD59-A6C34878D82A}">
-                    <a16:rowId xmlns:a16="http://schemas.microsoft.com/office/drawing/2014/main" val="2755969263"/>
+                    <a16:rowId xmlns:a16="http://schemas.microsoft.com/office/drawing/2014/main" val="1885486421"/>
                   </a:ext>
                 </a:extLst>
               </a:tr>
@@ -7084,8 +7219,69 @@
         </p:nvSpPr>
         <p:spPr>
           <a:xfrm>
-            <a:off x="3826780" y="3700134"/>
-            <a:ext cx="360000" cy="360000"/>
+            <a:off x="6978071" y="5642139"/>
+            <a:ext cx="324000" cy="324000"/>
+          </a:xfrm>
+          <a:prstGeom prst="ellipse">
+            <a:avLst/>
+          </a:prstGeom>
+          <a:solidFill>
+            <a:srgbClr val="C00000">
+              <a:alpha val="60000"/>
+            </a:srgbClr>
+          </a:solidFill>
+        </p:spPr>
+        <p:style>
+          <a:lnRef idx="2">
+            <a:schemeClr val="accent1">
+              <a:shade val="15000"/>
+            </a:schemeClr>
+          </a:lnRef>
+          <a:fillRef idx="1">
+            <a:schemeClr val="accent1"/>
+          </a:fillRef>
+          <a:effectRef idx="0">
+            <a:schemeClr val="accent1"/>
+          </a:effectRef>
+          <a:fontRef idx="minor">
+            <a:schemeClr val="lt1"/>
+          </a:fontRef>
+        </p:style>
+        <p:txBody>
+          <a:bodyPr rtlCol="0" anchor="ctr"/>
+          <a:lstStyle/>
+          <a:p>
+            <a:pPr algn="ctr"/>
+            <a:r>
+              <a:rPr lang="en-US" altLang="ko-KR" sz="2000">
+                <a:latin typeface="+mn-ea"/>
+              </a:rPr>
+              <a:t>2</a:t>
+            </a:r>
+            <a:endParaRPr lang="ko-KR" altLang="en-US" sz="2000">
+              <a:latin typeface="+mn-ea"/>
+            </a:endParaRPr>
+          </a:p>
+        </p:txBody>
+      </p:sp>
+      <p:sp>
+        <p:nvSpPr>
+          <p:cNvPr id="7" name="타원 6">
+            <a:extLst>
+              <a:ext uri="{FF2B5EF4-FFF2-40B4-BE49-F238E27FC236}">
+                <a16:creationId xmlns:a16="http://schemas.microsoft.com/office/drawing/2014/main" id="{6927301E-47D9-D7C6-EBF6-3EEBDCE32BE6}"/>
+              </a:ext>
+            </a:extLst>
+          </p:cNvPr>
+          <p:cNvSpPr>
+            <a:spLocks noChangeAspect="1"/>
+          </p:cNvSpPr>
+          <p:nvPr/>
+        </p:nvSpPr>
+        <p:spPr>
+          <a:xfrm>
+            <a:off x="1229323" y="3184753"/>
+            <a:ext cx="324000" cy="324000"/>
           </a:xfrm>
           <a:prstGeom prst="ellipse">
             <a:avLst/>
@@ -7129,71 +7325,10 @@
           </a:p>
         </p:txBody>
       </p:sp>
-      <p:sp>
-        <p:nvSpPr>
-          <p:cNvPr id="11" name="타원 10">
-            <a:extLst>
-              <a:ext uri="{FF2B5EF4-FFF2-40B4-BE49-F238E27FC236}">
-                <a16:creationId xmlns:a16="http://schemas.microsoft.com/office/drawing/2014/main" id="{F23660EC-BF39-B732-51DC-0C653706EBCB}"/>
-              </a:ext>
-            </a:extLst>
-          </p:cNvPr>
-          <p:cNvSpPr>
-            <a:spLocks noChangeAspect="1"/>
-          </p:cNvSpPr>
-          <p:nvPr/>
-        </p:nvSpPr>
-        <p:spPr>
-          <a:xfrm>
-            <a:off x="3826780" y="5259853"/>
-            <a:ext cx="360000" cy="360000"/>
-          </a:xfrm>
-          <a:prstGeom prst="ellipse">
-            <a:avLst/>
-          </a:prstGeom>
-          <a:solidFill>
-            <a:srgbClr val="C00000">
-              <a:alpha val="60000"/>
-            </a:srgbClr>
-          </a:solidFill>
-        </p:spPr>
-        <p:style>
-          <a:lnRef idx="2">
-            <a:schemeClr val="accent1">
-              <a:shade val="15000"/>
-            </a:schemeClr>
-          </a:lnRef>
-          <a:fillRef idx="1">
-            <a:schemeClr val="accent1"/>
-          </a:fillRef>
-          <a:effectRef idx="0">
-            <a:schemeClr val="accent1"/>
-          </a:effectRef>
-          <a:fontRef idx="minor">
-            <a:schemeClr val="lt1"/>
-          </a:fontRef>
-        </p:style>
-        <p:txBody>
-          <a:bodyPr rtlCol="0" anchor="ctr"/>
-          <a:lstStyle/>
-          <a:p>
-            <a:pPr algn="ctr"/>
-            <a:r>
-              <a:rPr lang="en-US" altLang="ko-KR" sz="2000">
-                <a:latin typeface="+mn-ea"/>
-              </a:rPr>
-              <a:t>2</a:t>
-            </a:r>
-            <a:endParaRPr lang="ko-KR" altLang="en-US" sz="2000">
-              <a:latin typeface="+mn-ea"/>
-            </a:endParaRPr>
-          </a:p>
-        </p:txBody>
-      </p:sp>
     </p:spTree>
     <p:extLst>
       <p:ext uri="{BB962C8B-B14F-4D97-AF65-F5344CB8AC3E}">
-        <p14:creationId xmlns:p14="http://schemas.microsoft.com/office/powerpoint/2010/main" val="465443049"/>
+        <p14:creationId xmlns:p14="http://schemas.microsoft.com/office/powerpoint/2010/main" val="1518207576"/>
       </p:ext>
     </p:extLst>
   </p:cSld>
@@ -7222,10 +7357,10 @@
       </p:grpSpPr>
       <p:pic>
         <p:nvPicPr>
-          <p:cNvPr id="8" name="그림 7" descr="텍스트, 스크린샷, 도표, 폰트이(가) 표시된 사진&#10;&#10;AI가 생성한 콘텐츠는 부정확할 수 있습니다.">
+          <p:cNvPr id="8" name="그림 7" descr="텍스트, 스크린샷, 직사각형, 번호이(가) 표시된 사진&#10;&#10;AI가 생성한 콘텐츠는 부정확할 수 있습니다.">
             <a:extLst>
               <a:ext uri="{FF2B5EF4-FFF2-40B4-BE49-F238E27FC236}">
-                <a16:creationId xmlns:a16="http://schemas.microsoft.com/office/drawing/2014/main" id="{C98737AC-8731-A304-4FF3-3824A063D168}"/>
+                <a16:creationId xmlns:a16="http://schemas.microsoft.com/office/drawing/2014/main" id="{8CA43BA6-EF96-A900-FBF2-6F9942429EE6}"/>
               </a:ext>
             </a:extLst>
           </p:cNvPr>
@@ -7248,17 +7383,12 @@
         </p:blipFill>
         <p:spPr>
           <a:xfrm>
-            <a:off x="363516" y="1980000"/>
-            <a:ext cx="8640000" cy="3606148"/>
+            <a:off x="363516" y="1757546"/>
+            <a:ext cx="8639999" cy="4862053"/>
           </a:xfrm>
           <a:prstGeom prst="rect">
             <a:avLst/>
           </a:prstGeom>
-          <a:ln>
-            <a:solidFill>
-              <a:schemeClr val="tx1"/>
-            </a:solidFill>
-          </a:ln>
         </p:spPr>
       </p:pic>
       <p:graphicFrame>
@@ -7273,7 +7403,13 @@
           <p:cNvGraphicFramePr>
             <a:graphicFrameLocks noGrp="1"/>
           </p:cNvGraphicFramePr>
-          <p:nvPr/>
+          <p:nvPr>
+            <p:extLst>
+              <p:ext uri="{D42A27DB-BD31-4B8C-83A1-F6EECF244321}">
+                <p14:modId xmlns:p14="http://schemas.microsoft.com/office/powerpoint/2010/main" val="618411351"/>
+              </p:ext>
+            </p:extLst>
+          </p:nvPr>
         </p:nvGraphicFramePr>
         <p:xfrm>
           <a:off x="363516" y="826547"/>
@@ -7420,15 +7556,22 @@
                     <a:p>
                       <a:pPr algn="l" latinLnBrk="1"/>
                       <a:r>
-                        <a:rPr lang="ko-KR" altLang="en-US" sz="1200" b="0">
+                        <a:rPr lang="en-US" altLang="ko-KR" sz="1200" b="0">
                           <a:solidFill>
                             <a:schemeClr val="tx1"/>
                           </a:solidFill>
                           <a:latin typeface="+mn-ea"/>
                           <a:ea typeface="+mn-ea"/>
                         </a:rPr>
-                        <a:t>데이터 결과</a:t>
-                      </a:r>
+                        <a:t>Predict</a:t>
+                      </a:r>
+                      <a:endParaRPr lang="ko-KR" altLang="en-US" sz="1200" b="0">
+                        <a:solidFill>
+                          <a:schemeClr val="tx1"/>
+                        </a:solidFill>
+                        <a:latin typeface="+mn-ea"/>
+                        <a:ea typeface="+mn-ea"/>
+                      </a:endParaRPr>
                     </a:p>
                   </a:txBody>
                   <a:tcPr anchor="ctr">
@@ -7556,7 +7699,7 @@
                           <a:latin typeface="+mn-ea"/>
                           <a:ea typeface="+mn-ea"/>
                         </a:rPr>
-                        <a:t>UI-Output_2</a:t>
+                        <a:t>UI-predict_2</a:t>
                       </a:r>
                       <a:endParaRPr lang="ko-KR" altLang="en-US" sz="1200" b="0">
                         <a:solidFill>
@@ -7821,7 +7964,7 @@
                           <a:latin typeface="+mn-ea"/>
                           <a:ea typeface="+mn-ea"/>
                         </a:rPr>
-                        <a:t>2026.03.27</a:t>
+                        <a:t>2026.04.09</a:t>
                       </a:r>
                       <a:endParaRPr lang="ko-KR" altLang="en-US" sz="1200" b="0">
                         <a:solidFill>
@@ -7964,7 +8107,7 @@
                           <a:latin typeface="+mn-ea"/>
                           <a:ea typeface="+mn-ea"/>
                         </a:rPr>
-                        <a:t>Input_data – Output_data</a:t>
+                        <a:t>main - predict</a:t>
                       </a:r>
                       <a:endParaRPr lang="ko-KR" altLang="en-US" sz="1200" b="0">
                         <a:solidFill>
@@ -8246,11 +8389,17 @@
           <p:cNvGraphicFramePr>
             <a:graphicFrameLocks noGrp="1"/>
           </p:cNvGraphicFramePr>
-          <p:nvPr/>
+          <p:nvPr>
+            <p:extLst>
+              <p:ext uri="{D42A27DB-BD31-4B8C-83A1-F6EECF244321}">
+                <p14:modId xmlns:p14="http://schemas.microsoft.com/office/powerpoint/2010/main" val="1088583924"/>
+              </p:ext>
+            </p:extLst>
+          </p:nvPr>
         </p:nvGraphicFramePr>
         <p:xfrm>
           <a:off x="9221188" y="826547"/>
-          <a:ext cx="2607296" cy="2556000"/>
+          <a:ext cx="2607296" cy="3196080"/>
         </p:xfrm>
         <a:graphic>
           <a:graphicData uri="http://schemas.openxmlformats.org/drawingml/2006/table">
@@ -8421,7 +8570,15 @@
                       <a:pPr algn="l" latinLnBrk="1"/>
                       <a:r>
                         <a:rPr lang="ko-KR" altLang="en-US" sz="1200"/>
-                        <a:t>입력받은 사용자 영양소 섭취량과 권장 섭취량 그래프 비교</a:t>
+                        <a:t>최근 </a:t>
+                      </a:r>
+                      <a:r>
+                        <a:rPr lang="en-US" altLang="ko-KR" sz="1200"/>
+                        <a:t>24</a:t>
+                      </a:r>
+                      <a:r>
+                        <a:rPr lang="ko-KR" altLang="en-US" sz="1200"/>
+                        <a:t>시간 섭취한 음식 영양소 수치 입력</a:t>
                       </a:r>
                     </a:p>
                   </a:txBody>
@@ -8537,15 +8694,7 @@
                       <a:pPr algn="l" latinLnBrk="1"/>
                       <a:r>
                         <a:rPr lang="ko-KR" altLang="en-US" sz="1200"/>
-                        <a:t>마우스를 올려 수치 비교</a:t>
-                      </a:r>
-                      <a:r>
-                        <a:rPr lang="en-US" altLang="ko-KR" sz="1200"/>
-                        <a:t>·</a:t>
-                      </a:r>
-                      <a:r>
-                        <a:rPr lang="ko-KR" altLang="en-US" sz="1200"/>
-                        <a:t>확인</a:t>
+                        <a:t>이전 정보 입력으로 넘어감</a:t>
                       </a:r>
                     </a:p>
                   </a:txBody>
@@ -8597,13 +8746,165 @@
                   </a:ext>
                 </a:extLst>
               </a:tr>
+              <a:tr h="612000">
+                <a:tc>
+                  <a:txBody>
+                    <a:bodyPr/>
+                    <a:lstStyle/>
+                    <a:p>
+                      <a:pPr algn="ctr" latinLnBrk="1"/>
+                      <a:r>
+                        <a:rPr lang="en-US" altLang="ko-KR" sz="1200"/>
+                        <a:t>3</a:t>
+                      </a:r>
+                      <a:endParaRPr lang="ko-KR" altLang="en-US" sz="1200"/>
+                    </a:p>
+                  </a:txBody>
+                  <a:tcPr>
+                    <a:lnL w="12700" cap="flat" cmpd="sng" algn="ctr">
+                      <a:solidFill>
+                        <a:schemeClr val="tx1"/>
+                      </a:solidFill>
+                      <a:prstDash val="solid"/>
+                      <a:round/>
+                      <a:headEnd type="none" w="med" len="med"/>
+                      <a:tailEnd type="none" w="med" len="med"/>
+                    </a:lnL>
+                    <a:lnR w="12700" cap="flat" cmpd="sng" algn="ctr">
+                      <a:solidFill>
+                        <a:schemeClr val="tx1"/>
+                      </a:solidFill>
+                      <a:prstDash val="solid"/>
+                      <a:round/>
+                      <a:headEnd type="none" w="med" len="med"/>
+                      <a:tailEnd type="none" w="med" len="med"/>
+                    </a:lnR>
+                    <a:lnT w="12700" cap="flat" cmpd="sng" algn="ctr">
+                      <a:solidFill>
+                        <a:schemeClr val="tx1"/>
+                      </a:solidFill>
+                      <a:prstDash val="solid"/>
+                      <a:round/>
+                      <a:headEnd type="none" w="med" len="med"/>
+                      <a:tailEnd type="none" w="med" len="med"/>
+                    </a:lnT>
+                    <a:lnB w="12700" cap="flat" cmpd="sng" algn="ctr">
+                      <a:solidFill>
+                        <a:schemeClr val="tx1"/>
+                      </a:solidFill>
+                      <a:prstDash val="solid"/>
+                      <a:round/>
+                      <a:headEnd type="none" w="med" len="med"/>
+                      <a:tailEnd type="none" w="med" len="med"/>
+                    </a:lnB>
+                    <a:solidFill>
+                      <a:schemeClr val="bg1"/>
+                    </a:solidFill>
+                  </a:tcPr>
+                </a:tc>
+                <a:tc>
+                  <a:txBody>
+                    <a:bodyPr/>
+                    <a:lstStyle/>
+                    <a:p>
+                      <a:pPr marL="0" marR="0" lvl="0" indent="0" algn="l" defTabSz="914400" rtl="0" eaLnBrk="1" fontAlgn="auto" latinLnBrk="1" hangingPunct="1">
+                        <a:lnSpc>
+                          <a:spcPct val="100000"/>
+                        </a:lnSpc>
+                        <a:spcBef>
+                          <a:spcPts val="0"/>
+                        </a:spcBef>
+                        <a:spcAft>
+                          <a:spcPts val="0"/>
+                        </a:spcAft>
+                        <a:buClrTx/>
+                        <a:buSzTx/>
+                        <a:buFontTx/>
+                        <a:buNone/>
+                        <a:tabLst/>
+                        <a:defRPr/>
+                      </a:pPr>
+                      <a:r>
+                        <a:rPr lang="ko-KR" altLang="en-US" sz="1200"/>
+                        <a:t>다음 정보 입력으로 넘어감</a:t>
+                      </a:r>
+                    </a:p>
+                    <a:p>
+                      <a:pPr algn="l" latinLnBrk="1"/>
+                      <a:endParaRPr lang="ko-KR" altLang="en-US" sz="1200"/>
+                    </a:p>
+                  </a:txBody>
+                  <a:tcPr anchor="ctr">
+                    <a:lnL w="12700" cap="flat" cmpd="sng" algn="ctr">
+                      <a:solidFill>
+                        <a:schemeClr val="tx1"/>
+                      </a:solidFill>
+                      <a:prstDash val="solid"/>
+                      <a:round/>
+                      <a:headEnd type="none" w="med" len="med"/>
+                      <a:tailEnd type="none" w="med" len="med"/>
+                    </a:lnL>
+                    <a:lnR w="12700" cap="flat" cmpd="sng" algn="ctr">
+                      <a:solidFill>
+                        <a:schemeClr val="tx1"/>
+                      </a:solidFill>
+                      <a:prstDash val="solid"/>
+                      <a:round/>
+                      <a:headEnd type="none" w="med" len="med"/>
+                      <a:tailEnd type="none" w="med" len="med"/>
+                    </a:lnR>
+                    <a:lnT w="12700" cap="flat" cmpd="sng" algn="ctr">
+                      <a:solidFill>
+                        <a:schemeClr val="tx1"/>
+                      </a:solidFill>
+                      <a:prstDash val="solid"/>
+                      <a:round/>
+                      <a:headEnd type="none" w="med" len="med"/>
+                      <a:tailEnd type="none" w="med" len="med"/>
+                    </a:lnT>
+                    <a:lnB w="12700" cap="flat" cmpd="sng" algn="ctr">
+                      <a:solidFill>
+                        <a:schemeClr val="tx1"/>
+                      </a:solidFill>
+                      <a:prstDash val="solid"/>
+                      <a:round/>
+                      <a:headEnd type="none" w="med" len="med"/>
+                      <a:tailEnd type="none" w="med" len="med"/>
+                    </a:lnB>
+                    <a:solidFill>
+                      <a:schemeClr val="bg1"/>
+                    </a:solidFill>
+                  </a:tcPr>
+                </a:tc>
+                <a:extLst>
+                  <a:ext uri="{0D108BD9-81ED-4DB2-BD59-A6C34878D82A}">
+                    <a16:rowId xmlns:a16="http://schemas.microsoft.com/office/drawing/2014/main" val="1747494998"/>
+                  </a:ext>
+                </a:extLst>
+              </a:tr>
               <a:tr h="360000">
                 <a:tc gridSpan="2">
                   <a:txBody>
                     <a:bodyPr/>
                     <a:lstStyle/>
                     <a:p>
-                      <a:pPr algn="ctr" latinLnBrk="1"/>
+                      <a:pPr marL="0" marR="0" lvl="0" indent="0" algn="ctr" defTabSz="914400" rtl="0" eaLnBrk="1" fontAlgn="auto" latinLnBrk="1" hangingPunct="1">
+                        <a:lnSpc>
+                          <a:spcPct val="100000"/>
+                        </a:lnSpc>
+                        <a:spcBef>
+                          <a:spcPts val="0"/>
+                        </a:spcBef>
+                        <a:spcAft>
+                          <a:spcPts val="0"/>
+                        </a:spcAft>
+                        <a:buClrTx/>
+                        <a:buSzTx/>
+                        <a:buFontTx/>
+                        <a:buNone/>
+                        <a:tabLst/>
+                        <a:defRPr/>
+                      </a:pPr>
                       <a:r>
                         <a:rPr lang="en-US" altLang="ko-KR" sz="1200"/>
                         <a:t>Check Point</a:t>
@@ -8659,7 +8960,8 @@
                     <a:bodyPr/>
                     <a:lstStyle/>
                     <a:p>
-                      <a:endParaRPr/>
+                      <a:pPr algn="l" latinLnBrk="1"/>
+                      <a:endParaRPr lang="ko-KR" altLang="en-US" sz="1200"/>
                     </a:p>
                   </a:txBody>
                   <a:tcPr anchor="ctr">
@@ -8706,7 +9008,7 @@
                 </a:tc>
                 <a:extLst>
                   <a:ext uri="{0D108BD9-81ED-4DB2-BD59-A6C34878D82A}">
-                    <a16:rowId xmlns:a16="http://schemas.microsoft.com/office/drawing/2014/main" val="3718604235"/>
+                    <a16:rowId xmlns:a16="http://schemas.microsoft.com/office/drawing/2014/main" val="2275643079"/>
                   </a:ext>
                 </a:extLst>
               </a:tr>
@@ -8716,14 +9018,42 @@
                     <a:bodyPr/>
                     <a:lstStyle/>
                     <a:p>
-                      <a:pPr algn="just" latinLnBrk="1"/>
+                      <a:pPr marL="0" marR="0" lvl="0" indent="0" algn="ctr" defTabSz="914400" rtl="0" eaLnBrk="1" fontAlgn="auto" latinLnBrk="1" hangingPunct="1">
+                        <a:lnSpc>
+                          <a:spcPct val="100000"/>
+                        </a:lnSpc>
+                        <a:spcBef>
+                          <a:spcPts val="0"/>
+                        </a:spcBef>
+                        <a:spcAft>
+                          <a:spcPts val="0"/>
+                        </a:spcAft>
+                        <a:buClrTx/>
+                        <a:buSzTx/>
+                        <a:buFontTx/>
+                        <a:buNone/>
+                        <a:tabLst/>
+                        <a:defRPr/>
+                      </a:pPr>
                       <a:r>
                         <a:rPr lang="ko-KR" altLang="en-US" sz="1200"/>
-                        <a:t>스크롤을 내려서 다음 화면으로 이동</a:t>
-                      </a:r>
-                    </a:p>
-                  </a:txBody>
-                  <a:tcPr anchor="ctr">
+                        <a:t>위에 </a:t>
+                      </a:r>
+                      <a:r>
+                        <a:rPr lang="en-US" altLang="ko-KR" sz="1200"/>
+                        <a:t>Look up, Predict</a:t>
+                      </a:r>
+                      <a:r>
+                        <a:rPr lang="ko-KR" altLang="en-US" sz="1200"/>
+                        <a:t>는 메인 페이지의 기능과 동일</a:t>
+                      </a:r>
+                    </a:p>
+                    <a:p>
+                      <a:pPr algn="ctr" latinLnBrk="1"/>
+                      <a:endParaRPr lang="ko-KR" altLang="en-US" sz="1200"/>
+                    </a:p>
+                  </a:txBody>
+                  <a:tcPr>
                     <a:lnL w="12700" cap="flat" cmpd="sng" algn="ctr">
                       <a:solidFill>
                         <a:schemeClr val="tx1"/>
@@ -8770,7 +9100,8 @@
                     <a:bodyPr/>
                     <a:lstStyle/>
                     <a:p>
-                      <a:endParaRPr/>
+                      <a:pPr algn="l" latinLnBrk="1"/>
+                      <a:endParaRPr lang="ko-KR" altLang="en-US" sz="1200"/>
                     </a:p>
                   </a:txBody>
                   <a:tcPr anchor="ctr">
@@ -8817,7 +9148,7 @@
                 </a:tc>
                 <a:extLst>
                   <a:ext uri="{0D108BD9-81ED-4DB2-BD59-A6C34878D82A}">
-                    <a16:rowId xmlns:a16="http://schemas.microsoft.com/office/drawing/2014/main" val="2755969263"/>
+                    <a16:rowId xmlns:a16="http://schemas.microsoft.com/office/drawing/2014/main" val="1885486421"/>
                   </a:ext>
                 </a:extLst>
               </a:tr>
@@ -8841,8 +9172,69 @@
         </p:nvSpPr>
         <p:spPr>
           <a:xfrm>
-            <a:off x="1233600" y="3249000"/>
-            <a:ext cx="360000" cy="360000"/>
+            <a:off x="7138388" y="5983952"/>
+            <a:ext cx="324000" cy="324000"/>
+          </a:xfrm>
+          <a:prstGeom prst="ellipse">
+            <a:avLst/>
+          </a:prstGeom>
+          <a:solidFill>
+            <a:srgbClr val="C00000">
+              <a:alpha val="60000"/>
+            </a:srgbClr>
+          </a:solidFill>
+        </p:spPr>
+        <p:style>
+          <a:lnRef idx="2">
+            <a:schemeClr val="accent1">
+              <a:shade val="15000"/>
+            </a:schemeClr>
+          </a:lnRef>
+          <a:fillRef idx="1">
+            <a:schemeClr val="accent1"/>
+          </a:fillRef>
+          <a:effectRef idx="0">
+            <a:schemeClr val="accent1"/>
+          </a:effectRef>
+          <a:fontRef idx="minor">
+            <a:schemeClr val="lt1"/>
+          </a:fontRef>
+        </p:style>
+        <p:txBody>
+          <a:bodyPr rtlCol="0" anchor="ctr"/>
+          <a:lstStyle/>
+          <a:p>
+            <a:pPr algn="ctr"/>
+            <a:r>
+              <a:rPr lang="en-US" altLang="ko-KR" sz="2000">
+                <a:latin typeface="+mn-ea"/>
+              </a:rPr>
+              <a:t>3</a:t>
+            </a:r>
+            <a:endParaRPr lang="ko-KR" altLang="en-US" sz="2000">
+              <a:latin typeface="+mn-ea"/>
+            </a:endParaRPr>
+          </a:p>
+        </p:txBody>
+      </p:sp>
+      <p:sp>
+        <p:nvSpPr>
+          <p:cNvPr id="7" name="타원 6">
+            <a:extLst>
+              <a:ext uri="{FF2B5EF4-FFF2-40B4-BE49-F238E27FC236}">
+                <a16:creationId xmlns:a16="http://schemas.microsoft.com/office/drawing/2014/main" id="{6927301E-47D9-D7C6-EBF6-3EEBDCE32BE6}"/>
+              </a:ext>
+            </a:extLst>
+          </p:cNvPr>
+          <p:cNvSpPr>
+            <a:spLocks noChangeAspect="1"/>
+          </p:cNvSpPr>
+          <p:nvPr/>
+        </p:nvSpPr>
+        <p:spPr>
+          <a:xfrm>
+            <a:off x="1229323" y="3184753"/>
+            <a:ext cx="324000" cy="324000"/>
           </a:xfrm>
           <a:prstGeom prst="ellipse">
             <a:avLst/>
@@ -8891,7 +9283,7 @@
           <p:cNvPr id="9" name="타원 8">
             <a:extLst>
               <a:ext uri="{FF2B5EF4-FFF2-40B4-BE49-F238E27FC236}">
-                <a16:creationId xmlns:a16="http://schemas.microsoft.com/office/drawing/2014/main" id="{F7CB8742-1CD9-D6BE-CB25-F1FC9B0F484E}"/>
+                <a16:creationId xmlns:a16="http://schemas.microsoft.com/office/drawing/2014/main" id="{D4E14AD0-C0F5-B974-6574-7EBB78BAB894}"/>
               </a:ext>
             </a:extLst>
           </p:cNvPr>
@@ -8902,8 +9294,8 @@
         </p:nvSpPr>
         <p:spPr>
           <a:xfrm>
-            <a:off x="3729150" y="3249000"/>
-            <a:ext cx="360000" cy="360000"/>
+            <a:off x="1229323" y="5983952"/>
+            <a:ext cx="324000" cy="324000"/>
           </a:xfrm>
           <a:prstGeom prst="ellipse">
             <a:avLst/>
@@ -8950,7 +9342,7 @@
     </p:spTree>
     <p:extLst>
       <p:ext uri="{BB962C8B-B14F-4D97-AF65-F5344CB8AC3E}">
-        <p14:creationId xmlns:p14="http://schemas.microsoft.com/office/powerpoint/2010/main" val="1319614109"/>
+        <p14:creationId xmlns:p14="http://schemas.microsoft.com/office/powerpoint/2010/main" val="2823196119"/>
       </p:ext>
     </p:extLst>
   </p:cSld>
@@ -8979,10 +9371,10 @@
       </p:grpSpPr>
       <p:pic>
         <p:nvPicPr>
-          <p:cNvPr id="6" name="그림 5" descr="텍스트, 스크린샷, 폰트, 번호이(가) 표시된 사진&#10;&#10;AI가 생성한 콘텐츠는 부정확할 수 있습니다.">
+          <p:cNvPr id="6" name="그림 5" descr="텍스트, 스크린샷, 소프트웨어, 컴퓨터 아이콘이(가) 표시된 사진&#10;&#10;AI가 생성한 콘텐츠는 부정확할 수 있습니다.">
             <a:extLst>
               <a:ext uri="{FF2B5EF4-FFF2-40B4-BE49-F238E27FC236}">
-                <a16:creationId xmlns:a16="http://schemas.microsoft.com/office/drawing/2014/main" id="{7AB0E476-9762-F85F-66A4-1AB019C7BF6C}"/>
+                <a16:creationId xmlns:a16="http://schemas.microsoft.com/office/drawing/2014/main" id="{38C42CA7-6E1F-9999-9906-824F65D2A312}"/>
               </a:ext>
             </a:extLst>
           </p:cNvPr>
@@ -9005,17 +9397,12 @@
         </p:blipFill>
         <p:spPr>
           <a:xfrm>
-            <a:off x="363516" y="1980000"/>
-            <a:ext cx="8640000" cy="4429091"/>
+            <a:off x="363516" y="1728382"/>
+            <a:ext cx="8640000" cy="4862054"/>
           </a:xfrm>
           <a:prstGeom prst="rect">
             <a:avLst/>
           </a:prstGeom>
-          <a:ln>
-            <a:solidFill>
-              <a:schemeClr val="tx1"/>
-            </a:solidFill>
-          </a:ln>
         </p:spPr>
       </p:pic>
       <p:graphicFrame>
@@ -9030,7 +9417,13 @@
           <p:cNvGraphicFramePr>
             <a:graphicFrameLocks noGrp="1"/>
           </p:cNvGraphicFramePr>
-          <p:nvPr/>
+          <p:nvPr>
+            <p:extLst>
+              <p:ext uri="{D42A27DB-BD31-4B8C-83A1-F6EECF244321}">
+                <p14:modId xmlns:p14="http://schemas.microsoft.com/office/powerpoint/2010/main" val="4014417462"/>
+              </p:ext>
+            </p:extLst>
+          </p:nvPr>
         </p:nvGraphicFramePr>
         <p:xfrm>
           <a:off x="363516" y="826547"/>
@@ -9177,15 +9570,22 @@
                     <a:p>
                       <a:pPr algn="l" latinLnBrk="1"/>
                       <a:r>
-                        <a:rPr lang="ko-KR" altLang="en-US" sz="1200" b="0">
+                        <a:rPr lang="en-US" altLang="ko-KR" sz="1200" b="0">
                           <a:solidFill>
                             <a:schemeClr val="tx1"/>
                           </a:solidFill>
                           <a:latin typeface="+mn-ea"/>
                           <a:ea typeface="+mn-ea"/>
                         </a:rPr>
-                        <a:t>데이터 결과</a:t>
-                      </a:r>
+                        <a:t>Predict</a:t>
+                      </a:r>
+                      <a:endParaRPr lang="ko-KR" altLang="en-US" sz="1200" b="0">
+                        <a:solidFill>
+                          <a:schemeClr val="tx1"/>
+                        </a:solidFill>
+                        <a:latin typeface="+mn-ea"/>
+                        <a:ea typeface="+mn-ea"/>
+                      </a:endParaRPr>
                     </a:p>
                   </a:txBody>
                   <a:tcPr anchor="ctr">
@@ -9313,7 +9713,7 @@
                           <a:latin typeface="+mn-ea"/>
                           <a:ea typeface="+mn-ea"/>
                         </a:rPr>
-                        <a:t>UI-Output_3</a:t>
+                        <a:t>UI-predict_3</a:t>
                       </a:r>
                       <a:endParaRPr lang="ko-KR" altLang="en-US" sz="1200" b="0">
                         <a:solidFill>
@@ -9578,7 +9978,7 @@
                           <a:latin typeface="+mn-ea"/>
                           <a:ea typeface="+mn-ea"/>
                         </a:rPr>
-                        <a:t>2026.03.27</a:t>
+                        <a:t>2026.04.09</a:t>
                       </a:r>
                       <a:endParaRPr lang="ko-KR" altLang="en-US" sz="1200" b="0">
                         <a:solidFill>
@@ -9721,7 +10121,7 @@
                           <a:latin typeface="+mn-ea"/>
                           <a:ea typeface="+mn-ea"/>
                         </a:rPr>
-                        <a:t>Input_data – Output_data</a:t>
+                        <a:t>main - predict</a:t>
                       </a:r>
                       <a:endParaRPr lang="ko-KR" altLang="en-US" sz="1200" b="0">
                         <a:solidFill>
@@ -10003,11 +10403,17 @@
           <p:cNvGraphicFramePr>
             <a:graphicFrameLocks noGrp="1"/>
           </p:cNvGraphicFramePr>
-          <p:nvPr/>
+          <p:nvPr>
+            <p:extLst>
+              <p:ext uri="{D42A27DB-BD31-4B8C-83A1-F6EECF244321}">
+                <p14:modId xmlns:p14="http://schemas.microsoft.com/office/powerpoint/2010/main" val="2869317801"/>
+              </p:ext>
+            </p:extLst>
+          </p:nvPr>
         </p:nvGraphicFramePr>
         <p:xfrm>
           <a:off x="9221188" y="826547"/>
-          <a:ext cx="2607296" cy="1584000"/>
+          <a:ext cx="2607296" cy="3196080"/>
         </p:xfrm>
         <a:graphic>
           <a:graphicData uri="http://schemas.openxmlformats.org/drawingml/2006/table">
@@ -10178,7 +10584,39 @@
                       <a:pPr algn="l" latinLnBrk="1"/>
                       <a:r>
                         <a:rPr lang="ko-KR" altLang="en-US" sz="1200"/>
-                        <a:t>섭취 영양별 위험도 비율 표시</a:t>
+                        <a:t>근력운동</a:t>
+                      </a:r>
+                      <a:r>
+                        <a:rPr lang="en-US" altLang="ko-KR" sz="1200"/>
+                        <a:t>, </a:t>
+                      </a:r>
+                      <a:r>
+                        <a:rPr lang="ko-KR" altLang="en-US" sz="1200"/>
+                        <a:t>유산소운동</a:t>
+                      </a:r>
+                      <a:r>
+                        <a:rPr lang="en-US" altLang="ko-KR" sz="1200"/>
+                        <a:t>, </a:t>
+                      </a:r>
+                      <a:r>
+                        <a:rPr lang="ko-KR" altLang="en-US" sz="1200"/>
+                        <a:t>수면시간</a:t>
+                      </a:r>
+                      <a:r>
+                        <a:rPr lang="en-US" altLang="ko-KR" sz="1200"/>
+                        <a:t>, </a:t>
+                      </a:r>
+                      <a:r>
+                        <a:rPr lang="ko-KR" altLang="en-US" sz="1200"/>
+                        <a:t>흡연여부</a:t>
+                      </a:r>
+                      <a:r>
+                        <a:rPr lang="en-US" altLang="ko-KR" sz="1200"/>
+                        <a:t>, </a:t>
+                      </a:r>
+                      <a:r>
+                        <a:rPr lang="ko-KR" altLang="en-US" sz="1200"/>
+                        <a:t>음주빈도 입력</a:t>
                       </a:r>
                     </a:p>
                   </a:txBody>
@@ -10294,7 +10732,7 @@
                       <a:pPr algn="l" latinLnBrk="1"/>
                       <a:r>
                         <a:rPr lang="ko-KR" altLang="en-US" sz="1200"/>
-                        <a:t>위험도에 따른 등급 표시</a:t>
+                        <a:t>이전 정보 입력으로 넘어감</a:t>
                       </a:r>
                     </a:p>
                   </a:txBody>
@@ -10343,6 +10781,408 @@
                 <a:extLst>
                   <a:ext uri="{0D108BD9-81ED-4DB2-BD59-A6C34878D82A}">
                     <a16:rowId xmlns:a16="http://schemas.microsoft.com/office/drawing/2014/main" val="2924856255"/>
+                  </a:ext>
+                </a:extLst>
+              </a:tr>
+              <a:tr h="612000">
+                <a:tc>
+                  <a:txBody>
+                    <a:bodyPr/>
+                    <a:lstStyle/>
+                    <a:p>
+                      <a:pPr algn="ctr" latinLnBrk="1"/>
+                      <a:r>
+                        <a:rPr lang="en-US" altLang="ko-KR" sz="1200"/>
+                        <a:t>3</a:t>
+                      </a:r>
+                      <a:endParaRPr lang="ko-KR" altLang="en-US" sz="1200"/>
+                    </a:p>
+                  </a:txBody>
+                  <a:tcPr>
+                    <a:lnL w="12700" cap="flat" cmpd="sng" algn="ctr">
+                      <a:solidFill>
+                        <a:schemeClr val="tx1"/>
+                      </a:solidFill>
+                      <a:prstDash val="solid"/>
+                      <a:round/>
+                      <a:headEnd type="none" w="med" len="med"/>
+                      <a:tailEnd type="none" w="med" len="med"/>
+                    </a:lnL>
+                    <a:lnR w="12700" cap="flat" cmpd="sng" algn="ctr">
+                      <a:solidFill>
+                        <a:schemeClr val="tx1"/>
+                      </a:solidFill>
+                      <a:prstDash val="solid"/>
+                      <a:round/>
+                      <a:headEnd type="none" w="med" len="med"/>
+                      <a:tailEnd type="none" w="med" len="med"/>
+                    </a:lnR>
+                    <a:lnT w="12700" cap="flat" cmpd="sng" algn="ctr">
+                      <a:solidFill>
+                        <a:schemeClr val="tx1"/>
+                      </a:solidFill>
+                      <a:prstDash val="solid"/>
+                      <a:round/>
+                      <a:headEnd type="none" w="med" len="med"/>
+                      <a:tailEnd type="none" w="med" len="med"/>
+                    </a:lnT>
+                    <a:lnB w="12700" cap="flat" cmpd="sng" algn="ctr">
+                      <a:solidFill>
+                        <a:schemeClr val="tx1"/>
+                      </a:solidFill>
+                      <a:prstDash val="solid"/>
+                      <a:round/>
+                      <a:headEnd type="none" w="med" len="med"/>
+                      <a:tailEnd type="none" w="med" len="med"/>
+                    </a:lnB>
+                    <a:solidFill>
+                      <a:schemeClr val="bg1"/>
+                    </a:solidFill>
+                  </a:tcPr>
+                </a:tc>
+                <a:tc>
+                  <a:txBody>
+                    <a:bodyPr/>
+                    <a:lstStyle/>
+                    <a:p>
+                      <a:pPr marL="0" marR="0" lvl="0" indent="0" algn="l" defTabSz="914400" rtl="0" eaLnBrk="1" fontAlgn="auto" latinLnBrk="1" hangingPunct="1">
+                        <a:lnSpc>
+                          <a:spcPct val="100000"/>
+                        </a:lnSpc>
+                        <a:spcBef>
+                          <a:spcPts val="0"/>
+                        </a:spcBef>
+                        <a:spcAft>
+                          <a:spcPts val="0"/>
+                        </a:spcAft>
+                        <a:buClrTx/>
+                        <a:buSzTx/>
+                        <a:buFontTx/>
+                        <a:buNone/>
+                        <a:tabLst/>
+                        <a:defRPr/>
+                      </a:pPr>
+                      <a:r>
+                        <a:rPr lang="ko-KR" altLang="en-US" sz="1200"/>
+                        <a:t>입력 데이터 기반 예측 결과 페이지로 이동</a:t>
+                      </a:r>
+                    </a:p>
+                  </a:txBody>
+                  <a:tcPr anchor="ctr">
+                    <a:lnL w="12700" cap="flat" cmpd="sng" algn="ctr">
+                      <a:solidFill>
+                        <a:schemeClr val="tx1"/>
+                      </a:solidFill>
+                      <a:prstDash val="solid"/>
+                      <a:round/>
+                      <a:headEnd type="none" w="med" len="med"/>
+                      <a:tailEnd type="none" w="med" len="med"/>
+                    </a:lnL>
+                    <a:lnR w="12700" cap="flat" cmpd="sng" algn="ctr">
+                      <a:solidFill>
+                        <a:schemeClr val="tx1"/>
+                      </a:solidFill>
+                      <a:prstDash val="solid"/>
+                      <a:round/>
+                      <a:headEnd type="none" w="med" len="med"/>
+                      <a:tailEnd type="none" w="med" len="med"/>
+                    </a:lnR>
+                    <a:lnT w="12700" cap="flat" cmpd="sng" algn="ctr">
+                      <a:solidFill>
+                        <a:schemeClr val="tx1"/>
+                      </a:solidFill>
+                      <a:prstDash val="solid"/>
+                      <a:round/>
+                      <a:headEnd type="none" w="med" len="med"/>
+                      <a:tailEnd type="none" w="med" len="med"/>
+                    </a:lnT>
+                    <a:lnB w="12700" cap="flat" cmpd="sng" algn="ctr">
+                      <a:solidFill>
+                        <a:schemeClr val="tx1"/>
+                      </a:solidFill>
+                      <a:prstDash val="solid"/>
+                      <a:round/>
+                      <a:headEnd type="none" w="med" len="med"/>
+                      <a:tailEnd type="none" w="med" len="med"/>
+                    </a:lnB>
+                    <a:solidFill>
+                      <a:schemeClr val="bg1"/>
+                    </a:solidFill>
+                  </a:tcPr>
+                </a:tc>
+                <a:extLst>
+                  <a:ext uri="{0D108BD9-81ED-4DB2-BD59-A6C34878D82A}">
+                    <a16:rowId xmlns:a16="http://schemas.microsoft.com/office/drawing/2014/main" val="1747494998"/>
+                  </a:ext>
+                </a:extLst>
+              </a:tr>
+              <a:tr h="360000">
+                <a:tc gridSpan="2">
+                  <a:txBody>
+                    <a:bodyPr/>
+                    <a:lstStyle/>
+                    <a:p>
+                      <a:pPr marL="0" marR="0" lvl="0" indent="0" algn="ctr" defTabSz="914400" rtl="0" eaLnBrk="1" fontAlgn="auto" latinLnBrk="1" hangingPunct="1">
+                        <a:lnSpc>
+                          <a:spcPct val="100000"/>
+                        </a:lnSpc>
+                        <a:spcBef>
+                          <a:spcPts val="0"/>
+                        </a:spcBef>
+                        <a:spcAft>
+                          <a:spcPts val="0"/>
+                        </a:spcAft>
+                        <a:buClrTx/>
+                        <a:buSzTx/>
+                        <a:buFontTx/>
+                        <a:buNone/>
+                        <a:tabLst/>
+                        <a:defRPr/>
+                      </a:pPr>
+                      <a:r>
+                        <a:rPr lang="en-US" altLang="ko-KR" sz="1200"/>
+                        <a:t>Check Point</a:t>
+                      </a:r>
+                    </a:p>
+                  </a:txBody>
+                  <a:tcPr anchor="ctr">
+                    <a:lnL w="12700" cap="flat" cmpd="sng" algn="ctr">
+                      <a:solidFill>
+                        <a:schemeClr val="tx1"/>
+                      </a:solidFill>
+                      <a:prstDash val="solid"/>
+                      <a:round/>
+                      <a:headEnd type="none" w="med" len="med"/>
+                      <a:tailEnd type="none" w="med" len="med"/>
+                    </a:lnL>
+                    <a:lnR w="12700" cap="flat" cmpd="sng" algn="ctr">
+                      <a:solidFill>
+                        <a:schemeClr val="tx1"/>
+                      </a:solidFill>
+                      <a:prstDash val="solid"/>
+                      <a:round/>
+                      <a:headEnd type="none" w="med" len="med"/>
+                      <a:tailEnd type="none" w="med" len="med"/>
+                    </a:lnR>
+                    <a:lnT w="12700" cap="flat" cmpd="sng" algn="ctr">
+                      <a:solidFill>
+                        <a:schemeClr val="tx1"/>
+                      </a:solidFill>
+                      <a:prstDash val="solid"/>
+                      <a:round/>
+                      <a:headEnd type="none" w="med" len="med"/>
+                      <a:tailEnd type="none" w="med" len="med"/>
+                    </a:lnT>
+                    <a:lnB w="12700" cap="flat" cmpd="sng" algn="ctr">
+                      <a:solidFill>
+                        <a:schemeClr val="tx1"/>
+                      </a:solidFill>
+                      <a:prstDash val="solid"/>
+                      <a:round/>
+                      <a:headEnd type="none" w="med" len="med"/>
+                      <a:tailEnd type="none" w="med" len="med"/>
+                    </a:lnB>
+                    <a:solidFill>
+                      <a:schemeClr val="bg1">
+                        <a:lumMod val="85000"/>
+                      </a:schemeClr>
+                    </a:solidFill>
+                  </a:tcPr>
+                </a:tc>
+                <a:tc hMerge="1">
+                  <a:txBody>
+                    <a:bodyPr/>
+                    <a:lstStyle/>
+                    <a:p>
+                      <a:pPr algn="l" latinLnBrk="1"/>
+                      <a:endParaRPr lang="ko-KR" altLang="en-US" sz="1200"/>
+                    </a:p>
+                  </a:txBody>
+                  <a:tcPr anchor="ctr">
+                    <a:lnL w="12700" cap="flat" cmpd="sng" algn="ctr">
+                      <a:solidFill>
+                        <a:schemeClr val="tx1"/>
+                      </a:solidFill>
+                      <a:prstDash val="solid"/>
+                      <a:round/>
+                      <a:headEnd type="none" w="med" len="med"/>
+                      <a:tailEnd type="none" w="med" len="med"/>
+                    </a:lnL>
+                    <a:lnR w="12700" cap="flat" cmpd="sng" algn="ctr">
+                      <a:solidFill>
+                        <a:schemeClr val="tx1"/>
+                      </a:solidFill>
+                      <a:prstDash val="solid"/>
+                      <a:round/>
+                      <a:headEnd type="none" w="med" len="med"/>
+                      <a:tailEnd type="none" w="med" len="med"/>
+                    </a:lnR>
+                    <a:lnT w="12700" cap="flat" cmpd="sng" algn="ctr">
+                      <a:solidFill>
+                        <a:schemeClr val="tx1"/>
+                      </a:solidFill>
+                      <a:prstDash val="solid"/>
+                      <a:round/>
+                      <a:headEnd type="none" w="med" len="med"/>
+                      <a:tailEnd type="none" w="med" len="med"/>
+                    </a:lnT>
+                    <a:lnB w="12700" cap="flat" cmpd="sng" algn="ctr">
+                      <a:solidFill>
+                        <a:schemeClr val="tx1"/>
+                      </a:solidFill>
+                      <a:prstDash val="solid"/>
+                      <a:round/>
+                      <a:headEnd type="none" w="med" len="med"/>
+                      <a:tailEnd type="none" w="med" len="med"/>
+                    </a:lnB>
+                    <a:solidFill>
+                      <a:schemeClr val="bg1"/>
+                    </a:solidFill>
+                  </a:tcPr>
+                </a:tc>
+                <a:extLst>
+                  <a:ext uri="{0D108BD9-81ED-4DB2-BD59-A6C34878D82A}">
+                    <a16:rowId xmlns:a16="http://schemas.microsoft.com/office/drawing/2014/main" val="2275643079"/>
+                  </a:ext>
+                </a:extLst>
+              </a:tr>
+              <a:tr h="612000">
+                <a:tc gridSpan="2">
+                  <a:txBody>
+                    <a:bodyPr/>
+                    <a:lstStyle/>
+                    <a:p>
+                      <a:pPr marL="0" marR="0" lvl="0" indent="0" algn="ctr" defTabSz="914400" rtl="0" eaLnBrk="1" fontAlgn="auto" latinLnBrk="1" hangingPunct="1">
+                        <a:lnSpc>
+                          <a:spcPct val="100000"/>
+                        </a:lnSpc>
+                        <a:spcBef>
+                          <a:spcPts val="0"/>
+                        </a:spcBef>
+                        <a:spcAft>
+                          <a:spcPts val="0"/>
+                        </a:spcAft>
+                        <a:buClrTx/>
+                        <a:buSzTx/>
+                        <a:buFontTx/>
+                        <a:buNone/>
+                        <a:tabLst/>
+                        <a:defRPr/>
+                      </a:pPr>
+                      <a:r>
+                        <a:rPr lang="ko-KR" altLang="en-US" sz="1200"/>
+                        <a:t>위에 </a:t>
+                      </a:r>
+                      <a:r>
+                        <a:rPr lang="en-US" altLang="ko-KR" sz="1200"/>
+                        <a:t>Look up, Predict</a:t>
+                      </a:r>
+                      <a:r>
+                        <a:rPr lang="ko-KR" altLang="en-US" sz="1200"/>
+                        <a:t>는 메인 페이지의 기능과 동일</a:t>
+                      </a:r>
+                    </a:p>
+                    <a:p>
+                      <a:pPr algn="ctr" latinLnBrk="1"/>
+                      <a:endParaRPr lang="ko-KR" altLang="en-US" sz="1200"/>
+                    </a:p>
+                  </a:txBody>
+                  <a:tcPr>
+                    <a:lnL w="12700" cap="flat" cmpd="sng" algn="ctr">
+                      <a:solidFill>
+                        <a:schemeClr val="tx1"/>
+                      </a:solidFill>
+                      <a:prstDash val="solid"/>
+                      <a:round/>
+                      <a:headEnd type="none" w="med" len="med"/>
+                      <a:tailEnd type="none" w="med" len="med"/>
+                    </a:lnL>
+                    <a:lnR w="12700" cap="flat" cmpd="sng" algn="ctr">
+                      <a:solidFill>
+                        <a:schemeClr val="tx1"/>
+                      </a:solidFill>
+                      <a:prstDash val="solid"/>
+                      <a:round/>
+                      <a:headEnd type="none" w="med" len="med"/>
+                      <a:tailEnd type="none" w="med" len="med"/>
+                    </a:lnR>
+                    <a:lnT w="12700" cap="flat" cmpd="sng" algn="ctr">
+                      <a:solidFill>
+                        <a:schemeClr val="tx1"/>
+                      </a:solidFill>
+                      <a:prstDash val="solid"/>
+                      <a:round/>
+                      <a:headEnd type="none" w="med" len="med"/>
+                      <a:tailEnd type="none" w="med" len="med"/>
+                    </a:lnT>
+                    <a:lnB w="12700" cap="flat" cmpd="sng" algn="ctr">
+                      <a:solidFill>
+                        <a:schemeClr val="tx1"/>
+                      </a:solidFill>
+                      <a:prstDash val="solid"/>
+                      <a:round/>
+                      <a:headEnd type="none" w="med" len="med"/>
+                      <a:tailEnd type="none" w="med" len="med"/>
+                    </a:lnB>
+                    <a:solidFill>
+                      <a:schemeClr val="bg1"/>
+                    </a:solidFill>
+                  </a:tcPr>
+                </a:tc>
+                <a:tc hMerge="1">
+                  <a:txBody>
+                    <a:bodyPr/>
+                    <a:lstStyle/>
+                    <a:p>
+                      <a:pPr algn="l" latinLnBrk="1"/>
+                      <a:endParaRPr lang="ko-KR" altLang="en-US" sz="1200"/>
+                    </a:p>
+                  </a:txBody>
+                  <a:tcPr anchor="ctr">
+                    <a:lnL w="12700" cap="flat" cmpd="sng" algn="ctr">
+                      <a:solidFill>
+                        <a:schemeClr val="tx1"/>
+                      </a:solidFill>
+                      <a:prstDash val="solid"/>
+                      <a:round/>
+                      <a:headEnd type="none" w="med" len="med"/>
+                      <a:tailEnd type="none" w="med" len="med"/>
+                    </a:lnL>
+                    <a:lnR w="12700" cap="flat" cmpd="sng" algn="ctr">
+                      <a:solidFill>
+                        <a:schemeClr val="tx1"/>
+                      </a:solidFill>
+                      <a:prstDash val="solid"/>
+                      <a:round/>
+                      <a:headEnd type="none" w="med" len="med"/>
+                      <a:tailEnd type="none" w="med" len="med"/>
+                    </a:lnR>
+                    <a:lnT w="12700" cap="flat" cmpd="sng" algn="ctr">
+                      <a:solidFill>
+                        <a:schemeClr val="tx1"/>
+                      </a:solidFill>
+                      <a:prstDash val="solid"/>
+                      <a:round/>
+                      <a:headEnd type="none" w="med" len="med"/>
+                      <a:tailEnd type="none" w="med" len="med"/>
+                    </a:lnT>
+                    <a:lnB w="12700" cap="flat" cmpd="sng" algn="ctr">
+                      <a:solidFill>
+                        <a:schemeClr val="tx1"/>
+                      </a:solidFill>
+                      <a:prstDash val="solid"/>
+                      <a:round/>
+                      <a:headEnd type="none" w="med" len="med"/>
+                      <a:tailEnd type="none" w="med" len="med"/>
+                    </a:lnB>
+                    <a:solidFill>
+                      <a:schemeClr val="bg1"/>
+                    </a:solidFill>
+                  </a:tcPr>
+                </a:tc>
+                <a:extLst>
+                  <a:ext uri="{0D108BD9-81ED-4DB2-BD59-A6C34878D82A}">
+                    <a16:rowId xmlns:a16="http://schemas.microsoft.com/office/drawing/2014/main" val="1885486421"/>
                   </a:ext>
                 </a:extLst>
               </a:tr>
@@ -10366,8 +11206,69 @@
         </p:nvSpPr>
         <p:spPr>
           <a:xfrm>
-            <a:off x="427810" y="3002638"/>
-            <a:ext cx="360000" cy="360000"/>
+            <a:off x="6794004" y="5869453"/>
+            <a:ext cx="324000" cy="324000"/>
+          </a:xfrm>
+          <a:prstGeom prst="ellipse">
+            <a:avLst/>
+          </a:prstGeom>
+          <a:solidFill>
+            <a:srgbClr val="C00000">
+              <a:alpha val="60000"/>
+            </a:srgbClr>
+          </a:solidFill>
+        </p:spPr>
+        <p:style>
+          <a:lnRef idx="2">
+            <a:schemeClr val="accent1">
+              <a:shade val="15000"/>
+            </a:schemeClr>
+          </a:lnRef>
+          <a:fillRef idx="1">
+            <a:schemeClr val="accent1"/>
+          </a:fillRef>
+          <a:effectRef idx="0">
+            <a:schemeClr val="accent1"/>
+          </a:effectRef>
+          <a:fontRef idx="minor">
+            <a:schemeClr val="lt1"/>
+          </a:fontRef>
+        </p:style>
+        <p:txBody>
+          <a:bodyPr rtlCol="0" anchor="ctr"/>
+          <a:lstStyle/>
+          <a:p>
+            <a:pPr algn="ctr"/>
+            <a:r>
+              <a:rPr lang="en-US" altLang="ko-KR" sz="2000">
+                <a:latin typeface="+mn-ea"/>
+              </a:rPr>
+              <a:t>3</a:t>
+            </a:r>
+            <a:endParaRPr lang="ko-KR" altLang="en-US" sz="2000">
+              <a:latin typeface="+mn-ea"/>
+            </a:endParaRPr>
+          </a:p>
+        </p:txBody>
+      </p:sp>
+      <p:sp>
+        <p:nvSpPr>
+          <p:cNvPr id="7" name="타원 6">
+            <a:extLst>
+              <a:ext uri="{FF2B5EF4-FFF2-40B4-BE49-F238E27FC236}">
+                <a16:creationId xmlns:a16="http://schemas.microsoft.com/office/drawing/2014/main" id="{6927301E-47D9-D7C6-EBF6-3EEBDCE32BE6}"/>
+              </a:ext>
+            </a:extLst>
+          </p:cNvPr>
+          <p:cNvSpPr>
+            <a:spLocks noChangeAspect="1"/>
+          </p:cNvSpPr>
+          <p:nvPr/>
+        </p:nvSpPr>
+        <p:spPr>
+          <a:xfrm>
+            <a:off x="1229323" y="3105000"/>
+            <a:ext cx="324000" cy="324000"/>
           </a:xfrm>
           <a:prstGeom prst="ellipse">
             <a:avLst/>
@@ -10413,10 +11314,10 @@
       </p:sp>
       <p:sp>
         <p:nvSpPr>
-          <p:cNvPr id="11" name="타원 10">
+          <p:cNvPr id="9" name="타원 8">
             <a:extLst>
               <a:ext uri="{FF2B5EF4-FFF2-40B4-BE49-F238E27FC236}">
-                <a16:creationId xmlns:a16="http://schemas.microsoft.com/office/drawing/2014/main" id="{5A7938F5-4B55-388B-DCE1-EE52E3F66C75}"/>
+                <a16:creationId xmlns:a16="http://schemas.microsoft.com/office/drawing/2014/main" id="{D4E14AD0-C0F5-B974-6574-7EBB78BAB894}"/>
               </a:ext>
             </a:extLst>
           </p:cNvPr>
@@ -10427,8 +11328,8 @@
         </p:nvSpPr>
         <p:spPr>
           <a:xfrm>
-            <a:off x="7936818" y="3002638"/>
-            <a:ext cx="360000" cy="360000"/>
+            <a:off x="1229323" y="5869453"/>
+            <a:ext cx="324000" cy="324000"/>
           </a:xfrm>
           <a:prstGeom prst="ellipse">
             <a:avLst/>
@@ -10475,7 +11376,4297 @@
     </p:spTree>
     <p:extLst>
       <p:ext uri="{BB962C8B-B14F-4D97-AF65-F5344CB8AC3E}">
-        <p14:creationId xmlns:p14="http://schemas.microsoft.com/office/powerpoint/2010/main" val="2324931337"/>
+        <p14:creationId xmlns:p14="http://schemas.microsoft.com/office/powerpoint/2010/main" val="3745535970"/>
+      </p:ext>
+    </p:extLst>
+  </p:cSld>
+  <p:clrMapOvr>
+    <a:masterClrMapping/>
+  </p:clrMapOvr>
+</p:sld>
+</file>
+
+<file path=ppt/slides/slide5.xml><?xml version="1.0" encoding="utf-8"?>
+<p:sld xmlns:a="http://schemas.openxmlformats.org/drawingml/2006/main" xmlns:r="http://schemas.openxmlformats.org/officeDocument/2006/relationships" xmlns:p="http://schemas.openxmlformats.org/presentationml/2006/main">
+  <p:cSld>
+    <p:spTree>
+      <p:nvGrpSpPr>
+        <p:cNvPr id="1" name=""/>
+        <p:cNvGrpSpPr/>
+        <p:nvPr/>
+      </p:nvGrpSpPr>
+      <p:grpSpPr>
+        <a:xfrm>
+          <a:off x="0" y="0"/>
+          <a:ext cx="0" cy="0"/>
+          <a:chOff x="0" y="0"/>
+          <a:chExt cx="0" cy="0"/>
+        </a:xfrm>
+      </p:grpSpPr>
+      <p:pic>
+        <p:nvPicPr>
+          <p:cNvPr id="8" name="그림 7" descr="텍스트, 스크린샷, 소프트웨어, 웹 페이지이(가) 표시된 사진&#10;&#10;AI가 생성한 콘텐츠는 부정확할 수 있습니다.">
+            <a:extLst>
+              <a:ext uri="{FF2B5EF4-FFF2-40B4-BE49-F238E27FC236}">
+                <a16:creationId xmlns:a16="http://schemas.microsoft.com/office/drawing/2014/main" id="{D61A098B-3AEA-169C-0B6F-593FC1BCF6C9}"/>
+              </a:ext>
+            </a:extLst>
+          </p:cNvPr>
+          <p:cNvPicPr>
+            <a:picLocks noChangeAspect="1"/>
+          </p:cNvPicPr>
+          <p:nvPr/>
+        </p:nvPicPr>
+        <p:blipFill>
+          <a:blip r:embed="rId2">
+            <a:extLst>
+              <a:ext uri="{28A0092B-C50C-407E-A947-70E740481C1C}">
+                <a14:useLocalDpi xmlns:a14="http://schemas.microsoft.com/office/drawing/2010/main" val="0"/>
+              </a:ext>
+            </a:extLst>
+          </a:blip>
+          <a:stretch>
+            <a:fillRect/>
+          </a:stretch>
+        </p:blipFill>
+        <p:spPr>
+          <a:xfrm>
+            <a:off x="361002" y="1781297"/>
+            <a:ext cx="8637486" cy="4857009"/>
+          </a:xfrm>
+          <a:prstGeom prst="rect">
+            <a:avLst/>
+          </a:prstGeom>
+        </p:spPr>
+      </p:pic>
+      <p:graphicFrame>
+        <p:nvGraphicFramePr>
+          <p:cNvPr id="5" name="표 4">
+            <a:extLst>
+              <a:ext uri="{FF2B5EF4-FFF2-40B4-BE49-F238E27FC236}">
+                <a16:creationId xmlns:a16="http://schemas.microsoft.com/office/drawing/2014/main" id="{E4817D6E-D20C-C517-A1A7-CE0B0E88C4D8}"/>
+              </a:ext>
+            </a:extLst>
+          </p:cNvPr>
+          <p:cNvGraphicFramePr>
+            <a:graphicFrameLocks noGrp="1"/>
+          </p:cNvGraphicFramePr>
+          <p:nvPr>
+            <p:extLst>
+              <p:ext uri="{D42A27DB-BD31-4B8C-83A1-F6EECF244321}">
+                <p14:modId xmlns:p14="http://schemas.microsoft.com/office/powerpoint/2010/main" val="3680330369"/>
+              </p:ext>
+            </p:extLst>
+          </p:nvPr>
+        </p:nvGraphicFramePr>
+        <p:xfrm>
+          <a:off x="363516" y="826547"/>
+          <a:ext cx="8640000" cy="715655"/>
+        </p:xfrm>
+        <a:graphic>
+          <a:graphicData uri="http://schemas.openxmlformats.org/drawingml/2006/table">
+            <a:tbl>
+              <a:tblPr firstRow="1" bandRow="1">
+                <a:tableStyleId>{5C22544A-7EE6-4342-B048-85BDC9FD1C3A}</a:tableStyleId>
+              </a:tblPr>
+              <a:tblGrid>
+                <a:gridCol w="1080000">
+                  <a:extLst>
+                    <a:ext uri="{9D8B030D-6E8A-4147-A177-3AD203B41FA5}">
+                      <a16:colId xmlns:a16="http://schemas.microsoft.com/office/drawing/2014/main" val="3504761122"/>
+                    </a:ext>
+                  </a:extLst>
+                </a:gridCol>
+                <a:gridCol w="1080000">
+                  <a:extLst>
+                    <a:ext uri="{9D8B030D-6E8A-4147-A177-3AD203B41FA5}">
+                      <a16:colId xmlns:a16="http://schemas.microsoft.com/office/drawing/2014/main" val="781226076"/>
+                    </a:ext>
+                  </a:extLst>
+                </a:gridCol>
+                <a:gridCol w="1080000">
+                  <a:extLst>
+                    <a:ext uri="{9D8B030D-6E8A-4147-A177-3AD203B41FA5}">
+                      <a16:colId xmlns:a16="http://schemas.microsoft.com/office/drawing/2014/main" val="3215577780"/>
+                    </a:ext>
+                  </a:extLst>
+                </a:gridCol>
+                <a:gridCol w="1080000">
+                  <a:extLst>
+                    <a:ext uri="{9D8B030D-6E8A-4147-A177-3AD203B41FA5}">
+                      <a16:colId xmlns:a16="http://schemas.microsoft.com/office/drawing/2014/main" val="1629845088"/>
+                    </a:ext>
+                  </a:extLst>
+                </a:gridCol>
+                <a:gridCol w="1080000">
+                  <a:extLst>
+                    <a:ext uri="{9D8B030D-6E8A-4147-A177-3AD203B41FA5}">
+                      <a16:colId xmlns:a16="http://schemas.microsoft.com/office/drawing/2014/main" val="3366529467"/>
+                    </a:ext>
+                  </a:extLst>
+                </a:gridCol>
+                <a:gridCol w="1080000">
+                  <a:extLst>
+                    <a:ext uri="{9D8B030D-6E8A-4147-A177-3AD203B41FA5}">
+                      <a16:colId xmlns:a16="http://schemas.microsoft.com/office/drawing/2014/main" val="2217245399"/>
+                    </a:ext>
+                  </a:extLst>
+                </a:gridCol>
+                <a:gridCol w="1080000">
+                  <a:extLst>
+                    <a:ext uri="{9D8B030D-6E8A-4147-A177-3AD203B41FA5}">
+                      <a16:colId xmlns:a16="http://schemas.microsoft.com/office/drawing/2014/main" val="4110027502"/>
+                    </a:ext>
+                  </a:extLst>
+                </a:gridCol>
+                <a:gridCol w="1080000">
+                  <a:extLst>
+                    <a:ext uri="{9D8B030D-6E8A-4147-A177-3AD203B41FA5}">
+                      <a16:colId xmlns:a16="http://schemas.microsoft.com/office/drawing/2014/main" val="3428513352"/>
+                    </a:ext>
+                  </a:extLst>
+                </a:gridCol>
+              </a:tblGrid>
+              <a:tr h="360000">
+                <a:tc>
+                  <a:txBody>
+                    <a:bodyPr/>
+                    <a:lstStyle/>
+                    <a:p>
+                      <a:pPr algn="l" latinLnBrk="1"/>
+                      <a:r>
+                        <a:rPr lang="en-US" altLang="ko-KR" sz="1200" b="1">
+                          <a:solidFill>
+                            <a:schemeClr val="tx1"/>
+                          </a:solidFill>
+                          <a:latin typeface="+mn-ea"/>
+                          <a:ea typeface="+mn-ea"/>
+                        </a:rPr>
+                        <a:t>Page Title</a:t>
+                      </a:r>
+                      <a:endParaRPr lang="ko-KR" altLang="en-US" sz="1200" b="1">
+                        <a:solidFill>
+                          <a:schemeClr val="tx1"/>
+                        </a:solidFill>
+                        <a:latin typeface="+mn-ea"/>
+                        <a:ea typeface="+mn-ea"/>
+                      </a:endParaRPr>
+                    </a:p>
+                  </a:txBody>
+                  <a:tcPr anchor="ctr">
+                    <a:lnL w="12700" cap="flat" cmpd="sng" algn="ctr">
+                      <a:solidFill>
+                        <a:schemeClr val="tx1"/>
+                      </a:solidFill>
+                      <a:prstDash val="solid"/>
+                      <a:round/>
+                      <a:headEnd type="none" w="med" len="med"/>
+                      <a:tailEnd type="none" w="med" len="med"/>
+                    </a:lnL>
+                    <a:lnR w="12700" cap="flat" cmpd="sng" algn="ctr">
+                      <a:solidFill>
+                        <a:schemeClr val="tx1"/>
+                      </a:solidFill>
+                      <a:prstDash val="solid"/>
+                      <a:round/>
+                      <a:headEnd type="none" w="med" len="med"/>
+                      <a:tailEnd type="none" w="med" len="med"/>
+                    </a:lnR>
+                    <a:lnT w="12700" cap="flat" cmpd="sng" algn="ctr">
+                      <a:solidFill>
+                        <a:schemeClr val="tx1"/>
+                      </a:solidFill>
+                      <a:prstDash val="solid"/>
+                      <a:round/>
+                      <a:headEnd type="none" w="med" len="med"/>
+                      <a:tailEnd type="none" w="med" len="med"/>
+                    </a:lnT>
+                    <a:lnB w="12700" cap="flat" cmpd="sng" algn="ctr">
+                      <a:solidFill>
+                        <a:schemeClr val="tx1"/>
+                      </a:solidFill>
+                      <a:prstDash val="solid"/>
+                      <a:round/>
+                      <a:headEnd type="none" w="med" len="med"/>
+                      <a:tailEnd type="none" w="med" len="med"/>
+                    </a:lnB>
+                    <a:solidFill>
+                      <a:schemeClr val="bg1">
+                        <a:lumMod val="85000"/>
+                      </a:schemeClr>
+                    </a:solidFill>
+                  </a:tcPr>
+                </a:tc>
+                <a:tc>
+                  <a:txBody>
+                    <a:bodyPr/>
+                    <a:lstStyle/>
+                    <a:p>
+                      <a:pPr algn="l" latinLnBrk="1"/>
+                      <a:r>
+                        <a:rPr lang="en-US" altLang="ko-KR" sz="1200" b="0">
+                          <a:solidFill>
+                            <a:schemeClr val="tx1"/>
+                          </a:solidFill>
+                          <a:latin typeface="+mn-ea"/>
+                          <a:ea typeface="+mn-ea"/>
+                        </a:rPr>
+                        <a:t>Result</a:t>
+                      </a:r>
+                      <a:endParaRPr lang="ko-KR" altLang="en-US" sz="1200" b="0">
+                        <a:solidFill>
+                          <a:schemeClr val="tx1"/>
+                        </a:solidFill>
+                        <a:latin typeface="+mn-ea"/>
+                        <a:ea typeface="+mn-ea"/>
+                      </a:endParaRPr>
+                    </a:p>
+                  </a:txBody>
+                  <a:tcPr anchor="ctr">
+                    <a:lnL w="12700" cap="flat" cmpd="sng" algn="ctr">
+                      <a:solidFill>
+                        <a:schemeClr val="tx1"/>
+                      </a:solidFill>
+                      <a:prstDash val="solid"/>
+                      <a:round/>
+                      <a:headEnd type="none" w="med" len="med"/>
+                      <a:tailEnd type="none" w="med" len="med"/>
+                    </a:lnL>
+                    <a:lnR w="12700" cap="flat" cmpd="sng" algn="ctr">
+                      <a:solidFill>
+                        <a:schemeClr val="tx1"/>
+                      </a:solidFill>
+                      <a:prstDash val="solid"/>
+                      <a:round/>
+                      <a:headEnd type="none" w="med" len="med"/>
+                      <a:tailEnd type="none" w="med" len="med"/>
+                    </a:lnR>
+                    <a:lnT w="12700" cap="flat" cmpd="sng" algn="ctr">
+                      <a:solidFill>
+                        <a:schemeClr val="tx1"/>
+                      </a:solidFill>
+                      <a:prstDash val="solid"/>
+                      <a:round/>
+                      <a:headEnd type="none" w="med" len="med"/>
+                      <a:tailEnd type="none" w="med" len="med"/>
+                    </a:lnT>
+                    <a:lnB w="12700" cap="flat" cmpd="sng" algn="ctr">
+                      <a:solidFill>
+                        <a:schemeClr val="tx1"/>
+                      </a:solidFill>
+                      <a:prstDash val="solid"/>
+                      <a:round/>
+                      <a:headEnd type="none" w="med" len="med"/>
+                      <a:tailEnd type="none" w="med" len="med"/>
+                    </a:lnB>
+                    <a:solidFill>
+                      <a:schemeClr val="bg1"/>
+                    </a:solidFill>
+                  </a:tcPr>
+                </a:tc>
+                <a:tc>
+                  <a:txBody>
+                    <a:bodyPr/>
+                    <a:lstStyle/>
+                    <a:p>
+                      <a:pPr algn="l" latinLnBrk="1"/>
+                      <a:r>
+                        <a:rPr lang="en-US" altLang="ko-KR" sz="1200" b="1">
+                          <a:solidFill>
+                            <a:schemeClr val="tx1"/>
+                          </a:solidFill>
+                          <a:latin typeface="+mn-ea"/>
+                          <a:ea typeface="+mn-ea"/>
+                        </a:rPr>
+                        <a:t>Screen ID</a:t>
+                      </a:r>
+                      <a:endParaRPr lang="ko-KR" altLang="en-US" sz="1200" b="1">
+                        <a:solidFill>
+                          <a:schemeClr val="tx1"/>
+                        </a:solidFill>
+                        <a:latin typeface="+mn-ea"/>
+                        <a:ea typeface="+mn-ea"/>
+                      </a:endParaRPr>
+                    </a:p>
+                  </a:txBody>
+                  <a:tcPr anchor="ctr">
+                    <a:lnL w="12700" cap="flat" cmpd="sng" algn="ctr">
+                      <a:solidFill>
+                        <a:schemeClr val="tx1"/>
+                      </a:solidFill>
+                      <a:prstDash val="solid"/>
+                      <a:round/>
+                      <a:headEnd type="none" w="med" len="med"/>
+                      <a:tailEnd type="none" w="med" len="med"/>
+                    </a:lnL>
+                    <a:lnR w="12700" cap="flat" cmpd="sng" algn="ctr">
+                      <a:solidFill>
+                        <a:schemeClr val="tx1"/>
+                      </a:solidFill>
+                      <a:prstDash val="solid"/>
+                      <a:round/>
+                      <a:headEnd type="none" w="med" len="med"/>
+                      <a:tailEnd type="none" w="med" len="med"/>
+                    </a:lnR>
+                    <a:lnT w="12700" cap="flat" cmpd="sng" algn="ctr">
+                      <a:solidFill>
+                        <a:schemeClr val="tx1"/>
+                      </a:solidFill>
+                      <a:prstDash val="solid"/>
+                      <a:round/>
+                      <a:headEnd type="none" w="med" len="med"/>
+                      <a:tailEnd type="none" w="med" len="med"/>
+                    </a:lnT>
+                    <a:lnB w="12700" cap="flat" cmpd="sng" algn="ctr">
+                      <a:solidFill>
+                        <a:schemeClr val="tx1"/>
+                      </a:solidFill>
+                      <a:prstDash val="solid"/>
+                      <a:round/>
+                      <a:headEnd type="none" w="med" len="med"/>
+                      <a:tailEnd type="none" w="med" len="med"/>
+                    </a:lnB>
+                    <a:solidFill>
+                      <a:schemeClr val="bg1">
+                        <a:lumMod val="85000"/>
+                      </a:schemeClr>
+                    </a:solidFill>
+                  </a:tcPr>
+                </a:tc>
+                <a:tc>
+                  <a:txBody>
+                    <a:bodyPr/>
+                    <a:lstStyle/>
+                    <a:p>
+                      <a:pPr algn="l" latinLnBrk="1"/>
+                      <a:r>
+                        <a:rPr lang="en-US" altLang="ko-KR" sz="1200" b="0">
+                          <a:solidFill>
+                            <a:schemeClr val="tx1"/>
+                          </a:solidFill>
+                          <a:latin typeface="+mn-ea"/>
+                          <a:ea typeface="+mn-ea"/>
+                        </a:rPr>
+                        <a:t>UI-result_1</a:t>
+                      </a:r>
+                      <a:endParaRPr lang="ko-KR" altLang="en-US" sz="1200" b="0">
+                        <a:solidFill>
+                          <a:schemeClr val="tx1"/>
+                        </a:solidFill>
+                        <a:latin typeface="+mn-ea"/>
+                        <a:ea typeface="+mn-ea"/>
+                      </a:endParaRPr>
+                    </a:p>
+                  </a:txBody>
+                  <a:tcPr anchor="ctr">
+                    <a:lnL w="12700" cap="flat" cmpd="sng" algn="ctr">
+                      <a:solidFill>
+                        <a:schemeClr val="tx1"/>
+                      </a:solidFill>
+                      <a:prstDash val="solid"/>
+                      <a:round/>
+                      <a:headEnd type="none" w="med" len="med"/>
+                      <a:tailEnd type="none" w="med" len="med"/>
+                    </a:lnL>
+                    <a:lnR w="12700" cap="flat" cmpd="sng" algn="ctr">
+                      <a:solidFill>
+                        <a:schemeClr val="tx1"/>
+                      </a:solidFill>
+                      <a:prstDash val="solid"/>
+                      <a:round/>
+                      <a:headEnd type="none" w="med" len="med"/>
+                      <a:tailEnd type="none" w="med" len="med"/>
+                    </a:lnR>
+                    <a:lnT w="12700" cap="flat" cmpd="sng" algn="ctr">
+                      <a:solidFill>
+                        <a:schemeClr val="tx1"/>
+                      </a:solidFill>
+                      <a:prstDash val="solid"/>
+                      <a:round/>
+                      <a:headEnd type="none" w="med" len="med"/>
+                      <a:tailEnd type="none" w="med" len="med"/>
+                    </a:lnT>
+                    <a:lnB w="12700" cap="flat" cmpd="sng" algn="ctr">
+                      <a:solidFill>
+                        <a:schemeClr val="tx1"/>
+                      </a:solidFill>
+                      <a:prstDash val="solid"/>
+                      <a:round/>
+                      <a:headEnd type="none" w="med" len="med"/>
+                      <a:tailEnd type="none" w="med" len="med"/>
+                    </a:lnB>
+                    <a:solidFill>
+                      <a:schemeClr val="bg1"/>
+                    </a:solidFill>
+                  </a:tcPr>
+                </a:tc>
+                <a:tc>
+                  <a:txBody>
+                    <a:bodyPr/>
+                    <a:lstStyle/>
+                    <a:p>
+                      <a:pPr algn="l" latinLnBrk="1"/>
+                      <a:r>
+                        <a:rPr lang="en-US" altLang="ko-KR" sz="1200" b="1">
+                          <a:solidFill>
+                            <a:schemeClr val="tx1"/>
+                          </a:solidFill>
+                          <a:latin typeface="+mn-ea"/>
+                          <a:ea typeface="+mn-ea"/>
+                        </a:rPr>
+                        <a:t>Author</a:t>
+                      </a:r>
+                      <a:endParaRPr lang="ko-KR" altLang="en-US" sz="1200" b="1">
+                        <a:solidFill>
+                          <a:schemeClr val="tx1"/>
+                        </a:solidFill>
+                        <a:latin typeface="+mn-ea"/>
+                        <a:ea typeface="+mn-ea"/>
+                      </a:endParaRPr>
+                    </a:p>
+                  </a:txBody>
+                  <a:tcPr anchor="ctr">
+                    <a:lnL w="12700" cap="flat" cmpd="sng" algn="ctr">
+                      <a:solidFill>
+                        <a:schemeClr val="tx1"/>
+                      </a:solidFill>
+                      <a:prstDash val="solid"/>
+                      <a:round/>
+                      <a:headEnd type="none" w="med" len="med"/>
+                      <a:tailEnd type="none" w="med" len="med"/>
+                    </a:lnL>
+                    <a:lnR w="12700" cap="flat" cmpd="sng" algn="ctr">
+                      <a:solidFill>
+                        <a:schemeClr val="tx1"/>
+                      </a:solidFill>
+                      <a:prstDash val="solid"/>
+                      <a:round/>
+                      <a:headEnd type="none" w="med" len="med"/>
+                      <a:tailEnd type="none" w="med" len="med"/>
+                    </a:lnR>
+                    <a:lnT w="12700" cap="flat" cmpd="sng" algn="ctr">
+                      <a:solidFill>
+                        <a:schemeClr val="tx1"/>
+                      </a:solidFill>
+                      <a:prstDash val="solid"/>
+                      <a:round/>
+                      <a:headEnd type="none" w="med" len="med"/>
+                      <a:tailEnd type="none" w="med" len="med"/>
+                    </a:lnT>
+                    <a:lnB w="12700" cap="flat" cmpd="sng" algn="ctr">
+                      <a:solidFill>
+                        <a:schemeClr val="tx1"/>
+                      </a:solidFill>
+                      <a:prstDash val="solid"/>
+                      <a:round/>
+                      <a:headEnd type="none" w="med" len="med"/>
+                      <a:tailEnd type="none" w="med" len="med"/>
+                    </a:lnB>
+                    <a:solidFill>
+                      <a:schemeClr val="bg1">
+                        <a:lumMod val="85000"/>
+                      </a:schemeClr>
+                    </a:solidFill>
+                  </a:tcPr>
+                </a:tc>
+                <a:tc>
+                  <a:txBody>
+                    <a:bodyPr/>
+                    <a:lstStyle/>
+                    <a:p>
+                      <a:pPr algn="l" latinLnBrk="1"/>
+                      <a:r>
+                        <a:rPr lang="ko-KR" altLang="en-US" sz="1200" b="0">
+                          <a:solidFill>
+                            <a:schemeClr val="tx1"/>
+                          </a:solidFill>
+                          <a:latin typeface="+mn-ea"/>
+                          <a:ea typeface="+mn-ea"/>
+                        </a:rPr>
+                        <a:t>이승찬</a:t>
+                      </a:r>
+                    </a:p>
+                  </a:txBody>
+                  <a:tcPr anchor="ctr">
+                    <a:lnL w="12700" cap="flat" cmpd="sng" algn="ctr">
+                      <a:solidFill>
+                        <a:schemeClr val="tx1"/>
+                      </a:solidFill>
+                      <a:prstDash val="solid"/>
+                      <a:round/>
+                      <a:headEnd type="none" w="med" len="med"/>
+                      <a:tailEnd type="none" w="med" len="med"/>
+                    </a:lnL>
+                    <a:lnR w="12700" cap="flat" cmpd="sng" algn="ctr">
+                      <a:solidFill>
+                        <a:schemeClr val="tx1"/>
+                      </a:solidFill>
+                      <a:prstDash val="solid"/>
+                      <a:round/>
+                      <a:headEnd type="none" w="med" len="med"/>
+                      <a:tailEnd type="none" w="med" len="med"/>
+                    </a:lnR>
+                    <a:lnT w="12700" cap="flat" cmpd="sng" algn="ctr">
+                      <a:solidFill>
+                        <a:schemeClr val="tx1"/>
+                      </a:solidFill>
+                      <a:prstDash val="solid"/>
+                      <a:round/>
+                      <a:headEnd type="none" w="med" len="med"/>
+                      <a:tailEnd type="none" w="med" len="med"/>
+                    </a:lnT>
+                    <a:lnB w="12700" cap="flat" cmpd="sng" algn="ctr">
+                      <a:solidFill>
+                        <a:schemeClr val="tx1"/>
+                      </a:solidFill>
+                      <a:prstDash val="solid"/>
+                      <a:round/>
+                      <a:headEnd type="none" w="med" len="med"/>
+                      <a:tailEnd type="none" w="med" len="med"/>
+                    </a:lnB>
+                    <a:solidFill>
+                      <a:schemeClr val="bg1"/>
+                    </a:solidFill>
+                  </a:tcPr>
+                </a:tc>
+                <a:tc>
+                  <a:txBody>
+                    <a:bodyPr/>
+                    <a:lstStyle/>
+                    <a:p>
+                      <a:pPr algn="l" latinLnBrk="1"/>
+                      <a:r>
+                        <a:rPr lang="en-US" altLang="ko-KR" sz="1200" b="1">
+                          <a:solidFill>
+                            <a:schemeClr val="tx1"/>
+                          </a:solidFill>
+                          <a:latin typeface="+mn-ea"/>
+                          <a:ea typeface="+mn-ea"/>
+                        </a:rPr>
+                        <a:t>Date</a:t>
+                      </a:r>
+                      <a:endParaRPr lang="ko-KR" altLang="en-US" sz="1200" b="1">
+                        <a:solidFill>
+                          <a:schemeClr val="tx1"/>
+                        </a:solidFill>
+                        <a:latin typeface="+mn-ea"/>
+                        <a:ea typeface="+mn-ea"/>
+                      </a:endParaRPr>
+                    </a:p>
+                  </a:txBody>
+                  <a:tcPr anchor="ctr">
+                    <a:lnL w="12700" cap="flat" cmpd="sng" algn="ctr">
+                      <a:solidFill>
+                        <a:schemeClr val="tx1"/>
+                      </a:solidFill>
+                      <a:prstDash val="solid"/>
+                      <a:round/>
+                      <a:headEnd type="none" w="med" len="med"/>
+                      <a:tailEnd type="none" w="med" len="med"/>
+                    </a:lnL>
+                    <a:lnR w="12700" cap="flat" cmpd="sng" algn="ctr">
+                      <a:solidFill>
+                        <a:schemeClr val="tx1"/>
+                      </a:solidFill>
+                      <a:prstDash val="solid"/>
+                      <a:round/>
+                      <a:headEnd type="none" w="med" len="med"/>
+                      <a:tailEnd type="none" w="med" len="med"/>
+                    </a:lnR>
+                    <a:lnT w="12700" cap="flat" cmpd="sng" algn="ctr">
+                      <a:solidFill>
+                        <a:schemeClr val="tx1"/>
+                      </a:solidFill>
+                      <a:prstDash val="solid"/>
+                      <a:round/>
+                      <a:headEnd type="none" w="med" len="med"/>
+                      <a:tailEnd type="none" w="med" len="med"/>
+                    </a:lnT>
+                    <a:lnB w="12700" cap="flat" cmpd="sng" algn="ctr">
+                      <a:solidFill>
+                        <a:schemeClr val="tx1"/>
+                      </a:solidFill>
+                      <a:prstDash val="solid"/>
+                      <a:round/>
+                      <a:headEnd type="none" w="med" len="med"/>
+                      <a:tailEnd type="none" w="med" len="med"/>
+                    </a:lnB>
+                    <a:solidFill>
+                      <a:schemeClr val="bg1">
+                        <a:lumMod val="85000"/>
+                      </a:schemeClr>
+                    </a:solidFill>
+                  </a:tcPr>
+                </a:tc>
+                <a:tc>
+                  <a:txBody>
+                    <a:bodyPr/>
+                    <a:lstStyle/>
+                    <a:p>
+                      <a:pPr algn="l" latinLnBrk="1"/>
+                      <a:r>
+                        <a:rPr lang="en-US" altLang="ko-KR" sz="1200" b="0">
+                          <a:solidFill>
+                            <a:schemeClr val="tx1"/>
+                          </a:solidFill>
+                          <a:latin typeface="+mn-ea"/>
+                          <a:ea typeface="+mn-ea"/>
+                        </a:rPr>
+                        <a:t>2026.04.09</a:t>
+                      </a:r>
+                      <a:endParaRPr lang="ko-KR" altLang="en-US" sz="1200" b="0">
+                        <a:solidFill>
+                          <a:schemeClr val="tx1"/>
+                        </a:solidFill>
+                        <a:latin typeface="+mn-ea"/>
+                        <a:ea typeface="+mn-ea"/>
+                      </a:endParaRPr>
+                    </a:p>
+                  </a:txBody>
+                  <a:tcPr anchor="ctr">
+                    <a:lnL w="12700" cap="flat" cmpd="sng" algn="ctr">
+                      <a:solidFill>
+                        <a:schemeClr val="tx1"/>
+                      </a:solidFill>
+                      <a:prstDash val="solid"/>
+                      <a:round/>
+                      <a:headEnd type="none" w="med" len="med"/>
+                      <a:tailEnd type="none" w="med" len="med"/>
+                    </a:lnL>
+                    <a:lnR w="12700" cap="flat" cmpd="sng" algn="ctr">
+                      <a:solidFill>
+                        <a:schemeClr val="tx1"/>
+                      </a:solidFill>
+                      <a:prstDash val="solid"/>
+                      <a:round/>
+                      <a:headEnd type="none" w="med" len="med"/>
+                      <a:tailEnd type="none" w="med" len="med"/>
+                    </a:lnR>
+                    <a:lnT w="12700" cap="flat" cmpd="sng" algn="ctr">
+                      <a:solidFill>
+                        <a:schemeClr val="tx1"/>
+                      </a:solidFill>
+                      <a:prstDash val="solid"/>
+                      <a:round/>
+                      <a:headEnd type="none" w="med" len="med"/>
+                      <a:tailEnd type="none" w="med" len="med"/>
+                    </a:lnT>
+                    <a:lnB w="12700" cap="flat" cmpd="sng" algn="ctr">
+                      <a:solidFill>
+                        <a:schemeClr val="tx1"/>
+                      </a:solidFill>
+                      <a:prstDash val="solid"/>
+                      <a:round/>
+                      <a:headEnd type="none" w="med" len="med"/>
+                      <a:tailEnd type="none" w="med" len="med"/>
+                    </a:lnB>
+                    <a:solidFill>
+                      <a:schemeClr val="bg1"/>
+                    </a:solidFill>
+                  </a:tcPr>
+                </a:tc>
+                <a:extLst>
+                  <a:ext uri="{0D108BD9-81ED-4DB2-BD59-A6C34878D82A}">
+                    <a16:rowId xmlns:a16="http://schemas.microsoft.com/office/drawing/2014/main" val="2390745574"/>
+                  </a:ext>
+                </a:extLst>
+              </a:tr>
+              <a:tr h="355655">
+                <a:tc>
+                  <a:txBody>
+                    <a:bodyPr/>
+                    <a:lstStyle/>
+                    <a:p>
+                      <a:pPr algn="l" latinLnBrk="1"/>
+                      <a:r>
+                        <a:rPr lang="en-US" altLang="ko-KR" sz="1200" b="1">
+                          <a:solidFill>
+                            <a:schemeClr val="tx1"/>
+                          </a:solidFill>
+                          <a:latin typeface="+mn-ea"/>
+                          <a:ea typeface="+mn-ea"/>
+                        </a:rPr>
+                        <a:t>Screen Path</a:t>
+                      </a:r>
+                      <a:endParaRPr lang="ko-KR" altLang="en-US" sz="1200" b="1">
+                        <a:solidFill>
+                          <a:schemeClr val="tx1"/>
+                        </a:solidFill>
+                        <a:latin typeface="+mn-ea"/>
+                        <a:ea typeface="+mn-ea"/>
+                      </a:endParaRPr>
+                    </a:p>
+                  </a:txBody>
+                  <a:tcPr anchor="ctr">
+                    <a:lnL w="12700" cap="flat" cmpd="sng" algn="ctr">
+                      <a:solidFill>
+                        <a:schemeClr val="tx1"/>
+                      </a:solidFill>
+                      <a:prstDash val="solid"/>
+                      <a:round/>
+                      <a:headEnd type="none" w="med" len="med"/>
+                      <a:tailEnd type="none" w="med" len="med"/>
+                    </a:lnL>
+                    <a:lnR w="12700" cap="flat" cmpd="sng" algn="ctr">
+                      <a:solidFill>
+                        <a:schemeClr val="tx1"/>
+                      </a:solidFill>
+                      <a:prstDash val="solid"/>
+                      <a:round/>
+                      <a:headEnd type="none" w="med" len="med"/>
+                      <a:tailEnd type="none" w="med" len="med"/>
+                    </a:lnR>
+                    <a:lnT w="12700" cap="flat" cmpd="sng" algn="ctr">
+                      <a:solidFill>
+                        <a:schemeClr val="tx1"/>
+                      </a:solidFill>
+                      <a:prstDash val="solid"/>
+                      <a:round/>
+                      <a:headEnd type="none" w="med" len="med"/>
+                      <a:tailEnd type="none" w="med" len="med"/>
+                    </a:lnT>
+                    <a:lnB w="12700" cap="flat" cmpd="sng" algn="ctr">
+                      <a:solidFill>
+                        <a:schemeClr val="tx1"/>
+                      </a:solidFill>
+                      <a:prstDash val="solid"/>
+                      <a:round/>
+                      <a:headEnd type="none" w="med" len="med"/>
+                      <a:tailEnd type="none" w="med" len="med"/>
+                    </a:lnB>
+                    <a:solidFill>
+                      <a:schemeClr val="bg1">
+                        <a:lumMod val="85000"/>
+                      </a:schemeClr>
+                    </a:solidFill>
+                  </a:tcPr>
+                </a:tc>
+                <a:tc gridSpan="7">
+                  <a:txBody>
+                    <a:bodyPr/>
+                    <a:lstStyle/>
+                    <a:p>
+                      <a:pPr algn="l" latinLnBrk="1"/>
+                      <a:r>
+                        <a:rPr lang="en-US" altLang="ko-KR" sz="1200" b="0">
+                          <a:solidFill>
+                            <a:schemeClr val="tx1"/>
+                          </a:solidFill>
+                          <a:latin typeface="+mn-ea"/>
+                          <a:ea typeface="+mn-ea"/>
+                        </a:rPr>
+                        <a:t>main - predict</a:t>
+                      </a:r>
+                      <a:endParaRPr lang="ko-KR" altLang="en-US" sz="1200" b="0">
+                        <a:solidFill>
+                          <a:schemeClr val="tx1"/>
+                        </a:solidFill>
+                        <a:latin typeface="+mn-ea"/>
+                        <a:ea typeface="+mn-ea"/>
+                      </a:endParaRPr>
+                    </a:p>
+                  </a:txBody>
+                  <a:tcPr anchor="ctr">
+                    <a:lnL w="12700" cap="flat" cmpd="sng" algn="ctr">
+                      <a:solidFill>
+                        <a:schemeClr val="tx1"/>
+                      </a:solidFill>
+                      <a:prstDash val="solid"/>
+                      <a:round/>
+                      <a:headEnd type="none" w="med" len="med"/>
+                      <a:tailEnd type="none" w="med" len="med"/>
+                    </a:lnL>
+                    <a:lnR w="12700" cap="flat" cmpd="sng" algn="ctr">
+                      <a:solidFill>
+                        <a:schemeClr val="tx1"/>
+                      </a:solidFill>
+                      <a:prstDash val="solid"/>
+                      <a:round/>
+                      <a:headEnd type="none" w="med" len="med"/>
+                      <a:tailEnd type="none" w="med" len="med"/>
+                    </a:lnR>
+                    <a:lnT w="12700" cap="flat" cmpd="sng" algn="ctr">
+                      <a:solidFill>
+                        <a:schemeClr val="tx1"/>
+                      </a:solidFill>
+                      <a:prstDash val="solid"/>
+                      <a:round/>
+                      <a:headEnd type="none" w="med" len="med"/>
+                      <a:tailEnd type="none" w="med" len="med"/>
+                    </a:lnT>
+                    <a:lnB w="12700" cap="flat" cmpd="sng" algn="ctr">
+                      <a:solidFill>
+                        <a:schemeClr val="tx1"/>
+                      </a:solidFill>
+                      <a:prstDash val="solid"/>
+                      <a:round/>
+                      <a:headEnd type="none" w="med" len="med"/>
+                      <a:tailEnd type="none" w="med" len="med"/>
+                    </a:lnB>
+                    <a:solidFill>
+                      <a:schemeClr val="bg1"/>
+                    </a:solidFill>
+                  </a:tcPr>
+                </a:tc>
+                <a:tc hMerge="1">
+                  <a:txBody>
+                    <a:bodyPr/>
+                    <a:lstStyle/>
+                    <a:p>
+                      <a:pPr latinLnBrk="1"/>
+                      <a:endParaRPr lang="ko-KR" altLang="en-US"/>
+                    </a:p>
+                  </a:txBody>
+                  <a:tcPr>
+                    <a:lnB w="12700" cap="flat" cmpd="sng" algn="ctr">
+                      <a:solidFill>
+                        <a:schemeClr val="tx1"/>
+                      </a:solidFill>
+                      <a:prstDash val="solid"/>
+                      <a:round/>
+                      <a:headEnd type="none" w="med" len="med"/>
+                      <a:tailEnd type="none" w="med" len="med"/>
+                    </a:lnB>
+                  </a:tcPr>
+                </a:tc>
+                <a:tc hMerge="1">
+                  <a:txBody>
+                    <a:bodyPr/>
+                    <a:lstStyle/>
+                    <a:p>
+                      <a:pPr latinLnBrk="1"/>
+                      <a:endParaRPr lang="ko-KR" altLang="en-US"/>
+                    </a:p>
+                  </a:txBody>
+                  <a:tcPr>
+                    <a:lnB w="12700" cap="flat" cmpd="sng" algn="ctr">
+                      <a:solidFill>
+                        <a:schemeClr val="tx1"/>
+                      </a:solidFill>
+                      <a:prstDash val="solid"/>
+                      <a:round/>
+                      <a:headEnd type="none" w="med" len="med"/>
+                      <a:tailEnd type="none" w="med" len="med"/>
+                    </a:lnB>
+                  </a:tcPr>
+                </a:tc>
+                <a:tc hMerge="1">
+                  <a:txBody>
+                    <a:bodyPr/>
+                    <a:lstStyle/>
+                    <a:p>
+                      <a:pPr latinLnBrk="1"/>
+                      <a:endParaRPr lang="ko-KR" altLang="en-US"/>
+                    </a:p>
+                  </a:txBody>
+                  <a:tcPr>
+                    <a:lnB w="12700" cap="flat" cmpd="sng" algn="ctr">
+                      <a:solidFill>
+                        <a:schemeClr val="tx1"/>
+                      </a:solidFill>
+                      <a:prstDash val="solid"/>
+                      <a:round/>
+                      <a:headEnd type="none" w="med" len="med"/>
+                      <a:tailEnd type="none" w="med" len="med"/>
+                    </a:lnB>
+                  </a:tcPr>
+                </a:tc>
+                <a:tc hMerge="1">
+                  <a:txBody>
+                    <a:bodyPr/>
+                    <a:lstStyle/>
+                    <a:p>
+                      <a:pPr latinLnBrk="1"/>
+                      <a:endParaRPr lang="ko-KR" altLang="en-US"/>
+                    </a:p>
+                  </a:txBody>
+                  <a:tcPr>
+                    <a:lnR w="12700" cap="flat" cmpd="sng" algn="ctr">
+                      <a:solidFill>
+                        <a:schemeClr val="tx1"/>
+                      </a:solidFill>
+                      <a:prstDash val="solid"/>
+                      <a:round/>
+                      <a:headEnd type="none" w="med" len="med"/>
+                      <a:tailEnd type="none" w="med" len="med"/>
+                    </a:lnR>
+                    <a:lnB w="12700" cap="flat" cmpd="sng" algn="ctr">
+                      <a:solidFill>
+                        <a:schemeClr val="tx1"/>
+                      </a:solidFill>
+                      <a:prstDash val="solid"/>
+                      <a:round/>
+                      <a:headEnd type="none" w="med" len="med"/>
+                      <a:tailEnd type="none" w="med" len="med"/>
+                    </a:lnB>
+                  </a:tcPr>
+                </a:tc>
+                <a:tc hMerge="1">
+                  <a:txBody>
+                    <a:bodyPr/>
+                    <a:lstStyle/>
+                    <a:p>
+                      <a:pPr algn="l" latinLnBrk="1"/>
+                      <a:endParaRPr lang="ko-KR" altLang="en-US" sz="1200" b="0">
+                        <a:solidFill>
+                          <a:schemeClr val="tx1"/>
+                        </a:solidFill>
+                        <a:latin typeface="+mn-ea"/>
+                        <a:ea typeface="+mn-ea"/>
+                      </a:endParaRPr>
+                    </a:p>
+                  </a:txBody>
+                  <a:tcPr anchor="ctr">
+                    <a:lnL w="12700" cap="flat" cmpd="sng" algn="ctr">
+                      <a:solidFill>
+                        <a:schemeClr val="tx1"/>
+                      </a:solidFill>
+                      <a:prstDash val="solid"/>
+                      <a:round/>
+                      <a:headEnd type="none" w="med" len="med"/>
+                      <a:tailEnd type="none" w="med" len="med"/>
+                    </a:lnL>
+                    <a:lnR w="12700" cap="flat" cmpd="sng" algn="ctr">
+                      <a:solidFill>
+                        <a:schemeClr val="tx1"/>
+                      </a:solidFill>
+                      <a:prstDash val="solid"/>
+                      <a:round/>
+                      <a:headEnd type="none" w="med" len="med"/>
+                      <a:tailEnd type="none" w="med" len="med"/>
+                    </a:lnR>
+                    <a:lnT w="12700" cap="flat" cmpd="sng" algn="ctr">
+                      <a:solidFill>
+                        <a:schemeClr val="tx1"/>
+                      </a:solidFill>
+                      <a:prstDash val="solid"/>
+                      <a:round/>
+                      <a:headEnd type="none" w="med" len="med"/>
+                      <a:tailEnd type="none" w="med" len="med"/>
+                    </a:lnT>
+                    <a:lnB w="12700" cap="flat" cmpd="sng" algn="ctr">
+                      <a:solidFill>
+                        <a:schemeClr val="tx1"/>
+                      </a:solidFill>
+                      <a:prstDash val="solid"/>
+                      <a:round/>
+                      <a:headEnd type="none" w="med" len="med"/>
+                      <a:tailEnd type="none" w="med" len="med"/>
+                    </a:lnB>
+                    <a:solidFill>
+                      <a:schemeClr val="bg1"/>
+                    </a:solidFill>
+                  </a:tcPr>
+                </a:tc>
+                <a:tc hMerge="1">
+                  <a:txBody>
+                    <a:bodyPr/>
+                    <a:lstStyle/>
+                    <a:p>
+                      <a:pPr algn="l" latinLnBrk="1"/>
+                      <a:endParaRPr lang="ko-KR" altLang="en-US" sz="1200" b="0">
+                        <a:solidFill>
+                          <a:schemeClr val="tx1"/>
+                        </a:solidFill>
+                        <a:latin typeface="+mn-ea"/>
+                        <a:ea typeface="+mn-ea"/>
+                      </a:endParaRPr>
+                    </a:p>
+                  </a:txBody>
+                  <a:tcPr anchor="ctr">
+                    <a:lnL w="12700" cap="flat" cmpd="sng" algn="ctr">
+                      <a:solidFill>
+                        <a:schemeClr val="tx1"/>
+                      </a:solidFill>
+                      <a:prstDash val="solid"/>
+                      <a:round/>
+                      <a:headEnd type="none" w="med" len="med"/>
+                      <a:tailEnd type="none" w="med" len="med"/>
+                    </a:lnL>
+                    <a:lnR w="12700" cap="flat" cmpd="sng" algn="ctr">
+                      <a:solidFill>
+                        <a:schemeClr val="tx1"/>
+                      </a:solidFill>
+                      <a:prstDash val="solid"/>
+                      <a:round/>
+                      <a:headEnd type="none" w="med" len="med"/>
+                      <a:tailEnd type="none" w="med" len="med"/>
+                    </a:lnR>
+                    <a:lnT w="12700" cap="flat" cmpd="sng" algn="ctr">
+                      <a:solidFill>
+                        <a:schemeClr val="tx1"/>
+                      </a:solidFill>
+                      <a:prstDash val="solid"/>
+                      <a:round/>
+                      <a:headEnd type="none" w="med" len="med"/>
+                      <a:tailEnd type="none" w="med" len="med"/>
+                    </a:lnT>
+                    <a:lnB w="12700" cap="flat" cmpd="sng" algn="ctr">
+                      <a:solidFill>
+                        <a:schemeClr val="tx1"/>
+                      </a:solidFill>
+                      <a:prstDash val="solid"/>
+                      <a:round/>
+                      <a:headEnd type="none" w="med" len="med"/>
+                      <a:tailEnd type="none" w="med" len="med"/>
+                    </a:lnB>
+                    <a:solidFill>
+                      <a:schemeClr val="bg1"/>
+                    </a:solidFill>
+                  </a:tcPr>
+                </a:tc>
+                <a:extLst>
+                  <a:ext uri="{0D108BD9-81ED-4DB2-BD59-A6C34878D82A}">
+                    <a16:rowId xmlns:a16="http://schemas.microsoft.com/office/drawing/2014/main" val="2990231026"/>
+                  </a:ext>
+                </a:extLst>
+              </a:tr>
+            </a:tbl>
+          </a:graphicData>
+        </a:graphic>
+      </p:graphicFrame>
+      <p:graphicFrame>
+        <p:nvGraphicFramePr>
+          <p:cNvPr id="4" name="표 3">
+            <a:extLst>
+              <a:ext uri="{FF2B5EF4-FFF2-40B4-BE49-F238E27FC236}">
+                <a16:creationId xmlns:a16="http://schemas.microsoft.com/office/drawing/2014/main" id="{7015AE86-E78D-2EC5-F218-E0ACF707DAD0}"/>
+              </a:ext>
+            </a:extLst>
+          </p:cNvPr>
+          <p:cNvGraphicFramePr>
+            <a:graphicFrameLocks noGrp="1"/>
+          </p:cNvGraphicFramePr>
+          <p:nvPr>
+            <p:extLst>
+              <p:ext uri="{D42A27DB-BD31-4B8C-83A1-F6EECF244321}">
+                <p14:modId xmlns:p14="http://schemas.microsoft.com/office/powerpoint/2010/main" val="2948787063"/>
+              </p:ext>
+            </p:extLst>
+          </p:nvPr>
+        </p:nvGraphicFramePr>
+        <p:xfrm>
+          <a:off x="9221188" y="826547"/>
+          <a:ext cx="2607296" cy="4813920"/>
+        </p:xfrm>
+        <a:graphic>
+          <a:graphicData uri="http://schemas.openxmlformats.org/drawingml/2006/table">
+            <a:tbl>
+              <a:tblPr firstRow="1" bandRow="1">
+                <a:tableStyleId>{5C22544A-7EE6-4342-B048-85BDC9FD1C3A}</a:tableStyleId>
+              </a:tblPr>
+              <a:tblGrid>
+                <a:gridCol w="324618">
+                  <a:extLst>
+                    <a:ext uri="{9D8B030D-6E8A-4147-A177-3AD203B41FA5}">
+                      <a16:colId xmlns:a16="http://schemas.microsoft.com/office/drawing/2014/main" val="3477001054"/>
+                    </a:ext>
+                  </a:extLst>
+                </a:gridCol>
+                <a:gridCol w="2282678">
+                  <a:extLst>
+                    <a:ext uri="{9D8B030D-6E8A-4147-A177-3AD203B41FA5}">
+                      <a16:colId xmlns:a16="http://schemas.microsoft.com/office/drawing/2014/main" val="2165713866"/>
+                    </a:ext>
+                  </a:extLst>
+                </a:gridCol>
+              </a:tblGrid>
+              <a:tr h="360000">
+                <a:tc gridSpan="2">
+                  <a:txBody>
+                    <a:bodyPr/>
+                    <a:lstStyle/>
+                    <a:p>
+                      <a:pPr algn="ctr" latinLnBrk="1"/>
+                      <a:r>
+                        <a:rPr lang="en-US" altLang="ko-KR" sz="1200">
+                          <a:solidFill>
+                            <a:schemeClr val="tx1"/>
+                          </a:solidFill>
+                        </a:rPr>
+                        <a:t>Description</a:t>
+                      </a:r>
+                      <a:endParaRPr lang="ko-KR" altLang="en-US" sz="1200">
+                        <a:solidFill>
+                          <a:schemeClr val="tx1"/>
+                        </a:solidFill>
+                      </a:endParaRPr>
+                    </a:p>
+                  </a:txBody>
+                  <a:tcPr anchor="ctr">
+                    <a:lnL w="12700" cap="flat" cmpd="sng" algn="ctr">
+                      <a:solidFill>
+                        <a:schemeClr val="tx1"/>
+                      </a:solidFill>
+                      <a:prstDash val="solid"/>
+                      <a:round/>
+                      <a:headEnd type="none" w="med" len="med"/>
+                      <a:tailEnd type="none" w="med" len="med"/>
+                    </a:lnL>
+                    <a:lnR w="12700" cap="flat" cmpd="sng" algn="ctr">
+                      <a:solidFill>
+                        <a:schemeClr val="tx1"/>
+                      </a:solidFill>
+                      <a:prstDash val="solid"/>
+                      <a:round/>
+                      <a:headEnd type="none" w="med" len="med"/>
+                      <a:tailEnd type="none" w="med" len="med"/>
+                    </a:lnR>
+                    <a:lnT w="12700" cap="flat" cmpd="sng" algn="ctr">
+                      <a:solidFill>
+                        <a:schemeClr val="tx1"/>
+                      </a:solidFill>
+                      <a:prstDash val="solid"/>
+                      <a:round/>
+                      <a:headEnd type="none" w="med" len="med"/>
+                      <a:tailEnd type="none" w="med" len="med"/>
+                    </a:lnT>
+                    <a:lnB w="12700" cap="flat" cmpd="sng" algn="ctr">
+                      <a:solidFill>
+                        <a:schemeClr val="tx1"/>
+                      </a:solidFill>
+                      <a:prstDash val="solid"/>
+                      <a:round/>
+                      <a:headEnd type="none" w="med" len="med"/>
+                      <a:tailEnd type="none" w="med" len="med"/>
+                    </a:lnB>
+                    <a:solidFill>
+                      <a:schemeClr val="bg1">
+                        <a:lumMod val="85000"/>
+                      </a:schemeClr>
+                    </a:solidFill>
+                  </a:tcPr>
+                </a:tc>
+                <a:tc hMerge="1">
+                  <a:txBody>
+                    <a:bodyPr/>
+                    <a:lstStyle/>
+                    <a:p>
+                      <a:pPr algn="ctr" latinLnBrk="1"/>
+                      <a:endParaRPr lang="ko-KR" altLang="en-US"/>
+                    </a:p>
+                  </a:txBody>
+                  <a:tcPr anchor="ctr"/>
+                </a:tc>
+                <a:extLst>
+                  <a:ext uri="{0D108BD9-81ED-4DB2-BD59-A6C34878D82A}">
+                    <a16:rowId xmlns:a16="http://schemas.microsoft.com/office/drawing/2014/main" val="1766262352"/>
+                  </a:ext>
+                </a:extLst>
+              </a:tr>
+              <a:tr h="612000">
+                <a:tc>
+                  <a:txBody>
+                    <a:bodyPr/>
+                    <a:lstStyle/>
+                    <a:p>
+                      <a:pPr algn="ctr" latinLnBrk="1"/>
+                      <a:r>
+                        <a:rPr lang="en-US" altLang="ko-KR" sz="1200"/>
+                        <a:t>1</a:t>
+                      </a:r>
+                      <a:endParaRPr lang="ko-KR" altLang="en-US" sz="1200"/>
+                    </a:p>
+                  </a:txBody>
+                  <a:tcPr>
+                    <a:lnL w="12700" cap="flat" cmpd="sng" algn="ctr">
+                      <a:solidFill>
+                        <a:schemeClr val="tx1"/>
+                      </a:solidFill>
+                      <a:prstDash val="solid"/>
+                      <a:round/>
+                      <a:headEnd type="none" w="med" len="med"/>
+                      <a:tailEnd type="none" w="med" len="med"/>
+                    </a:lnL>
+                    <a:lnR w="12700" cap="flat" cmpd="sng" algn="ctr">
+                      <a:solidFill>
+                        <a:schemeClr val="tx1"/>
+                      </a:solidFill>
+                      <a:prstDash val="solid"/>
+                      <a:round/>
+                      <a:headEnd type="none" w="med" len="med"/>
+                      <a:tailEnd type="none" w="med" len="med"/>
+                    </a:lnR>
+                    <a:lnT w="12700" cap="flat" cmpd="sng" algn="ctr">
+                      <a:solidFill>
+                        <a:schemeClr val="tx1"/>
+                      </a:solidFill>
+                      <a:prstDash val="solid"/>
+                      <a:round/>
+                      <a:headEnd type="none" w="med" len="med"/>
+                      <a:tailEnd type="none" w="med" len="med"/>
+                    </a:lnT>
+                    <a:lnB w="12700" cap="flat" cmpd="sng" algn="ctr">
+                      <a:solidFill>
+                        <a:schemeClr val="tx1"/>
+                      </a:solidFill>
+                      <a:prstDash val="solid"/>
+                      <a:round/>
+                      <a:headEnd type="none" w="med" len="med"/>
+                      <a:tailEnd type="none" w="med" len="med"/>
+                    </a:lnB>
+                    <a:solidFill>
+                      <a:schemeClr val="bg1"/>
+                    </a:solidFill>
+                  </a:tcPr>
+                </a:tc>
+                <a:tc>
+                  <a:txBody>
+                    <a:bodyPr/>
+                    <a:lstStyle/>
+                    <a:p>
+                      <a:pPr algn="l" latinLnBrk="1"/>
+                      <a:r>
+                        <a:rPr lang="ko-KR" altLang="en-US" sz="1200"/>
+                        <a:t>사용자 입력 데이터 저장 </a:t>
+                      </a:r>
+                      <a:r>
+                        <a:rPr lang="en-US" altLang="ko-KR" sz="1200"/>
+                        <a:t>ID</a:t>
+                      </a:r>
+                    </a:p>
+                    <a:p>
+                      <a:pPr algn="l" latinLnBrk="1"/>
+                      <a:r>
+                        <a:rPr lang="ko-KR" altLang="en-US" sz="1200"/>
+                        <a:t>상단 </a:t>
+                      </a:r>
+                      <a:r>
+                        <a:rPr lang="en-US" altLang="ko-KR" sz="1200"/>
+                        <a:t>Analysis ID</a:t>
+                      </a:r>
+                      <a:r>
+                        <a:rPr lang="ko-KR" altLang="en-US" sz="1200"/>
+                        <a:t>로 조회 가능</a:t>
+                      </a:r>
+                    </a:p>
+                  </a:txBody>
+                  <a:tcPr anchor="ctr">
+                    <a:lnL w="12700" cap="flat" cmpd="sng" algn="ctr">
+                      <a:solidFill>
+                        <a:schemeClr val="tx1"/>
+                      </a:solidFill>
+                      <a:prstDash val="solid"/>
+                      <a:round/>
+                      <a:headEnd type="none" w="med" len="med"/>
+                      <a:tailEnd type="none" w="med" len="med"/>
+                    </a:lnL>
+                    <a:lnR w="12700" cap="flat" cmpd="sng" algn="ctr">
+                      <a:solidFill>
+                        <a:schemeClr val="tx1"/>
+                      </a:solidFill>
+                      <a:prstDash val="solid"/>
+                      <a:round/>
+                      <a:headEnd type="none" w="med" len="med"/>
+                      <a:tailEnd type="none" w="med" len="med"/>
+                    </a:lnR>
+                    <a:lnT w="12700" cap="flat" cmpd="sng" algn="ctr">
+                      <a:solidFill>
+                        <a:schemeClr val="tx1"/>
+                      </a:solidFill>
+                      <a:prstDash val="solid"/>
+                      <a:round/>
+                      <a:headEnd type="none" w="med" len="med"/>
+                      <a:tailEnd type="none" w="med" len="med"/>
+                    </a:lnT>
+                    <a:lnB w="12700" cap="flat" cmpd="sng" algn="ctr">
+                      <a:solidFill>
+                        <a:schemeClr val="tx1"/>
+                      </a:solidFill>
+                      <a:prstDash val="solid"/>
+                      <a:round/>
+                      <a:headEnd type="none" w="med" len="med"/>
+                      <a:tailEnd type="none" w="med" len="med"/>
+                    </a:lnB>
+                    <a:solidFill>
+                      <a:schemeClr val="bg1"/>
+                    </a:solidFill>
+                  </a:tcPr>
+                </a:tc>
+                <a:extLst>
+                  <a:ext uri="{0D108BD9-81ED-4DB2-BD59-A6C34878D82A}">
+                    <a16:rowId xmlns:a16="http://schemas.microsoft.com/office/drawing/2014/main" val="3571744345"/>
+                  </a:ext>
+                </a:extLst>
+              </a:tr>
+              <a:tr h="612000">
+                <a:tc>
+                  <a:txBody>
+                    <a:bodyPr/>
+                    <a:lstStyle/>
+                    <a:p>
+                      <a:pPr algn="ctr" latinLnBrk="1"/>
+                      <a:r>
+                        <a:rPr lang="en-US" altLang="ko-KR" sz="1200"/>
+                        <a:t>2</a:t>
+                      </a:r>
+                      <a:endParaRPr lang="ko-KR" altLang="en-US" sz="1200"/>
+                    </a:p>
+                  </a:txBody>
+                  <a:tcPr>
+                    <a:lnL w="12700" cap="flat" cmpd="sng" algn="ctr">
+                      <a:solidFill>
+                        <a:schemeClr val="tx1"/>
+                      </a:solidFill>
+                      <a:prstDash val="solid"/>
+                      <a:round/>
+                      <a:headEnd type="none" w="med" len="med"/>
+                      <a:tailEnd type="none" w="med" len="med"/>
+                    </a:lnL>
+                    <a:lnR w="12700" cap="flat" cmpd="sng" algn="ctr">
+                      <a:solidFill>
+                        <a:schemeClr val="tx1"/>
+                      </a:solidFill>
+                      <a:prstDash val="solid"/>
+                      <a:round/>
+                      <a:headEnd type="none" w="med" len="med"/>
+                      <a:tailEnd type="none" w="med" len="med"/>
+                    </a:lnR>
+                    <a:lnT w="12700" cap="flat" cmpd="sng" algn="ctr">
+                      <a:solidFill>
+                        <a:schemeClr val="tx1"/>
+                      </a:solidFill>
+                      <a:prstDash val="solid"/>
+                      <a:round/>
+                      <a:headEnd type="none" w="med" len="med"/>
+                      <a:tailEnd type="none" w="med" len="med"/>
+                    </a:lnT>
+                    <a:lnB w="12700" cap="flat" cmpd="sng" algn="ctr">
+                      <a:solidFill>
+                        <a:schemeClr val="tx1"/>
+                      </a:solidFill>
+                      <a:prstDash val="solid"/>
+                      <a:round/>
+                      <a:headEnd type="none" w="med" len="med"/>
+                      <a:tailEnd type="none" w="med" len="med"/>
+                    </a:lnB>
+                    <a:solidFill>
+                      <a:schemeClr val="bg1"/>
+                    </a:solidFill>
+                  </a:tcPr>
+                </a:tc>
+                <a:tc>
+                  <a:txBody>
+                    <a:bodyPr/>
+                    <a:lstStyle/>
+                    <a:p>
+                      <a:pPr algn="l" latinLnBrk="1"/>
+                      <a:r>
+                        <a:rPr lang="ko-KR" altLang="en-US" sz="1200"/>
+                        <a:t>사용자 입력 데이터 예측 결과 그래프</a:t>
+                      </a:r>
+                      <a:endParaRPr lang="en-US" altLang="ko-KR" sz="1200"/>
+                    </a:p>
+                    <a:p>
+                      <a:pPr algn="l" latinLnBrk="1"/>
+                      <a:r>
+                        <a:rPr lang="en-US" altLang="ko-KR" sz="1200"/>
+                        <a:t>class0 – </a:t>
+                      </a:r>
+                      <a:r>
+                        <a:rPr lang="ko-KR" altLang="en-US" sz="1200"/>
+                        <a:t>정상</a:t>
+                      </a:r>
+                      <a:r>
+                        <a:rPr lang="en-US" altLang="ko-KR" sz="1200"/>
+                        <a:t>, class1 – </a:t>
+                      </a:r>
+                      <a:r>
+                        <a:rPr lang="ko-KR" altLang="en-US" sz="1200"/>
+                        <a:t>경계</a:t>
+                      </a:r>
+                      <a:r>
+                        <a:rPr lang="en-US" altLang="ko-KR" sz="1200"/>
+                        <a:t>, class2 - </a:t>
+                      </a:r>
+                      <a:r>
+                        <a:rPr lang="ko-KR" altLang="en-US" sz="1200"/>
+                        <a:t>위험</a:t>
+                      </a:r>
+                    </a:p>
+                  </a:txBody>
+                  <a:tcPr anchor="ctr">
+                    <a:lnL w="12700" cap="flat" cmpd="sng" algn="ctr">
+                      <a:solidFill>
+                        <a:schemeClr val="tx1"/>
+                      </a:solidFill>
+                      <a:prstDash val="solid"/>
+                      <a:round/>
+                      <a:headEnd type="none" w="med" len="med"/>
+                      <a:tailEnd type="none" w="med" len="med"/>
+                    </a:lnL>
+                    <a:lnR w="12700" cap="flat" cmpd="sng" algn="ctr">
+                      <a:solidFill>
+                        <a:schemeClr val="tx1"/>
+                      </a:solidFill>
+                      <a:prstDash val="solid"/>
+                      <a:round/>
+                      <a:headEnd type="none" w="med" len="med"/>
+                      <a:tailEnd type="none" w="med" len="med"/>
+                    </a:lnR>
+                    <a:lnT w="12700" cap="flat" cmpd="sng" algn="ctr">
+                      <a:solidFill>
+                        <a:schemeClr val="tx1"/>
+                      </a:solidFill>
+                      <a:prstDash val="solid"/>
+                      <a:round/>
+                      <a:headEnd type="none" w="med" len="med"/>
+                      <a:tailEnd type="none" w="med" len="med"/>
+                    </a:lnT>
+                    <a:lnB w="12700" cap="flat" cmpd="sng" algn="ctr">
+                      <a:solidFill>
+                        <a:schemeClr val="tx1"/>
+                      </a:solidFill>
+                      <a:prstDash val="solid"/>
+                      <a:round/>
+                      <a:headEnd type="none" w="med" len="med"/>
+                      <a:tailEnd type="none" w="med" len="med"/>
+                    </a:lnB>
+                    <a:solidFill>
+                      <a:schemeClr val="bg1"/>
+                    </a:solidFill>
+                  </a:tcPr>
+                </a:tc>
+                <a:extLst>
+                  <a:ext uri="{0D108BD9-81ED-4DB2-BD59-A6C34878D82A}">
+                    <a16:rowId xmlns:a16="http://schemas.microsoft.com/office/drawing/2014/main" val="2924856255"/>
+                  </a:ext>
+                </a:extLst>
+              </a:tr>
+              <a:tr h="612000">
+                <a:tc>
+                  <a:txBody>
+                    <a:bodyPr/>
+                    <a:lstStyle/>
+                    <a:p>
+                      <a:pPr algn="ctr" latinLnBrk="1"/>
+                      <a:r>
+                        <a:rPr lang="en-US" altLang="ko-KR" sz="1200"/>
+                        <a:t>3</a:t>
+                      </a:r>
+                      <a:endParaRPr lang="ko-KR" altLang="en-US" sz="1200"/>
+                    </a:p>
+                  </a:txBody>
+                  <a:tcPr>
+                    <a:lnL w="12700" cap="flat" cmpd="sng" algn="ctr">
+                      <a:solidFill>
+                        <a:schemeClr val="tx1"/>
+                      </a:solidFill>
+                      <a:prstDash val="solid"/>
+                      <a:round/>
+                      <a:headEnd type="none" w="med" len="med"/>
+                      <a:tailEnd type="none" w="med" len="med"/>
+                    </a:lnL>
+                    <a:lnR w="12700" cap="flat" cmpd="sng" algn="ctr">
+                      <a:solidFill>
+                        <a:schemeClr val="tx1"/>
+                      </a:solidFill>
+                      <a:prstDash val="solid"/>
+                      <a:round/>
+                      <a:headEnd type="none" w="med" len="med"/>
+                      <a:tailEnd type="none" w="med" len="med"/>
+                    </a:lnR>
+                    <a:lnT w="12700" cap="flat" cmpd="sng" algn="ctr">
+                      <a:solidFill>
+                        <a:schemeClr val="tx1"/>
+                      </a:solidFill>
+                      <a:prstDash val="solid"/>
+                      <a:round/>
+                      <a:headEnd type="none" w="med" len="med"/>
+                      <a:tailEnd type="none" w="med" len="med"/>
+                    </a:lnT>
+                    <a:lnB w="12700" cap="flat" cmpd="sng" algn="ctr">
+                      <a:solidFill>
+                        <a:schemeClr val="tx1"/>
+                      </a:solidFill>
+                      <a:prstDash val="solid"/>
+                      <a:round/>
+                      <a:headEnd type="none" w="med" len="med"/>
+                      <a:tailEnd type="none" w="med" len="med"/>
+                    </a:lnB>
+                    <a:solidFill>
+                      <a:schemeClr val="bg1"/>
+                    </a:solidFill>
+                  </a:tcPr>
+                </a:tc>
+                <a:tc>
+                  <a:txBody>
+                    <a:bodyPr/>
+                    <a:lstStyle/>
+                    <a:p>
+                      <a:pPr marL="0" marR="0" lvl="0" indent="0" algn="l" defTabSz="914400" rtl="0" eaLnBrk="1" fontAlgn="auto" latinLnBrk="1" hangingPunct="1">
+                        <a:lnSpc>
+                          <a:spcPct val="100000"/>
+                        </a:lnSpc>
+                        <a:spcBef>
+                          <a:spcPts val="0"/>
+                        </a:spcBef>
+                        <a:spcAft>
+                          <a:spcPts val="0"/>
+                        </a:spcAft>
+                        <a:buClrTx/>
+                        <a:buSzTx/>
+                        <a:buFontTx/>
+                        <a:buNone/>
+                        <a:tabLst/>
+                        <a:defRPr/>
+                      </a:pPr>
+                      <a:r>
+                        <a:rPr lang="ko-KR" altLang="en-US" sz="1200"/>
+                        <a:t>입력 데이터 수정</a:t>
+                      </a:r>
+                    </a:p>
+                  </a:txBody>
+                  <a:tcPr anchor="ctr">
+                    <a:lnL w="12700" cap="flat" cmpd="sng" algn="ctr">
+                      <a:solidFill>
+                        <a:schemeClr val="tx1"/>
+                      </a:solidFill>
+                      <a:prstDash val="solid"/>
+                      <a:round/>
+                      <a:headEnd type="none" w="med" len="med"/>
+                      <a:tailEnd type="none" w="med" len="med"/>
+                    </a:lnL>
+                    <a:lnR w="12700" cap="flat" cmpd="sng" algn="ctr">
+                      <a:solidFill>
+                        <a:schemeClr val="tx1"/>
+                      </a:solidFill>
+                      <a:prstDash val="solid"/>
+                      <a:round/>
+                      <a:headEnd type="none" w="med" len="med"/>
+                      <a:tailEnd type="none" w="med" len="med"/>
+                    </a:lnR>
+                    <a:lnT w="12700" cap="flat" cmpd="sng" algn="ctr">
+                      <a:solidFill>
+                        <a:schemeClr val="tx1"/>
+                      </a:solidFill>
+                      <a:prstDash val="solid"/>
+                      <a:round/>
+                      <a:headEnd type="none" w="med" len="med"/>
+                      <a:tailEnd type="none" w="med" len="med"/>
+                    </a:lnT>
+                    <a:lnB w="12700" cap="flat" cmpd="sng" algn="ctr">
+                      <a:solidFill>
+                        <a:schemeClr val="tx1"/>
+                      </a:solidFill>
+                      <a:prstDash val="solid"/>
+                      <a:round/>
+                      <a:headEnd type="none" w="med" len="med"/>
+                      <a:tailEnd type="none" w="med" len="med"/>
+                    </a:lnB>
+                    <a:solidFill>
+                      <a:schemeClr val="bg1"/>
+                    </a:solidFill>
+                  </a:tcPr>
+                </a:tc>
+                <a:extLst>
+                  <a:ext uri="{0D108BD9-81ED-4DB2-BD59-A6C34878D82A}">
+                    <a16:rowId xmlns:a16="http://schemas.microsoft.com/office/drawing/2014/main" val="1747494998"/>
+                  </a:ext>
+                </a:extLst>
+              </a:tr>
+              <a:tr h="612000">
+                <a:tc>
+                  <a:txBody>
+                    <a:bodyPr/>
+                    <a:lstStyle/>
+                    <a:p>
+                      <a:pPr algn="ctr" latinLnBrk="1"/>
+                      <a:r>
+                        <a:rPr lang="en-US" altLang="ko-KR" sz="1200"/>
+                        <a:t>4</a:t>
+                      </a:r>
+                      <a:endParaRPr lang="ko-KR" altLang="en-US" sz="1200"/>
+                    </a:p>
+                  </a:txBody>
+                  <a:tcPr>
+                    <a:lnL w="12700" cap="flat" cmpd="sng" algn="ctr">
+                      <a:solidFill>
+                        <a:schemeClr val="tx1"/>
+                      </a:solidFill>
+                      <a:prstDash val="solid"/>
+                      <a:round/>
+                      <a:headEnd type="none" w="med" len="med"/>
+                      <a:tailEnd type="none" w="med" len="med"/>
+                    </a:lnL>
+                    <a:lnR w="12700" cap="flat" cmpd="sng" algn="ctr">
+                      <a:solidFill>
+                        <a:schemeClr val="tx1"/>
+                      </a:solidFill>
+                      <a:prstDash val="solid"/>
+                      <a:round/>
+                      <a:headEnd type="none" w="med" len="med"/>
+                      <a:tailEnd type="none" w="med" len="med"/>
+                    </a:lnR>
+                    <a:lnT w="12700" cap="flat" cmpd="sng" algn="ctr">
+                      <a:solidFill>
+                        <a:schemeClr val="tx1"/>
+                      </a:solidFill>
+                      <a:prstDash val="solid"/>
+                      <a:round/>
+                      <a:headEnd type="none" w="med" len="med"/>
+                      <a:tailEnd type="none" w="med" len="med"/>
+                    </a:lnT>
+                    <a:lnB w="12700" cap="flat" cmpd="sng" algn="ctr">
+                      <a:solidFill>
+                        <a:schemeClr val="tx1"/>
+                      </a:solidFill>
+                      <a:prstDash val="solid"/>
+                      <a:round/>
+                      <a:headEnd type="none" w="med" len="med"/>
+                      <a:tailEnd type="none" w="med" len="med"/>
+                    </a:lnB>
+                    <a:solidFill>
+                      <a:schemeClr val="bg1"/>
+                    </a:solidFill>
+                  </a:tcPr>
+                </a:tc>
+                <a:tc>
+                  <a:txBody>
+                    <a:bodyPr/>
+                    <a:lstStyle/>
+                    <a:p>
+                      <a:pPr marL="0" marR="0" lvl="0" indent="0" algn="l" defTabSz="914400" rtl="0" eaLnBrk="1" fontAlgn="auto" latinLnBrk="1" hangingPunct="1">
+                        <a:lnSpc>
+                          <a:spcPct val="100000"/>
+                        </a:lnSpc>
+                        <a:spcBef>
+                          <a:spcPts val="0"/>
+                        </a:spcBef>
+                        <a:spcAft>
+                          <a:spcPts val="0"/>
+                        </a:spcAft>
+                        <a:buClrTx/>
+                        <a:buSzTx/>
+                        <a:buFontTx/>
+                        <a:buNone/>
+                        <a:tabLst/>
+                        <a:defRPr/>
+                      </a:pPr>
+                      <a:r>
+                        <a:rPr lang="ko-KR" altLang="en-US" sz="1200"/>
+                        <a:t>개별 영양소별 입력수치와 적정수치 비교 그래프</a:t>
+                      </a:r>
+                    </a:p>
+                  </a:txBody>
+                  <a:tcPr anchor="ctr">
+                    <a:lnL w="12700" cap="flat" cmpd="sng" algn="ctr">
+                      <a:solidFill>
+                        <a:schemeClr val="tx1"/>
+                      </a:solidFill>
+                      <a:prstDash val="solid"/>
+                      <a:round/>
+                      <a:headEnd type="none" w="med" len="med"/>
+                      <a:tailEnd type="none" w="med" len="med"/>
+                    </a:lnL>
+                    <a:lnR w="12700" cap="flat" cmpd="sng" algn="ctr">
+                      <a:solidFill>
+                        <a:schemeClr val="tx1"/>
+                      </a:solidFill>
+                      <a:prstDash val="solid"/>
+                      <a:round/>
+                      <a:headEnd type="none" w="med" len="med"/>
+                      <a:tailEnd type="none" w="med" len="med"/>
+                    </a:lnR>
+                    <a:lnT w="12700" cap="flat" cmpd="sng" algn="ctr">
+                      <a:solidFill>
+                        <a:schemeClr val="tx1"/>
+                      </a:solidFill>
+                      <a:prstDash val="solid"/>
+                      <a:round/>
+                      <a:headEnd type="none" w="med" len="med"/>
+                      <a:tailEnd type="none" w="med" len="med"/>
+                    </a:lnT>
+                    <a:lnB w="12700" cap="flat" cmpd="sng" algn="ctr">
+                      <a:solidFill>
+                        <a:schemeClr val="tx1"/>
+                      </a:solidFill>
+                      <a:prstDash val="solid"/>
+                      <a:round/>
+                      <a:headEnd type="none" w="med" len="med"/>
+                      <a:tailEnd type="none" w="med" len="med"/>
+                    </a:lnB>
+                    <a:solidFill>
+                      <a:schemeClr val="bg1"/>
+                    </a:solidFill>
+                  </a:tcPr>
+                </a:tc>
+                <a:extLst>
+                  <a:ext uri="{0D108BD9-81ED-4DB2-BD59-A6C34878D82A}">
+                    <a16:rowId xmlns:a16="http://schemas.microsoft.com/office/drawing/2014/main" val="1051244995"/>
+                  </a:ext>
+                </a:extLst>
+              </a:tr>
+              <a:tr h="612000">
+                <a:tc>
+                  <a:txBody>
+                    <a:bodyPr/>
+                    <a:lstStyle/>
+                    <a:p>
+                      <a:pPr algn="ctr" latinLnBrk="1"/>
+                      <a:r>
+                        <a:rPr lang="en-US" altLang="ko-KR" sz="1200"/>
+                        <a:t>5</a:t>
+                      </a:r>
+                      <a:endParaRPr lang="ko-KR" altLang="en-US" sz="1200"/>
+                    </a:p>
+                  </a:txBody>
+                  <a:tcPr>
+                    <a:lnL w="12700" cap="flat" cmpd="sng" algn="ctr">
+                      <a:solidFill>
+                        <a:schemeClr val="tx1"/>
+                      </a:solidFill>
+                      <a:prstDash val="solid"/>
+                      <a:round/>
+                      <a:headEnd type="none" w="med" len="med"/>
+                      <a:tailEnd type="none" w="med" len="med"/>
+                    </a:lnL>
+                    <a:lnR w="12700" cap="flat" cmpd="sng" algn="ctr">
+                      <a:solidFill>
+                        <a:schemeClr val="tx1"/>
+                      </a:solidFill>
+                      <a:prstDash val="solid"/>
+                      <a:round/>
+                      <a:headEnd type="none" w="med" len="med"/>
+                      <a:tailEnd type="none" w="med" len="med"/>
+                    </a:lnR>
+                    <a:lnT w="12700" cap="flat" cmpd="sng" algn="ctr">
+                      <a:solidFill>
+                        <a:schemeClr val="tx1"/>
+                      </a:solidFill>
+                      <a:prstDash val="solid"/>
+                      <a:round/>
+                      <a:headEnd type="none" w="med" len="med"/>
+                      <a:tailEnd type="none" w="med" len="med"/>
+                    </a:lnT>
+                    <a:lnB w="12700" cap="flat" cmpd="sng" algn="ctr">
+                      <a:solidFill>
+                        <a:schemeClr val="tx1"/>
+                      </a:solidFill>
+                      <a:prstDash val="solid"/>
+                      <a:round/>
+                      <a:headEnd type="none" w="med" len="med"/>
+                      <a:tailEnd type="none" w="med" len="med"/>
+                    </a:lnB>
+                    <a:solidFill>
+                      <a:schemeClr val="bg1"/>
+                    </a:solidFill>
+                  </a:tcPr>
+                </a:tc>
+                <a:tc>
+                  <a:txBody>
+                    <a:bodyPr/>
+                    <a:lstStyle/>
+                    <a:p>
+                      <a:pPr marL="0" marR="0" lvl="0" indent="0" algn="l" defTabSz="914400" rtl="0" eaLnBrk="1" fontAlgn="auto" latinLnBrk="1" hangingPunct="1">
+                        <a:lnSpc>
+                          <a:spcPct val="100000"/>
+                        </a:lnSpc>
+                        <a:spcBef>
+                          <a:spcPts val="0"/>
+                        </a:spcBef>
+                        <a:spcAft>
+                          <a:spcPts val="0"/>
+                        </a:spcAft>
+                        <a:buClrTx/>
+                        <a:buSzTx/>
+                        <a:buFontTx/>
+                        <a:buNone/>
+                        <a:tabLst/>
+                        <a:defRPr/>
+                      </a:pPr>
+                      <a:r>
+                        <a:rPr lang="ko-KR" altLang="en-US" sz="1200"/>
+                        <a:t>화살표를 눌러 다른 영양소 그래프 확인 가능</a:t>
+                      </a:r>
+                    </a:p>
+                  </a:txBody>
+                  <a:tcPr anchor="ctr">
+                    <a:lnL w="12700" cap="flat" cmpd="sng" algn="ctr">
+                      <a:solidFill>
+                        <a:schemeClr val="tx1"/>
+                      </a:solidFill>
+                      <a:prstDash val="solid"/>
+                      <a:round/>
+                      <a:headEnd type="none" w="med" len="med"/>
+                      <a:tailEnd type="none" w="med" len="med"/>
+                    </a:lnL>
+                    <a:lnR w="12700" cap="flat" cmpd="sng" algn="ctr">
+                      <a:solidFill>
+                        <a:schemeClr val="tx1"/>
+                      </a:solidFill>
+                      <a:prstDash val="solid"/>
+                      <a:round/>
+                      <a:headEnd type="none" w="med" len="med"/>
+                      <a:tailEnd type="none" w="med" len="med"/>
+                    </a:lnR>
+                    <a:lnT w="12700" cap="flat" cmpd="sng" algn="ctr">
+                      <a:solidFill>
+                        <a:schemeClr val="tx1"/>
+                      </a:solidFill>
+                      <a:prstDash val="solid"/>
+                      <a:round/>
+                      <a:headEnd type="none" w="med" len="med"/>
+                      <a:tailEnd type="none" w="med" len="med"/>
+                    </a:lnT>
+                    <a:lnB w="12700" cap="flat" cmpd="sng" algn="ctr">
+                      <a:solidFill>
+                        <a:schemeClr val="tx1"/>
+                      </a:solidFill>
+                      <a:prstDash val="solid"/>
+                      <a:round/>
+                      <a:headEnd type="none" w="med" len="med"/>
+                      <a:tailEnd type="none" w="med" len="med"/>
+                    </a:lnB>
+                    <a:solidFill>
+                      <a:schemeClr val="bg1"/>
+                    </a:solidFill>
+                  </a:tcPr>
+                </a:tc>
+                <a:extLst>
+                  <a:ext uri="{0D108BD9-81ED-4DB2-BD59-A6C34878D82A}">
+                    <a16:rowId xmlns:a16="http://schemas.microsoft.com/office/drawing/2014/main" val="2891091043"/>
+                  </a:ext>
+                </a:extLst>
+              </a:tr>
+              <a:tr h="360000">
+                <a:tc gridSpan="2">
+                  <a:txBody>
+                    <a:bodyPr/>
+                    <a:lstStyle/>
+                    <a:p>
+                      <a:pPr marL="0" marR="0" lvl="0" indent="0" algn="ctr" defTabSz="914400" rtl="0" eaLnBrk="1" fontAlgn="auto" latinLnBrk="1" hangingPunct="1">
+                        <a:lnSpc>
+                          <a:spcPct val="100000"/>
+                        </a:lnSpc>
+                        <a:spcBef>
+                          <a:spcPts val="0"/>
+                        </a:spcBef>
+                        <a:spcAft>
+                          <a:spcPts val="0"/>
+                        </a:spcAft>
+                        <a:buClrTx/>
+                        <a:buSzTx/>
+                        <a:buFontTx/>
+                        <a:buNone/>
+                        <a:tabLst/>
+                        <a:defRPr/>
+                      </a:pPr>
+                      <a:r>
+                        <a:rPr lang="en-US" altLang="ko-KR" sz="1200"/>
+                        <a:t>Check Point</a:t>
+                      </a:r>
+                    </a:p>
+                  </a:txBody>
+                  <a:tcPr anchor="ctr">
+                    <a:lnL w="12700" cap="flat" cmpd="sng" algn="ctr">
+                      <a:solidFill>
+                        <a:schemeClr val="tx1"/>
+                      </a:solidFill>
+                      <a:prstDash val="solid"/>
+                      <a:round/>
+                      <a:headEnd type="none" w="med" len="med"/>
+                      <a:tailEnd type="none" w="med" len="med"/>
+                    </a:lnL>
+                    <a:lnR w="12700" cap="flat" cmpd="sng" algn="ctr">
+                      <a:solidFill>
+                        <a:schemeClr val="tx1"/>
+                      </a:solidFill>
+                      <a:prstDash val="solid"/>
+                      <a:round/>
+                      <a:headEnd type="none" w="med" len="med"/>
+                      <a:tailEnd type="none" w="med" len="med"/>
+                    </a:lnR>
+                    <a:lnT w="12700" cap="flat" cmpd="sng" algn="ctr">
+                      <a:solidFill>
+                        <a:schemeClr val="tx1"/>
+                      </a:solidFill>
+                      <a:prstDash val="solid"/>
+                      <a:round/>
+                      <a:headEnd type="none" w="med" len="med"/>
+                      <a:tailEnd type="none" w="med" len="med"/>
+                    </a:lnT>
+                    <a:lnB w="12700" cap="flat" cmpd="sng" algn="ctr">
+                      <a:solidFill>
+                        <a:schemeClr val="tx1"/>
+                      </a:solidFill>
+                      <a:prstDash val="solid"/>
+                      <a:round/>
+                      <a:headEnd type="none" w="med" len="med"/>
+                      <a:tailEnd type="none" w="med" len="med"/>
+                    </a:lnB>
+                    <a:solidFill>
+                      <a:schemeClr val="bg1">
+                        <a:lumMod val="85000"/>
+                      </a:schemeClr>
+                    </a:solidFill>
+                  </a:tcPr>
+                </a:tc>
+                <a:tc hMerge="1">
+                  <a:txBody>
+                    <a:bodyPr/>
+                    <a:lstStyle/>
+                    <a:p>
+                      <a:pPr algn="l" latinLnBrk="1"/>
+                      <a:endParaRPr lang="ko-KR" altLang="en-US" sz="1200"/>
+                    </a:p>
+                  </a:txBody>
+                  <a:tcPr anchor="ctr">
+                    <a:lnL w="12700" cap="flat" cmpd="sng" algn="ctr">
+                      <a:solidFill>
+                        <a:schemeClr val="tx1"/>
+                      </a:solidFill>
+                      <a:prstDash val="solid"/>
+                      <a:round/>
+                      <a:headEnd type="none" w="med" len="med"/>
+                      <a:tailEnd type="none" w="med" len="med"/>
+                    </a:lnL>
+                    <a:lnR w="12700" cap="flat" cmpd="sng" algn="ctr">
+                      <a:solidFill>
+                        <a:schemeClr val="tx1"/>
+                      </a:solidFill>
+                      <a:prstDash val="solid"/>
+                      <a:round/>
+                      <a:headEnd type="none" w="med" len="med"/>
+                      <a:tailEnd type="none" w="med" len="med"/>
+                    </a:lnR>
+                    <a:lnT w="12700" cap="flat" cmpd="sng" algn="ctr">
+                      <a:solidFill>
+                        <a:schemeClr val="tx1"/>
+                      </a:solidFill>
+                      <a:prstDash val="solid"/>
+                      <a:round/>
+                      <a:headEnd type="none" w="med" len="med"/>
+                      <a:tailEnd type="none" w="med" len="med"/>
+                    </a:lnT>
+                    <a:lnB w="12700" cap="flat" cmpd="sng" algn="ctr">
+                      <a:solidFill>
+                        <a:schemeClr val="tx1"/>
+                      </a:solidFill>
+                      <a:prstDash val="solid"/>
+                      <a:round/>
+                      <a:headEnd type="none" w="med" len="med"/>
+                      <a:tailEnd type="none" w="med" len="med"/>
+                    </a:lnB>
+                    <a:solidFill>
+                      <a:schemeClr val="bg1"/>
+                    </a:solidFill>
+                  </a:tcPr>
+                </a:tc>
+                <a:extLst>
+                  <a:ext uri="{0D108BD9-81ED-4DB2-BD59-A6C34878D82A}">
+                    <a16:rowId xmlns:a16="http://schemas.microsoft.com/office/drawing/2014/main" val="2275643079"/>
+                  </a:ext>
+                </a:extLst>
+              </a:tr>
+              <a:tr h="612000">
+                <a:tc gridSpan="2">
+                  <a:txBody>
+                    <a:bodyPr/>
+                    <a:lstStyle/>
+                    <a:p>
+                      <a:pPr marL="0" marR="0" lvl="0" indent="0" algn="ctr" defTabSz="914400" rtl="0" eaLnBrk="1" fontAlgn="auto" latinLnBrk="1" hangingPunct="1">
+                        <a:lnSpc>
+                          <a:spcPct val="100000"/>
+                        </a:lnSpc>
+                        <a:spcBef>
+                          <a:spcPts val="0"/>
+                        </a:spcBef>
+                        <a:spcAft>
+                          <a:spcPts val="0"/>
+                        </a:spcAft>
+                        <a:buClrTx/>
+                        <a:buSzTx/>
+                        <a:buFontTx/>
+                        <a:buNone/>
+                        <a:tabLst/>
+                        <a:defRPr/>
+                      </a:pPr>
+                      <a:r>
+                        <a:rPr lang="ko-KR" altLang="en-US" sz="1200"/>
+                        <a:t>위에 </a:t>
+                      </a:r>
+                      <a:r>
+                        <a:rPr lang="en-US" altLang="ko-KR" sz="1200"/>
+                        <a:t>Look up, Predict</a:t>
+                      </a:r>
+                      <a:r>
+                        <a:rPr lang="ko-KR" altLang="en-US" sz="1200"/>
+                        <a:t>는 메인 페이지의 기능과 동일</a:t>
+                      </a:r>
+                    </a:p>
+                    <a:p>
+                      <a:pPr algn="ctr" latinLnBrk="1"/>
+                      <a:r>
+                        <a:rPr lang="ko-KR" altLang="en-US" sz="1200"/>
+                        <a:t>아래로 스크롤해 상세 데이터 확인 가능</a:t>
+                      </a:r>
+                    </a:p>
+                  </a:txBody>
+                  <a:tcPr>
+                    <a:lnL w="12700" cap="flat" cmpd="sng" algn="ctr">
+                      <a:solidFill>
+                        <a:schemeClr val="tx1"/>
+                      </a:solidFill>
+                      <a:prstDash val="solid"/>
+                      <a:round/>
+                      <a:headEnd type="none" w="med" len="med"/>
+                      <a:tailEnd type="none" w="med" len="med"/>
+                    </a:lnL>
+                    <a:lnR w="12700" cap="flat" cmpd="sng" algn="ctr">
+                      <a:solidFill>
+                        <a:schemeClr val="tx1"/>
+                      </a:solidFill>
+                      <a:prstDash val="solid"/>
+                      <a:round/>
+                      <a:headEnd type="none" w="med" len="med"/>
+                      <a:tailEnd type="none" w="med" len="med"/>
+                    </a:lnR>
+                    <a:lnT w="12700" cap="flat" cmpd="sng" algn="ctr">
+                      <a:solidFill>
+                        <a:schemeClr val="tx1"/>
+                      </a:solidFill>
+                      <a:prstDash val="solid"/>
+                      <a:round/>
+                      <a:headEnd type="none" w="med" len="med"/>
+                      <a:tailEnd type="none" w="med" len="med"/>
+                    </a:lnT>
+                    <a:lnB w="12700" cap="flat" cmpd="sng" algn="ctr">
+                      <a:solidFill>
+                        <a:schemeClr val="tx1"/>
+                      </a:solidFill>
+                      <a:prstDash val="solid"/>
+                      <a:round/>
+                      <a:headEnd type="none" w="med" len="med"/>
+                      <a:tailEnd type="none" w="med" len="med"/>
+                    </a:lnB>
+                    <a:solidFill>
+                      <a:schemeClr val="bg1"/>
+                    </a:solidFill>
+                  </a:tcPr>
+                </a:tc>
+                <a:tc hMerge="1">
+                  <a:txBody>
+                    <a:bodyPr/>
+                    <a:lstStyle/>
+                    <a:p>
+                      <a:pPr algn="l" latinLnBrk="1"/>
+                      <a:endParaRPr lang="ko-KR" altLang="en-US" sz="1200"/>
+                    </a:p>
+                  </a:txBody>
+                  <a:tcPr anchor="ctr">
+                    <a:lnL w="12700" cap="flat" cmpd="sng" algn="ctr">
+                      <a:solidFill>
+                        <a:schemeClr val="tx1"/>
+                      </a:solidFill>
+                      <a:prstDash val="solid"/>
+                      <a:round/>
+                      <a:headEnd type="none" w="med" len="med"/>
+                      <a:tailEnd type="none" w="med" len="med"/>
+                    </a:lnL>
+                    <a:lnR w="12700" cap="flat" cmpd="sng" algn="ctr">
+                      <a:solidFill>
+                        <a:schemeClr val="tx1"/>
+                      </a:solidFill>
+                      <a:prstDash val="solid"/>
+                      <a:round/>
+                      <a:headEnd type="none" w="med" len="med"/>
+                      <a:tailEnd type="none" w="med" len="med"/>
+                    </a:lnR>
+                    <a:lnT w="12700" cap="flat" cmpd="sng" algn="ctr">
+                      <a:solidFill>
+                        <a:schemeClr val="tx1"/>
+                      </a:solidFill>
+                      <a:prstDash val="solid"/>
+                      <a:round/>
+                      <a:headEnd type="none" w="med" len="med"/>
+                      <a:tailEnd type="none" w="med" len="med"/>
+                    </a:lnT>
+                    <a:lnB w="12700" cap="flat" cmpd="sng" algn="ctr">
+                      <a:solidFill>
+                        <a:schemeClr val="tx1"/>
+                      </a:solidFill>
+                      <a:prstDash val="solid"/>
+                      <a:round/>
+                      <a:headEnd type="none" w="med" len="med"/>
+                      <a:tailEnd type="none" w="med" len="med"/>
+                    </a:lnB>
+                    <a:solidFill>
+                      <a:schemeClr val="bg1"/>
+                    </a:solidFill>
+                  </a:tcPr>
+                </a:tc>
+                <a:extLst>
+                  <a:ext uri="{0D108BD9-81ED-4DB2-BD59-A6C34878D82A}">
+                    <a16:rowId xmlns:a16="http://schemas.microsoft.com/office/drawing/2014/main" val="1885486421"/>
+                  </a:ext>
+                </a:extLst>
+              </a:tr>
+            </a:tbl>
+          </a:graphicData>
+        </a:graphic>
+      </p:graphicFrame>
+      <p:sp>
+        <p:nvSpPr>
+          <p:cNvPr id="2" name="타원 1">
+            <a:extLst>
+              <a:ext uri="{FF2B5EF4-FFF2-40B4-BE49-F238E27FC236}">
+                <a16:creationId xmlns:a16="http://schemas.microsoft.com/office/drawing/2014/main" id="{CFA4621C-5EB8-811B-072B-A85ED9144CF2}"/>
+              </a:ext>
+            </a:extLst>
+          </p:cNvPr>
+          <p:cNvSpPr>
+            <a:spLocks noChangeAspect="1"/>
+          </p:cNvSpPr>
+          <p:nvPr/>
+        </p:nvSpPr>
+        <p:spPr>
+          <a:xfrm>
+            <a:off x="6218050" y="2823433"/>
+            <a:ext cx="324000" cy="324000"/>
+          </a:xfrm>
+          <a:prstGeom prst="ellipse">
+            <a:avLst/>
+          </a:prstGeom>
+          <a:solidFill>
+            <a:srgbClr val="C00000">
+              <a:alpha val="60000"/>
+            </a:srgbClr>
+          </a:solidFill>
+        </p:spPr>
+        <p:style>
+          <a:lnRef idx="2">
+            <a:schemeClr val="accent1">
+              <a:shade val="15000"/>
+            </a:schemeClr>
+          </a:lnRef>
+          <a:fillRef idx="1">
+            <a:schemeClr val="accent1"/>
+          </a:fillRef>
+          <a:effectRef idx="0">
+            <a:schemeClr val="accent1"/>
+          </a:effectRef>
+          <a:fontRef idx="minor">
+            <a:schemeClr val="lt1"/>
+          </a:fontRef>
+        </p:style>
+        <p:txBody>
+          <a:bodyPr rtlCol="0" anchor="ctr"/>
+          <a:lstStyle/>
+          <a:p>
+            <a:pPr algn="ctr"/>
+            <a:r>
+              <a:rPr lang="en-US" altLang="ko-KR" sz="2000">
+                <a:latin typeface="+mn-ea"/>
+              </a:rPr>
+              <a:t>2</a:t>
+            </a:r>
+            <a:endParaRPr lang="ko-KR" altLang="en-US" sz="2000">
+              <a:latin typeface="+mn-ea"/>
+            </a:endParaRPr>
+          </a:p>
+        </p:txBody>
+      </p:sp>
+      <p:sp>
+        <p:nvSpPr>
+          <p:cNvPr id="7" name="타원 6">
+            <a:extLst>
+              <a:ext uri="{FF2B5EF4-FFF2-40B4-BE49-F238E27FC236}">
+                <a16:creationId xmlns:a16="http://schemas.microsoft.com/office/drawing/2014/main" id="{6927301E-47D9-D7C6-EBF6-3EEBDCE32BE6}"/>
+              </a:ext>
+            </a:extLst>
+          </p:cNvPr>
+          <p:cNvSpPr>
+            <a:spLocks noChangeAspect="1"/>
+          </p:cNvSpPr>
+          <p:nvPr/>
+        </p:nvSpPr>
+        <p:spPr>
+          <a:xfrm>
+            <a:off x="962128" y="2424587"/>
+            <a:ext cx="324000" cy="324000"/>
+          </a:xfrm>
+          <a:prstGeom prst="ellipse">
+            <a:avLst/>
+          </a:prstGeom>
+          <a:solidFill>
+            <a:srgbClr val="C00000">
+              <a:alpha val="60000"/>
+            </a:srgbClr>
+          </a:solidFill>
+        </p:spPr>
+        <p:style>
+          <a:lnRef idx="2">
+            <a:schemeClr val="accent1">
+              <a:shade val="15000"/>
+            </a:schemeClr>
+          </a:lnRef>
+          <a:fillRef idx="1">
+            <a:schemeClr val="accent1"/>
+          </a:fillRef>
+          <a:effectRef idx="0">
+            <a:schemeClr val="accent1"/>
+          </a:effectRef>
+          <a:fontRef idx="minor">
+            <a:schemeClr val="lt1"/>
+          </a:fontRef>
+        </p:style>
+        <p:txBody>
+          <a:bodyPr rtlCol="0" anchor="ctr"/>
+          <a:lstStyle/>
+          <a:p>
+            <a:pPr algn="ctr"/>
+            <a:r>
+              <a:rPr lang="en-US" altLang="ko-KR" sz="2000">
+                <a:latin typeface="+mn-ea"/>
+              </a:rPr>
+              <a:t>1</a:t>
+            </a:r>
+            <a:endParaRPr lang="ko-KR" altLang="en-US" sz="2000">
+              <a:latin typeface="+mn-ea"/>
+            </a:endParaRPr>
+          </a:p>
+        </p:txBody>
+      </p:sp>
+      <p:sp>
+        <p:nvSpPr>
+          <p:cNvPr id="9" name="타원 8">
+            <a:extLst>
+              <a:ext uri="{FF2B5EF4-FFF2-40B4-BE49-F238E27FC236}">
+                <a16:creationId xmlns:a16="http://schemas.microsoft.com/office/drawing/2014/main" id="{D4E14AD0-C0F5-B974-6574-7EBB78BAB894}"/>
+              </a:ext>
+            </a:extLst>
+          </p:cNvPr>
+          <p:cNvSpPr>
+            <a:spLocks noChangeAspect="1"/>
+          </p:cNvSpPr>
+          <p:nvPr/>
+        </p:nvSpPr>
+        <p:spPr>
+          <a:xfrm>
+            <a:off x="962128" y="4699734"/>
+            <a:ext cx="324000" cy="324000"/>
+          </a:xfrm>
+          <a:prstGeom prst="ellipse">
+            <a:avLst/>
+          </a:prstGeom>
+          <a:solidFill>
+            <a:srgbClr val="C00000">
+              <a:alpha val="60000"/>
+            </a:srgbClr>
+          </a:solidFill>
+        </p:spPr>
+        <p:style>
+          <a:lnRef idx="2">
+            <a:schemeClr val="accent1">
+              <a:shade val="15000"/>
+            </a:schemeClr>
+          </a:lnRef>
+          <a:fillRef idx="1">
+            <a:schemeClr val="accent1"/>
+          </a:fillRef>
+          <a:effectRef idx="0">
+            <a:schemeClr val="accent1"/>
+          </a:effectRef>
+          <a:fontRef idx="minor">
+            <a:schemeClr val="lt1"/>
+          </a:fontRef>
+        </p:style>
+        <p:txBody>
+          <a:bodyPr rtlCol="0" anchor="ctr"/>
+          <a:lstStyle/>
+          <a:p>
+            <a:pPr algn="ctr"/>
+            <a:r>
+              <a:rPr lang="en-US" altLang="ko-KR" sz="2000">
+                <a:latin typeface="+mn-ea"/>
+              </a:rPr>
+              <a:t>4</a:t>
+            </a:r>
+            <a:endParaRPr lang="ko-KR" altLang="en-US" sz="2000">
+              <a:latin typeface="+mn-ea"/>
+            </a:endParaRPr>
+          </a:p>
+        </p:txBody>
+      </p:sp>
+      <p:sp>
+        <p:nvSpPr>
+          <p:cNvPr id="10" name="타원 9">
+            <a:extLst>
+              <a:ext uri="{FF2B5EF4-FFF2-40B4-BE49-F238E27FC236}">
+                <a16:creationId xmlns:a16="http://schemas.microsoft.com/office/drawing/2014/main" id="{38187DEF-3384-550D-8C48-ECFE9D1C26D8}"/>
+              </a:ext>
+            </a:extLst>
+          </p:cNvPr>
+          <p:cNvSpPr>
+            <a:spLocks noChangeAspect="1"/>
+          </p:cNvSpPr>
+          <p:nvPr/>
+        </p:nvSpPr>
+        <p:spPr>
+          <a:xfrm>
+            <a:off x="7308600" y="4293994"/>
+            <a:ext cx="324000" cy="324000"/>
+          </a:xfrm>
+          <a:prstGeom prst="ellipse">
+            <a:avLst/>
+          </a:prstGeom>
+          <a:solidFill>
+            <a:srgbClr val="C00000">
+              <a:alpha val="60000"/>
+            </a:srgbClr>
+          </a:solidFill>
+        </p:spPr>
+        <p:style>
+          <a:lnRef idx="2">
+            <a:schemeClr val="accent1">
+              <a:shade val="15000"/>
+            </a:schemeClr>
+          </a:lnRef>
+          <a:fillRef idx="1">
+            <a:schemeClr val="accent1"/>
+          </a:fillRef>
+          <a:effectRef idx="0">
+            <a:schemeClr val="accent1"/>
+          </a:effectRef>
+          <a:fontRef idx="minor">
+            <a:schemeClr val="lt1"/>
+          </a:fontRef>
+        </p:style>
+        <p:txBody>
+          <a:bodyPr rtlCol="0" anchor="ctr"/>
+          <a:lstStyle/>
+          <a:p>
+            <a:pPr algn="ctr"/>
+            <a:r>
+              <a:rPr lang="en-US" altLang="ko-KR" sz="2000">
+                <a:latin typeface="+mn-ea"/>
+              </a:rPr>
+              <a:t>5</a:t>
+            </a:r>
+            <a:endParaRPr lang="ko-KR" altLang="en-US" sz="2000">
+              <a:latin typeface="+mn-ea"/>
+            </a:endParaRPr>
+          </a:p>
+        </p:txBody>
+      </p:sp>
+      <p:sp>
+        <p:nvSpPr>
+          <p:cNvPr id="11" name="타원 10">
+            <a:extLst>
+              <a:ext uri="{FF2B5EF4-FFF2-40B4-BE49-F238E27FC236}">
+                <a16:creationId xmlns:a16="http://schemas.microsoft.com/office/drawing/2014/main" id="{455901E0-447B-8A52-8C8D-16645C03869B}"/>
+              </a:ext>
+            </a:extLst>
+          </p:cNvPr>
+          <p:cNvSpPr>
+            <a:spLocks noChangeAspect="1"/>
+          </p:cNvSpPr>
+          <p:nvPr/>
+        </p:nvSpPr>
+        <p:spPr>
+          <a:xfrm>
+            <a:off x="962128" y="3664602"/>
+            <a:ext cx="324000" cy="324000"/>
+          </a:xfrm>
+          <a:prstGeom prst="ellipse">
+            <a:avLst/>
+          </a:prstGeom>
+          <a:solidFill>
+            <a:srgbClr val="C00000">
+              <a:alpha val="60000"/>
+            </a:srgbClr>
+          </a:solidFill>
+        </p:spPr>
+        <p:style>
+          <a:lnRef idx="2">
+            <a:schemeClr val="accent1">
+              <a:shade val="15000"/>
+            </a:schemeClr>
+          </a:lnRef>
+          <a:fillRef idx="1">
+            <a:schemeClr val="accent1"/>
+          </a:fillRef>
+          <a:effectRef idx="0">
+            <a:schemeClr val="accent1"/>
+          </a:effectRef>
+          <a:fontRef idx="minor">
+            <a:schemeClr val="lt1"/>
+          </a:fontRef>
+        </p:style>
+        <p:txBody>
+          <a:bodyPr rtlCol="0" anchor="ctr"/>
+          <a:lstStyle/>
+          <a:p>
+            <a:pPr algn="ctr"/>
+            <a:r>
+              <a:rPr lang="en-US" altLang="ko-KR" sz="2000">
+                <a:latin typeface="+mn-ea"/>
+              </a:rPr>
+              <a:t>3</a:t>
+            </a:r>
+            <a:endParaRPr lang="ko-KR" altLang="en-US" sz="2000">
+              <a:latin typeface="+mn-ea"/>
+            </a:endParaRPr>
+          </a:p>
+        </p:txBody>
+      </p:sp>
+    </p:spTree>
+    <p:extLst>
+      <p:ext uri="{BB962C8B-B14F-4D97-AF65-F5344CB8AC3E}">
+        <p14:creationId xmlns:p14="http://schemas.microsoft.com/office/powerpoint/2010/main" val="710167497"/>
+      </p:ext>
+    </p:extLst>
+  </p:cSld>
+  <p:clrMapOvr>
+    <a:masterClrMapping/>
+  </p:clrMapOvr>
+</p:sld>
+</file>
+
+<file path=ppt/slides/slide6.xml><?xml version="1.0" encoding="utf-8"?>
+<p:sld xmlns:a="http://schemas.openxmlformats.org/drawingml/2006/main" xmlns:r="http://schemas.openxmlformats.org/officeDocument/2006/relationships" xmlns:p="http://schemas.openxmlformats.org/presentationml/2006/main">
+  <p:cSld>
+    <p:spTree>
+      <p:nvGrpSpPr>
+        <p:cNvPr id="1" name=""/>
+        <p:cNvGrpSpPr/>
+        <p:nvPr/>
+      </p:nvGrpSpPr>
+      <p:grpSpPr>
+        <a:xfrm>
+          <a:off x="0" y="0"/>
+          <a:ext cx="0" cy="0"/>
+          <a:chOff x="0" y="0"/>
+          <a:chExt cx="0" cy="0"/>
+        </a:xfrm>
+      </p:grpSpPr>
+      <p:pic>
+        <p:nvPicPr>
+          <p:cNvPr id="6" name="그림 5" descr="텍스트, 스크린샷, 번호, 소프트웨어이(가) 표시된 사진&#10;&#10;AI가 생성한 콘텐츠는 부정확할 수 있습니다.">
+            <a:extLst>
+              <a:ext uri="{FF2B5EF4-FFF2-40B4-BE49-F238E27FC236}">
+                <a16:creationId xmlns:a16="http://schemas.microsoft.com/office/drawing/2014/main" id="{51D1F5B9-061A-6022-67AB-BF36CA686AC8}"/>
+              </a:ext>
+            </a:extLst>
+          </p:cNvPr>
+          <p:cNvPicPr>
+            <a:picLocks noChangeAspect="1"/>
+          </p:cNvPicPr>
+          <p:nvPr/>
+        </p:nvPicPr>
+        <p:blipFill>
+          <a:blip r:embed="rId2">
+            <a:extLst>
+              <a:ext uri="{28A0092B-C50C-407E-A947-70E740481C1C}">
+                <a14:useLocalDpi xmlns:a14="http://schemas.microsoft.com/office/drawing/2010/main" val="0"/>
+              </a:ext>
+            </a:extLst>
+          </a:blip>
+          <a:stretch>
+            <a:fillRect/>
+          </a:stretch>
+        </p:blipFill>
+        <p:spPr>
+          <a:xfrm>
+            <a:off x="363516" y="1753189"/>
+            <a:ext cx="8640000" cy="4861428"/>
+          </a:xfrm>
+          <a:prstGeom prst="rect">
+            <a:avLst/>
+          </a:prstGeom>
+        </p:spPr>
+      </p:pic>
+      <p:graphicFrame>
+        <p:nvGraphicFramePr>
+          <p:cNvPr id="5" name="표 4">
+            <a:extLst>
+              <a:ext uri="{FF2B5EF4-FFF2-40B4-BE49-F238E27FC236}">
+                <a16:creationId xmlns:a16="http://schemas.microsoft.com/office/drawing/2014/main" id="{E4817D6E-D20C-C517-A1A7-CE0B0E88C4D8}"/>
+              </a:ext>
+            </a:extLst>
+          </p:cNvPr>
+          <p:cNvGraphicFramePr>
+            <a:graphicFrameLocks noGrp="1"/>
+          </p:cNvGraphicFramePr>
+          <p:nvPr>
+            <p:extLst>
+              <p:ext uri="{D42A27DB-BD31-4B8C-83A1-F6EECF244321}">
+                <p14:modId xmlns:p14="http://schemas.microsoft.com/office/powerpoint/2010/main" val="2744838499"/>
+              </p:ext>
+            </p:extLst>
+          </p:nvPr>
+        </p:nvGraphicFramePr>
+        <p:xfrm>
+          <a:off x="363516" y="826547"/>
+          <a:ext cx="8640000" cy="715655"/>
+        </p:xfrm>
+        <a:graphic>
+          <a:graphicData uri="http://schemas.openxmlformats.org/drawingml/2006/table">
+            <a:tbl>
+              <a:tblPr firstRow="1" bandRow="1">
+                <a:tableStyleId>{5C22544A-7EE6-4342-B048-85BDC9FD1C3A}</a:tableStyleId>
+              </a:tblPr>
+              <a:tblGrid>
+                <a:gridCol w="1080000">
+                  <a:extLst>
+                    <a:ext uri="{9D8B030D-6E8A-4147-A177-3AD203B41FA5}">
+                      <a16:colId xmlns:a16="http://schemas.microsoft.com/office/drawing/2014/main" val="3504761122"/>
+                    </a:ext>
+                  </a:extLst>
+                </a:gridCol>
+                <a:gridCol w="1080000">
+                  <a:extLst>
+                    <a:ext uri="{9D8B030D-6E8A-4147-A177-3AD203B41FA5}">
+                      <a16:colId xmlns:a16="http://schemas.microsoft.com/office/drawing/2014/main" val="781226076"/>
+                    </a:ext>
+                  </a:extLst>
+                </a:gridCol>
+                <a:gridCol w="1080000">
+                  <a:extLst>
+                    <a:ext uri="{9D8B030D-6E8A-4147-A177-3AD203B41FA5}">
+                      <a16:colId xmlns:a16="http://schemas.microsoft.com/office/drawing/2014/main" val="3215577780"/>
+                    </a:ext>
+                  </a:extLst>
+                </a:gridCol>
+                <a:gridCol w="1080000">
+                  <a:extLst>
+                    <a:ext uri="{9D8B030D-6E8A-4147-A177-3AD203B41FA5}">
+                      <a16:colId xmlns:a16="http://schemas.microsoft.com/office/drawing/2014/main" val="1629845088"/>
+                    </a:ext>
+                  </a:extLst>
+                </a:gridCol>
+                <a:gridCol w="1080000">
+                  <a:extLst>
+                    <a:ext uri="{9D8B030D-6E8A-4147-A177-3AD203B41FA5}">
+                      <a16:colId xmlns:a16="http://schemas.microsoft.com/office/drawing/2014/main" val="3366529467"/>
+                    </a:ext>
+                  </a:extLst>
+                </a:gridCol>
+                <a:gridCol w="1080000">
+                  <a:extLst>
+                    <a:ext uri="{9D8B030D-6E8A-4147-A177-3AD203B41FA5}">
+                      <a16:colId xmlns:a16="http://schemas.microsoft.com/office/drawing/2014/main" val="2217245399"/>
+                    </a:ext>
+                  </a:extLst>
+                </a:gridCol>
+                <a:gridCol w="1080000">
+                  <a:extLst>
+                    <a:ext uri="{9D8B030D-6E8A-4147-A177-3AD203B41FA5}">
+                      <a16:colId xmlns:a16="http://schemas.microsoft.com/office/drawing/2014/main" val="4110027502"/>
+                    </a:ext>
+                  </a:extLst>
+                </a:gridCol>
+                <a:gridCol w="1080000">
+                  <a:extLst>
+                    <a:ext uri="{9D8B030D-6E8A-4147-A177-3AD203B41FA5}">
+                      <a16:colId xmlns:a16="http://schemas.microsoft.com/office/drawing/2014/main" val="3428513352"/>
+                    </a:ext>
+                  </a:extLst>
+                </a:gridCol>
+              </a:tblGrid>
+              <a:tr h="360000">
+                <a:tc>
+                  <a:txBody>
+                    <a:bodyPr/>
+                    <a:lstStyle/>
+                    <a:p>
+                      <a:pPr algn="l" latinLnBrk="1"/>
+                      <a:r>
+                        <a:rPr lang="en-US" altLang="ko-KR" sz="1200" b="1">
+                          <a:solidFill>
+                            <a:schemeClr val="tx1"/>
+                          </a:solidFill>
+                          <a:latin typeface="+mn-ea"/>
+                          <a:ea typeface="+mn-ea"/>
+                        </a:rPr>
+                        <a:t>Page Title</a:t>
+                      </a:r>
+                      <a:endParaRPr lang="ko-KR" altLang="en-US" sz="1200" b="1">
+                        <a:solidFill>
+                          <a:schemeClr val="tx1"/>
+                        </a:solidFill>
+                        <a:latin typeface="+mn-ea"/>
+                        <a:ea typeface="+mn-ea"/>
+                      </a:endParaRPr>
+                    </a:p>
+                  </a:txBody>
+                  <a:tcPr anchor="ctr">
+                    <a:lnL w="12700" cap="flat" cmpd="sng" algn="ctr">
+                      <a:solidFill>
+                        <a:schemeClr val="tx1"/>
+                      </a:solidFill>
+                      <a:prstDash val="solid"/>
+                      <a:round/>
+                      <a:headEnd type="none" w="med" len="med"/>
+                      <a:tailEnd type="none" w="med" len="med"/>
+                    </a:lnL>
+                    <a:lnR w="12700" cap="flat" cmpd="sng" algn="ctr">
+                      <a:solidFill>
+                        <a:schemeClr val="tx1"/>
+                      </a:solidFill>
+                      <a:prstDash val="solid"/>
+                      <a:round/>
+                      <a:headEnd type="none" w="med" len="med"/>
+                      <a:tailEnd type="none" w="med" len="med"/>
+                    </a:lnR>
+                    <a:lnT w="12700" cap="flat" cmpd="sng" algn="ctr">
+                      <a:solidFill>
+                        <a:schemeClr val="tx1"/>
+                      </a:solidFill>
+                      <a:prstDash val="solid"/>
+                      <a:round/>
+                      <a:headEnd type="none" w="med" len="med"/>
+                      <a:tailEnd type="none" w="med" len="med"/>
+                    </a:lnT>
+                    <a:lnB w="12700" cap="flat" cmpd="sng" algn="ctr">
+                      <a:solidFill>
+                        <a:schemeClr val="tx1"/>
+                      </a:solidFill>
+                      <a:prstDash val="solid"/>
+                      <a:round/>
+                      <a:headEnd type="none" w="med" len="med"/>
+                      <a:tailEnd type="none" w="med" len="med"/>
+                    </a:lnB>
+                    <a:solidFill>
+                      <a:schemeClr val="bg1">
+                        <a:lumMod val="85000"/>
+                      </a:schemeClr>
+                    </a:solidFill>
+                  </a:tcPr>
+                </a:tc>
+                <a:tc>
+                  <a:txBody>
+                    <a:bodyPr/>
+                    <a:lstStyle/>
+                    <a:p>
+                      <a:pPr algn="l" latinLnBrk="1"/>
+                      <a:r>
+                        <a:rPr lang="en-US" altLang="ko-KR" sz="1200" b="0">
+                          <a:solidFill>
+                            <a:schemeClr val="tx1"/>
+                          </a:solidFill>
+                          <a:latin typeface="+mn-ea"/>
+                          <a:ea typeface="+mn-ea"/>
+                        </a:rPr>
+                        <a:t>Result</a:t>
+                      </a:r>
+                      <a:endParaRPr lang="ko-KR" altLang="en-US" sz="1200" b="0">
+                        <a:solidFill>
+                          <a:schemeClr val="tx1"/>
+                        </a:solidFill>
+                        <a:latin typeface="+mn-ea"/>
+                        <a:ea typeface="+mn-ea"/>
+                      </a:endParaRPr>
+                    </a:p>
+                  </a:txBody>
+                  <a:tcPr anchor="ctr">
+                    <a:lnL w="12700" cap="flat" cmpd="sng" algn="ctr">
+                      <a:solidFill>
+                        <a:schemeClr val="tx1"/>
+                      </a:solidFill>
+                      <a:prstDash val="solid"/>
+                      <a:round/>
+                      <a:headEnd type="none" w="med" len="med"/>
+                      <a:tailEnd type="none" w="med" len="med"/>
+                    </a:lnL>
+                    <a:lnR w="12700" cap="flat" cmpd="sng" algn="ctr">
+                      <a:solidFill>
+                        <a:schemeClr val="tx1"/>
+                      </a:solidFill>
+                      <a:prstDash val="solid"/>
+                      <a:round/>
+                      <a:headEnd type="none" w="med" len="med"/>
+                      <a:tailEnd type="none" w="med" len="med"/>
+                    </a:lnR>
+                    <a:lnT w="12700" cap="flat" cmpd="sng" algn="ctr">
+                      <a:solidFill>
+                        <a:schemeClr val="tx1"/>
+                      </a:solidFill>
+                      <a:prstDash val="solid"/>
+                      <a:round/>
+                      <a:headEnd type="none" w="med" len="med"/>
+                      <a:tailEnd type="none" w="med" len="med"/>
+                    </a:lnT>
+                    <a:lnB w="12700" cap="flat" cmpd="sng" algn="ctr">
+                      <a:solidFill>
+                        <a:schemeClr val="tx1"/>
+                      </a:solidFill>
+                      <a:prstDash val="solid"/>
+                      <a:round/>
+                      <a:headEnd type="none" w="med" len="med"/>
+                      <a:tailEnd type="none" w="med" len="med"/>
+                    </a:lnB>
+                    <a:solidFill>
+                      <a:schemeClr val="bg1"/>
+                    </a:solidFill>
+                  </a:tcPr>
+                </a:tc>
+                <a:tc>
+                  <a:txBody>
+                    <a:bodyPr/>
+                    <a:lstStyle/>
+                    <a:p>
+                      <a:pPr algn="l" latinLnBrk="1"/>
+                      <a:r>
+                        <a:rPr lang="en-US" altLang="ko-KR" sz="1200" b="1">
+                          <a:solidFill>
+                            <a:schemeClr val="tx1"/>
+                          </a:solidFill>
+                          <a:latin typeface="+mn-ea"/>
+                          <a:ea typeface="+mn-ea"/>
+                        </a:rPr>
+                        <a:t>Screen ID</a:t>
+                      </a:r>
+                      <a:endParaRPr lang="ko-KR" altLang="en-US" sz="1200" b="1">
+                        <a:solidFill>
+                          <a:schemeClr val="tx1"/>
+                        </a:solidFill>
+                        <a:latin typeface="+mn-ea"/>
+                        <a:ea typeface="+mn-ea"/>
+                      </a:endParaRPr>
+                    </a:p>
+                  </a:txBody>
+                  <a:tcPr anchor="ctr">
+                    <a:lnL w="12700" cap="flat" cmpd="sng" algn="ctr">
+                      <a:solidFill>
+                        <a:schemeClr val="tx1"/>
+                      </a:solidFill>
+                      <a:prstDash val="solid"/>
+                      <a:round/>
+                      <a:headEnd type="none" w="med" len="med"/>
+                      <a:tailEnd type="none" w="med" len="med"/>
+                    </a:lnL>
+                    <a:lnR w="12700" cap="flat" cmpd="sng" algn="ctr">
+                      <a:solidFill>
+                        <a:schemeClr val="tx1"/>
+                      </a:solidFill>
+                      <a:prstDash val="solid"/>
+                      <a:round/>
+                      <a:headEnd type="none" w="med" len="med"/>
+                      <a:tailEnd type="none" w="med" len="med"/>
+                    </a:lnR>
+                    <a:lnT w="12700" cap="flat" cmpd="sng" algn="ctr">
+                      <a:solidFill>
+                        <a:schemeClr val="tx1"/>
+                      </a:solidFill>
+                      <a:prstDash val="solid"/>
+                      <a:round/>
+                      <a:headEnd type="none" w="med" len="med"/>
+                      <a:tailEnd type="none" w="med" len="med"/>
+                    </a:lnT>
+                    <a:lnB w="12700" cap="flat" cmpd="sng" algn="ctr">
+                      <a:solidFill>
+                        <a:schemeClr val="tx1"/>
+                      </a:solidFill>
+                      <a:prstDash val="solid"/>
+                      <a:round/>
+                      <a:headEnd type="none" w="med" len="med"/>
+                      <a:tailEnd type="none" w="med" len="med"/>
+                    </a:lnB>
+                    <a:solidFill>
+                      <a:schemeClr val="bg1">
+                        <a:lumMod val="85000"/>
+                      </a:schemeClr>
+                    </a:solidFill>
+                  </a:tcPr>
+                </a:tc>
+                <a:tc>
+                  <a:txBody>
+                    <a:bodyPr/>
+                    <a:lstStyle/>
+                    <a:p>
+                      <a:pPr algn="l" latinLnBrk="1"/>
+                      <a:r>
+                        <a:rPr lang="en-US" altLang="ko-KR" sz="1200" b="0">
+                          <a:solidFill>
+                            <a:schemeClr val="tx1"/>
+                          </a:solidFill>
+                          <a:latin typeface="+mn-ea"/>
+                          <a:ea typeface="+mn-ea"/>
+                        </a:rPr>
+                        <a:t>UI-result_2</a:t>
+                      </a:r>
+                      <a:endParaRPr lang="ko-KR" altLang="en-US" sz="1200" b="0">
+                        <a:solidFill>
+                          <a:schemeClr val="tx1"/>
+                        </a:solidFill>
+                        <a:latin typeface="+mn-ea"/>
+                        <a:ea typeface="+mn-ea"/>
+                      </a:endParaRPr>
+                    </a:p>
+                  </a:txBody>
+                  <a:tcPr anchor="ctr">
+                    <a:lnL w="12700" cap="flat" cmpd="sng" algn="ctr">
+                      <a:solidFill>
+                        <a:schemeClr val="tx1"/>
+                      </a:solidFill>
+                      <a:prstDash val="solid"/>
+                      <a:round/>
+                      <a:headEnd type="none" w="med" len="med"/>
+                      <a:tailEnd type="none" w="med" len="med"/>
+                    </a:lnL>
+                    <a:lnR w="12700" cap="flat" cmpd="sng" algn="ctr">
+                      <a:solidFill>
+                        <a:schemeClr val="tx1"/>
+                      </a:solidFill>
+                      <a:prstDash val="solid"/>
+                      <a:round/>
+                      <a:headEnd type="none" w="med" len="med"/>
+                      <a:tailEnd type="none" w="med" len="med"/>
+                    </a:lnR>
+                    <a:lnT w="12700" cap="flat" cmpd="sng" algn="ctr">
+                      <a:solidFill>
+                        <a:schemeClr val="tx1"/>
+                      </a:solidFill>
+                      <a:prstDash val="solid"/>
+                      <a:round/>
+                      <a:headEnd type="none" w="med" len="med"/>
+                      <a:tailEnd type="none" w="med" len="med"/>
+                    </a:lnT>
+                    <a:lnB w="12700" cap="flat" cmpd="sng" algn="ctr">
+                      <a:solidFill>
+                        <a:schemeClr val="tx1"/>
+                      </a:solidFill>
+                      <a:prstDash val="solid"/>
+                      <a:round/>
+                      <a:headEnd type="none" w="med" len="med"/>
+                      <a:tailEnd type="none" w="med" len="med"/>
+                    </a:lnB>
+                    <a:solidFill>
+                      <a:schemeClr val="bg1"/>
+                    </a:solidFill>
+                  </a:tcPr>
+                </a:tc>
+                <a:tc>
+                  <a:txBody>
+                    <a:bodyPr/>
+                    <a:lstStyle/>
+                    <a:p>
+                      <a:pPr algn="l" latinLnBrk="1"/>
+                      <a:r>
+                        <a:rPr lang="en-US" altLang="ko-KR" sz="1200" b="1">
+                          <a:solidFill>
+                            <a:schemeClr val="tx1"/>
+                          </a:solidFill>
+                          <a:latin typeface="+mn-ea"/>
+                          <a:ea typeface="+mn-ea"/>
+                        </a:rPr>
+                        <a:t>Author</a:t>
+                      </a:r>
+                      <a:endParaRPr lang="ko-KR" altLang="en-US" sz="1200" b="1">
+                        <a:solidFill>
+                          <a:schemeClr val="tx1"/>
+                        </a:solidFill>
+                        <a:latin typeface="+mn-ea"/>
+                        <a:ea typeface="+mn-ea"/>
+                      </a:endParaRPr>
+                    </a:p>
+                  </a:txBody>
+                  <a:tcPr anchor="ctr">
+                    <a:lnL w="12700" cap="flat" cmpd="sng" algn="ctr">
+                      <a:solidFill>
+                        <a:schemeClr val="tx1"/>
+                      </a:solidFill>
+                      <a:prstDash val="solid"/>
+                      <a:round/>
+                      <a:headEnd type="none" w="med" len="med"/>
+                      <a:tailEnd type="none" w="med" len="med"/>
+                    </a:lnL>
+                    <a:lnR w="12700" cap="flat" cmpd="sng" algn="ctr">
+                      <a:solidFill>
+                        <a:schemeClr val="tx1"/>
+                      </a:solidFill>
+                      <a:prstDash val="solid"/>
+                      <a:round/>
+                      <a:headEnd type="none" w="med" len="med"/>
+                      <a:tailEnd type="none" w="med" len="med"/>
+                    </a:lnR>
+                    <a:lnT w="12700" cap="flat" cmpd="sng" algn="ctr">
+                      <a:solidFill>
+                        <a:schemeClr val="tx1"/>
+                      </a:solidFill>
+                      <a:prstDash val="solid"/>
+                      <a:round/>
+                      <a:headEnd type="none" w="med" len="med"/>
+                      <a:tailEnd type="none" w="med" len="med"/>
+                    </a:lnT>
+                    <a:lnB w="12700" cap="flat" cmpd="sng" algn="ctr">
+                      <a:solidFill>
+                        <a:schemeClr val="tx1"/>
+                      </a:solidFill>
+                      <a:prstDash val="solid"/>
+                      <a:round/>
+                      <a:headEnd type="none" w="med" len="med"/>
+                      <a:tailEnd type="none" w="med" len="med"/>
+                    </a:lnB>
+                    <a:solidFill>
+                      <a:schemeClr val="bg1">
+                        <a:lumMod val="85000"/>
+                      </a:schemeClr>
+                    </a:solidFill>
+                  </a:tcPr>
+                </a:tc>
+                <a:tc>
+                  <a:txBody>
+                    <a:bodyPr/>
+                    <a:lstStyle/>
+                    <a:p>
+                      <a:pPr algn="l" latinLnBrk="1"/>
+                      <a:r>
+                        <a:rPr lang="ko-KR" altLang="en-US" sz="1200" b="0">
+                          <a:solidFill>
+                            <a:schemeClr val="tx1"/>
+                          </a:solidFill>
+                          <a:latin typeface="+mn-ea"/>
+                          <a:ea typeface="+mn-ea"/>
+                        </a:rPr>
+                        <a:t>이승찬</a:t>
+                      </a:r>
+                    </a:p>
+                  </a:txBody>
+                  <a:tcPr anchor="ctr">
+                    <a:lnL w="12700" cap="flat" cmpd="sng" algn="ctr">
+                      <a:solidFill>
+                        <a:schemeClr val="tx1"/>
+                      </a:solidFill>
+                      <a:prstDash val="solid"/>
+                      <a:round/>
+                      <a:headEnd type="none" w="med" len="med"/>
+                      <a:tailEnd type="none" w="med" len="med"/>
+                    </a:lnL>
+                    <a:lnR w="12700" cap="flat" cmpd="sng" algn="ctr">
+                      <a:solidFill>
+                        <a:schemeClr val="tx1"/>
+                      </a:solidFill>
+                      <a:prstDash val="solid"/>
+                      <a:round/>
+                      <a:headEnd type="none" w="med" len="med"/>
+                      <a:tailEnd type="none" w="med" len="med"/>
+                    </a:lnR>
+                    <a:lnT w="12700" cap="flat" cmpd="sng" algn="ctr">
+                      <a:solidFill>
+                        <a:schemeClr val="tx1"/>
+                      </a:solidFill>
+                      <a:prstDash val="solid"/>
+                      <a:round/>
+                      <a:headEnd type="none" w="med" len="med"/>
+                      <a:tailEnd type="none" w="med" len="med"/>
+                    </a:lnT>
+                    <a:lnB w="12700" cap="flat" cmpd="sng" algn="ctr">
+                      <a:solidFill>
+                        <a:schemeClr val="tx1"/>
+                      </a:solidFill>
+                      <a:prstDash val="solid"/>
+                      <a:round/>
+                      <a:headEnd type="none" w="med" len="med"/>
+                      <a:tailEnd type="none" w="med" len="med"/>
+                    </a:lnB>
+                    <a:solidFill>
+                      <a:schemeClr val="bg1"/>
+                    </a:solidFill>
+                  </a:tcPr>
+                </a:tc>
+                <a:tc>
+                  <a:txBody>
+                    <a:bodyPr/>
+                    <a:lstStyle/>
+                    <a:p>
+                      <a:pPr algn="l" latinLnBrk="1"/>
+                      <a:r>
+                        <a:rPr lang="en-US" altLang="ko-KR" sz="1200" b="1">
+                          <a:solidFill>
+                            <a:schemeClr val="tx1"/>
+                          </a:solidFill>
+                          <a:latin typeface="+mn-ea"/>
+                          <a:ea typeface="+mn-ea"/>
+                        </a:rPr>
+                        <a:t>Date</a:t>
+                      </a:r>
+                      <a:endParaRPr lang="ko-KR" altLang="en-US" sz="1200" b="1">
+                        <a:solidFill>
+                          <a:schemeClr val="tx1"/>
+                        </a:solidFill>
+                        <a:latin typeface="+mn-ea"/>
+                        <a:ea typeface="+mn-ea"/>
+                      </a:endParaRPr>
+                    </a:p>
+                  </a:txBody>
+                  <a:tcPr anchor="ctr">
+                    <a:lnL w="12700" cap="flat" cmpd="sng" algn="ctr">
+                      <a:solidFill>
+                        <a:schemeClr val="tx1"/>
+                      </a:solidFill>
+                      <a:prstDash val="solid"/>
+                      <a:round/>
+                      <a:headEnd type="none" w="med" len="med"/>
+                      <a:tailEnd type="none" w="med" len="med"/>
+                    </a:lnL>
+                    <a:lnR w="12700" cap="flat" cmpd="sng" algn="ctr">
+                      <a:solidFill>
+                        <a:schemeClr val="tx1"/>
+                      </a:solidFill>
+                      <a:prstDash val="solid"/>
+                      <a:round/>
+                      <a:headEnd type="none" w="med" len="med"/>
+                      <a:tailEnd type="none" w="med" len="med"/>
+                    </a:lnR>
+                    <a:lnT w="12700" cap="flat" cmpd="sng" algn="ctr">
+                      <a:solidFill>
+                        <a:schemeClr val="tx1"/>
+                      </a:solidFill>
+                      <a:prstDash val="solid"/>
+                      <a:round/>
+                      <a:headEnd type="none" w="med" len="med"/>
+                      <a:tailEnd type="none" w="med" len="med"/>
+                    </a:lnT>
+                    <a:lnB w="12700" cap="flat" cmpd="sng" algn="ctr">
+                      <a:solidFill>
+                        <a:schemeClr val="tx1"/>
+                      </a:solidFill>
+                      <a:prstDash val="solid"/>
+                      <a:round/>
+                      <a:headEnd type="none" w="med" len="med"/>
+                      <a:tailEnd type="none" w="med" len="med"/>
+                    </a:lnB>
+                    <a:solidFill>
+                      <a:schemeClr val="bg1">
+                        <a:lumMod val="85000"/>
+                      </a:schemeClr>
+                    </a:solidFill>
+                  </a:tcPr>
+                </a:tc>
+                <a:tc>
+                  <a:txBody>
+                    <a:bodyPr/>
+                    <a:lstStyle/>
+                    <a:p>
+                      <a:pPr algn="l" latinLnBrk="1"/>
+                      <a:r>
+                        <a:rPr lang="en-US" altLang="ko-KR" sz="1200" b="0">
+                          <a:solidFill>
+                            <a:schemeClr val="tx1"/>
+                          </a:solidFill>
+                          <a:latin typeface="+mn-ea"/>
+                          <a:ea typeface="+mn-ea"/>
+                        </a:rPr>
+                        <a:t>2026.04.09</a:t>
+                      </a:r>
+                      <a:endParaRPr lang="ko-KR" altLang="en-US" sz="1200" b="0">
+                        <a:solidFill>
+                          <a:schemeClr val="tx1"/>
+                        </a:solidFill>
+                        <a:latin typeface="+mn-ea"/>
+                        <a:ea typeface="+mn-ea"/>
+                      </a:endParaRPr>
+                    </a:p>
+                  </a:txBody>
+                  <a:tcPr anchor="ctr">
+                    <a:lnL w="12700" cap="flat" cmpd="sng" algn="ctr">
+                      <a:solidFill>
+                        <a:schemeClr val="tx1"/>
+                      </a:solidFill>
+                      <a:prstDash val="solid"/>
+                      <a:round/>
+                      <a:headEnd type="none" w="med" len="med"/>
+                      <a:tailEnd type="none" w="med" len="med"/>
+                    </a:lnL>
+                    <a:lnR w="12700" cap="flat" cmpd="sng" algn="ctr">
+                      <a:solidFill>
+                        <a:schemeClr val="tx1"/>
+                      </a:solidFill>
+                      <a:prstDash val="solid"/>
+                      <a:round/>
+                      <a:headEnd type="none" w="med" len="med"/>
+                      <a:tailEnd type="none" w="med" len="med"/>
+                    </a:lnR>
+                    <a:lnT w="12700" cap="flat" cmpd="sng" algn="ctr">
+                      <a:solidFill>
+                        <a:schemeClr val="tx1"/>
+                      </a:solidFill>
+                      <a:prstDash val="solid"/>
+                      <a:round/>
+                      <a:headEnd type="none" w="med" len="med"/>
+                      <a:tailEnd type="none" w="med" len="med"/>
+                    </a:lnT>
+                    <a:lnB w="12700" cap="flat" cmpd="sng" algn="ctr">
+                      <a:solidFill>
+                        <a:schemeClr val="tx1"/>
+                      </a:solidFill>
+                      <a:prstDash val="solid"/>
+                      <a:round/>
+                      <a:headEnd type="none" w="med" len="med"/>
+                      <a:tailEnd type="none" w="med" len="med"/>
+                    </a:lnB>
+                    <a:solidFill>
+                      <a:schemeClr val="bg1"/>
+                    </a:solidFill>
+                  </a:tcPr>
+                </a:tc>
+                <a:extLst>
+                  <a:ext uri="{0D108BD9-81ED-4DB2-BD59-A6C34878D82A}">
+                    <a16:rowId xmlns:a16="http://schemas.microsoft.com/office/drawing/2014/main" val="2390745574"/>
+                  </a:ext>
+                </a:extLst>
+              </a:tr>
+              <a:tr h="355655">
+                <a:tc>
+                  <a:txBody>
+                    <a:bodyPr/>
+                    <a:lstStyle/>
+                    <a:p>
+                      <a:pPr algn="l" latinLnBrk="1"/>
+                      <a:r>
+                        <a:rPr lang="en-US" altLang="ko-KR" sz="1200" b="1">
+                          <a:solidFill>
+                            <a:schemeClr val="tx1"/>
+                          </a:solidFill>
+                          <a:latin typeface="+mn-ea"/>
+                          <a:ea typeface="+mn-ea"/>
+                        </a:rPr>
+                        <a:t>Screen Path</a:t>
+                      </a:r>
+                      <a:endParaRPr lang="ko-KR" altLang="en-US" sz="1200" b="1">
+                        <a:solidFill>
+                          <a:schemeClr val="tx1"/>
+                        </a:solidFill>
+                        <a:latin typeface="+mn-ea"/>
+                        <a:ea typeface="+mn-ea"/>
+                      </a:endParaRPr>
+                    </a:p>
+                  </a:txBody>
+                  <a:tcPr anchor="ctr">
+                    <a:lnL w="12700" cap="flat" cmpd="sng" algn="ctr">
+                      <a:solidFill>
+                        <a:schemeClr val="tx1"/>
+                      </a:solidFill>
+                      <a:prstDash val="solid"/>
+                      <a:round/>
+                      <a:headEnd type="none" w="med" len="med"/>
+                      <a:tailEnd type="none" w="med" len="med"/>
+                    </a:lnL>
+                    <a:lnR w="12700" cap="flat" cmpd="sng" algn="ctr">
+                      <a:solidFill>
+                        <a:schemeClr val="tx1"/>
+                      </a:solidFill>
+                      <a:prstDash val="solid"/>
+                      <a:round/>
+                      <a:headEnd type="none" w="med" len="med"/>
+                      <a:tailEnd type="none" w="med" len="med"/>
+                    </a:lnR>
+                    <a:lnT w="12700" cap="flat" cmpd="sng" algn="ctr">
+                      <a:solidFill>
+                        <a:schemeClr val="tx1"/>
+                      </a:solidFill>
+                      <a:prstDash val="solid"/>
+                      <a:round/>
+                      <a:headEnd type="none" w="med" len="med"/>
+                      <a:tailEnd type="none" w="med" len="med"/>
+                    </a:lnT>
+                    <a:lnB w="12700" cap="flat" cmpd="sng" algn="ctr">
+                      <a:solidFill>
+                        <a:schemeClr val="tx1"/>
+                      </a:solidFill>
+                      <a:prstDash val="solid"/>
+                      <a:round/>
+                      <a:headEnd type="none" w="med" len="med"/>
+                      <a:tailEnd type="none" w="med" len="med"/>
+                    </a:lnB>
+                    <a:solidFill>
+                      <a:schemeClr val="bg1">
+                        <a:lumMod val="85000"/>
+                      </a:schemeClr>
+                    </a:solidFill>
+                  </a:tcPr>
+                </a:tc>
+                <a:tc gridSpan="7">
+                  <a:txBody>
+                    <a:bodyPr/>
+                    <a:lstStyle/>
+                    <a:p>
+                      <a:pPr algn="l" latinLnBrk="1"/>
+                      <a:r>
+                        <a:rPr lang="en-US" altLang="ko-KR" sz="1200" b="0">
+                          <a:solidFill>
+                            <a:schemeClr val="tx1"/>
+                          </a:solidFill>
+                          <a:latin typeface="+mn-ea"/>
+                          <a:ea typeface="+mn-ea"/>
+                        </a:rPr>
+                        <a:t>main - predict</a:t>
+                      </a:r>
+                      <a:endParaRPr lang="ko-KR" altLang="en-US" sz="1200" b="0">
+                        <a:solidFill>
+                          <a:schemeClr val="tx1"/>
+                        </a:solidFill>
+                        <a:latin typeface="+mn-ea"/>
+                        <a:ea typeface="+mn-ea"/>
+                      </a:endParaRPr>
+                    </a:p>
+                  </a:txBody>
+                  <a:tcPr anchor="ctr">
+                    <a:lnL w="12700" cap="flat" cmpd="sng" algn="ctr">
+                      <a:solidFill>
+                        <a:schemeClr val="tx1"/>
+                      </a:solidFill>
+                      <a:prstDash val="solid"/>
+                      <a:round/>
+                      <a:headEnd type="none" w="med" len="med"/>
+                      <a:tailEnd type="none" w="med" len="med"/>
+                    </a:lnL>
+                    <a:lnR w="12700" cap="flat" cmpd="sng" algn="ctr">
+                      <a:solidFill>
+                        <a:schemeClr val="tx1"/>
+                      </a:solidFill>
+                      <a:prstDash val="solid"/>
+                      <a:round/>
+                      <a:headEnd type="none" w="med" len="med"/>
+                      <a:tailEnd type="none" w="med" len="med"/>
+                    </a:lnR>
+                    <a:lnT w="12700" cap="flat" cmpd="sng" algn="ctr">
+                      <a:solidFill>
+                        <a:schemeClr val="tx1"/>
+                      </a:solidFill>
+                      <a:prstDash val="solid"/>
+                      <a:round/>
+                      <a:headEnd type="none" w="med" len="med"/>
+                      <a:tailEnd type="none" w="med" len="med"/>
+                    </a:lnT>
+                    <a:lnB w="12700" cap="flat" cmpd="sng" algn="ctr">
+                      <a:solidFill>
+                        <a:schemeClr val="tx1"/>
+                      </a:solidFill>
+                      <a:prstDash val="solid"/>
+                      <a:round/>
+                      <a:headEnd type="none" w="med" len="med"/>
+                      <a:tailEnd type="none" w="med" len="med"/>
+                    </a:lnB>
+                    <a:solidFill>
+                      <a:schemeClr val="bg1"/>
+                    </a:solidFill>
+                  </a:tcPr>
+                </a:tc>
+                <a:tc hMerge="1">
+                  <a:txBody>
+                    <a:bodyPr/>
+                    <a:lstStyle/>
+                    <a:p>
+                      <a:pPr latinLnBrk="1"/>
+                      <a:endParaRPr lang="ko-KR" altLang="en-US"/>
+                    </a:p>
+                  </a:txBody>
+                  <a:tcPr>
+                    <a:lnB w="12700" cap="flat" cmpd="sng" algn="ctr">
+                      <a:solidFill>
+                        <a:schemeClr val="tx1"/>
+                      </a:solidFill>
+                      <a:prstDash val="solid"/>
+                      <a:round/>
+                      <a:headEnd type="none" w="med" len="med"/>
+                      <a:tailEnd type="none" w="med" len="med"/>
+                    </a:lnB>
+                  </a:tcPr>
+                </a:tc>
+                <a:tc hMerge="1">
+                  <a:txBody>
+                    <a:bodyPr/>
+                    <a:lstStyle/>
+                    <a:p>
+                      <a:pPr latinLnBrk="1"/>
+                      <a:endParaRPr lang="ko-KR" altLang="en-US"/>
+                    </a:p>
+                  </a:txBody>
+                  <a:tcPr>
+                    <a:lnB w="12700" cap="flat" cmpd="sng" algn="ctr">
+                      <a:solidFill>
+                        <a:schemeClr val="tx1"/>
+                      </a:solidFill>
+                      <a:prstDash val="solid"/>
+                      <a:round/>
+                      <a:headEnd type="none" w="med" len="med"/>
+                      <a:tailEnd type="none" w="med" len="med"/>
+                    </a:lnB>
+                  </a:tcPr>
+                </a:tc>
+                <a:tc hMerge="1">
+                  <a:txBody>
+                    <a:bodyPr/>
+                    <a:lstStyle/>
+                    <a:p>
+                      <a:pPr latinLnBrk="1"/>
+                      <a:endParaRPr lang="ko-KR" altLang="en-US"/>
+                    </a:p>
+                  </a:txBody>
+                  <a:tcPr>
+                    <a:lnB w="12700" cap="flat" cmpd="sng" algn="ctr">
+                      <a:solidFill>
+                        <a:schemeClr val="tx1"/>
+                      </a:solidFill>
+                      <a:prstDash val="solid"/>
+                      <a:round/>
+                      <a:headEnd type="none" w="med" len="med"/>
+                      <a:tailEnd type="none" w="med" len="med"/>
+                    </a:lnB>
+                  </a:tcPr>
+                </a:tc>
+                <a:tc hMerge="1">
+                  <a:txBody>
+                    <a:bodyPr/>
+                    <a:lstStyle/>
+                    <a:p>
+                      <a:pPr latinLnBrk="1"/>
+                      <a:endParaRPr lang="ko-KR" altLang="en-US"/>
+                    </a:p>
+                  </a:txBody>
+                  <a:tcPr>
+                    <a:lnR w="12700" cap="flat" cmpd="sng" algn="ctr">
+                      <a:solidFill>
+                        <a:schemeClr val="tx1"/>
+                      </a:solidFill>
+                      <a:prstDash val="solid"/>
+                      <a:round/>
+                      <a:headEnd type="none" w="med" len="med"/>
+                      <a:tailEnd type="none" w="med" len="med"/>
+                    </a:lnR>
+                    <a:lnB w="12700" cap="flat" cmpd="sng" algn="ctr">
+                      <a:solidFill>
+                        <a:schemeClr val="tx1"/>
+                      </a:solidFill>
+                      <a:prstDash val="solid"/>
+                      <a:round/>
+                      <a:headEnd type="none" w="med" len="med"/>
+                      <a:tailEnd type="none" w="med" len="med"/>
+                    </a:lnB>
+                  </a:tcPr>
+                </a:tc>
+                <a:tc hMerge="1">
+                  <a:txBody>
+                    <a:bodyPr/>
+                    <a:lstStyle/>
+                    <a:p>
+                      <a:pPr algn="l" latinLnBrk="1"/>
+                      <a:endParaRPr lang="ko-KR" altLang="en-US" sz="1200" b="0">
+                        <a:solidFill>
+                          <a:schemeClr val="tx1"/>
+                        </a:solidFill>
+                        <a:latin typeface="+mn-ea"/>
+                        <a:ea typeface="+mn-ea"/>
+                      </a:endParaRPr>
+                    </a:p>
+                  </a:txBody>
+                  <a:tcPr anchor="ctr">
+                    <a:lnL w="12700" cap="flat" cmpd="sng" algn="ctr">
+                      <a:solidFill>
+                        <a:schemeClr val="tx1"/>
+                      </a:solidFill>
+                      <a:prstDash val="solid"/>
+                      <a:round/>
+                      <a:headEnd type="none" w="med" len="med"/>
+                      <a:tailEnd type="none" w="med" len="med"/>
+                    </a:lnL>
+                    <a:lnR w="12700" cap="flat" cmpd="sng" algn="ctr">
+                      <a:solidFill>
+                        <a:schemeClr val="tx1"/>
+                      </a:solidFill>
+                      <a:prstDash val="solid"/>
+                      <a:round/>
+                      <a:headEnd type="none" w="med" len="med"/>
+                      <a:tailEnd type="none" w="med" len="med"/>
+                    </a:lnR>
+                    <a:lnT w="12700" cap="flat" cmpd="sng" algn="ctr">
+                      <a:solidFill>
+                        <a:schemeClr val="tx1"/>
+                      </a:solidFill>
+                      <a:prstDash val="solid"/>
+                      <a:round/>
+                      <a:headEnd type="none" w="med" len="med"/>
+                      <a:tailEnd type="none" w="med" len="med"/>
+                    </a:lnT>
+                    <a:lnB w="12700" cap="flat" cmpd="sng" algn="ctr">
+                      <a:solidFill>
+                        <a:schemeClr val="tx1"/>
+                      </a:solidFill>
+                      <a:prstDash val="solid"/>
+                      <a:round/>
+                      <a:headEnd type="none" w="med" len="med"/>
+                      <a:tailEnd type="none" w="med" len="med"/>
+                    </a:lnB>
+                    <a:solidFill>
+                      <a:schemeClr val="bg1"/>
+                    </a:solidFill>
+                  </a:tcPr>
+                </a:tc>
+                <a:tc hMerge="1">
+                  <a:txBody>
+                    <a:bodyPr/>
+                    <a:lstStyle/>
+                    <a:p>
+                      <a:pPr algn="l" latinLnBrk="1"/>
+                      <a:endParaRPr lang="ko-KR" altLang="en-US" sz="1200" b="0">
+                        <a:solidFill>
+                          <a:schemeClr val="tx1"/>
+                        </a:solidFill>
+                        <a:latin typeface="+mn-ea"/>
+                        <a:ea typeface="+mn-ea"/>
+                      </a:endParaRPr>
+                    </a:p>
+                  </a:txBody>
+                  <a:tcPr anchor="ctr">
+                    <a:lnL w="12700" cap="flat" cmpd="sng" algn="ctr">
+                      <a:solidFill>
+                        <a:schemeClr val="tx1"/>
+                      </a:solidFill>
+                      <a:prstDash val="solid"/>
+                      <a:round/>
+                      <a:headEnd type="none" w="med" len="med"/>
+                      <a:tailEnd type="none" w="med" len="med"/>
+                    </a:lnL>
+                    <a:lnR w="12700" cap="flat" cmpd="sng" algn="ctr">
+                      <a:solidFill>
+                        <a:schemeClr val="tx1"/>
+                      </a:solidFill>
+                      <a:prstDash val="solid"/>
+                      <a:round/>
+                      <a:headEnd type="none" w="med" len="med"/>
+                      <a:tailEnd type="none" w="med" len="med"/>
+                    </a:lnR>
+                    <a:lnT w="12700" cap="flat" cmpd="sng" algn="ctr">
+                      <a:solidFill>
+                        <a:schemeClr val="tx1"/>
+                      </a:solidFill>
+                      <a:prstDash val="solid"/>
+                      <a:round/>
+                      <a:headEnd type="none" w="med" len="med"/>
+                      <a:tailEnd type="none" w="med" len="med"/>
+                    </a:lnT>
+                    <a:lnB w="12700" cap="flat" cmpd="sng" algn="ctr">
+                      <a:solidFill>
+                        <a:schemeClr val="tx1"/>
+                      </a:solidFill>
+                      <a:prstDash val="solid"/>
+                      <a:round/>
+                      <a:headEnd type="none" w="med" len="med"/>
+                      <a:tailEnd type="none" w="med" len="med"/>
+                    </a:lnB>
+                    <a:solidFill>
+                      <a:schemeClr val="bg1"/>
+                    </a:solidFill>
+                  </a:tcPr>
+                </a:tc>
+                <a:extLst>
+                  <a:ext uri="{0D108BD9-81ED-4DB2-BD59-A6C34878D82A}">
+                    <a16:rowId xmlns:a16="http://schemas.microsoft.com/office/drawing/2014/main" val="2990231026"/>
+                  </a:ext>
+                </a:extLst>
+              </a:tr>
+            </a:tbl>
+          </a:graphicData>
+        </a:graphic>
+      </p:graphicFrame>
+      <p:graphicFrame>
+        <p:nvGraphicFramePr>
+          <p:cNvPr id="4" name="표 3">
+            <a:extLst>
+              <a:ext uri="{FF2B5EF4-FFF2-40B4-BE49-F238E27FC236}">
+                <a16:creationId xmlns:a16="http://schemas.microsoft.com/office/drawing/2014/main" id="{7015AE86-E78D-2EC5-F218-E0ACF707DAD0}"/>
+              </a:ext>
+            </a:extLst>
+          </p:cNvPr>
+          <p:cNvGraphicFramePr>
+            <a:graphicFrameLocks noGrp="1"/>
+          </p:cNvGraphicFramePr>
+          <p:nvPr>
+            <p:extLst>
+              <p:ext uri="{D42A27DB-BD31-4B8C-83A1-F6EECF244321}">
+                <p14:modId xmlns:p14="http://schemas.microsoft.com/office/powerpoint/2010/main" val="3983425267"/>
+              </p:ext>
+            </p:extLst>
+          </p:nvPr>
+        </p:nvGraphicFramePr>
+        <p:xfrm>
+          <a:off x="9221188" y="826547"/>
+          <a:ext cx="2607296" cy="2766960"/>
+        </p:xfrm>
+        <a:graphic>
+          <a:graphicData uri="http://schemas.openxmlformats.org/drawingml/2006/table">
+            <a:tbl>
+              <a:tblPr firstRow="1" bandRow="1">
+                <a:tableStyleId>{5C22544A-7EE6-4342-B048-85BDC9FD1C3A}</a:tableStyleId>
+              </a:tblPr>
+              <a:tblGrid>
+                <a:gridCol w="324618">
+                  <a:extLst>
+                    <a:ext uri="{9D8B030D-6E8A-4147-A177-3AD203B41FA5}">
+                      <a16:colId xmlns:a16="http://schemas.microsoft.com/office/drawing/2014/main" val="3477001054"/>
+                    </a:ext>
+                  </a:extLst>
+                </a:gridCol>
+                <a:gridCol w="2282678">
+                  <a:extLst>
+                    <a:ext uri="{9D8B030D-6E8A-4147-A177-3AD203B41FA5}">
+                      <a16:colId xmlns:a16="http://schemas.microsoft.com/office/drawing/2014/main" val="2165713866"/>
+                    </a:ext>
+                  </a:extLst>
+                </a:gridCol>
+              </a:tblGrid>
+              <a:tr h="360000">
+                <a:tc gridSpan="2">
+                  <a:txBody>
+                    <a:bodyPr/>
+                    <a:lstStyle/>
+                    <a:p>
+                      <a:pPr algn="ctr" latinLnBrk="1"/>
+                      <a:r>
+                        <a:rPr lang="en-US" altLang="ko-KR" sz="1200">
+                          <a:solidFill>
+                            <a:schemeClr val="tx1"/>
+                          </a:solidFill>
+                        </a:rPr>
+                        <a:t>Description</a:t>
+                      </a:r>
+                      <a:endParaRPr lang="ko-KR" altLang="en-US" sz="1200">
+                        <a:solidFill>
+                          <a:schemeClr val="tx1"/>
+                        </a:solidFill>
+                      </a:endParaRPr>
+                    </a:p>
+                  </a:txBody>
+                  <a:tcPr anchor="ctr">
+                    <a:lnL w="12700" cap="flat" cmpd="sng" algn="ctr">
+                      <a:solidFill>
+                        <a:schemeClr val="tx1"/>
+                      </a:solidFill>
+                      <a:prstDash val="solid"/>
+                      <a:round/>
+                      <a:headEnd type="none" w="med" len="med"/>
+                      <a:tailEnd type="none" w="med" len="med"/>
+                    </a:lnL>
+                    <a:lnR w="12700" cap="flat" cmpd="sng" algn="ctr">
+                      <a:solidFill>
+                        <a:schemeClr val="tx1"/>
+                      </a:solidFill>
+                      <a:prstDash val="solid"/>
+                      <a:round/>
+                      <a:headEnd type="none" w="med" len="med"/>
+                      <a:tailEnd type="none" w="med" len="med"/>
+                    </a:lnR>
+                    <a:lnT w="12700" cap="flat" cmpd="sng" algn="ctr">
+                      <a:solidFill>
+                        <a:schemeClr val="tx1"/>
+                      </a:solidFill>
+                      <a:prstDash val="solid"/>
+                      <a:round/>
+                      <a:headEnd type="none" w="med" len="med"/>
+                      <a:tailEnd type="none" w="med" len="med"/>
+                    </a:lnT>
+                    <a:lnB w="12700" cap="flat" cmpd="sng" algn="ctr">
+                      <a:solidFill>
+                        <a:schemeClr val="tx1"/>
+                      </a:solidFill>
+                      <a:prstDash val="solid"/>
+                      <a:round/>
+                      <a:headEnd type="none" w="med" len="med"/>
+                      <a:tailEnd type="none" w="med" len="med"/>
+                    </a:lnB>
+                    <a:solidFill>
+                      <a:schemeClr val="bg1">
+                        <a:lumMod val="85000"/>
+                      </a:schemeClr>
+                    </a:solidFill>
+                  </a:tcPr>
+                </a:tc>
+                <a:tc hMerge="1">
+                  <a:txBody>
+                    <a:bodyPr/>
+                    <a:lstStyle/>
+                    <a:p>
+                      <a:pPr algn="ctr" latinLnBrk="1"/>
+                      <a:endParaRPr lang="ko-KR" altLang="en-US"/>
+                    </a:p>
+                  </a:txBody>
+                  <a:tcPr anchor="ctr"/>
+                </a:tc>
+                <a:extLst>
+                  <a:ext uri="{0D108BD9-81ED-4DB2-BD59-A6C34878D82A}">
+                    <a16:rowId xmlns:a16="http://schemas.microsoft.com/office/drawing/2014/main" val="1766262352"/>
+                  </a:ext>
+                </a:extLst>
+              </a:tr>
+              <a:tr h="612000">
+                <a:tc>
+                  <a:txBody>
+                    <a:bodyPr/>
+                    <a:lstStyle/>
+                    <a:p>
+                      <a:pPr algn="ctr" latinLnBrk="1"/>
+                      <a:r>
+                        <a:rPr lang="en-US" altLang="ko-KR" sz="1200"/>
+                        <a:t>1</a:t>
+                      </a:r>
+                      <a:endParaRPr lang="ko-KR" altLang="en-US" sz="1200"/>
+                    </a:p>
+                  </a:txBody>
+                  <a:tcPr>
+                    <a:lnL w="12700" cap="flat" cmpd="sng" algn="ctr">
+                      <a:solidFill>
+                        <a:schemeClr val="tx1"/>
+                      </a:solidFill>
+                      <a:prstDash val="solid"/>
+                      <a:round/>
+                      <a:headEnd type="none" w="med" len="med"/>
+                      <a:tailEnd type="none" w="med" len="med"/>
+                    </a:lnL>
+                    <a:lnR w="12700" cap="flat" cmpd="sng" algn="ctr">
+                      <a:solidFill>
+                        <a:schemeClr val="tx1"/>
+                      </a:solidFill>
+                      <a:prstDash val="solid"/>
+                      <a:round/>
+                      <a:headEnd type="none" w="med" len="med"/>
+                      <a:tailEnd type="none" w="med" len="med"/>
+                    </a:lnR>
+                    <a:lnT w="12700" cap="flat" cmpd="sng" algn="ctr">
+                      <a:solidFill>
+                        <a:schemeClr val="tx1"/>
+                      </a:solidFill>
+                      <a:prstDash val="solid"/>
+                      <a:round/>
+                      <a:headEnd type="none" w="med" len="med"/>
+                      <a:tailEnd type="none" w="med" len="med"/>
+                    </a:lnT>
+                    <a:lnB w="12700" cap="flat" cmpd="sng" algn="ctr">
+                      <a:solidFill>
+                        <a:schemeClr val="tx1"/>
+                      </a:solidFill>
+                      <a:prstDash val="solid"/>
+                      <a:round/>
+                      <a:headEnd type="none" w="med" len="med"/>
+                      <a:tailEnd type="none" w="med" len="med"/>
+                    </a:lnB>
+                    <a:solidFill>
+                      <a:schemeClr val="bg1"/>
+                    </a:solidFill>
+                  </a:tcPr>
+                </a:tc>
+                <a:tc>
+                  <a:txBody>
+                    <a:bodyPr/>
+                    <a:lstStyle/>
+                    <a:p>
+                      <a:pPr algn="l" latinLnBrk="1"/>
+                      <a:r>
+                        <a:rPr lang="ko-KR" altLang="en-US" sz="1200"/>
+                        <a:t>사용자 입력 데이터 저장 </a:t>
+                      </a:r>
+                      <a:r>
+                        <a:rPr lang="en-US" altLang="ko-KR" sz="1200"/>
+                        <a:t>ID</a:t>
+                      </a:r>
+                    </a:p>
+                    <a:p>
+                      <a:pPr algn="l" latinLnBrk="1"/>
+                      <a:r>
+                        <a:rPr lang="ko-KR" altLang="en-US" sz="1200"/>
+                        <a:t>상단 </a:t>
+                      </a:r>
+                      <a:r>
+                        <a:rPr lang="en-US" altLang="ko-KR" sz="1200"/>
+                        <a:t>Analysis ID</a:t>
+                      </a:r>
+                      <a:r>
+                        <a:rPr lang="ko-KR" altLang="en-US" sz="1200"/>
+                        <a:t>로 조회 가능</a:t>
+                      </a:r>
+                    </a:p>
+                  </a:txBody>
+                  <a:tcPr anchor="ctr">
+                    <a:lnL w="12700" cap="flat" cmpd="sng" algn="ctr">
+                      <a:solidFill>
+                        <a:schemeClr val="tx1"/>
+                      </a:solidFill>
+                      <a:prstDash val="solid"/>
+                      <a:round/>
+                      <a:headEnd type="none" w="med" len="med"/>
+                      <a:tailEnd type="none" w="med" len="med"/>
+                    </a:lnL>
+                    <a:lnR w="12700" cap="flat" cmpd="sng" algn="ctr">
+                      <a:solidFill>
+                        <a:schemeClr val="tx1"/>
+                      </a:solidFill>
+                      <a:prstDash val="solid"/>
+                      <a:round/>
+                      <a:headEnd type="none" w="med" len="med"/>
+                      <a:tailEnd type="none" w="med" len="med"/>
+                    </a:lnR>
+                    <a:lnT w="12700" cap="flat" cmpd="sng" algn="ctr">
+                      <a:solidFill>
+                        <a:schemeClr val="tx1"/>
+                      </a:solidFill>
+                      <a:prstDash val="solid"/>
+                      <a:round/>
+                      <a:headEnd type="none" w="med" len="med"/>
+                      <a:tailEnd type="none" w="med" len="med"/>
+                    </a:lnT>
+                    <a:lnB w="12700" cap="flat" cmpd="sng" algn="ctr">
+                      <a:solidFill>
+                        <a:schemeClr val="tx1"/>
+                      </a:solidFill>
+                      <a:prstDash val="solid"/>
+                      <a:round/>
+                      <a:headEnd type="none" w="med" len="med"/>
+                      <a:tailEnd type="none" w="med" len="med"/>
+                    </a:lnB>
+                    <a:solidFill>
+                      <a:schemeClr val="bg1"/>
+                    </a:solidFill>
+                  </a:tcPr>
+                </a:tc>
+                <a:extLst>
+                  <a:ext uri="{0D108BD9-81ED-4DB2-BD59-A6C34878D82A}">
+                    <a16:rowId xmlns:a16="http://schemas.microsoft.com/office/drawing/2014/main" val="3571744345"/>
+                  </a:ext>
+                </a:extLst>
+              </a:tr>
+              <a:tr h="612000">
+                <a:tc>
+                  <a:txBody>
+                    <a:bodyPr/>
+                    <a:lstStyle/>
+                    <a:p>
+                      <a:pPr algn="ctr" latinLnBrk="1"/>
+                      <a:r>
+                        <a:rPr lang="en-US" altLang="ko-KR" sz="1200"/>
+                        <a:t>2</a:t>
+                      </a:r>
+                      <a:endParaRPr lang="ko-KR" altLang="en-US" sz="1200"/>
+                    </a:p>
+                  </a:txBody>
+                  <a:tcPr>
+                    <a:lnL w="12700" cap="flat" cmpd="sng" algn="ctr">
+                      <a:solidFill>
+                        <a:schemeClr val="tx1"/>
+                      </a:solidFill>
+                      <a:prstDash val="solid"/>
+                      <a:round/>
+                      <a:headEnd type="none" w="med" len="med"/>
+                      <a:tailEnd type="none" w="med" len="med"/>
+                    </a:lnL>
+                    <a:lnR w="12700" cap="flat" cmpd="sng" algn="ctr">
+                      <a:solidFill>
+                        <a:schemeClr val="tx1"/>
+                      </a:solidFill>
+                      <a:prstDash val="solid"/>
+                      <a:round/>
+                      <a:headEnd type="none" w="med" len="med"/>
+                      <a:tailEnd type="none" w="med" len="med"/>
+                    </a:lnR>
+                    <a:lnT w="12700" cap="flat" cmpd="sng" algn="ctr">
+                      <a:solidFill>
+                        <a:schemeClr val="tx1"/>
+                      </a:solidFill>
+                      <a:prstDash val="solid"/>
+                      <a:round/>
+                      <a:headEnd type="none" w="med" len="med"/>
+                      <a:tailEnd type="none" w="med" len="med"/>
+                    </a:lnT>
+                    <a:lnB w="12700" cap="flat" cmpd="sng" algn="ctr">
+                      <a:solidFill>
+                        <a:schemeClr val="tx1"/>
+                      </a:solidFill>
+                      <a:prstDash val="solid"/>
+                      <a:round/>
+                      <a:headEnd type="none" w="med" len="med"/>
+                      <a:tailEnd type="none" w="med" len="med"/>
+                    </a:lnB>
+                    <a:solidFill>
+                      <a:schemeClr val="bg1"/>
+                    </a:solidFill>
+                  </a:tcPr>
+                </a:tc>
+                <a:tc>
+                  <a:txBody>
+                    <a:bodyPr/>
+                    <a:lstStyle/>
+                    <a:p>
+                      <a:pPr algn="l" latinLnBrk="1"/>
+                      <a:r>
+                        <a:rPr lang="ko-KR" altLang="en-US" sz="1200"/>
+                        <a:t>사용자 입력 데이터 예측 결과 그래프</a:t>
+                      </a:r>
+                      <a:endParaRPr lang="en-US" altLang="ko-KR" sz="1200"/>
+                    </a:p>
+                    <a:p>
+                      <a:pPr algn="l" latinLnBrk="1"/>
+                      <a:r>
+                        <a:rPr lang="en-US" altLang="ko-KR" sz="1200"/>
+                        <a:t>class0 – </a:t>
+                      </a:r>
+                      <a:r>
+                        <a:rPr lang="ko-KR" altLang="en-US" sz="1200"/>
+                        <a:t>정상</a:t>
+                      </a:r>
+                      <a:r>
+                        <a:rPr lang="en-US" altLang="ko-KR" sz="1200"/>
+                        <a:t>, class1 – </a:t>
+                      </a:r>
+                      <a:r>
+                        <a:rPr lang="ko-KR" altLang="en-US" sz="1200"/>
+                        <a:t>경계</a:t>
+                      </a:r>
+                      <a:r>
+                        <a:rPr lang="en-US" altLang="ko-KR" sz="1200"/>
+                        <a:t>, class2 - </a:t>
+                      </a:r>
+                      <a:r>
+                        <a:rPr lang="ko-KR" altLang="en-US" sz="1200"/>
+                        <a:t>위험</a:t>
+                      </a:r>
+                    </a:p>
+                  </a:txBody>
+                  <a:tcPr anchor="ctr">
+                    <a:lnL w="12700" cap="flat" cmpd="sng" algn="ctr">
+                      <a:solidFill>
+                        <a:schemeClr val="tx1"/>
+                      </a:solidFill>
+                      <a:prstDash val="solid"/>
+                      <a:round/>
+                      <a:headEnd type="none" w="med" len="med"/>
+                      <a:tailEnd type="none" w="med" len="med"/>
+                    </a:lnL>
+                    <a:lnR w="12700" cap="flat" cmpd="sng" algn="ctr">
+                      <a:solidFill>
+                        <a:schemeClr val="tx1"/>
+                      </a:solidFill>
+                      <a:prstDash val="solid"/>
+                      <a:round/>
+                      <a:headEnd type="none" w="med" len="med"/>
+                      <a:tailEnd type="none" w="med" len="med"/>
+                    </a:lnR>
+                    <a:lnT w="12700" cap="flat" cmpd="sng" algn="ctr">
+                      <a:solidFill>
+                        <a:schemeClr val="tx1"/>
+                      </a:solidFill>
+                      <a:prstDash val="solid"/>
+                      <a:round/>
+                      <a:headEnd type="none" w="med" len="med"/>
+                      <a:tailEnd type="none" w="med" len="med"/>
+                    </a:lnT>
+                    <a:lnB w="12700" cap="flat" cmpd="sng" algn="ctr">
+                      <a:solidFill>
+                        <a:schemeClr val="tx1"/>
+                      </a:solidFill>
+                      <a:prstDash val="solid"/>
+                      <a:round/>
+                      <a:headEnd type="none" w="med" len="med"/>
+                      <a:tailEnd type="none" w="med" len="med"/>
+                    </a:lnB>
+                    <a:solidFill>
+                      <a:schemeClr val="bg1"/>
+                    </a:solidFill>
+                  </a:tcPr>
+                </a:tc>
+                <a:extLst>
+                  <a:ext uri="{0D108BD9-81ED-4DB2-BD59-A6C34878D82A}">
+                    <a16:rowId xmlns:a16="http://schemas.microsoft.com/office/drawing/2014/main" val="2924856255"/>
+                  </a:ext>
+                </a:extLst>
+              </a:tr>
+              <a:tr h="360000">
+                <a:tc gridSpan="2">
+                  <a:txBody>
+                    <a:bodyPr/>
+                    <a:lstStyle/>
+                    <a:p>
+                      <a:pPr marL="0" marR="0" lvl="0" indent="0" algn="ctr" defTabSz="914400" rtl="0" eaLnBrk="1" fontAlgn="auto" latinLnBrk="1" hangingPunct="1">
+                        <a:lnSpc>
+                          <a:spcPct val="100000"/>
+                        </a:lnSpc>
+                        <a:spcBef>
+                          <a:spcPts val="0"/>
+                        </a:spcBef>
+                        <a:spcAft>
+                          <a:spcPts val="0"/>
+                        </a:spcAft>
+                        <a:buClrTx/>
+                        <a:buSzTx/>
+                        <a:buFontTx/>
+                        <a:buNone/>
+                        <a:tabLst/>
+                        <a:defRPr/>
+                      </a:pPr>
+                      <a:r>
+                        <a:rPr lang="en-US" altLang="ko-KR" sz="1200"/>
+                        <a:t>Check Point</a:t>
+                      </a:r>
+                    </a:p>
+                  </a:txBody>
+                  <a:tcPr anchor="ctr">
+                    <a:lnL w="12700" cap="flat" cmpd="sng" algn="ctr">
+                      <a:solidFill>
+                        <a:schemeClr val="tx1"/>
+                      </a:solidFill>
+                      <a:prstDash val="solid"/>
+                      <a:round/>
+                      <a:headEnd type="none" w="med" len="med"/>
+                      <a:tailEnd type="none" w="med" len="med"/>
+                    </a:lnL>
+                    <a:lnR w="12700" cap="flat" cmpd="sng" algn="ctr">
+                      <a:solidFill>
+                        <a:schemeClr val="tx1"/>
+                      </a:solidFill>
+                      <a:prstDash val="solid"/>
+                      <a:round/>
+                      <a:headEnd type="none" w="med" len="med"/>
+                      <a:tailEnd type="none" w="med" len="med"/>
+                    </a:lnR>
+                    <a:lnT w="12700" cap="flat" cmpd="sng" algn="ctr">
+                      <a:solidFill>
+                        <a:schemeClr val="tx1"/>
+                      </a:solidFill>
+                      <a:prstDash val="solid"/>
+                      <a:round/>
+                      <a:headEnd type="none" w="med" len="med"/>
+                      <a:tailEnd type="none" w="med" len="med"/>
+                    </a:lnT>
+                    <a:lnB w="12700" cap="flat" cmpd="sng" algn="ctr">
+                      <a:solidFill>
+                        <a:schemeClr val="tx1"/>
+                      </a:solidFill>
+                      <a:prstDash val="solid"/>
+                      <a:round/>
+                      <a:headEnd type="none" w="med" len="med"/>
+                      <a:tailEnd type="none" w="med" len="med"/>
+                    </a:lnB>
+                    <a:solidFill>
+                      <a:schemeClr val="bg1">
+                        <a:lumMod val="85000"/>
+                      </a:schemeClr>
+                    </a:solidFill>
+                  </a:tcPr>
+                </a:tc>
+                <a:tc hMerge="1">
+                  <a:txBody>
+                    <a:bodyPr/>
+                    <a:lstStyle/>
+                    <a:p>
+                      <a:pPr algn="l" latinLnBrk="1"/>
+                      <a:endParaRPr lang="ko-KR" altLang="en-US" sz="1200"/>
+                    </a:p>
+                  </a:txBody>
+                  <a:tcPr anchor="ctr">
+                    <a:lnL w="12700" cap="flat" cmpd="sng" algn="ctr">
+                      <a:solidFill>
+                        <a:schemeClr val="tx1"/>
+                      </a:solidFill>
+                      <a:prstDash val="solid"/>
+                      <a:round/>
+                      <a:headEnd type="none" w="med" len="med"/>
+                      <a:tailEnd type="none" w="med" len="med"/>
+                    </a:lnL>
+                    <a:lnR w="12700" cap="flat" cmpd="sng" algn="ctr">
+                      <a:solidFill>
+                        <a:schemeClr val="tx1"/>
+                      </a:solidFill>
+                      <a:prstDash val="solid"/>
+                      <a:round/>
+                      <a:headEnd type="none" w="med" len="med"/>
+                      <a:tailEnd type="none" w="med" len="med"/>
+                    </a:lnR>
+                    <a:lnT w="12700" cap="flat" cmpd="sng" algn="ctr">
+                      <a:solidFill>
+                        <a:schemeClr val="tx1"/>
+                      </a:solidFill>
+                      <a:prstDash val="solid"/>
+                      <a:round/>
+                      <a:headEnd type="none" w="med" len="med"/>
+                      <a:tailEnd type="none" w="med" len="med"/>
+                    </a:lnT>
+                    <a:lnB w="12700" cap="flat" cmpd="sng" algn="ctr">
+                      <a:solidFill>
+                        <a:schemeClr val="tx1"/>
+                      </a:solidFill>
+                      <a:prstDash val="solid"/>
+                      <a:round/>
+                      <a:headEnd type="none" w="med" len="med"/>
+                      <a:tailEnd type="none" w="med" len="med"/>
+                    </a:lnB>
+                    <a:solidFill>
+                      <a:schemeClr val="bg1"/>
+                    </a:solidFill>
+                  </a:tcPr>
+                </a:tc>
+                <a:extLst>
+                  <a:ext uri="{0D108BD9-81ED-4DB2-BD59-A6C34878D82A}">
+                    <a16:rowId xmlns:a16="http://schemas.microsoft.com/office/drawing/2014/main" val="2275643079"/>
+                  </a:ext>
+                </a:extLst>
+              </a:tr>
+              <a:tr h="612000">
+                <a:tc gridSpan="2">
+                  <a:txBody>
+                    <a:bodyPr/>
+                    <a:lstStyle/>
+                    <a:p>
+                      <a:pPr marL="0" marR="0" lvl="0" indent="0" algn="ctr" defTabSz="914400" rtl="0" eaLnBrk="1" fontAlgn="auto" latinLnBrk="1" hangingPunct="1">
+                        <a:lnSpc>
+                          <a:spcPct val="100000"/>
+                        </a:lnSpc>
+                        <a:spcBef>
+                          <a:spcPts val="0"/>
+                        </a:spcBef>
+                        <a:spcAft>
+                          <a:spcPts val="0"/>
+                        </a:spcAft>
+                        <a:buClrTx/>
+                        <a:buSzTx/>
+                        <a:buFontTx/>
+                        <a:buNone/>
+                        <a:tabLst/>
+                        <a:defRPr/>
+                      </a:pPr>
+                      <a:r>
+                        <a:rPr lang="ko-KR" altLang="en-US" sz="1200"/>
+                        <a:t>위에 </a:t>
+                      </a:r>
+                      <a:r>
+                        <a:rPr lang="en-US" altLang="ko-KR" sz="1200"/>
+                        <a:t>Look up, Predict</a:t>
+                      </a:r>
+                      <a:r>
+                        <a:rPr lang="ko-KR" altLang="en-US" sz="1200"/>
+                        <a:t>는 메인 페이지의 기능과 동일</a:t>
+                      </a:r>
+                    </a:p>
+                  </a:txBody>
+                  <a:tcPr>
+                    <a:lnL w="12700" cap="flat" cmpd="sng" algn="ctr">
+                      <a:solidFill>
+                        <a:schemeClr val="tx1"/>
+                      </a:solidFill>
+                      <a:prstDash val="solid"/>
+                      <a:round/>
+                      <a:headEnd type="none" w="med" len="med"/>
+                      <a:tailEnd type="none" w="med" len="med"/>
+                    </a:lnL>
+                    <a:lnR w="12700" cap="flat" cmpd="sng" algn="ctr">
+                      <a:solidFill>
+                        <a:schemeClr val="tx1"/>
+                      </a:solidFill>
+                      <a:prstDash val="solid"/>
+                      <a:round/>
+                      <a:headEnd type="none" w="med" len="med"/>
+                      <a:tailEnd type="none" w="med" len="med"/>
+                    </a:lnR>
+                    <a:lnT w="12700" cap="flat" cmpd="sng" algn="ctr">
+                      <a:solidFill>
+                        <a:schemeClr val="tx1"/>
+                      </a:solidFill>
+                      <a:prstDash val="solid"/>
+                      <a:round/>
+                      <a:headEnd type="none" w="med" len="med"/>
+                      <a:tailEnd type="none" w="med" len="med"/>
+                    </a:lnT>
+                    <a:lnB w="12700" cap="flat" cmpd="sng" algn="ctr">
+                      <a:solidFill>
+                        <a:schemeClr val="tx1"/>
+                      </a:solidFill>
+                      <a:prstDash val="solid"/>
+                      <a:round/>
+                      <a:headEnd type="none" w="med" len="med"/>
+                      <a:tailEnd type="none" w="med" len="med"/>
+                    </a:lnB>
+                    <a:solidFill>
+                      <a:schemeClr val="bg1"/>
+                    </a:solidFill>
+                  </a:tcPr>
+                </a:tc>
+                <a:tc hMerge="1">
+                  <a:txBody>
+                    <a:bodyPr/>
+                    <a:lstStyle/>
+                    <a:p>
+                      <a:pPr algn="l" latinLnBrk="1"/>
+                      <a:endParaRPr lang="ko-KR" altLang="en-US" sz="1200"/>
+                    </a:p>
+                  </a:txBody>
+                  <a:tcPr anchor="ctr">
+                    <a:lnL w="12700" cap="flat" cmpd="sng" algn="ctr">
+                      <a:solidFill>
+                        <a:schemeClr val="tx1"/>
+                      </a:solidFill>
+                      <a:prstDash val="solid"/>
+                      <a:round/>
+                      <a:headEnd type="none" w="med" len="med"/>
+                      <a:tailEnd type="none" w="med" len="med"/>
+                    </a:lnL>
+                    <a:lnR w="12700" cap="flat" cmpd="sng" algn="ctr">
+                      <a:solidFill>
+                        <a:schemeClr val="tx1"/>
+                      </a:solidFill>
+                      <a:prstDash val="solid"/>
+                      <a:round/>
+                      <a:headEnd type="none" w="med" len="med"/>
+                      <a:tailEnd type="none" w="med" len="med"/>
+                    </a:lnR>
+                    <a:lnT w="12700" cap="flat" cmpd="sng" algn="ctr">
+                      <a:solidFill>
+                        <a:schemeClr val="tx1"/>
+                      </a:solidFill>
+                      <a:prstDash val="solid"/>
+                      <a:round/>
+                      <a:headEnd type="none" w="med" len="med"/>
+                      <a:tailEnd type="none" w="med" len="med"/>
+                    </a:lnT>
+                    <a:lnB w="12700" cap="flat" cmpd="sng" algn="ctr">
+                      <a:solidFill>
+                        <a:schemeClr val="tx1"/>
+                      </a:solidFill>
+                      <a:prstDash val="solid"/>
+                      <a:round/>
+                      <a:headEnd type="none" w="med" len="med"/>
+                      <a:tailEnd type="none" w="med" len="med"/>
+                    </a:lnB>
+                    <a:solidFill>
+                      <a:schemeClr val="bg1"/>
+                    </a:solidFill>
+                  </a:tcPr>
+                </a:tc>
+                <a:extLst>
+                  <a:ext uri="{0D108BD9-81ED-4DB2-BD59-A6C34878D82A}">
+                    <a16:rowId xmlns:a16="http://schemas.microsoft.com/office/drawing/2014/main" val="1885486421"/>
+                  </a:ext>
+                </a:extLst>
+              </a:tr>
+            </a:tbl>
+          </a:graphicData>
+        </a:graphic>
+      </p:graphicFrame>
+      <p:sp>
+        <p:nvSpPr>
+          <p:cNvPr id="2" name="타원 1">
+            <a:extLst>
+              <a:ext uri="{FF2B5EF4-FFF2-40B4-BE49-F238E27FC236}">
+                <a16:creationId xmlns:a16="http://schemas.microsoft.com/office/drawing/2014/main" id="{CFA4621C-5EB8-811B-072B-A85ED9144CF2}"/>
+              </a:ext>
+            </a:extLst>
+          </p:cNvPr>
+          <p:cNvSpPr>
+            <a:spLocks noChangeAspect="1"/>
+          </p:cNvSpPr>
+          <p:nvPr/>
+        </p:nvSpPr>
+        <p:spPr>
+          <a:xfrm>
+            <a:off x="4901822" y="2397604"/>
+            <a:ext cx="324000" cy="324000"/>
+          </a:xfrm>
+          <a:prstGeom prst="ellipse">
+            <a:avLst/>
+          </a:prstGeom>
+          <a:solidFill>
+            <a:srgbClr val="C00000">
+              <a:alpha val="60000"/>
+            </a:srgbClr>
+          </a:solidFill>
+        </p:spPr>
+        <p:style>
+          <a:lnRef idx="2">
+            <a:schemeClr val="accent1">
+              <a:shade val="15000"/>
+            </a:schemeClr>
+          </a:lnRef>
+          <a:fillRef idx="1">
+            <a:schemeClr val="accent1"/>
+          </a:fillRef>
+          <a:effectRef idx="0">
+            <a:schemeClr val="accent1"/>
+          </a:effectRef>
+          <a:fontRef idx="minor">
+            <a:schemeClr val="lt1"/>
+          </a:fontRef>
+        </p:style>
+        <p:txBody>
+          <a:bodyPr rtlCol="0" anchor="ctr"/>
+          <a:lstStyle/>
+          <a:p>
+            <a:pPr algn="ctr"/>
+            <a:r>
+              <a:rPr lang="en-US" altLang="ko-KR" sz="2000">
+                <a:latin typeface="+mn-ea"/>
+              </a:rPr>
+              <a:t>2</a:t>
+            </a:r>
+            <a:endParaRPr lang="ko-KR" altLang="en-US" sz="2000">
+              <a:latin typeface="+mn-ea"/>
+            </a:endParaRPr>
+          </a:p>
+        </p:txBody>
+      </p:sp>
+      <p:sp>
+        <p:nvSpPr>
+          <p:cNvPr id="9" name="타원 8">
+            <a:extLst>
+              <a:ext uri="{FF2B5EF4-FFF2-40B4-BE49-F238E27FC236}">
+                <a16:creationId xmlns:a16="http://schemas.microsoft.com/office/drawing/2014/main" id="{D4E14AD0-C0F5-B974-6574-7EBB78BAB894}"/>
+              </a:ext>
+            </a:extLst>
+          </p:cNvPr>
+          <p:cNvSpPr>
+            <a:spLocks noChangeAspect="1"/>
+          </p:cNvSpPr>
+          <p:nvPr/>
+        </p:nvSpPr>
+        <p:spPr>
+          <a:xfrm>
+            <a:off x="2885634" y="2400647"/>
+            <a:ext cx="324000" cy="324000"/>
+          </a:xfrm>
+          <a:prstGeom prst="ellipse">
+            <a:avLst/>
+          </a:prstGeom>
+          <a:solidFill>
+            <a:srgbClr val="C00000">
+              <a:alpha val="60000"/>
+            </a:srgbClr>
+          </a:solidFill>
+        </p:spPr>
+        <p:style>
+          <a:lnRef idx="2">
+            <a:schemeClr val="accent1">
+              <a:shade val="15000"/>
+            </a:schemeClr>
+          </a:lnRef>
+          <a:fillRef idx="1">
+            <a:schemeClr val="accent1"/>
+          </a:fillRef>
+          <a:effectRef idx="0">
+            <a:schemeClr val="accent1"/>
+          </a:effectRef>
+          <a:fontRef idx="minor">
+            <a:schemeClr val="lt1"/>
+          </a:fontRef>
+        </p:style>
+        <p:txBody>
+          <a:bodyPr rtlCol="0" anchor="ctr"/>
+          <a:lstStyle/>
+          <a:p>
+            <a:pPr algn="ctr"/>
+            <a:r>
+              <a:rPr lang="en-US" altLang="ko-KR" sz="2000">
+                <a:latin typeface="+mn-ea"/>
+              </a:rPr>
+              <a:t>1</a:t>
+            </a:r>
+            <a:endParaRPr lang="ko-KR" altLang="en-US" sz="2000">
+              <a:latin typeface="+mn-ea"/>
+            </a:endParaRPr>
+          </a:p>
+        </p:txBody>
+      </p:sp>
+    </p:spTree>
+    <p:extLst>
+      <p:ext uri="{BB962C8B-B14F-4D97-AF65-F5344CB8AC3E}">
+        <p14:creationId xmlns:p14="http://schemas.microsoft.com/office/powerpoint/2010/main" val="1428151794"/>
       </p:ext>
     </p:extLst>
   </p:cSld>

--- a/1차 프로젝트/기획/화면 설계서.pptx
+++ b/1차 프로젝트/기획/화면 설계서.pptx
@@ -10,7 +10,6 @@
     <p:sldId id="283" r:id="rId4"/>
     <p:sldId id="284" r:id="rId5"/>
     <p:sldId id="285" r:id="rId6"/>
-    <p:sldId id="286" r:id="rId7"/>
   </p:sldIdLst>
   <p:sldSz cx="12192000" cy="6858000"/>
   <p:notesSz cx="6858000" cy="9144000"/>
@@ -264,7 +263,7 @@
           <a:p>
             <a:fld id="{086E833D-714E-4D65-B923-5C68908BA676}" type="datetimeFigureOut">
               <a:rPr lang="ko-KR" altLang="en-US" smtClean="0"/>
-              <a:t>2026-04-10</a:t>
+              <a:t>2026-05-14</a:t>
             </a:fld>
             <a:endParaRPr lang="ko-KR" altLang="en-US"/>
           </a:p>
@@ -462,7 +461,7 @@
           <a:p>
             <a:fld id="{086E833D-714E-4D65-B923-5C68908BA676}" type="datetimeFigureOut">
               <a:rPr lang="ko-KR" altLang="en-US" smtClean="0"/>
-              <a:t>2026-04-10</a:t>
+              <a:t>2026-05-14</a:t>
             </a:fld>
             <a:endParaRPr lang="ko-KR" altLang="en-US"/>
           </a:p>
@@ -670,7 +669,7 @@
           <a:p>
             <a:fld id="{086E833D-714E-4D65-B923-5C68908BA676}" type="datetimeFigureOut">
               <a:rPr lang="ko-KR" altLang="en-US" smtClean="0"/>
-              <a:t>2026-04-10</a:t>
+              <a:t>2026-05-14</a:t>
             </a:fld>
             <a:endParaRPr lang="ko-KR" altLang="en-US"/>
           </a:p>
@@ -868,7 +867,7 @@
           <a:p>
             <a:fld id="{086E833D-714E-4D65-B923-5C68908BA676}" type="datetimeFigureOut">
               <a:rPr lang="ko-KR" altLang="en-US" smtClean="0"/>
-              <a:t>2026-04-10</a:t>
+              <a:t>2026-05-14</a:t>
             </a:fld>
             <a:endParaRPr lang="ko-KR" altLang="en-US"/>
           </a:p>
@@ -1143,7 +1142,7 @@
           <a:p>
             <a:fld id="{086E833D-714E-4D65-B923-5C68908BA676}" type="datetimeFigureOut">
               <a:rPr lang="ko-KR" altLang="en-US" smtClean="0"/>
-              <a:t>2026-04-10</a:t>
+              <a:t>2026-05-14</a:t>
             </a:fld>
             <a:endParaRPr lang="ko-KR" altLang="en-US"/>
           </a:p>
@@ -1408,7 +1407,7 @@
           <a:p>
             <a:fld id="{086E833D-714E-4D65-B923-5C68908BA676}" type="datetimeFigureOut">
               <a:rPr lang="ko-KR" altLang="en-US" smtClean="0"/>
-              <a:t>2026-04-10</a:t>
+              <a:t>2026-05-14</a:t>
             </a:fld>
             <a:endParaRPr lang="ko-KR" altLang="en-US"/>
           </a:p>
@@ -1820,7 +1819,7 @@
           <a:p>
             <a:fld id="{086E833D-714E-4D65-B923-5C68908BA676}" type="datetimeFigureOut">
               <a:rPr lang="ko-KR" altLang="en-US" smtClean="0"/>
-              <a:t>2026-04-10</a:t>
+              <a:t>2026-05-14</a:t>
             </a:fld>
             <a:endParaRPr lang="ko-KR" altLang="en-US"/>
           </a:p>
@@ -1961,7 +1960,7 @@
           <a:p>
             <a:fld id="{086E833D-714E-4D65-B923-5C68908BA676}" type="datetimeFigureOut">
               <a:rPr lang="ko-KR" altLang="en-US" smtClean="0"/>
-              <a:t>2026-04-10</a:t>
+              <a:t>2026-05-14</a:t>
             </a:fld>
             <a:endParaRPr lang="ko-KR" altLang="en-US"/>
           </a:p>
@@ -2074,7 +2073,7 @@
           <a:p>
             <a:fld id="{086E833D-714E-4D65-B923-5C68908BA676}" type="datetimeFigureOut">
               <a:rPr lang="ko-KR" altLang="en-US" smtClean="0"/>
-              <a:t>2026-04-10</a:t>
+              <a:t>2026-05-14</a:t>
             </a:fld>
             <a:endParaRPr lang="ko-KR" altLang="en-US"/>
           </a:p>
@@ -2385,7 +2384,7 @@
           <a:p>
             <a:fld id="{086E833D-714E-4D65-B923-5C68908BA676}" type="datetimeFigureOut">
               <a:rPr lang="ko-KR" altLang="en-US" smtClean="0"/>
-              <a:t>2026-04-10</a:t>
+              <a:t>2026-05-14</a:t>
             </a:fld>
             <a:endParaRPr lang="ko-KR" altLang="en-US"/>
           </a:p>
@@ -2673,7 +2672,7 @@
           <a:p>
             <a:fld id="{086E833D-714E-4D65-B923-5C68908BA676}" type="datetimeFigureOut">
               <a:rPr lang="ko-KR" altLang="en-US" smtClean="0"/>
-              <a:t>2026-04-10</a:t>
+              <a:t>2026-05-14</a:t>
             </a:fld>
             <a:endParaRPr lang="ko-KR" altLang="en-US"/>
           </a:p>
@@ -2914,7 +2913,7 @@
           <a:p>
             <a:fld id="{086E833D-714E-4D65-B923-5C68908BA676}" type="datetimeFigureOut">
               <a:rPr lang="ko-KR" altLang="en-US" smtClean="0"/>
-              <a:t>2026-04-10</a:t>
+              <a:t>2026-05-14</a:t>
             </a:fld>
             <a:endParaRPr lang="ko-KR" altLang="en-US"/>
           </a:p>
@@ -3333,7 +3332,7 @@
       </p:grpSpPr>
       <p:pic>
         <p:nvPicPr>
-          <p:cNvPr id="10" name="그림 9" descr="실내, 벽, 가구, 인테리어 디자인이(가) 표시된 사진&#10;&#10;AI가 생성한 콘텐츠는 부정확할 수 있습니다.">
+          <p:cNvPr id="10" name="그림 9">
             <a:extLst>
               <a:ext uri="{FF2B5EF4-FFF2-40B4-BE49-F238E27FC236}">
                 <a16:creationId xmlns:a16="http://schemas.microsoft.com/office/drawing/2014/main" id="{08207204-0CDA-0EAB-2C4B-4292E2476009}"/>
@@ -3353,14 +3352,13 @@
               </a:ext>
             </a:extLst>
           </a:blip>
-          <a:stretch>
-            <a:fillRect/>
-          </a:stretch>
+          <a:srcRect/>
+          <a:stretch/>
         </p:blipFill>
         <p:spPr>
           <a:xfrm>
-            <a:off x="1009000" y="1825222"/>
-            <a:ext cx="7349031" cy="4447008"/>
+            <a:off x="363515" y="1648722"/>
+            <a:ext cx="8640001" cy="4759149"/>
           </a:xfrm>
           <a:prstGeom prst="rect">
             <a:avLst/>
@@ -3382,7 +3380,7 @@
           <p:nvPr>
             <p:extLst>
               <p:ext uri="{D42A27DB-BD31-4B8C-83A1-F6EECF244321}">
-                <p14:modId xmlns:p14="http://schemas.microsoft.com/office/powerpoint/2010/main" val="2591827434"/>
+                <p14:modId xmlns:p14="http://schemas.microsoft.com/office/powerpoint/2010/main" val="4034481148"/>
               </p:ext>
             </p:extLst>
           </p:nvPr>
@@ -5256,7 +5254,7 @@
         </p:nvSpPr>
         <p:spPr>
           <a:xfrm>
-            <a:off x="2113534" y="2176701"/>
+            <a:off x="1905715" y="2013963"/>
             <a:ext cx="324000" cy="324000"/>
           </a:xfrm>
           <a:prstGeom prst="ellipse">
@@ -5317,7 +5315,7 @@
         </p:nvSpPr>
         <p:spPr>
           <a:xfrm>
-            <a:off x="6357552" y="2176701"/>
+            <a:off x="5891034" y="2015911"/>
             <a:ext cx="324000" cy="324000"/>
           </a:xfrm>
           <a:prstGeom prst="ellipse">
@@ -5378,7 +5376,7 @@
         </p:nvSpPr>
         <p:spPr>
           <a:xfrm>
-            <a:off x="7220709" y="2176701"/>
+            <a:off x="6685143" y="2020996"/>
             <a:ext cx="324000" cy="324000"/>
           </a:xfrm>
           <a:prstGeom prst="ellipse">
@@ -5439,7 +5437,7 @@
         </p:nvSpPr>
         <p:spPr>
           <a:xfrm>
-            <a:off x="7789370" y="2177911"/>
+            <a:off x="7415297" y="2015911"/>
             <a:ext cx="324000" cy="324000"/>
           </a:xfrm>
           <a:prstGeom prst="ellipse">
@@ -5516,7 +5514,7 @@
       </p:grpSpPr>
       <p:pic>
         <p:nvPicPr>
-          <p:cNvPr id="6" name="그림 5" descr="텍스트, 스크린샷, 소프트웨어, 컴퓨터 아이콘이(가) 표시된 사진&#10;&#10;AI가 생성한 콘텐츠는 부정확할 수 있습니다.">
+          <p:cNvPr id="6" name="그림 5">
             <a:extLst>
               <a:ext uri="{FF2B5EF4-FFF2-40B4-BE49-F238E27FC236}">
                 <a16:creationId xmlns:a16="http://schemas.microsoft.com/office/drawing/2014/main" id="{EE3BC58B-D548-E5EA-CF2D-4D872053AE50}"/>
@@ -5536,14 +5534,13 @@
               </a:ext>
             </a:extLst>
           </a:blip>
-          <a:stretch>
-            <a:fillRect/>
-          </a:stretch>
+          <a:srcRect/>
+          <a:stretch/>
         </p:blipFill>
         <p:spPr>
           <a:xfrm>
-            <a:off x="363516" y="1745672"/>
-            <a:ext cx="8641587" cy="4862946"/>
+            <a:off x="363516" y="1797133"/>
+            <a:ext cx="8641587" cy="4760023"/>
           </a:xfrm>
           <a:prstGeom prst="rect">
             <a:avLst/>
@@ -6551,14 +6548,14 @@
           <p:nvPr>
             <p:extLst>
               <p:ext uri="{D42A27DB-BD31-4B8C-83A1-F6EECF244321}">
-                <p14:modId xmlns:p14="http://schemas.microsoft.com/office/powerpoint/2010/main" val="3191102460"/>
+                <p14:modId xmlns:p14="http://schemas.microsoft.com/office/powerpoint/2010/main" val="3994009129"/>
               </p:ext>
             </p:extLst>
           </p:nvPr>
         </p:nvGraphicFramePr>
         <p:xfrm>
           <a:off x="9221188" y="826547"/>
-          <a:ext cx="2607296" cy="2766960"/>
+          <a:ext cx="2607296" cy="3378960"/>
         </p:xfrm>
         <a:graphic>
           <a:graphicData uri="http://schemas.openxmlformats.org/drawingml/2006/table">
@@ -6937,6 +6934,122 @@
                   </a:ext>
                 </a:extLst>
               </a:tr>
+              <a:tr h="612000">
+                <a:tc>
+                  <a:txBody>
+                    <a:bodyPr/>
+                    <a:lstStyle/>
+                    <a:p>
+                      <a:pPr algn="ctr" latinLnBrk="1"/>
+                      <a:r>
+                        <a:rPr lang="en-US" altLang="ko-KR" sz="1200"/>
+                        <a:t>3</a:t>
+                      </a:r>
+                      <a:endParaRPr lang="ko-KR" altLang="en-US" sz="1200"/>
+                    </a:p>
+                  </a:txBody>
+                  <a:tcPr>
+                    <a:lnL w="12700" cap="flat" cmpd="sng" algn="ctr">
+                      <a:solidFill>
+                        <a:schemeClr val="tx1"/>
+                      </a:solidFill>
+                      <a:prstDash val="solid"/>
+                      <a:round/>
+                      <a:headEnd type="none" w="med" len="med"/>
+                      <a:tailEnd type="none" w="med" len="med"/>
+                    </a:lnL>
+                    <a:lnR w="12700" cap="flat" cmpd="sng" algn="ctr">
+                      <a:solidFill>
+                        <a:schemeClr val="tx1"/>
+                      </a:solidFill>
+                      <a:prstDash val="solid"/>
+                      <a:round/>
+                      <a:headEnd type="none" w="med" len="med"/>
+                      <a:tailEnd type="none" w="med" len="med"/>
+                    </a:lnR>
+                    <a:lnT w="12700" cap="flat" cmpd="sng" algn="ctr">
+                      <a:solidFill>
+                        <a:schemeClr val="tx1"/>
+                      </a:solidFill>
+                      <a:prstDash val="solid"/>
+                      <a:round/>
+                      <a:headEnd type="none" w="med" len="med"/>
+                      <a:tailEnd type="none" w="med" len="med"/>
+                    </a:lnT>
+                    <a:lnB w="12700" cap="flat" cmpd="sng" algn="ctr">
+                      <a:solidFill>
+                        <a:schemeClr val="tx1"/>
+                      </a:solidFill>
+                      <a:prstDash val="solid"/>
+                      <a:round/>
+                      <a:headEnd type="none" w="med" len="med"/>
+                      <a:tailEnd type="none" w="med" len="med"/>
+                    </a:lnB>
+                    <a:solidFill>
+                      <a:schemeClr val="bg1"/>
+                    </a:solidFill>
+                  </a:tcPr>
+                </a:tc>
+                <a:tc>
+                  <a:txBody>
+                    <a:bodyPr/>
+                    <a:lstStyle/>
+                    <a:p>
+                      <a:pPr algn="l" latinLnBrk="1"/>
+                      <a:r>
+                        <a:rPr lang="ko-KR" altLang="en-US" sz="1200"/>
+                        <a:t>입력 데이터가 없을 때 표시되는 화면</a:t>
+                      </a:r>
+                    </a:p>
+                  </a:txBody>
+                  <a:tcPr anchor="ctr">
+                    <a:lnL w="12700" cap="flat" cmpd="sng" algn="ctr">
+                      <a:solidFill>
+                        <a:schemeClr val="tx1"/>
+                      </a:solidFill>
+                      <a:prstDash val="solid"/>
+                      <a:round/>
+                      <a:headEnd type="none" w="med" len="med"/>
+                      <a:tailEnd type="none" w="med" len="med"/>
+                    </a:lnL>
+                    <a:lnR w="12700" cap="flat" cmpd="sng" algn="ctr">
+                      <a:solidFill>
+                        <a:schemeClr val="tx1"/>
+                      </a:solidFill>
+                      <a:prstDash val="solid"/>
+                      <a:round/>
+                      <a:headEnd type="none" w="med" len="med"/>
+                      <a:tailEnd type="none" w="med" len="med"/>
+                    </a:lnR>
+                    <a:lnT w="12700" cap="flat" cmpd="sng" algn="ctr">
+                      <a:solidFill>
+                        <a:schemeClr val="tx1"/>
+                      </a:solidFill>
+                      <a:prstDash val="solid"/>
+                      <a:round/>
+                      <a:headEnd type="none" w="med" len="med"/>
+                      <a:tailEnd type="none" w="med" len="med"/>
+                    </a:lnT>
+                    <a:lnB w="12700" cap="flat" cmpd="sng" algn="ctr">
+                      <a:solidFill>
+                        <a:schemeClr val="tx1"/>
+                      </a:solidFill>
+                      <a:prstDash val="solid"/>
+                      <a:round/>
+                      <a:headEnd type="none" w="med" len="med"/>
+                      <a:tailEnd type="none" w="med" len="med"/>
+                    </a:lnB>
+                    <a:solidFill>
+                      <a:schemeClr val="bg1"/>
+                    </a:solidFill>
+                  </a:tcPr>
+                </a:tc>
+                <a:extLst>
+                  <a:ext uri="{0D108BD9-81ED-4DB2-BD59-A6C34878D82A}">
+                    <a16:rowId xmlns:a16="http://schemas.microsoft.com/office/drawing/2014/main" val="23029993"/>
+                  </a:ext>
+                </a:extLst>
+              </a:tr>
               <a:tr h="360000">
                 <a:tc gridSpan="2">
                   <a:txBody>
@@ -7076,15 +7189,15 @@
                       <a:pPr algn="ctr" latinLnBrk="1"/>
                       <a:r>
                         <a:rPr lang="ko-KR" altLang="en-US" sz="1200"/>
-                        <a:t>위에 </a:t>
+                        <a:t>위에 사용자 검색</a:t>
                       </a:r>
                       <a:r>
                         <a:rPr lang="en-US" altLang="ko-KR" sz="1200"/>
-                        <a:t>Look up, Predict</a:t>
+                        <a:t>, </a:t>
                       </a:r>
                       <a:r>
                         <a:rPr lang="ko-KR" altLang="en-US" sz="1200"/>
-                        <a:t>는 메인 페이지의 기능과 동일</a:t>
+                        <a:t>예측하기는 메인 페이지의 기능과 동일</a:t>
                       </a:r>
                       <a:endParaRPr lang="en-US" altLang="ko-KR" sz="1200"/>
                     </a:p>
@@ -7219,7 +7332,7 @@
         </p:nvSpPr>
         <p:spPr>
           <a:xfrm>
-            <a:off x="6978071" y="5642139"/>
+            <a:off x="3575791" y="4626799"/>
             <a:ext cx="324000" cy="324000"/>
           </a:xfrm>
           <a:prstGeom prst="ellipse">
@@ -7280,7 +7393,7 @@
         </p:nvSpPr>
         <p:spPr>
           <a:xfrm>
-            <a:off x="1229323" y="3184753"/>
+            <a:off x="825563" y="2727553"/>
             <a:ext cx="324000" cy="324000"/>
           </a:xfrm>
           <a:prstGeom prst="ellipse">
@@ -7325,6 +7438,67 @@
           </a:p>
         </p:txBody>
       </p:sp>
+      <p:sp>
+        <p:nvSpPr>
+          <p:cNvPr id="3" name="타원 2">
+            <a:extLst>
+              <a:ext uri="{FF2B5EF4-FFF2-40B4-BE49-F238E27FC236}">
+                <a16:creationId xmlns:a16="http://schemas.microsoft.com/office/drawing/2014/main" id="{A8207B3F-6E71-29FA-8D7B-37BA791680C0}"/>
+              </a:ext>
+            </a:extLst>
+          </p:cNvPr>
+          <p:cNvSpPr>
+            <a:spLocks noChangeAspect="1"/>
+          </p:cNvSpPr>
+          <p:nvPr/>
+        </p:nvSpPr>
+        <p:spPr>
+          <a:xfrm>
+            <a:off x="4683516" y="2192027"/>
+            <a:ext cx="324000" cy="324000"/>
+          </a:xfrm>
+          <a:prstGeom prst="ellipse">
+            <a:avLst/>
+          </a:prstGeom>
+          <a:solidFill>
+            <a:srgbClr val="C00000">
+              <a:alpha val="60000"/>
+            </a:srgbClr>
+          </a:solidFill>
+        </p:spPr>
+        <p:style>
+          <a:lnRef idx="2">
+            <a:schemeClr val="accent1">
+              <a:shade val="15000"/>
+            </a:schemeClr>
+          </a:lnRef>
+          <a:fillRef idx="1">
+            <a:schemeClr val="accent1"/>
+          </a:fillRef>
+          <a:effectRef idx="0">
+            <a:schemeClr val="accent1"/>
+          </a:effectRef>
+          <a:fontRef idx="minor">
+            <a:schemeClr val="lt1"/>
+          </a:fontRef>
+        </p:style>
+        <p:txBody>
+          <a:bodyPr rtlCol="0" anchor="ctr"/>
+          <a:lstStyle/>
+          <a:p>
+            <a:pPr algn="ctr"/>
+            <a:r>
+              <a:rPr lang="en-US" altLang="ko-KR" sz="2000">
+                <a:latin typeface="+mn-ea"/>
+              </a:rPr>
+              <a:t>3</a:t>
+            </a:r>
+            <a:endParaRPr lang="ko-KR" altLang="en-US" sz="2000">
+              <a:latin typeface="+mn-ea"/>
+            </a:endParaRPr>
+          </a:p>
+        </p:txBody>
+      </p:sp>
     </p:spTree>
     <p:extLst>
       <p:ext uri="{BB962C8B-B14F-4D97-AF65-F5344CB8AC3E}">
@@ -7357,7 +7531,7 @@
       </p:grpSpPr>
       <p:pic>
         <p:nvPicPr>
-          <p:cNvPr id="8" name="그림 7" descr="텍스트, 스크린샷, 직사각형, 번호이(가) 표시된 사진&#10;&#10;AI가 생성한 콘텐츠는 부정확할 수 있습니다.">
+          <p:cNvPr id="8" name="그림 7">
             <a:extLst>
               <a:ext uri="{FF2B5EF4-FFF2-40B4-BE49-F238E27FC236}">
                 <a16:creationId xmlns:a16="http://schemas.microsoft.com/office/drawing/2014/main" id="{8CA43BA6-EF96-A900-FBF2-6F9942429EE6}"/>
@@ -7377,14 +7551,13 @@
               </a:ext>
             </a:extLst>
           </a:blip>
-          <a:stretch>
-            <a:fillRect/>
-          </a:stretch>
+          <a:srcRect/>
+          <a:stretch/>
         </p:blipFill>
         <p:spPr>
           <a:xfrm>
-            <a:off x="363516" y="1757546"/>
-            <a:ext cx="8639999" cy="4862053"/>
+            <a:off x="363516" y="1924547"/>
+            <a:ext cx="8639999" cy="3857020"/>
           </a:xfrm>
           <a:prstGeom prst="rect">
             <a:avLst/>
@@ -8392,14 +8565,14 @@
           <p:nvPr>
             <p:extLst>
               <p:ext uri="{D42A27DB-BD31-4B8C-83A1-F6EECF244321}">
-                <p14:modId xmlns:p14="http://schemas.microsoft.com/office/powerpoint/2010/main" val="1088583924"/>
+                <p14:modId xmlns:p14="http://schemas.microsoft.com/office/powerpoint/2010/main" val="3420662339"/>
               </p:ext>
             </p:extLst>
           </p:nvPr>
         </p:nvGraphicFramePr>
         <p:xfrm>
           <a:off x="9221188" y="826547"/>
-          <a:ext cx="2607296" cy="3196080"/>
+          <a:ext cx="2607296" cy="2196000"/>
         </p:xfrm>
         <a:graphic>
           <a:graphicData uri="http://schemas.openxmlformats.org/drawingml/2006/table">
@@ -8882,276 +9055,6 @@
                   </a:ext>
                 </a:extLst>
               </a:tr>
-              <a:tr h="360000">
-                <a:tc gridSpan="2">
-                  <a:txBody>
-                    <a:bodyPr/>
-                    <a:lstStyle/>
-                    <a:p>
-                      <a:pPr marL="0" marR="0" lvl="0" indent="0" algn="ctr" defTabSz="914400" rtl="0" eaLnBrk="1" fontAlgn="auto" latinLnBrk="1" hangingPunct="1">
-                        <a:lnSpc>
-                          <a:spcPct val="100000"/>
-                        </a:lnSpc>
-                        <a:spcBef>
-                          <a:spcPts val="0"/>
-                        </a:spcBef>
-                        <a:spcAft>
-                          <a:spcPts val="0"/>
-                        </a:spcAft>
-                        <a:buClrTx/>
-                        <a:buSzTx/>
-                        <a:buFontTx/>
-                        <a:buNone/>
-                        <a:tabLst/>
-                        <a:defRPr/>
-                      </a:pPr>
-                      <a:r>
-                        <a:rPr lang="en-US" altLang="ko-KR" sz="1200"/>
-                        <a:t>Check Point</a:t>
-                      </a:r>
-                    </a:p>
-                  </a:txBody>
-                  <a:tcPr anchor="ctr">
-                    <a:lnL w="12700" cap="flat" cmpd="sng" algn="ctr">
-                      <a:solidFill>
-                        <a:schemeClr val="tx1"/>
-                      </a:solidFill>
-                      <a:prstDash val="solid"/>
-                      <a:round/>
-                      <a:headEnd type="none" w="med" len="med"/>
-                      <a:tailEnd type="none" w="med" len="med"/>
-                    </a:lnL>
-                    <a:lnR w="12700" cap="flat" cmpd="sng" algn="ctr">
-                      <a:solidFill>
-                        <a:schemeClr val="tx1"/>
-                      </a:solidFill>
-                      <a:prstDash val="solid"/>
-                      <a:round/>
-                      <a:headEnd type="none" w="med" len="med"/>
-                      <a:tailEnd type="none" w="med" len="med"/>
-                    </a:lnR>
-                    <a:lnT w="12700" cap="flat" cmpd="sng" algn="ctr">
-                      <a:solidFill>
-                        <a:schemeClr val="tx1"/>
-                      </a:solidFill>
-                      <a:prstDash val="solid"/>
-                      <a:round/>
-                      <a:headEnd type="none" w="med" len="med"/>
-                      <a:tailEnd type="none" w="med" len="med"/>
-                    </a:lnT>
-                    <a:lnB w="12700" cap="flat" cmpd="sng" algn="ctr">
-                      <a:solidFill>
-                        <a:schemeClr val="tx1"/>
-                      </a:solidFill>
-                      <a:prstDash val="solid"/>
-                      <a:round/>
-                      <a:headEnd type="none" w="med" len="med"/>
-                      <a:tailEnd type="none" w="med" len="med"/>
-                    </a:lnB>
-                    <a:solidFill>
-                      <a:schemeClr val="bg1">
-                        <a:lumMod val="85000"/>
-                      </a:schemeClr>
-                    </a:solidFill>
-                  </a:tcPr>
-                </a:tc>
-                <a:tc hMerge="1">
-                  <a:txBody>
-                    <a:bodyPr/>
-                    <a:lstStyle/>
-                    <a:p>
-                      <a:pPr algn="l" latinLnBrk="1"/>
-                      <a:endParaRPr lang="ko-KR" altLang="en-US" sz="1200"/>
-                    </a:p>
-                  </a:txBody>
-                  <a:tcPr anchor="ctr">
-                    <a:lnL w="12700" cap="flat" cmpd="sng" algn="ctr">
-                      <a:solidFill>
-                        <a:schemeClr val="tx1"/>
-                      </a:solidFill>
-                      <a:prstDash val="solid"/>
-                      <a:round/>
-                      <a:headEnd type="none" w="med" len="med"/>
-                      <a:tailEnd type="none" w="med" len="med"/>
-                    </a:lnL>
-                    <a:lnR w="12700" cap="flat" cmpd="sng" algn="ctr">
-                      <a:solidFill>
-                        <a:schemeClr val="tx1"/>
-                      </a:solidFill>
-                      <a:prstDash val="solid"/>
-                      <a:round/>
-                      <a:headEnd type="none" w="med" len="med"/>
-                      <a:tailEnd type="none" w="med" len="med"/>
-                    </a:lnR>
-                    <a:lnT w="12700" cap="flat" cmpd="sng" algn="ctr">
-                      <a:solidFill>
-                        <a:schemeClr val="tx1"/>
-                      </a:solidFill>
-                      <a:prstDash val="solid"/>
-                      <a:round/>
-                      <a:headEnd type="none" w="med" len="med"/>
-                      <a:tailEnd type="none" w="med" len="med"/>
-                    </a:lnT>
-                    <a:lnB w="12700" cap="flat" cmpd="sng" algn="ctr">
-                      <a:solidFill>
-                        <a:schemeClr val="tx1"/>
-                      </a:solidFill>
-                      <a:prstDash val="solid"/>
-                      <a:round/>
-                      <a:headEnd type="none" w="med" len="med"/>
-                      <a:tailEnd type="none" w="med" len="med"/>
-                    </a:lnB>
-                    <a:solidFill>
-                      <a:schemeClr val="bg1"/>
-                    </a:solidFill>
-                  </a:tcPr>
-                </a:tc>
-                <a:extLst>
-                  <a:ext uri="{0D108BD9-81ED-4DB2-BD59-A6C34878D82A}">
-                    <a16:rowId xmlns:a16="http://schemas.microsoft.com/office/drawing/2014/main" val="2275643079"/>
-                  </a:ext>
-                </a:extLst>
-              </a:tr>
-              <a:tr h="612000">
-                <a:tc gridSpan="2">
-                  <a:txBody>
-                    <a:bodyPr/>
-                    <a:lstStyle/>
-                    <a:p>
-                      <a:pPr marL="0" marR="0" lvl="0" indent="0" algn="ctr" defTabSz="914400" rtl="0" eaLnBrk="1" fontAlgn="auto" latinLnBrk="1" hangingPunct="1">
-                        <a:lnSpc>
-                          <a:spcPct val="100000"/>
-                        </a:lnSpc>
-                        <a:spcBef>
-                          <a:spcPts val="0"/>
-                        </a:spcBef>
-                        <a:spcAft>
-                          <a:spcPts val="0"/>
-                        </a:spcAft>
-                        <a:buClrTx/>
-                        <a:buSzTx/>
-                        <a:buFontTx/>
-                        <a:buNone/>
-                        <a:tabLst/>
-                        <a:defRPr/>
-                      </a:pPr>
-                      <a:r>
-                        <a:rPr lang="ko-KR" altLang="en-US" sz="1200"/>
-                        <a:t>위에 </a:t>
-                      </a:r>
-                      <a:r>
-                        <a:rPr lang="en-US" altLang="ko-KR" sz="1200"/>
-                        <a:t>Look up, Predict</a:t>
-                      </a:r>
-                      <a:r>
-                        <a:rPr lang="ko-KR" altLang="en-US" sz="1200"/>
-                        <a:t>는 메인 페이지의 기능과 동일</a:t>
-                      </a:r>
-                    </a:p>
-                    <a:p>
-                      <a:pPr algn="ctr" latinLnBrk="1"/>
-                      <a:endParaRPr lang="ko-KR" altLang="en-US" sz="1200"/>
-                    </a:p>
-                  </a:txBody>
-                  <a:tcPr>
-                    <a:lnL w="12700" cap="flat" cmpd="sng" algn="ctr">
-                      <a:solidFill>
-                        <a:schemeClr val="tx1"/>
-                      </a:solidFill>
-                      <a:prstDash val="solid"/>
-                      <a:round/>
-                      <a:headEnd type="none" w="med" len="med"/>
-                      <a:tailEnd type="none" w="med" len="med"/>
-                    </a:lnL>
-                    <a:lnR w="12700" cap="flat" cmpd="sng" algn="ctr">
-                      <a:solidFill>
-                        <a:schemeClr val="tx1"/>
-                      </a:solidFill>
-                      <a:prstDash val="solid"/>
-                      <a:round/>
-                      <a:headEnd type="none" w="med" len="med"/>
-                      <a:tailEnd type="none" w="med" len="med"/>
-                    </a:lnR>
-                    <a:lnT w="12700" cap="flat" cmpd="sng" algn="ctr">
-                      <a:solidFill>
-                        <a:schemeClr val="tx1"/>
-                      </a:solidFill>
-                      <a:prstDash val="solid"/>
-                      <a:round/>
-                      <a:headEnd type="none" w="med" len="med"/>
-                      <a:tailEnd type="none" w="med" len="med"/>
-                    </a:lnT>
-                    <a:lnB w="12700" cap="flat" cmpd="sng" algn="ctr">
-                      <a:solidFill>
-                        <a:schemeClr val="tx1"/>
-                      </a:solidFill>
-                      <a:prstDash val="solid"/>
-                      <a:round/>
-                      <a:headEnd type="none" w="med" len="med"/>
-                      <a:tailEnd type="none" w="med" len="med"/>
-                    </a:lnB>
-                    <a:solidFill>
-                      <a:schemeClr val="bg1"/>
-                    </a:solidFill>
-                  </a:tcPr>
-                </a:tc>
-                <a:tc hMerge="1">
-                  <a:txBody>
-                    <a:bodyPr/>
-                    <a:lstStyle/>
-                    <a:p>
-                      <a:pPr algn="l" latinLnBrk="1"/>
-                      <a:endParaRPr lang="ko-KR" altLang="en-US" sz="1200"/>
-                    </a:p>
-                  </a:txBody>
-                  <a:tcPr anchor="ctr">
-                    <a:lnL w="12700" cap="flat" cmpd="sng" algn="ctr">
-                      <a:solidFill>
-                        <a:schemeClr val="tx1"/>
-                      </a:solidFill>
-                      <a:prstDash val="solid"/>
-                      <a:round/>
-                      <a:headEnd type="none" w="med" len="med"/>
-                      <a:tailEnd type="none" w="med" len="med"/>
-                    </a:lnL>
-                    <a:lnR w="12700" cap="flat" cmpd="sng" algn="ctr">
-                      <a:solidFill>
-                        <a:schemeClr val="tx1"/>
-                      </a:solidFill>
-                      <a:prstDash val="solid"/>
-                      <a:round/>
-                      <a:headEnd type="none" w="med" len="med"/>
-                      <a:tailEnd type="none" w="med" len="med"/>
-                    </a:lnR>
-                    <a:lnT w="12700" cap="flat" cmpd="sng" algn="ctr">
-                      <a:solidFill>
-                        <a:schemeClr val="tx1"/>
-                      </a:solidFill>
-                      <a:prstDash val="solid"/>
-                      <a:round/>
-                      <a:headEnd type="none" w="med" len="med"/>
-                      <a:tailEnd type="none" w="med" len="med"/>
-                    </a:lnT>
-                    <a:lnB w="12700" cap="flat" cmpd="sng" algn="ctr">
-                      <a:solidFill>
-                        <a:schemeClr val="tx1"/>
-                      </a:solidFill>
-                      <a:prstDash val="solid"/>
-                      <a:round/>
-                      <a:headEnd type="none" w="med" len="med"/>
-                      <a:tailEnd type="none" w="med" len="med"/>
-                    </a:lnB>
-                    <a:solidFill>
-                      <a:schemeClr val="bg1"/>
-                    </a:solidFill>
-                  </a:tcPr>
-                </a:tc>
-                <a:extLst>
-                  <a:ext uri="{0D108BD9-81ED-4DB2-BD59-A6C34878D82A}">
-                    <a16:rowId xmlns:a16="http://schemas.microsoft.com/office/drawing/2014/main" val="1885486421"/>
-                  </a:ext>
-                </a:extLst>
-              </a:tr>
             </a:tbl>
           </a:graphicData>
         </a:graphic>
@@ -9172,7 +9075,7 @@
         </p:nvSpPr>
         <p:spPr>
           <a:xfrm>
-            <a:off x="7138388" y="5983952"/>
+            <a:off x="3730169" y="4580980"/>
             <a:ext cx="324000" cy="324000"/>
           </a:xfrm>
           <a:prstGeom prst="ellipse">
@@ -9233,7 +9136,7 @@
         </p:nvSpPr>
         <p:spPr>
           <a:xfrm>
-            <a:off x="1229323" y="3184753"/>
+            <a:off x="831415" y="2442545"/>
             <a:ext cx="324000" cy="324000"/>
           </a:xfrm>
           <a:prstGeom prst="ellipse">
@@ -9294,7 +9197,7 @@
         </p:nvSpPr>
         <p:spPr>
           <a:xfrm>
-            <a:off x="1229323" y="5983952"/>
+            <a:off x="831415" y="4580980"/>
             <a:ext cx="324000" cy="324000"/>
           </a:xfrm>
           <a:prstGeom prst="ellipse">
@@ -9371,7 +9274,7 @@
       </p:grpSpPr>
       <p:pic>
         <p:nvPicPr>
-          <p:cNvPr id="6" name="그림 5" descr="텍스트, 스크린샷, 소프트웨어, 컴퓨터 아이콘이(가) 표시된 사진&#10;&#10;AI가 생성한 콘텐츠는 부정확할 수 있습니다.">
+          <p:cNvPr id="6" name="그림 5">
             <a:extLst>
               <a:ext uri="{FF2B5EF4-FFF2-40B4-BE49-F238E27FC236}">
                 <a16:creationId xmlns:a16="http://schemas.microsoft.com/office/drawing/2014/main" id="{38C42CA7-6E1F-9999-9906-824F65D2A312}"/>
@@ -9391,14 +9294,13 @@
               </a:ext>
             </a:extLst>
           </a:blip>
-          <a:stretch>
-            <a:fillRect/>
-          </a:stretch>
+          <a:srcRect/>
+          <a:stretch/>
         </p:blipFill>
         <p:spPr>
           <a:xfrm>
-            <a:off x="363516" y="1728382"/>
-            <a:ext cx="8640000" cy="4862054"/>
+            <a:off x="363516" y="1924547"/>
+            <a:ext cx="8640000" cy="3857021"/>
           </a:xfrm>
           <a:prstGeom prst="rect">
             <a:avLst/>
@@ -10406,14 +10308,14 @@
           <p:nvPr>
             <p:extLst>
               <p:ext uri="{D42A27DB-BD31-4B8C-83A1-F6EECF244321}">
-                <p14:modId xmlns:p14="http://schemas.microsoft.com/office/powerpoint/2010/main" val="2869317801"/>
+                <p14:modId xmlns:p14="http://schemas.microsoft.com/office/powerpoint/2010/main" val="933951273"/>
               </p:ext>
             </p:extLst>
           </p:nvPr>
         </p:nvGraphicFramePr>
         <p:xfrm>
           <a:off x="9221188" y="826547"/>
-          <a:ext cx="2607296" cy="3196080"/>
+          <a:ext cx="2607296" cy="2196000"/>
         </p:xfrm>
         <a:graphic>
           <a:graphicData uri="http://schemas.openxmlformats.org/drawingml/2006/table">
@@ -10916,276 +10818,6 @@
                   </a:ext>
                 </a:extLst>
               </a:tr>
-              <a:tr h="360000">
-                <a:tc gridSpan="2">
-                  <a:txBody>
-                    <a:bodyPr/>
-                    <a:lstStyle/>
-                    <a:p>
-                      <a:pPr marL="0" marR="0" lvl="0" indent="0" algn="ctr" defTabSz="914400" rtl="0" eaLnBrk="1" fontAlgn="auto" latinLnBrk="1" hangingPunct="1">
-                        <a:lnSpc>
-                          <a:spcPct val="100000"/>
-                        </a:lnSpc>
-                        <a:spcBef>
-                          <a:spcPts val="0"/>
-                        </a:spcBef>
-                        <a:spcAft>
-                          <a:spcPts val="0"/>
-                        </a:spcAft>
-                        <a:buClrTx/>
-                        <a:buSzTx/>
-                        <a:buFontTx/>
-                        <a:buNone/>
-                        <a:tabLst/>
-                        <a:defRPr/>
-                      </a:pPr>
-                      <a:r>
-                        <a:rPr lang="en-US" altLang="ko-KR" sz="1200"/>
-                        <a:t>Check Point</a:t>
-                      </a:r>
-                    </a:p>
-                  </a:txBody>
-                  <a:tcPr anchor="ctr">
-                    <a:lnL w="12700" cap="flat" cmpd="sng" algn="ctr">
-                      <a:solidFill>
-                        <a:schemeClr val="tx1"/>
-                      </a:solidFill>
-                      <a:prstDash val="solid"/>
-                      <a:round/>
-                      <a:headEnd type="none" w="med" len="med"/>
-                      <a:tailEnd type="none" w="med" len="med"/>
-                    </a:lnL>
-                    <a:lnR w="12700" cap="flat" cmpd="sng" algn="ctr">
-                      <a:solidFill>
-                        <a:schemeClr val="tx1"/>
-                      </a:solidFill>
-                      <a:prstDash val="solid"/>
-                      <a:round/>
-                      <a:headEnd type="none" w="med" len="med"/>
-                      <a:tailEnd type="none" w="med" len="med"/>
-                    </a:lnR>
-                    <a:lnT w="12700" cap="flat" cmpd="sng" algn="ctr">
-                      <a:solidFill>
-                        <a:schemeClr val="tx1"/>
-                      </a:solidFill>
-                      <a:prstDash val="solid"/>
-                      <a:round/>
-                      <a:headEnd type="none" w="med" len="med"/>
-                      <a:tailEnd type="none" w="med" len="med"/>
-                    </a:lnT>
-                    <a:lnB w="12700" cap="flat" cmpd="sng" algn="ctr">
-                      <a:solidFill>
-                        <a:schemeClr val="tx1"/>
-                      </a:solidFill>
-                      <a:prstDash val="solid"/>
-                      <a:round/>
-                      <a:headEnd type="none" w="med" len="med"/>
-                      <a:tailEnd type="none" w="med" len="med"/>
-                    </a:lnB>
-                    <a:solidFill>
-                      <a:schemeClr val="bg1">
-                        <a:lumMod val="85000"/>
-                      </a:schemeClr>
-                    </a:solidFill>
-                  </a:tcPr>
-                </a:tc>
-                <a:tc hMerge="1">
-                  <a:txBody>
-                    <a:bodyPr/>
-                    <a:lstStyle/>
-                    <a:p>
-                      <a:pPr algn="l" latinLnBrk="1"/>
-                      <a:endParaRPr lang="ko-KR" altLang="en-US" sz="1200"/>
-                    </a:p>
-                  </a:txBody>
-                  <a:tcPr anchor="ctr">
-                    <a:lnL w="12700" cap="flat" cmpd="sng" algn="ctr">
-                      <a:solidFill>
-                        <a:schemeClr val="tx1"/>
-                      </a:solidFill>
-                      <a:prstDash val="solid"/>
-                      <a:round/>
-                      <a:headEnd type="none" w="med" len="med"/>
-                      <a:tailEnd type="none" w="med" len="med"/>
-                    </a:lnL>
-                    <a:lnR w="12700" cap="flat" cmpd="sng" algn="ctr">
-                      <a:solidFill>
-                        <a:schemeClr val="tx1"/>
-                      </a:solidFill>
-                      <a:prstDash val="solid"/>
-                      <a:round/>
-                      <a:headEnd type="none" w="med" len="med"/>
-                      <a:tailEnd type="none" w="med" len="med"/>
-                    </a:lnR>
-                    <a:lnT w="12700" cap="flat" cmpd="sng" algn="ctr">
-                      <a:solidFill>
-                        <a:schemeClr val="tx1"/>
-                      </a:solidFill>
-                      <a:prstDash val="solid"/>
-                      <a:round/>
-                      <a:headEnd type="none" w="med" len="med"/>
-                      <a:tailEnd type="none" w="med" len="med"/>
-                    </a:lnT>
-                    <a:lnB w="12700" cap="flat" cmpd="sng" algn="ctr">
-                      <a:solidFill>
-                        <a:schemeClr val="tx1"/>
-                      </a:solidFill>
-                      <a:prstDash val="solid"/>
-                      <a:round/>
-                      <a:headEnd type="none" w="med" len="med"/>
-                      <a:tailEnd type="none" w="med" len="med"/>
-                    </a:lnB>
-                    <a:solidFill>
-                      <a:schemeClr val="bg1"/>
-                    </a:solidFill>
-                  </a:tcPr>
-                </a:tc>
-                <a:extLst>
-                  <a:ext uri="{0D108BD9-81ED-4DB2-BD59-A6C34878D82A}">
-                    <a16:rowId xmlns:a16="http://schemas.microsoft.com/office/drawing/2014/main" val="2275643079"/>
-                  </a:ext>
-                </a:extLst>
-              </a:tr>
-              <a:tr h="612000">
-                <a:tc gridSpan="2">
-                  <a:txBody>
-                    <a:bodyPr/>
-                    <a:lstStyle/>
-                    <a:p>
-                      <a:pPr marL="0" marR="0" lvl="0" indent="0" algn="ctr" defTabSz="914400" rtl="0" eaLnBrk="1" fontAlgn="auto" latinLnBrk="1" hangingPunct="1">
-                        <a:lnSpc>
-                          <a:spcPct val="100000"/>
-                        </a:lnSpc>
-                        <a:spcBef>
-                          <a:spcPts val="0"/>
-                        </a:spcBef>
-                        <a:spcAft>
-                          <a:spcPts val="0"/>
-                        </a:spcAft>
-                        <a:buClrTx/>
-                        <a:buSzTx/>
-                        <a:buFontTx/>
-                        <a:buNone/>
-                        <a:tabLst/>
-                        <a:defRPr/>
-                      </a:pPr>
-                      <a:r>
-                        <a:rPr lang="ko-KR" altLang="en-US" sz="1200"/>
-                        <a:t>위에 </a:t>
-                      </a:r>
-                      <a:r>
-                        <a:rPr lang="en-US" altLang="ko-KR" sz="1200"/>
-                        <a:t>Look up, Predict</a:t>
-                      </a:r>
-                      <a:r>
-                        <a:rPr lang="ko-KR" altLang="en-US" sz="1200"/>
-                        <a:t>는 메인 페이지의 기능과 동일</a:t>
-                      </a:r>
-                    </a:p>
-                    <a:p>
-                      <a:pPr algn="ctr" latinLnBrk="1"/>
-                      <a:endParaRPr lang="ko-KR" altLang="en-US" sz="1200"/>
-                    </a:p>
-                  </a:txBody>
-                  <a:tcPr>
-                    <a:lnL w="12700" cap="flat" cmpd="sng" algn="ctr">
-                      <a:solidFill>
-                        <a:schemeClr val="tx1"/>
-                      </a:solidFill>
-                      <a:prstDash val="solid"/>
-                      <a:round/>
-                      <a:headEnd type="none" w="med" len="med"/>
-                      <a:tailEnd type="none" w="med" len="med"/>
-                    </a:lnL>
-                    <a:lnR w="12700" cap="flat" cmpd="sng" algn="ctr">
-                      <a:solidFill>
-                        <a:schemeClr val="tx1"/>
-                      </a:solidFill>
-                      <a:prstDash val="solid"/>
-                      <a:round/>
-                      <a:headEnd type="none" w="med" len="med"/>
-                      <a:tailEnd type="none" w="med" len="med"/>
-                    </a:lnR>
-                    <a:lnT w="12700" cap="flat" cmpd="sng" algn="ctr">
-                      <a:solidFill>
-                        <a:schemeClr val="tx1"/>
-                      </a:solidFill>
-                      <a:prstDash val="solid"/>
-                      <a:round/>
-                      <a:headEnd type="none" w="med" len="med"/>
-                      <a:tailEnd type="none" w="med" len="med"/>
-                    </a:lnT>
-                    <a:lnB w="12700" cap="flat" cmpd="sng" algn="ctr">
-                      <a:solidFill>
-                        <a:schemeClr val="tx1"/>
-                      </a:solidFill>
-                      <a:prstDash val="solid"/>
-                      <a:round/>
-                      <a:headEnd type="none" w="med" len="med"/>
-                      <a:tailEnd type="none" w="med" len="med"/>
-                    </a:lnB>
-                    <a:solidFill>
-                      <a:schemeClr val="bg1"/>
-                    </a:solidFill>
-                  </a:tcPr>
-                </a:tc>
-                <a:tc hMerge="1">
-                  <a:txBody>
-                    <a:bodyPr/>
-                    <a:lstStyle/>
-                    <a:p>
-                      <a:pPr algn="l" latinLnBrk="1"/>
-                      <a:endParaRPr lang="ko-KR" altLang="en-US" sz="1200"/>
-                    </a:p>
-                  </a:txBody>
-                  <a:tcPr anchor="ctr">
-                    <a:lnL w="12700" cap="flat" cmpd="sng" algn="ctr">
-                      <a:solidFill>
-                        <a:schemeClr val="tx1"/>
-                      </a:solidFill>
-                      <a:prstDash val="solid"/>
-                      <a:round/>
-                      <a:headEnd type="none" w="med" len="med"/>
-                      <a:tailEnd type="none" w="med" len="med"/>
-                    </a:lnL>
-                    <a:lnR w="12700" cap="flat" cmpd="sng" algn="ctr">
-                      <a:solidFill>
-                        <a:schemeClr val="tx1"/>
-                      </a:solidFill>
-                      <a:prstDash val="solid"/>
-                      <a:round/>
-                      <a:headEnd type="none" w="med" len="med"/>
-                      <a:tailEnd type="none" w="med" len="med"/>
-                    </a:lnR>
-                    <a:lnT w="12700" cap="flat" cmpd="sng" algn="ctr">
-                      <a:solidFill>
-                        <a:schemeClr val="tx1"/>
-                      </a:solidFill>
-                      <a:prstDash val="solid"/>
-                      <a:round/>
-                      <a:headEnd type="none" w="med" len="med"/>
-                      <a:tailEnd type="none" w="med" len="med"/>
-                    </a:lnT>
-                    <a:lnB w="12700" cap="flat" cmpd="sng" algn="ctr">
-                      <a:solidFill>
-                        <a:schemeClr val="tx1"/>
-                      </a:solidFill>
-                      <a:prstDash val="solid"/>
-                      <a:round/>
-                      <a:headEnd type="none" w="med" len="med"/>
-                      <a:tailEnd type="none" w="med" len="med"/>
-                    </a:lnB>
-                    <a:solidFill>
-                      <a:schemeClr val="bg1"/>
-                    </a:solidFill>
-                  </a:tcPr>
-                </a:tc>
-                <a:extLst>
-                  <a:ext uri="{0D108BD9-81ED-4DB2-BD59-A6C34878D82A}">
-                    <a16:rowId xmlns:a16="http://schemas.microsoft.com/office/drawing/2014/main" val="1885486421"/>
-                  </a:ext>
-                </a:extLst>
-              </a:tr>
             </a:tbl>
           </a:graphicData>
         </a:graphic>
@@ -11206,7 +10838,7 @@
         </p:nvSpPr>
         <p:spPr>
           <a:xfrm>
-            <a:off x="6794004" y="5869453"/>
+            <a:off x="3521626" y="4509728"/>
             <a:ext cx="324000" cy="324000"/>
           </a:xfrm>
           <a:prstGeom prst="ellipse">
@@ -11267,7 +10899,7 @@
         </p:nvSpPr>
         <p:spPr>
           <a:xfrm>
-            <a:off x="1229323" y="3105000"/>
+            <a:off x="878916" y="2460213"/>
             <a:ext cx="324000" cy="324000"/>
           </a:xfrm>
           <a:prstGeom prst="ellipse">
@@ -11328,7 +10960,7 @@
         </p:nvSpPr>
         <p:spPr>
           <a:xfrm>
-            <a:off x="1229323" y="5869453"/>
+            <a:off x="878916" y="4509728"/>
             <a:ext cx="324000" cy="324000"/>
           </a:xfrm>
           <a:prstGeom prst="ellipse">
@@ -11405,7 +11037,7 @@
       </p:grpSpPr>
       <p:pic>
         <p:nvPicPr>
-          <p:cNvPr id="8" name="그림 7" descr="텍스트, 스크린샷, 소프트웨어, 웹 페이지이(가) 표시된 사진&#10;&#10;AI가 생성한 콘텐츠는 부정확할 수 있습니다.">
+          <p:cNvPr id="8" name="그림 7">
             <a:extLst>
               <a:ext uri="{FF2B5EF4-FFF2-40B4-BE49-F238E27FC236}">
                 <a16:creationId xmlns:a16="http://schemas.microsoft.com/office/drawing/2014/main" id="{D61A098B-3AEA-169C-0B6F-593FC1BCF6C9}"/>
@@ -11425,14 +11057,13 @@
               </a:ext>
             </a:extLst>
           </a:blip>
-          <a:stretch>
-            <a:fillRect/>
-          </a:stretch>
+          <a:srcRect/>
+          <a:stretch/>
         </p:blipFill>
         <p:spPr>
           <a:xfrm>
-            <a:off x="361002" y="1781297"/>
-            <a:ext cx="8637486" cy="4857009"/>
+            <a:off x="363515" y="1669553"/>
+            <a:ext cx="8639999" cy="4970213"/>
           </a:xfrm>
           <a:prstGeom prst="rect">
             <a:avLst/>
@@ -11454,7 +11085,7 @@
           <p:nvPr>
             <p:extLst>
               <p:ext uri="{D42A27DB-BD31-4B8C-83A1-F6EECF244321}">
-                <p14:modId xmlns:p14="http://schemas.microsoft.com/office/powerpoint/2010/main" val="3680330369"/>
+                <p14:modId xmlns:p14="http://schemas.microsoft.com/office/powerpoint/2010/main" val="2420323580"/>
               </p:ext>
             </p:extLst>
           </p:nvPr>
@@ -11747,7 +11378,7 @@
                           <a:latin typeface="+mn-ea"/>
                           <a:ea typeface="+mn-ea"/>
                         </a:rPr>
-                        <a:t>UI-result_1</a:t>
+                        <a:t>UI-result</a:t>
                       </a:r>
                       <a:endParaRPr lang="ko-KR" altLang="en-US" sz="1200" b="0">
                         <a:solidFill>
@@ -12440,14 +12071,14 @@
           <p:nvPr>
             <p:extLst>
               <p:ext uri="{D42A27DB-BD31-4B8C-83A1-F6EECF244321}">
-                <p14:modId xmlns:p14="http://schemas.microsoft.com/office/powerpoint/2010/main" val="2948787063"/>
+                <p14:modId xmlns:p14="http://schemas.microsoft.com/office/powerpoint/2010/main" val="1603334515"/>
               </p:ext>
             </p:extLst>
           </p:nvPr>
         </p:nvGraphicFramePr>
         <p:xfrm>
           <a:off x="9221188" y="826547"/>
-          <a:ext cx="2607296" cy="4813920"/>
+          <a:ext cx="2607296" cy="3659040"/>
         </p:xfrm>
         <a:graphic>
           <a:graphicData uri="http://schemas.openxmlformats.org/drawingml/2006/table">
@@ -12615,30 +12246,28 @@
                     <a:bodyPr/>
                     <a:lstStyle/>
                     <a:p>
-                      <a:pPr algn="l" latinLnBrk="1"/>
+                      <a:pPr marL="0" marR="0" lvl="0" indent="0" algn="l" defTabSz="914400" rtl="0" eaLnBrk="1" fontAlgn="auto" latinLnBrk="1" hangingPunct="1">
+                        <a:lnSpc>
+                          <a:spcPct val="100000"/>
+                        </a:lnSpc>
+                        <a:spcBef>
+                          <a:spcPts val="0"/>
+                        </a:spcBef>
+                        <a:spcAft>
+                          <a:spcPts val="0"/>
+                        </a:spcAft>
+                        <a:buClrTx/>
+                        <a:buSzTx/>
+                        <a:buFontTx/>
+                        <a:buNone/>
+                        <a:tabLst/>
+                        <a:defRPr/>
+                      </a:pPr>
                       <a:r>
                         <a:rPr lang="ko-KR" altLang="en-US" sz="1200"/>
-                        <a:t>사용자 입력 데이터 저장 </a:t>
-                      </a:r>
-                      <a:r>
-                        <a:rPr lang="en-US" altLang="ko-KR" sz="1200"/>
-                        <a:t>ID</a:t>
-                      </a:r>
-                    </a:p>
-                    <a:p>
-                      <a:pPr algn="l" latinLnBrk="1"/>
-                      <a:r>
-                        <a:rPr lang="ko-KR" altLang="en-US" sz="1200"/>
-                        <a:t>상단 </a:t>
-                      </a:r>
-                      <a:r>
-                        <a:rPr lang="en-US" altLang="ko-KR" sz="1200"/>
-                        <a:t>Analysis ID</a:t>
-                      </a:r>
-                      <a:r>
-                        <a:rPr lang="ko-KR" altLang="en-US" sz="1200"/>
-                        <a:t>로 조회 가능</a:t>
-                      </a:r>
+                        <a:t>입력 데이터 수정</a:t>
+                      </a:r>
+                      <a:endParaRPr lang="en-US" altLang="ko-KR" sz="1200"/>
                     </a:p>
                   </a:txBody>
                   <a:tcPr anchor="ctr">
@@ -12753,35 +12382,34 @@
                       <a:pPr algn="l" latinLnBrk="1"/>
                       <a:r>
                         <a:rPr lang="ko-KR" altLang="en-US" sz="1200"/>
-                        <a:t>사용자 입력 데이터 예측 결과 그래프</a:t>
-                      </a:r>
-                      <a:endParaRPr lang="en-US" altLang="ko-KR" sz="1200"/>
+                        <a:t>사용자 데이터 저장 </a:t>
+                      </a:r>
+                      <a:r>
+                        <a:rPr lang="en-US" altLang="ko-KR" sz="1200"/>
+                        <a:t>ID</a:t>
+                      </a:r>
                     </a:p>
                     <a:p>
                       <a:pPr algn="l" latinLnBrk="1"/>
                       <a:r>
+                        <a:rPr lang="ko-KR" altLang="en-US" sz="1200"/>
+                        <a:t>상단 </a:t>
+                      </a:r>
+                      <a:r>
                         <a:rPr lang="en-US" altLang="ko-KR" sz="1200"/>
-                        <a:t>class0 – </a:t>
+                        <a:t>‘</a:t>
                       </a:r>
                       <a:r>
                         <a:rPr lang="ko-KR" altLang="en-US" sz="1200"/>
-                        <a:t>정상</a:t>
+                        <a:t>사용자 검색</a:t>
                       </a:r>
                       <a:r>
                         <a:rPr lang="en-US" altLang="ko-KR" sz="1200"/>
-                        <a:t>, class1 – </a:t>
+                        <a:t>’</a:t>
                       </a:r>
                       <a:r>
                         <a:rPr lang="ko-KR" altLang="en-US" sz="1200"/>
-                        <a:t>경계</a:t>
-                      </a:r>
-                      <a:r>
-                        <a:rPr lang="en-US" altLang="ko-KR" sz="1200"/>
-                        <a:t>, class2 - </a:t>
-                      </a:r>
-                      <a:r>
-                        <a:rPr lang="ko-KR" altLang="en-US" sz="1200"/>
-                        <a:t>위험</a:t>
+                        <a:t>으로 저장된 데이터 조회</a:t>
                       </a:r>
                     </a:p>
                   </a:txBody>
@@ -12894,6 +12522,165 @@
                     <a:bodyPr/>
                     <a:lstStyle/>
                     <a:p>
+                      <a:pPr algn="l" latinLnBrk="1"/>
+                      <a:r>
+                        <a:rPr lang="ko-KR" altLang="en-US" sz="1200"/>
+                        <a:t>입력 데이터 예측 결과 그래프</a:t>
+                      </a:r>
+                      <a:endParaRPr lang="en-US" altLang="ko-KR" sz="1200"/>
+                    </a:p>
+                    <a:p>
+                      <a:pPr algn="l" latinLnBrk="1"/>
+                      <a:r>
+                        <a:rPr lang="en-US" altLang="ko-KR" sz="1200"/>
+                        <a:t>class0 – </a:t>
+                      </a:r>
+                      <a:r>
+                        <a:rPr lang="ko-KR" altLang="en-US" sz="1200"/>
+                        <a:t>정상</a:t>
+                      </a:r>
+                      <a:r>
+                        <a:rPr lang="en-US" altLang="ko-KR" sz="1200"/>
+                        <a:t> </a:t>
+                      </a:r>
+                    </a:p>
+                    <a:p>
+                      <a:pPr algn="l" latinLnBrk="1"/>
+                      <a:r>
+                        <a:rPr lang="en-US" altLang="ko-KR" sz="1200"/>
+                        <a:t>class1 – </a:t>
+                      </a:r>
+                      <a:r>
+                        <a:rPr lang="ko-KR" altLang="en-US" sz="1200"/>
+                        <a:t>경계</a:t>
+                      </a:r>
+                      <a:r>
+                        <a:rPr lang="en-US" altLang="ko-KR" sz="1200"/>
+                        <a:t> </a:t>
+                      </a:r>
+                    </a:p>
+                    <a:p>
+                      <a:pPr algn="l" latinLnBrk="1"/>
+                      <a:r>
+                        <a:rPr lang="en-US" altLang="ko-KR" sz="1200"/>
+                        <a:t>class2 – </a:t>
+                      </a:r>
+                      <a:r>
+                        <a:rPr lang="ko-KR" altLang="en-US" sz="1200"/>
+                        <a:t>위험</a:t>
+                      </a:r>
+                      <a:endParaRPr lang="en-US" altLang="ko-KR" sz="1200"/>
+                    </a:p>
+                  </a:txBody>
+                  <a:tcPr anchor="ctr">
+                    <a:lnL w="12700" cap="flat" cmpd="sng" algn="ctr">
+                      <a:solidFill>
+                        <a:schemeClr val="tx1"/>
+                      </a:solidFill>
+                      <a:prstDash val="solid"/>
+                      <a:round/>
+                      <a:headEnd type="none" w="med" len="med"/>
+                      <a:tailEnd type="none" w="med" len="med"/>
+                    </a:lnL>
+                    <a:lnR w="12700" cap="flat" cmpd="sng" algn="ctr">
+                      <a:solidFill>
+                        <a:schemeClr val="tx1"/>
+                      </a:solidFill>
+                      <a:prstDash val="solid"/>
+                      <a:round/>
+                      <a:headEnd type="none" w="med" len="med"/>
+                      <a:tailEnd type="none" w="med" len="med"/>
+                    </a:lnR>
+                    <a:lnT w="12700" cap="flat" cmpd="sng" algn="ctr">
+                      <a:solidFill>
+                        <a:schemeClr val="tx1"/>
+                      </a:solidFill>
+                      <a:prstDash val="solid"/>
+                      <a:round/>
+                      <a:headEnd type="none" w="med" len="med"/>
+                      <a:tailEnd type="none" w="med" len="med"/>
+                    </a:lnT>
+                    <a:lnB w="12700" cap="flat" cmpd="sng" algn="ctr">
+                      <a:solidFill>
+                        <a:schemeClr val="tx1"/>
+                      </a:solidFill>
+                      <a:prstDash val="solid"/>
+                      <a:round/>
+                      <a:headEnd type="none" w="med" len="med"/>
+                      <a:tailEnd type="none" w="med" len="med"/>
+                    </a:lnB>
+                    <a:solidFill>
+                      <a:schemeClr val="bg1"/>
+                    </a:solidFill>
+                  </a:tcPr>
+                </a:tc>
+                <a:extLst>
+                  <a:ext uri="{0D108BD9-81ED-4DB2-BD59-A6C34878D82A}">
+                    <a16:rowId xmlns:a16="http://schemas.microsoft.com/office/drawing/2014/main" val="1747494998"/>
+                  </a:ext>
+                </a:extLst>
+              </a:tr>
+              <a:tr h="612000">
+                <a:tc>
+                  <a:txBody>
+                    <a:bodyPr/>
+                    <a:lstStyle/>
+                    <a:p>
+                      <a:pPr algn="ctr" latinLnBrk="1"/>
+                      <a:r>
+                        <a:rPr lang="en-US" altLang="ko-KR" sz="1200"/>
+                        <a:t>4</a:t>
+                      </a:r>
+                      <a:endParaRPr lang="ko-KR" altLang="en-US" sz="1200"/>
+                    </a:p>
+                  </a:txBody>
+                  <a:tcPr>
+                    <a:lnL w="12700" cap="flat" cmpd="sng" algn="ctr">
+                      <a:solidFill>
+                        <a:schemeClr val="tx1"/>
+                      </a:solidFill>
+                      <a:prstDash val="solid"/>
+                      <a:round/>
+                      <a:headEnd type="none" w="med" len="med"/>
+                      <a:tailEnd type="none" w="med" len="med"/>
+                    </a:lnL>
+                    <a:lnR w="12700" cap="flat" cmpd="sng" algn="ctr">
+                      <a:solidFill>
+                        <a:schemeClr val="tx1"/>
+                      </a:solidFill>
+                      <a:prstDash val="solid"/>
+                      <a:round/>
+                      <a:headEnd type="none" w="med" len="med"/>
+                      <a:tailEnd type="none" w="med" len="med"/>
+                    </a:lnR>
+                    <a:lnT w="12700" cap="flat" cmpd="sng" algn="ctr">
+                      <a:solidFill>
+                        <a:schemeClr val="tx1"/>
+                      </a:solidFill>
+                      <a:prstDash val="solid"/>
+                      <a:round/>
+                      <a:headEnd type="none" w="med" len="med"/>
+                      <a:tailEnd type="none" w="med" len="med"/>
+                    </a:lnT>
+                    <a:lnB w="12700" cap="flat" cmpd="sng" algn="ctr">
+                      <a:solidFill>
+                        <a:schemeClr val="tx1"/>
+                      </a:solidFill>
+                      <a:prstDash val="solid"/>
+                      <a:round/>
+                      <a:headEnd type="none" w="med" len="med"/>
+                      <a:tailEnd type="none" w="med" len="med"/>
+                    </a:lnB>
+                    <a:solidFill>
+                      <a:schemeClr val="bg1"/>
+                    </a:solidFill>
+                  </a:tcPr>
+                </a:tc>
+                <a:tc>
+                  <a:txBody>
+                    <a:bodyPr/>
+                    <a:lstStyle/>
+                    <a:p>
                       <a:pPr marL="0" marR="0" lvl="0" indent="0" algn="l" defTabSz="914400" rtl="0" eaLnBrk="1" fontAlgn="auto" latinLnBrk="1" hangingPunct="1">
                         <a:lnSpc>
                           <a:spcPct val="100000"/>
@@ -12913,7 +12700,15 @@
                       </a:pPr>
                       <a:r>
                         <a:rPr lang="ko-KR" altLang="en-US" sz="1200"/>
-                        <a:t>입력 데이터 수정</a:t>
+                        <a:t>예측 영향도가 높은 순서대로 영양소 </a:t>
+                      </a:r>
+                      <a:r>
+                        <a:rPr lang="en-US" altLang="ko-KR" sz="1200"/>
+                        <a:t>5</a:t>
+                      </a:r>
+                      <a:r>
+                        <a:rPr lang="ko-KR" altLang="en-US" sz="1200"/>
+                        <a:t>개 표시</a:t>
                       </a:r>
                     </a:p>
                   </a:txBody>
@@ -12961,7 +12756,7 @@
                 </a:tc>
                 <a:extLst>
                   <a:ext uri="{0D108BD9-81ED-4DB2-BD59-A6C34878D82A}">
-                    <a16:rowId xmlns:a16="http://schemas.microsoft.com/office/drawing/2014/main" val="1747494998"/>
+                    <a16:rowId xmlns:a16="http://schemas.microsoft.com/office/drawing/2014/main" val="1051244995"/>
                   </a:ext>
                 </a:extLst>
               </a:tr>
@@ -12974,7 +12769,7 @@
                       <a:pPr algn="ctr" latinLnBrk="1"/>
                       <a:r>
                         <a:rPr lang="en-US" altLang="ko-KR" sz="1200"/>
-                        <a:t>4</a:t>
+                        <a:t>5</a:t>
                       </a:r>
                       <a:endParaRPr lang="ko-KR" altLang="en-US" sz="1200"/>
                     </a:p>
@@ -13045,138 +12840,6 @@
                       </a:pPr>
                       <a:r>
                         <a:rPr lang="ko-KR" altLang="en-US" sz="1200"/>
-                        <a:t>개별 영양소별 입력수치와 적정수치 비교 그래프</a:t>
-                      </a:r>
-                    </a:p>
-                  </a:txBody>
-                  <a:tcPr anchor="ctr">
-                    <a:lnL w="12700" cap="flat" cmpd="sng" algn="ctr">
-                      <a:solidFill>
-                        <a:schemeClr val="tx1"/>
-                      </a:solidFill>
-                      <a:prstDash val="solid"/>
-                      <a:round/>
-                      <a:headEnd type="none" w="med" len="med"/>
-                      <a:tailEnd type="none" w="med" len="med"/>
-                    </a:lnL>
-                    <a:lnR w="12700" cap="flat" cmpd="sng" algn="ctr">
-                      <a:solidFill>
-                        <a:schemeClr val="tx1"/>
-                      </a:solidFill>
-                      <a:prstDash val="solid"/>
-                      <a:round/>
-                      <a:headEnd type="none" w="med" len="med"/>
-                      <a:tailEnd type="none" w="med" len="med"/>
-                    </a:lnR>
-                    <a:lnT w="12700" cap="flat" cmpd="sng" algn="ctr">
-                      <a:solidFill>
-                        <a:schemeClr val="tx1"/>
-                      </a:solidFill>
-                      <a:prstDash val="solid"/>
-                      <a:round/>
-                      <a:headEnd type="none" w="med" len="med"/>
-                      <a:tailEnd type="none" w="med" len="med"/>
-                    </a:lnT>
-                    <a:lnB w="12700" cap="flat" cmpd="sng" algn="ctr">
-                      <a:solidFill>
-                        <a:schemeClr val="tx1"/>
-                      </a:solidFill>
-                      <a:prstDash val="solid"/>
-                      <a:round/>
-                      <a:headEnd type="none" w="med" len="med"/>
-                      <a:tailEnd type="none" w="med" len="med"/>
-                    </a:lnB>
-                    <a:solidFill>
-                      <a:schemeClr val="bg1"/>
-                    </a:solidFill>
-                  </a:tcPr>
-                </a:tc>
-                <a:extLst>
-                  <a:ext uri="{0D108BD9-81ED-4DB2-BD59-A6C34878D82A}">
-                    <a16:rowId xmlns:a16="http://schemas.microsoft.com/office/drawing/2014/main" val="1051244995"/>
-                  </a:ext>
-                </a:extLst>
-              </a:tr>
-              <a:tr h="612000">
-                <a:tc>
-                  <a:txBody>
-                    <a:bodyPr/>
-                    <a:lstStyle/>
-                    <a:p>
-                      <a:pPr algn="ctr" latinLnBrk="1"/>
-                      <a:r>
-                        <a:rPr lang="en-US" altLang="ko-KR" sz="1200"/>
-                        <a:t>5</a:t>
-                      </a:r>
-                      <a:endParaRPr lang="ko-KR" altLang="en-US" sz="1200"/>
-                    </a:p>
-                  </a:txBody>
-                  <a:tcPr>
-                    <a:lnL w="12700" cap="flat" cmpd="sng" algn="ctr">
-                      <a:solidFill>
-                        <a:schemeClr val="tx1"/>
-                      </a:solidFill>
-                      <a:prstDash val="solid"/>
-                      <a:round/>
-                      <a:headEnd type="none" w="med" len="med"/>
-                      <a:tailEnd type="none" w="med" len="med"/>
-                    </a:lnL>
-                    <a:lnR w="12700" cap="flat" cmpd="sng" algn="ctr">
-                      <a:solidFill>
-                        <a:schemeClr val="tx1"/>
-                      </a:solidFill>
-                      <a:prstDash val="solid"/>
-                      <a:round/>
-                      <a:headEnd type="none" w="med" len="med"/>
-                      <a:tailEnd type="none" w="med" len="med"/>
-                    </a:lnR>
-                    <a:lnT w="12700" cap="flat" cmpd="sng" algn="ctr">
-                      <a:solidFill>
-                        <a:schemeClr val="tx1"/>
-                      </a:solidFill>
-                      <a:prstDash val="solid"/>
-                      <a:round/>
-                      <a:headEnd type="none" w="med" len="med"/>
-                      <a:tailEnd type="none" w="med" len="med"/>
-                    </a:lnT>
-                    <a:lnB w="12700" cap="flat" cmpd="sng" algn="ctr">
-                      <a:solidFill>
-                        <a:schemeClr val="tx1"/>
-                      </a:solidFill>
-                      <a:prstDash val="solid"/>
-                      <a:round/>
-                      <a:headEnd type="none" w="med" len="med"/>
-                      <a:tailEnd type="none" w="med" len="med"/>
-                    </a:lnB>
-                    <a:solidFill>
-                      <a:schemeClr val="bg1"/>
-                    </a:solidFill>
-                  </a:tcPr>
-                </a:tc>
-                <a:tc>
-                  <a:txBody>
-                    <a:bodyPr/>
-                    <a:lstStyle/>
-                    <a:p>
-                      <a:pPr marL="0" marR="0" lvl="0" indent="0" algn="l" defTabSz="914400" rtl="0" eaLnBrk="1" fontAlgn="auto" latinLnBrk="1" hangingPunct="1">
-                        <a:lnSpc>
-                          <a:spcPct val="100000"/>
-                        </a:lnSpc>
-                        <a:spcBef>
-                          <a:spcPts val="0"/>
-                        </a:spcBef>
-                        <a:spcAft>
-                          <a:spcPts val="0"/>
-                        </a:spcAft>
-                        <a:buClrTx/>
-                        <a:buSzTx/>
-                        <a:buFontTx/>
-                        <a:buNone/>
-                        <a:tabLst/>
-                        <a:defRPr/>
-                      </a:pPr>
-                      <a:r>
-                        <a:rPr lang="ko-KR" altLang="en-US" sz="1200"/>
                         <a:t>화살표를 눌러 다른 영양소 그래프 확인 가능</a:t>
                       </a:r>
                     </a:p>
@@ -13226,279 +12889,6 @@
                 <a:extLst>
                   <a:ext uri="{0D108BD9-81ED-4DB2-BD59-A6C34878D82A}">
                     <a16:rowId xmlns:a16="http://schemas.microsoft.com/office/drawing/2014/main" val="2891091043"/>
-                  </a:ext>
-                </a:extLst>
-              </a:tr>
-              <a:tr h="360000">
-                <a:tc gridSpan="2">
-                  <a:txBody>
-                    <a:bodyPr/>
-                    <a:lstStyle/>
-                    <a:p>
-                      <a:pPr marL="0" marR="0" lvl="0" indent="0" algn="ctr" defTabSz="914400" rtl="0" eaLnBrk="1" fontAlgn="auto" latinLnBrk="1" hangingPunct="1">
-                        <a:lnSpc>
-                          <a:spcPct val="100000"/>
-                        </a:lnSpc>
-                        <a:spcBef>
-                          <a:spcPts val="0"/>
-                        </a:spcBef>
-                        <a:spcAft>
-                          <a:spcPts val="0"/>
-                        </a:spcAft>
-                        <a:buClrTx/>
-                        <a:buSzTx/>
-                        <a:buFontTx/>
-                        <a:buNone/>
-                        <a:tabLst/>
-                        <a:defRPr/>
-                      </a:pPr>
-                      <a:r>
-                        <a:rPr lang="en-US" altLang="ko-KR" sz="1200"/>
-                        <a:t>Check Point</a:t>
-                      </a:r>
-                    </a:p>
-                  </a:txBody>
-                  <a:tcPr anchor="ctr">
-                    <a:lnL w="12700" cap="flat" cmpd="sng" algn="ctr">
-                      <a:solidFill>
-                        <a:schemeClr val="tx1"/>
-                      </a:solidFill>
-                      <a:prstDash val="solid"/>
-                      <a:round/>
-                      <a:headEnd type="none" w="med" len="med"/>
-                      <a:tailEnd type="none" w="med" len="med"/>
-                    </a:lnL>
-                    <a:lnR w="12700" cap="flat" cmpd="sng" algn="ctr">
-                      <a:solidFill>
-                        <a:schemeClr val="tx1"/>
-                      </a:solidFill>
-                      <a:prstDash val="solid"/>
-                      <a:round/>
-                      <a:headEnd type="none" w="med" len="med"/>
-                      <a:tailEnd type="none" w="med" len="med"/>
-                    </a:lnR>
-                    <a:lnT w="12700" cap="flat" cmpd="sng" algn="ctr">
-                      <a:solidFill>
-                        <a:schemeClr val="tx1"/>
-                      </a:solidFill>
-                      <a:prstDash val="solid"/>
-                      <a:round/>
-                      <a:headEnd type="none" w="med" len="med"/>
-                      <a:tailEnd type="none" w="med" len="med"/>
-                    </a:lnT>
-                    <a:lnB w="12700" cap="flat" cmpd="sng" algn="ctr">
-                      <a:solidFill>
-                        <a:schemeClr val="tx1"/>
-                      </a:solidFill>
-                      <a:prstDash val="solid"/>
-                      <a:round/>
-                      <a:headEnd type="none" w="med" len="med"/>
-                      <a:tailEnd type="none" w="med" len="med"/>
-                    </a:lnB>
-                    <a:solidFill>
-                      <a:schemeClr val="bg1">
-                        <a:lumMod val="85000"/>
-                      </a:schemeClr>
-                    </a:solidFill>
-                  </a:tcPr>
-                </a:tc>
-                <a:tc hMerge="1">
-                  <a:txBody>
-                    <a:bodyPr/>
-                    <a:lstStyle/>
-                    <a:p>
-                      <a:pPr algn="l" latinLnBrk="1"/>
-                      <a:endParaRPr lang="ko-KR" altLang="en-US" sz="1200"/>
-                    </a:p>
-                  </a:txBody>
-                  <a:tcPr anchor="ctr">
-                    <a:lnL w="12700" cap="flat" cmpd="sng" algn="ctr">
-                      <a:solidFill>
-                        <a:schemeClr val="tx1"/>
-                      </a:solidFill>
-                      <a:prstDash val="solid"/>
-                      <a:round/>
-                      <a:headEnd type="none" w="med" len="med"/>
-                      <a:tailEnd type="none" w="med" len="med"/>
-                    </a:lnL>
-                    <a:lnR w="12700" cap="flat" cmpd="sng" algn="ctr">
-                      <a:solidFill>
-                        <a:schemeClr val="tx1"/>
-                      </a:solidFill>
-                      <a:prstDash val="solid"/>
-                      <a:round/>
-                      <a:headEnd type="none" w="med" len="med"/>
-                      <a:tailEnd type="none" w="med" len="med"/>
-                    </a:lnR>
-                    <a:lnT w="12700" cap="flat" cmpd="sng" algn="ctr">
-                      <a:solidFill>
-                        <a:schemeClr val="tx1"/>
-                      </a:solidFill>
-                      <a:prstDash val="solid"/>
-                      <a:round/>
-                      <a:headEnd type="none" w="med" len="med"/>
-                      <a:tailEnd type="none" w="med" len="med"/>
-                    </a:lnT>
-                    <a:lnB w="12700" cap="flat" cmpd="sng" algn="ctr">
-                      <a:solidFill>
-                        <a:schemeClr val="tx1"/>
-                      </a:solidFill>
-                      <a:prstDash val="solid"/>
-                      <a:round/>
-                      <a:headEnd type="none" w="med" len="med"/>
-                      <a:tailEnd type="none" w="med" len="med"/>
-                    </a:lnB>
-                    <a:solidFill>
-                      <a:schemeClr val="bg1"/>
-                    </a:solidFill>
-                  </a:tcPr>
-                </a:tc>
-                <a:extLst>
-                  <a:ext uri="{0D108BD9-81ED-4DB2-BD59-A6C34878D82A}">
-                    <a16:rowId xmlns:a16="http://schemas.microsoft.com/office/drawing/2014/main" val="2275643079"/>
-                  </a:ext>
-                </a:extLst>
-              </a:tr>
-              <a:tr h="612000">
-                <a:tc gridSpan="2">
-                  <a:txBody>
-                    <a:bodyPr/>
-                    <a:lstStyle/>
-                    <a:p>
-                      <a:pPr marL="0" marR="0" lvl="0" indent="0" algn="ctr" defTabSz="914400" rtl="0" eaLnBrk="1" fontAlgn="auto" latinLnBrk="1" hangingPunct="1">
-                        <a:lnSpc>
-                          <a:spcPct val="100000"/>
-                        </a:lnSpc>
-                        <a:spcBef>
-                          <a:spcPts val="0"/>
-                        </a:spcBef>
-                        <a:spcAft>
-                          <a:spcPts val="0"/>
-                        </a:spcAft>
-                        <a:buClrTx/>
-                        <a:buSzTx/>
-                        <a:buFontTx/>
-                        <a:buNone/>
-                        <a:tabLst/>
-                        <a:defRPr/>
-                      </a:pPr>
-                      <a:r>
-                        <a:rPr lang="ko-KR" altLang="en-US" sz="1200"/>
-                        <a:t>위에 </a:t>
-                      </a:r>
-                      <a:r>
-                        <a:rPr lang="en-US" altLang="ko-KR" sz="1200"/>
-                        <a:t>Look up, Predict</a:t>
-                      </a:r>
-                      <a:r>
-                        <a:rPr lang="ko-KR" altLang="en-US" sz="1200"/>
-                        <a:t>는 메인 페이지의 기능과 동일</a:t>
-                      </a:r>
-                    </a:p>
-                    <a:p>
-                      <a:pPr algn="ctr" latinLnBrk="1"/>
-                      <a:r>
-                        <a:rPr lang="ko-KR" altLang="en-US" sz="1200"/>
-                        <a:t>아래로 스크롤해 상세 데이터 확인 가능</a:t>
-                      </a:r>
-                    </a:p>
-                  </a:txBody>
-                  <a:tcPr>
-                    <a:lnL w="12700" cap="flat" cmpd="sng" algn="ctr">
-                      <a:solidFill>
-                        <a:schemeClr val="tx1"/>
-                      </a:solidFill>
-                      <a:prstDash val="solid"/>
-                      <a:round/>
-                      <a:headEnd type="none" w="med" len="med"/>
-                      <a:tailEnd type="none" w="med" len="med"/>
-                    </a:lnL>
-                    <a:lnR w="12700" cap="flat" cmpd="sng" algn="ctr">
-                      <a:solidFill>
-                        <a:schemeClr val="tx1"/>
-                      </a:solidFill>
-                      <a:prstDash val="solid"/>
-                      <a:round/>
-                      <a:headEnd type="none" w="med" len="med"/>
-                      <a:tailEnd type="none" w="med" len="med"/>
-                    </a:lnR>
-                    <a:lnT w="12700" cap="flat" cmpd="sng" algn="ctr">
-                      <a:solidFill>
-                        <a:schemeClr val="tx1"/>
-                      </a:solidFill>
-                      <a:prstDash val="solid"/>
-                      <a:round/>
-                      <a:headEnd type="none" w="med" len="med"/>
-                      <a:tailEnd type="none" w="med" len="med"/>
-                    </a:lnT>
-                    <a:lnB w="12700" cap="flat" cmpd="sng" algn="ctr">
-                      <a:solidFill>
-                        <a:schemeClr val="tx1"/>
-                      </a:solidFill>
-                      <a:prstDash val="solid"/>
-                      <a:round/>
-                      <a:headEnd type="none" w="med" len="med"/>
-                      <a:tailEnd type="none" w="med" len="med"/>
-                    </a:lnB>
-                    <a:solidFill>
-                      <a:schemeClr val="bg1"/>
-                    </a:solidFill>
-                  </a:tcPr>
-                </a:tc>
-                <a:tc hMerge="1">
-                  <a:txBody>
-                    <a:bodyPr/>
-                    <a:lstStyle/>
-                    <a:p>
-                      <a:pPr algn="l" latinLnBrk="1"/>
-                      <a:endParaRPr lang="ko-KR" altLang="en-US" sz="1200"/>
-                    </a:p>
-                  </a:txBody>
-                  <a:tcPr anchor="ctr">
-                    <a:lnL w="12700" cap="flat" cmpd="sng" algn="ctr">
-                      <a:solidFill>
-                        <a:schemeClr val="tx1"/>
-                      </a:solidFill>
-                      <a:prstDash val="solid"/>
-                      <a:round/>
-                      <a:headEnd type="none" w="med" len="med"/>
-                      <a:tailEnd type="none" w="med" len="med"/>
-                    </a:lnL>
-                    <a:lnR w="12700" cap="flat" cmpd="sng" algn="ctr">
-                      <a:solidFill>
-                        <a:schemeClr val="tx1"/>
-                      </a:solidFill>
-                      <a:prstDash val="solid"/>
-                      <a:round/>
-                      <a:headEnd type="none" w="med" len="med"/>
-                      <a:tailEnd type="none" w="med" len="med"/>
-                    </a:lnR>
-                    <a:lnT w="12700" cap="flat" cmpd="sng" algn="ctr">
-                      <a:solidFill>
-                        <a:schemeClr val="tx1"/>
-                      </a:solidFill>
-                      <a:prstDash val="solid"/>
-                      <a:round/>
-                      <a:headEnd type="none" w="med" len="med"/>
-                      <a:tailEnd type="none" w="med" len="med"/>
-                    </a:lnT>
-                    <a:lnB w="12700" cap="flat" cmpd="sng" algn="ctr">
-                      <a:solidFill>
-                        <a:schemeClr val="tx1"/>
-                      </a:solidFill>
-                      <a:prstDash val="solid"/>
-                      <a:round/>
-                      <a:headEnd type="none" w="med" len="med"/>
-                      <a:tailEnd type="none" w="med" len="med"/>
-                    </a:lnB>
-                    <a:solidFill>
-                      <a:schemeClr val="bg1"/>
-                    </a:solidFill>
-                  </a:tcPr>
-                </a:tc>
-                <a:extLst>
-                  <a:ext uri="{0D108BD9-81ED-4DB2-BD59-A6C34878D82A}">
-                    <a16:rowId xmlns:a16="http://schemas.microsoft.com/office/drawing/2014/main" val="1885486421"/>
                   </a:ext>
                 </a:extLst>
               </a:tr>
@@ -13522,7 +12912,68 @@
         </p:nvSpPr>
         <p:spPr>
           <a:xfrm>
-            <a:off x="6218050" y="2823433"/>
+            <a:off x="6990537" y="2341882"/>
+            <a:ext cx="324000" cy="324000"/>
+          </a:xfrm>
+          <a:prstGeom prst="ellipse">
+            <a:avLst/>
+          </a:prstGeom>
+          <a:solidFill>
+            <a:srgbClr val="C00000">
+              <a:alpha val="60000"/>
+            </a:srgbClr>
+          </a:solidFill>
+        </p:spPr>
+        <p:style>
+          <a:lnRef idx="2">
+            <a:schemeClr val="accent1">
+              <a:shade val="15000"/>
+            </a:schemeClr>
+          </a:lnRef>
+          <a:fillRef idx="1">
+            <a:schemeClr val="accent1"/>
+          </a:fillRef>
+          <a:effectRef idx="0">
+            <a:schemeClr val="accent1"/>
+          </a:effectRef>
+          <a:fontRef idx="minor">
+            <a:schemeClr val="lt1"/>
+          </a:fontRef>
+        </p:style>
+        <p:txBody>
+          <a:bodyPr rtlCol="0" anchor="ctr"/>
+          <a:lstStyle/>
+          <a:p>
+            <a:pPr algn="ctr"/>
+            <a:r>
+              <a:rPr lang="en-US" altLang="ko-KR" sz="2000">
+                <a:latin typeface="+mn-ea"/>
+              </a:rPr>
+              <a:t>3</a:t>
+            </a:r>
+            <a:endParaRPr lang="ko-KR" altLang="en-US" sz="2000">
+              <a:latin typeface="+mn-ea"/>
+            </a:endParaRPr>
+          </a:p>
+        </p:txBody>
+      </p:sp>
+      <p:sp>
+        <p:nvSpPr>
+          <p:cNvPr id="7" name="타원 6">
+            <a:extLst>
+              <a:ext uri="{FF2B5EF4-FFF2-40B4-BE49-F238E27FC236}">
+                <a16:creationId xmlns:a16="http://schemas.microsoft.com/office/drawing/2014/main" id="{6927301E-47D9-D7C6-EBF6-3EEBDCE32BE6}"/>
+              </a:ext>
+            </a:extLst>
+          </p:cNvPr>
+          <p:cNvSpPr>
+            <a:spLocks noChangeAspect="1"/>
+          </p:cNvSpPr>
+          <p:nvPr/>
+        </p:nvSpPr>
+        <p:spPr>
+          <a:xfrm>
+            <a:off x="4355745" y="2147855"/>
             <a:ext cx="324000" cy="324000"/>
           </a:xfrm>
           <a:prstGeom prst="ellipse">
@@ -13569,67 +13020,6 @@
       </p:sp>
       <p:sp>
         <p:nvSpPr>
-          <p:cNvPr id="7" name="타원 6">
-            <a:extLst>
-              <a:ext uri="{FF2B5EF4-FFF2-40B4-BE49-F238E27FC236}">
-                <a16:creationId xmlns:a16="http://schemas.microsoft.com/office/drawing/2014/main" id="{6927301E-47D9-D7C6-EBF6-3EEBDCE32BE6}"/>
-              </a:ext>
-            </a:extLst>
-          </p:cNvPr>
-          <p:cNvSpPr>
-            <a:spLocks noChangeAspect="1"/>
-          </p:cNvSpPr>
-          <p:nvPr/>
-        </p:nvSpPr>
-        <p:spPr>
-          <a:xfrm>
-            <a:off x="962128" y="2424587"/>
-            <a:ext cx="324000" cy="324000"/>
-          </a:xfrm>
-          <a:prstGeom prst="ellipse">
-            <a:avLst/>
-          </a:prstGeom>
-          <a:solidFill>
-            <a:srgbClr val="C00000">
-              <a:alpha val="60000"/>
-            </a:srgbClr>
-          </a:solidFill>
-        </p:spPr>
-        <p:style>
-          <a:lnRef idx="2">
-            <a:schemeClr val="accent1">
-              <a:shade val="15000"/>
-            </a:schemeClr>
-          </a:lnRef>
-          <a:fillRef idx="1">
-            <a:schemeClr val="accent1"/>
-          </a:fillRef>
-          <a:effectRef idx="0">
-            <a:schemeClr val="accent1"/>
-          </a:effectRef>
-          <a:fontRef idx="minor">
-            <a:schemeClr val="lt1"/>
-          </a:fontRef>
-        </p:style>
-        <p:txBody>
-          <a:bodyPr rtlCol="0" anchor="ctr"/>
-          <a:lstStyle/>
-          <a:p>
-            <a:pPr algn="ctr"/>
-            <a:r>
-              <a:rPr lang="en-US" altLang="ko-KR" sz="2000">
-                <a:latin typeface="+mn-ea"/>
-              </a:rPr>
-              <a:t>1</a:t>
-            </a:r>
-            <a:endParaRPr lang="ko-KR" altLang="en-US" sz="2000">
-              <a:latin typeface="+mn-ea"/>
-            </a:endParaRPr>
-          </a:p>
-        </p:txBody>
-      </p:sp>
-      <p:sp>
-        <p:nvSpPr>
           <p:cNvPr id="9" name="타원 8">
             <a:extLst>
               <a:ext uri="{FF2B5EF4-FFF2-40B4-BE49-F238E27FC236}">
@@ -13644,7 +13034,7 @@
         </p:nvSpPr>
         <p:spPr>
           <a:xfrm>
-            <a:off x="962128" y="4699734"/>
+            <a:off x="4468560" y="3302157"/>
             <a:ext cx="324000" cy="324000"/>
           </a:xfrm>
           <a:prstGeom prst="ellipse">
@@ -13705,7 +13095,7 @@
         </p:nvSpPr>
         <p:spPr>
           <a:xfrm>
-            <a:off x="7308600" y="4293994"/>
+            <a:off x="7854864" y="4943178"/>
             <a:ext cx="324000" cy="324000"/>
           </a:xfrm>
           <a:prstGeom prst="ellipse">
@@ -13766,1859 +13156,7 @@
         </p:nvSpPr>
         <p:spPr>
           <a:xfrm>
-            <a:off x="962128" y="3664602"/>
-            <a:ext cx="324000" cy="324000"/>
-          </a:xfrm>
-          <a:prstGeom prst="ellipse">
-            <a:avLst/>
-          </a:prstGeom>
-          <a:solidFill>
-            <a:srgbClr val="C00000">
-              <a:alpha val="60000"/>
-            </a:srgbClr>
-          </a:solidFill>
-        </p:spPr>
-        <p:style>
-          <a:lnRef idx="2">
-            <a:schemeClr val="accent1">
-              <a:shade val="15000"/>
-            </a:schemeClr>
-          </a:lnRef>
-          <a:fillRef idx="1">
-            <a:schemeClr val="accent1"/>
-          </a:fillRef>
-          <a:effectRef idx="0">
-            <a:schemeClr val="accent1"/>
-          </a:effectRef>
-          <a:fontRef idx="minor">
-            <a:schemeClr val="lt1"/>
-          </a:fontRef>
-        </p:style>
-        <p:txBody>
-          <a:bodyPr rtlCol="0" anchor="ctr"/>
-          <a:lstStyle/>
-          <a:p>
-            <a:pPr algn="ctr"/>
-            <a:r>
-              <a:rPr lang="en-US" altLang="ko-KR" sz="2000">
-                <a:latin typeface="+mn-ea"/>
-              </a:rPr>
-              <a:t>3</a:t>
-            </a:r>
-            <a:endParaRPr lang="ko-KR" altLang="en-US" sz="2000">
-              <a:latin typeface="+mn-ea"/>
-            </a:endParaRPr>
-          </a:p>
-        </p:txBody>
-      </p:sp>
-    </p:spTree>
-    <p:extLst>
-      <p:ext uri="{BB962C8B-B14F-4D97-AF65-F5344CB8AC3E}">
-        <p14:creationId xmlns:p14="http://schemas.microsoft.com/office/powerpoint/2010/main" val="710167497"/>
-      </p:ext>
-    </p:extLst>
-  </p:cSld>
-  <p:clrMapOvr>
-    <a:masterClrMapping/>
-  </p:clrMapOvr>
-</p:sld>
-</file>
-
-<file path=ppt/slides/slide6.xml><?xml version="1.0" encoding="utf-8"?>
-<p:sld xmlns:a="http://schemas.openxmlformats.org/drawingml/2006/main" xmlns:r="http://schemas.openxmlformats.org/officeDocument/2006/relationships" xmlns:p="http://schemas.openxmlformats.org/presentationml/2006/main">
-  <p:cSld>
-    <p:spTree>
-      <p:nvGrpSpPr>
-        <p:cNvPr id="1" name=""/>
-        <p:cNvGrpSpPr/>
-        <p:nvPr/>
-      </p:nvGrpSpPr>
-      <p:grpSpPr>
-        <a:xfrm>
-          <a:off x="0" y="0"/>
-          <a:ext cx="0" cy="0"/>
-          <a:chOff x="0" y="0"/>
-          <a:chExt cx="0" cy="0"/>
-        </a:xfrm>
-      </p:grpSpPr>
-      <p:pic>
-        <p:nvPicPr>
-          <p:cNvPr id="6" name="그림 5" descr="텍스트, 스크린샷, 번호, 소프트웨어이(가) 표시된 사진&#10;&#10;AI가 생성한 콘텐츠는 부정확할 수 있습니다.">
-            <a:extLst>
-              <a:ext uri="{FF2B5EF4-FFF2-40B4-BE49-F238E27FC236}">
-                <a16:creationId xmlns:a16="http://schemas.microsoft.com/office/drawing/2014/main" id="{51D1F5B9-061A-6022-67AB-BF36CA686AC8}"/>
-              </a:ext>
-            </a:extLst>
-          </p:cNvPr>
-          <p:cNvPicPr>
-            <a:picLocks noChangeAspect="1"/>
-          </p:cNvPicPr>
-          <p:nvPr/>
-        </p:nvPicPr>
-        <p:blipFill>
-          <a:blip r:embed="rId2">
-            <a:extLst>
-              <a:ext uri="{28A0092B-C50C-407E-A947-70E740481C1C}">
-                <a14:useLocalDpi xmlns:a14="http://schemas.microsoft.com/office/drawing/2010/main" val="0"/>
-              </a:ext>
-            </a:extLst>
-          </a:blip>
-          <a:stretch>
-            <a:fillRect/>
-          </a:stretch>
-        </p:blipFill>
-        <p:spPr>
-          <a:xfrm>
-            <a:off x="363516" y="1753189"/>
-            <a:ext cx="8640000" cy="4861428"/>
-          </a:xfrm>
-          <a:prstGeom prst="rect">
-            <a:avLst/>
-          </a:prstGeom>
-        </p:spPr>
-      </p:pic>
-      <p:graphicFrame>
-        <p:nvGraphicFramePr>
-          <p:cNvPr id="5" name="표 4">
-            <a:extLst>
-              <a:ext uri="{FF2B5EF4-FFF2-40B4-BE49-F238E27FC236}">
-                <a16:creationId xmlns:a16="http://schemas.microsoft.com/office/drawing/2014/main" id="{E4817D6E-D20C-C517-A1A7-CE0B0E88C4D8}"/>
-              </a:ext>
-            </a:extLst>
-          </p:cNvPr>
-          <p:cNvGraphicFramePr>
-            <a:graphicFrameLocks noGrp="1"/>
-          </p:cNvGraphicFramePr>
-          <p:nvPr>
-            <p:extLst>
-              <p:ext uri="{D42A27DB-BD31-4B8C-83A1-F6EECF244321}">
-                <p14:modId xmlns:p14="http://schemas.microsoft.com/office/powerpoint/2010/main" val="2744838499"/>
-              </p:ext>
-            </p:extLst>
-          </p:nvPr>
-        </p:nvGraphicFramePr>
-        <p:xfrm>
-          <a:off x="363516" y="826547"/>
-          <a:ext cx="8640000" cy="715655"/>
-        </p:xfrm>
-        <a:graphic>
-          <a:graphicData uri="http://schemas.openxmlformats.org/drawingml/2006/table">
-            <a:tbl>
-              <a:tblPr firstRow="1" bandRow="1">
-                <a:tableStyleId>{5C22544A-7EE6-4342-B048-85BDC9FD1C3A}</a:tableStyleId>
-              </a:tblPr>
-              <a:tblGrid>
-                <a:gridCol w="1080000">
-                  <a:extLst>
-                    <a:ext uri="{9D8B030D-6E8A-4147-A177-3AD203B41FA5}">
-                      <a16:colId xmlns:a16="http://schemas.microsoft.com/office/drawing/2014/main" val="3504761122"/>
-                    </a:ext>
-                  </a:extLst>
-                </a:gridCol>
-                <a:gridCol w="1080000">
-                  <a:extLst>
-                    <a:ext uri="{9D8B030D-6E8A-4147-A177-3AD203B41FA5}">
-                      <a16:colId xmlns:a16="http://schemas.microsoft.com/office/drawing/2014/main" val="781226076"/>
-                    </a:ext>
-                  </a:extLst>
-                </a:gridCol>
-                <a:gridCol w="1080000">
-                  <a:extLst>
-                    <a:ext uri="{9D8B030D-6E8A-4147-A177-3AD203B41FA5}">
-                      <a16:colId xmlns:a16="http://schemas.microsoft.com/office/drawing/2014/main" val="3215577780"/>
-                    </a:ext>
-                  </a:extLst>
-                </a:gridCol>
-                <a:gridCol w="1080000">
-                  <a:extLst>
-                    <a:ext uri="{9D8B030D-6E8A-4147-A177-3AD203B41FA5}">
-                      <a16:colId xmlns:a16="http://schemas.microsoft.com/office/drawing/2014/main" val="1629845088"/>
-                    </a:ext>
-                  </a:extLst>
-                </a:gridCol>
-                <a:gridCol w="1080000">
-                  <a:extLst>
-                    <a:ext uri="{9D8B030D-6E8A-4147-A177-3AD203B41FA5}">
-                      <a16:colId xmlns:a16="http://schemas.microsoft.com/office/drawing/2014/main" val="3366529467"/>
-                    </a:ext>
-                  </a:extLst>
-                </a:gridCol>
-                <a:gridCol w="1080000">
-                  <a:extLst>
-                    <a:ext uri="{9D8B030D-6E8A-4147-A177-3AD203B41FA5}">
-                      <a16:colId xmlns:a16="http://schemas.microsoft.com/office/drawing/2014/main" val="2217245399"/>
-                    </a:ext>
-                  </a:extLst>
-                </a:gridCol>
-                <a:gridCol w="1080000">
-                  <a:extLst>
-                    <a:ext uri="{9D8B030D-6E8A-4147-A177-3AD203B41FA5}">
-                      <a16:colId xmlns:a16="http://schemas.microsoft.com/office/drawing/2014/main" val="4110027502"/>
-                    </a:ext>
-                  </a:extLst>
-                </a:gridCol>
-                <a:gridCol w="1080000">
-                  <a:extLst>
-                    <a:ext uri="{9D8B030D-6E8A-4147-A177-3AD203B41FA5}">
-                      <a16:colId xmlns:a16="http://schemas.microsoft.com/office/drawing/2014/main" val="3428513352"/>
-                    </a:ext>
-                  </a:extLst>
-                </a:gridCol>
-              </a:tblGrid>
-              <a:tr h="360000">
-                <a:tc>
-                  <a:txBody>
-                    <a:bodyPr/>
-                    <a:lstStyle/>
-                    <a:p>
-                      <a:pPr algn="l" latinLnBrk="1"/>
-                      <a:r>
-                        <a:rPr lang="en-US" altLang="ko-KR" sz="1200" b="1">
-                          <a:solidFill>
-                            <a:schemeClr val="tx1"/>
-                          </a:solidFill>
-                          <a:latin typeface="+mn-ea"/>
-                          <a:ea typeface="+mn-ea"/>
-                        </a:rPr>
-                        <a:t>Page Title</a:t>
-                      </a:r>
-                      <a:endParaRPr lang="ko-KR" altLang="en-US" sz="1200" b="1">
-                        <a:solidFill>
-                          <a:schemeClr val="tx1"/>
-                        </a:solidFill>
-                        <a:latin typeface="+mn-ea"/>
-                        <a:ea typeface="+mn-ea"/>
-                      </a:endParaRPr>
-                    </a:p>
-                  </a:txBody>
-                  <a:tcPr anchor="ctr">
-                    <a:lnL w="12700" cap="flat" cmpd="sng" algn="ctr">
-                      <a:solidFill>
-                        <a:schemeClr val="tx1"/>
-                      </a:solidFill>
-                      <a:prstDash val="solid"/>
-                      <a:round/>
-                      <a:headEnd type="none" w="med" len="med"/>
-                      <a:tailEnd type="none" w="med" len="med"/>
-                    </a:lnL>
-                    <a:lnR w="12700" cap="flat" cmpd="sng" algn="ctr">
-                      <a:solidFill>
-                        <a:schemeClr val="tx1"/>
-                      </a:solidFill>
-                      <a:prstDash val="solid"/>
-                      <a:round/>
-                      <a:headEnd type="none" w="med" len="med"/>
-                      <a:tailEnd type="none" w="med" len="med"/>
-                    </a:lnR>
-                    <a:lnT w="12700" cap="flat" cmpd="sng" algn="ctr">
-                      <a:solidFill>
-                        <a:schemeClr val="tx1"/>
-                      </a:solidFill>
-                      <a:prstDash val="solid"/>
-                      <a:round/>
-                      <a:headEnd type="none" w="med" len="med"/>
-                      <a:tailEnd type="none" w="med" len="med"/>
-                    </a:lnT>
-                    <a:lnB w="12700" cap="flat" cmpd="sng" algn="ctr">
-                      <a:solidFill>
-                        <a:schemeClr val="tx1"/>
-                      </a:solidFill>
-                      <a:prstDash val="solid"/>
-                      <a:round/>
-                      <a:headEnd type="none" w="med" len="med"/>
-                      <a:tailEnd type="none" w="med" len="med"/>
-                    </a:lnB>
-                    <a:solidFill>
-                      <a:schemeClr val="bg1">
-                        <a:lumMod val="85000"/>
-                      </a:schemeClr>
-                    </a:solidFill>
-                  </a:tcPr>
-                </a:tc>
-                <a:tc>
-                  <a:txBody>
-                    <a:bodyPr/>
-                    <a:lstStyle/>
-                    <a:p>
-                      <a:pPr algn="l" latinLnBrk="1"/>
-                      <a:r>
-                        <a:rPr lang="en-US" altLang="ko-KR" sz="1200" b="0">
-                          <a:solidFill>
-                            <a:schemeClr val="tx1"/>
-                          </a:solidFill>
-                          <a:latin typeface="+mn-ea"/>
-                          <a:ea typeface="+mn-ea"/>
-                        </a:rPr>
-                        <a:t>Result</a:t>
-                      </a:r>
-                      <a:endParaRPr lang="ko-KR" altLang="en-US" sz="1200" b="0">
-                        <a:solidFill>
-                          <a:schemeClr val="tx1"/>
-                        </a:solidFill>
-                        <a:latin typeface="+mn-ea"/>
-                        <a:ea typeface="+mn-ea"/>
-                      </a:endParaRPr>
-                    </a:p>
-                  </a:txBody>
-                  <a:tcPr anchor="ctr">
-                    <a:lnL w="12700" cap="flat" cmpd="sng" algn="ctr">
-                      <a:solidFill>
-                        <a:schemeClr val="tx1"/>
-                      </a:solidFill>
-                      <a:prstDash val="solid"/>
-                      <a:round/>
-                      <a:headEnd type="none" w="med" len="med"/>
-                      <a:tailEnd type="none" w="med" len="med"/>
-                    </a:lnL>
-                    <a:lnR w="12700" cap="flat" cmpd="sng" algn="ctr">
-                      <a:solidFill>
-                        <a:schemeClr val="tx1"/>
-                      </a:solidFill>
-                      <a:prstDash val="solid"/>
-                      <a:round/>
-                      <a:headEnd type="none" w="med" len="med"/>
-                      <a:tailEnd type="none" w="med" len="med"/>
-                    </a:lnR>
-                    <a:lnT w="12700" cap="flat" cmpd="sng" algn="ctr">
-                      <a:solidFill>
-                        <a:schemeClr val="tx1"/>
-                      </a:solidFill>
-                      <a:prstDash val="solid"/>
-                      <a:round/>
-                      <a:headEnd type="none" w="med" len="med"/>
-                      <a:tailEnd type="none" w="med" len="med"/>
-                    </a:lnT>
-                    <a:lnB w="12700" cap="flat" cmpd="sng" algn="ctr">
-                      <a:solidFill>
-                        <a:schemeClr val="tx1"/>
-                      </a:solidFill>
-                      <a:prstDash val="solid"/>
-                      <a:round/>
-                      <a:headEnd type="none" w="med" len="med"/>
-                      <a:tailEnd type="none" w="med" len="med"/>
-                    </a:lnB>
-                    <a:solidFill>
-                      <a:schemeClr val="bg1"/>
-                    </a:solidFill>
-                  </a:tcPr>
-                </a:tc>
-                <a:tc>
-                  <a:txBody>
-                    <a:bodyPr/>
-                    <a:lstStyle/>
-                    <a:p>
-                      <a:pPr algn="l" latinLnBrk="1"/>
-                      <a:r>
-                        <a:rPr lang="en-US" altLang="ko-KR" sz="1200" b="1">
-                          <a:solidFill>
-                            <a:schemeClr val="tx1"/>
-                          </a:solidFill>
-                          <a:latin typeface="+mn-ea"/>
-                          <a:ea typeface="+mn-ea"/>
-                        </a:rPr>
-                        <a:t>Screen ID</a:t>
-                      </a:r>
-                      <a:endParaRPr lang="ko-KR" altLang="en-US" sz="1200" b="1">
-                        <a:solidFill>
-                          <a:schemeClr val="tx1"/>
-                        </a:solidFill>
-                        <a:latin typeface="+mn-ea"/>
-                        <a:ea typeface="+mn-ea"/>
-                      </a:endParaRPr>
-                    </a:p>
-                  </a:txBody>
-                  <a:tcPr anchor="ctr">
-                    <a:lnL w="12700" cap="flat" cmpd="sng" algn="ctr">
-                      <a:solidFill>
-                        <a:schemeClr val="tx1"/>
-                      </a:solidFill>
-                      <a:prstDash val="solid"/>
-                      <a:round/>
-                      <a:headEnd type="none" w="med" len="med"/>
-                      <a:tailEnd type="none" w="med" len="med"/>
-                    </a:lnL>
-                    <a:lnR w="12700" cap="flat" cmpd="sng" algn="ctr">
-                      <a:solidFill>
-                        <a:schemeClr val="tx1"/>
-                      </a:solidFill>
-                      <a:prstDash val="solid"/>
-                      <a:round/>
-                      <a:headEnd type="none" w="med" len="med"/>
-                      <a:tailEnd type="none" w="med" len="med"/>
-                    </a:lnR>
-                    <a:lnT w="12700" cap="flat" cmpd="sng" algn="ctr">
-                      <a:solidFill>
-                        <a:schemeClr val="tx1"/>
-                      </a:solidFill>
-                      <a:prstDash val="solid"/>
-                      <a:round/>
-                      <a:headEnd type="none" w="med" len="med"/>
-                      <a:tailEnd type="none" w="med" len="med"/>
-                    </a:lnT>
-                    <a:lnB w="12700" cap="flat" cmpd="sng" algn="ctr">
-                      <a:solidFill>
-                        <a:schemeClr val="tx1"/>
-                      </a:solidFill>
-                      <a:prstDash val="solid"/>
-                      <a:round/>
-                      <a:headEnd type="none" w="med" len="med"/>
-                      <a:tailEnd type="none" w="med" len="med"/>
-                    </a:lnB>
-                    <a:solidFill>
-                      <a:schemeClr val="bg1">
-                        <a:lumMod val="85000"/>
-                      </a:schemeClr>
-                    </a:solidFill>
-                  </a:tcPr>
-                </a:tc>
-                <a:tc>
-                  <a:txBody>
-                    <a:bodyPr/>
-                    <a:lstStyle/>
-                    <a:p>
-                      <a:pPr algn="l" latinLnBrk="1"/>
-                      <a:r>
-                        <a:rPr lang="en-US" altLang="ko-KR" sz="1200" b="0">
-                          <a:solidFill>
-                            <a:schemeClr val="tx1"/>
-                          </a:solidFill>
-                          <a:latin typeface="+mn-ea"/>
-                          <a:ea typeface="+mn-ea"/>
-                        </a:rPr>
-                        <a:t>UI-result_2</a:t>
-                      </a:r>
-                      <a:endParaRPr lang="ko-KR" altLang="en-US" sz="1200" b="0">
-                        <a:solidFill>
-                          <a:schemeClr val="tx1"/>
-                        </a:solidFill>
-                        <a:latin typeface="+mn-ea"/>
-                        <a:ea typeface="+mn-ea"/>
-                      </a:endParaRPr>
-                    </a:p>
-                  </a:txBody>
-                  <a:tcPr anchor="ctr">
-                    <a:lnL w="12700" cap="flat" cmpd="sng" algn="ctr">
-                      <a:solidFill>
-                        <a:schemeClr val="tx1"/>
-                      </a:solidFill>
-                      <a:prstDash val="solid"/>
-                      <a:round/>
-                      <a:headEnd type="none" w="med" len="med"/>
-                      <a:tailEnd type="none" w="med" len="med"/>
-                    </a:lnL>
-                    <a:lnR w="12700" cap="flat" cmpd="sng" algn="ctr">
-                      <a:solidFill>
-                        <a:schemeClr val="tx1"/>
-                      </a:solidFill>
-                      <a:prstDash val="solid"/>
-                      <a:round/>
-                      <a:headEnd type="none" w="med" len="med"/>
-                      <a:tailEnd type="none" w="med" len="med"/>
-                    </a:lnR>
-                    <a:lnT w="12700" cap="flat" cmpd="sng" algn="ctr">
-                      <a:solidFill>
-                        <a:schemeClr val="tx1"/>
-                      </a:solidFill>
-                      <a:prstDash val="solid"/>
-                      <a:round/>
-                      <a:headEnd type="none" w="med" len="med"/>
-                      <a:tailEnd type="none" w="med" len="med"/>
-                    </a:lnT>
-                    <a:lnB w="12700" cap="flat" cmpd="sng" algn="ctr">
-                      <a:solidFill>
-                        <a:schemeClr val="tx1"/>
-                      </a:solidFill>
-                      <a:prstDash val="solid"/>
-                      <a:round/>
-                      <a:headEnd type="none" w="med" len="med"/>
-                      <a:tailEnd type="none" w="med" len="med"/>
-                    </a:lnB>
-                    <a:solidFill>
-                      <a:schemeClr val="bg1"/>
-                    </a:solidFill>
-                  </a:tcPr>
-                </a:tc>
-                <a:tc>
-                  <a:txBody>
-                    <a:bodyPr/>
-                    <a:lstStyle/>
-                    <a:p>
-                      <a:pPr algn="l" latinLnBrk="1"/>
-                      <a:r>
-                        <a:rPr lang="en-US" altLang="ko-KR" sz="1200" b="1">
-                          <a:solidFill>
-                            <a:schemeClr val="tx1"/>
-                          </a:solidFill>
-                          <a:latin typeface="+mn-ea"/>
-                          <a:ea typeface="+mn-ea"/>
-                        </a:rPr>
-                        <a:t>Author</a:t>
-                      </a:r>
-                      <a:endParaRPr lang="ko-KR" altLang="en-US" sz="1200" b="1">
-                        <a:solidFill>
-                          <a:schemeClr val="tx1"/>
-                        </a:solidFill>
-                        <a:latin typeface="+mn-ea"/>
-                        <a:ea typeface="+mn-ea"/>
-                      </a:endParaRPr>
-                    </a:p>
-                  </a:txBody>
-                  <a:tcPr anchor="ctr">
-                    <a:lnL w="12700" cap="flat" cmpd="sng" algn="ctr">
-                      <a:solidFill>
-                        <a:schemeClr val="tx1"/>
-                      </a:solidFill>
-                      <a:prstDash val="solid"/>
-                      <a:round/>
-                      <a:headEnd type="none" w="med" len="med"/>
-                      <a:tailEnd type="none" w="med" len="med"/>
-                    </a:lnL>
-                    <a:lnR w="12700" cap="flat" cmpd="sng" algn="ctr">
-                      <a:solidFill>
-                        <a:schemeClr val="tx1"/>
-                      </a:solidFill>
-                      <a:prstDash val="solid"/>
-                      <a:round/>
-                      <a:headEnd type="none" w="med" len="med"/>
-                      <a:tailEnd type="none" w="med" len="med"/>
-                    </a:lnR>
-                    <a:lnT w="12700" cap="flat" cmpd="sng" algn="ctr">
-                      <a:solidFill>
-                        <a:schemeClr val="tx1"/>
-                      </a:solidFill>
-                      <a:prstDash val="solid"/>
-                      <a:round/>
-                      <a:headEnd type="none" w="med" len="med"/>
-                      <a:tailEnd type="none" w="med" len="med"/>
-                    </a:lnT>
-                    <a:lnB w="12700" cap="flat" cmpd="sng" algn="ctr">
-                      <a:solidFill>
-                        <a:schemeClr val="tx1"/>
-                      </a:solidFill>
-                      <a:prstDash val="solid"/>
-                      <a:round/>
-                      <a:headEnd type="none" w="med" len="med"/>
-                      <a:tailEnd type="none" w="med" len="med"/>
-                    </a:lnB>
-                    <a:solidFill>
-                      <a:schemeClr val="bg1">
-                        <a:lumMod val="85000"/>
-                      </a:schemeClr>
-                    </a:solidFill>
-                  </a:tcPr>
-                </a:tc>
-                <a:tc>
-                  <a:txBody>
-                    <a:bodyPr/>
-                    <a:lstStyle/>
-                    <a:p>
-                      <a:pPr algn="l" latinLnBrk="1"/>
-                      <a:r>
-                        <a:rPr lang="ko-KR" altLang="en-US" sz="1200" b="0">
-                          <a:solidFill>
-                            <a:schemeClr val="tx1"/>
-                          </a:solidFill>
-                          <a:latin typeface="+mn-ea"/>
-                          <a:ea typeface="+mn-ea"/>
-                        </a:rPr>
-                        <a:t>이승찬</a:t>
-                      </a:r>
-                    </a:p>
-                  </a:txBody>
-                  <a:tcPr anchor="ctr">
-                    <a:lnL w="12700" cap="flat" cmpd="sng" algn="ctr">
-                      <a:solidFill>
-                        <a:schemeClr val="tx1"/>
-                      </a:solidFill>
-                      <a:prstDash val="solid"/>
-                      <a:round/>
-                      <a:headEnd type="none" w="med" len="med"/>
-                      <a:tailEnd type="none" w="med" len="med"/>
-                    </a:lnL>
-                    <a:lnR w="12700" cap="flat" cmpd="sng" algn="ctr">
-                      <a:solidFill>
-                        <a:schemeClr val="tx1"/>
-                      </a:solidFill>
-                      <a:prstDash val="solid"/>
-                      <a:round/>
-                      <a:headEnd type="none" w="med" len="med"/>
-                      <a:tailEnd type="none" w="med" len="med"/>
-                    </a:lnR>
-                    <a:lnT w="12700" cap="flat" cmpd="sng" algn="ctr">
-                      <a:solidFill>
-                        <a:schemeClr val="tx1"/>
-                      </a:solidFill>
-                      <a:prstDash val="solid"/>
-                      <a:round/>
-                      <a:headEnd type="none" w="med" len="med"/>
-                      <a:tailEnd type="none" w="med" len="med"/>
-                    </a:lnT>
-                    <a:lnB w="12700" cap="flat" cmpd="sng" algn="ctr">
-                      <a:solidFill>
-                        <a:schemeClr val="tx1"/>
-                      </a:solidFill>
-                      <a:prstDash val="solid"/>
-                      <a:round/>
-                      <a:headEnd type="none" w="med" len="med"/>
-                      <a:tailEnd type="none" w="med" len="med"/>
-                    </a:lnB>
-                    <a:solidFill>
-                      <a:schemeClr val="bg1"/>
-                    </a:solidFill>
-                  </a:tcPr>
-                </a:tc>
-                <a:tc>
-                  <a:txBody>
-                    <a:bodyPr/>
-                    <a:lstStyle/>
-                    <a:p>
-                      <a:pPr algn="l" latinLnBrk="1"/>
-                      <a:r>
-                        <a:rPr lang="en-US" altLang="ko-KR" sz="1200" b="1">
-                          <a:solidFill>
-                            <a:schemeClr val="tx1"/>
-                          </a:solidFill>
-                          <a:latin typeface="+mn-ea"/>
-                          <a:ea typeface="+mn-ea"/>
-                        </a:rPr>
-                        <a:t>Date</a:t>
-                      </a:r>
-                      <a:endParaRPr lang="ko-KR" altLang="en-US" sz="1200" b="1">
-                        <a:solidFill>
-                          <a:schemeClr val="tx1"/>
-                        </a:solidFill>
-                        <a:latin typeface="+mn-ea"/>
-                        <a:ea typeface="+mn-ea"/>
-                      </a:endParaRPr>
-                    </a:p>
-                  </a:txBody>
-                  <a:tcPr anchor="ctr">
-                    <a:lnL w="12700" cap="flat" cmpd="sng" algn="ctr">
-                      <a:solidFill>
-                        <a:schemeClr val="tx1"/>
-                      </a:solidFill>
-                      <a:prstDash val="solid"/>
-                      <a:round/>
-                      <a:headEnd type="none" w="med" len="med"/>
-                      <a:tailEnd type="none" w="med" len="med"/>
-                    </a:lnL>
-                    <a:lnR w="12700" cap="flat" cmpd="sng" algn="ctr">
-                      <a:solidFill>
-                        <a:schemeClr val="tx1"/>
-                      </a:solidFill>
-                      <a:prstDash val="solid"/>
-                      <a:round/>
-                      <a:headEnd type="none" w="med" len="med"/>
-                      <a:tailEnd type="none" w="med" len="med"/>
-                    </a:lnR>
-                    <a:lnT w="12700" cap="flat" cmpd="sng" algn="ctr">
-                      <a:solidFill>
-                        <a:schemeClr val="tx1"/>
-                      </a:solidFill>
-                      <a:prstDash val="solid"/>
-                      <a:round/>
-                      <a:headEnd type="none" w="med" len="med"/>
-                      <a:tailEnd type="none" w="med" len="med"/>
-                    </a:lnT>
-                    <a:lnB w="12700" cap="flat" cmpd="sng" algn="ctr">
-                      <a:solidFill>
-                        <a:schemeClr val="tx1"/>
-                      </a:solidFill>
-                      <a:prstDash val="solid"/>
-                      <a:round/>
-                      <a:headEnd type="none" w="med" len="med"/>
-                      <a:tailEnd type="none" w="med" len="med"/>
-                    </a:lnB>
-                    <a:solidFill>
-                      <a:schemeClr val="bg1">
-                        <a:lumMod val="85000"/>
-                      </a:schemeClr>
-                    </a:solidFill>
-                  </a:tcPr>
-                </a:tc>
-                <a:tc>
-                  <a:txBody>
-                    <a:bodyPr/>
-                    <a:lstStyle/>
-                    <a:p>
-                      <a:pPr algn="l" latinLnBrk="1"/>
-                      <a:r>
-                        <a:rPr lang="en-US" altLang="ko-KR" sz="1200" b="0">
-                          <a:solidFill>
-                            <a:schemeClr val="tx1"/>
-                          </a:solidFill>
-                          <a:latin typeface="+mn-ea"/>
-                          <a:ea typeface="+mn-ea"/>
-                        </a:rPr>
-                        <a:t>2026.04.09</a:t>
-                      </a:r>
-                      <a:endParaRPr lang="ko-KR" altLang="en-US" sz="1200" b="0">
-                        <a:solidFill>
-                          <a:schemeClr val="tx1"/>
-                        </a:solidFill>
-                        <a:latin typeface="+mn-ea"/>
-                        <a:ea typeface="+mn-ea"/>
-                      </a:endParaRPr>
-                    </a:p>
-                  </a:txBody>
-                  <a:tcPr anchor="ctr">
-                    <a:lnL w="12700" cap="flat" cmpd="sng" algn="ctr">
-                      <a:solidFill>
-                        <a:schemeClr val="tx1"/>
-                      </a:solidFill>
-                      <a:prstDash val="solid"/>
-                      <a:round/>
-                      <a:headEnd type="none" w="med" len="med"/>
-                      <a:tailEnd type="none" w="med" len="med"/>
-                    </a:lnL>
-                    <a:lnR w="12700" cap="flat" cmpd="sng" algn="ctr">
-                      <a:solidFill>
-                        <a:schemeClr val="tx1"/>
-                      </a:solidFill>
-                      <a:prstDash val="solid"/>
-                      <a:round/>
-                      <a:headEnd type="none" w="med" len="med"/>
-                      <a:tailEnd type="none" w="med" len="med"/>
-                    </a:lnR>
-                    <a:lnT w="12700" cap="flat" cmpd="sng" algn="ctr">
-                      <a:solidFill>
-                        <a:schemeClr val="tx1"/>
-                      </a:solidFill>
-                      <a:prstDash val="solid"/>
-                      <a:round/>
-                      <a:headEnd type="none" w="med" len="med"/>
-                      <a:tailEnd type="none" w="med" len="med"/>
-                    </a:lnT>
-                    <a:lnB w="12700" cap="flat" cmpd="sng" algn="ctr">
-                      <a:solidFill>
-                        <a:schemeClr val="tx1"/>
-                      </a:solidFill>
-                      <a:prstDash val="solid"/>
-                      <a:round/>
-                      <a:headEnd type="none" w="med" len="med"/>
-                      <a:tailEnd type="none" w="med" len="med"/>
-                    </a:lnB>
-                    <a:solidFill>
-                      <a:schemeClr val="bg1"/>
-                    </a:solidFill>
-                  </a:tcPr>
-                </a:tc>
-                <a:extLst>
-                  <a:ext uri="{0D108BD9-81ED-4DB2-BD59-A6C34878D82A}">
-                    <a16:rowId xmlns:a16="http://schemas.microsoft.com/office/drawing/2014/main" val="2390745574"/>
-                  </a:ext>
-                </a:extLst>
-              </a:tr>
-              <a:tr h="355655">
-                <a:tc>
-                  <a:txBody>
-                    <a:bodyPr/>
-                    <a:lstStyle/>
-                    <a:p>
-                      <a:pPr algn="l" latinLnBrk="1"/>
-                      <a:r>
-                        <a:rPr lang="en-US" altLang="ko-KR" sz="1200" b="1">
-                          <a:solidFill>
-                            <a:schemeClr val="tx1"/>
-                          </a:solidFill>
-                          <a:latin typeface="+mn-ea"/>
-                          <a:ea typeface="+mn-ea"/>
-                        </a:rPr>
-                        <a:t>Screen Path</a:t>
-                      </a:r>
-                      <a:endParaRPr lang="ko-KR" altLang="en-US" sz="1200" b="1">
-                        <a:solidFill>
-                          <a:schemeClr val="tx1"/>
-                        </a:solidFill>
-                        <a:latin typeface="+mn-ea"/>
-                        <a:ea typeface="+mn-ea"/>
-                      </a:endParaRPr>
-                    </a:p>
-                  </a:txBody>
-                  <a:tcPr anchor="ctr">
-                    <a:lnL w="12700" cap="flat" cmpd="sng" algn="ctr">
-                      <a:solidFill>
-                        <a:schemeClr val="tx1"/>
-                      </a:solidFill>
-                      <a:prstDash val="solid"/>
-                      <a:round/>
-                      <a:headEnd type="none" w="med" len="med"/>
-                      <a:tailEnd type="none" w="med" len="med"/>
-                    </a:lnL>
-                    <a:lnR w="12700" cap="flat" cmpd="sng" algn="ctr">
-                      <a:solidFill>
-                        <a:schemeClr val="tx1"/>
-                      </a:solidFill>
-                      <a:prstDash val="solid"/>
-                      <a:round/>
-                      <a:headEnd type="none" w="med" len="med"/>
-                      <a:tailEnd type="none" w="med" len="med"/>
-                    </a:lnR>
-                    <a:lnT w="12700" cap="flat" cmpd="sng" algn="ctr">
-                      <a:solidFill>
-                        <a:schemeClr val="tx1"/>
-                      </a:solidFill>
-                      <a:prstDash val="solid"/>
-                      <a:round/>
-                      <a:headEnd type="none" w="med" len="med"/>
-                      <a:tailEnd type="none" w="med" len="med"/>
-                    </a:lnT>
-                    <a:lnB w="12700" cap="flat" cmpd="sng" algn="ctr">
-                      <a:solidFill>
-                        <a:schemeClr val="tx1"/>
-                      </a:solidFill>
-                      <a:prstDash val="solid"/>
-                      <a:round/>
-                      <a:headEnd type="none" w="med" len="med"/>
-                      <a:tailEnd type="none" w="med" len="med"/>
-                    </a:lnB>
-                    <a:solidFill>
-                      <a:schemeClr val="bg1">
-                        <a:lumMod val="85000"/>
-                      </a:schemeClr>
-                    </a:solidFill>
-                  </a:tcPr>
-                </a:tc>
-                <a:tc gridSpan="7">
-                  <a:txBody>
-                    <a:bodyPr/>
-                    <a:lstStyle/>
-                    <a:p>
-                      <a:pPr algn="l" latinLnBrk="1"/>
-                      <a:r>
-                        <a:rPr lang="en-US" altLang="ko-KR" sz="1200" b="0">
-                          <a:solidFill>
-                            <a:schemeClr val="tx1"/>
-                          </a:solidFill>
-                          <a:latin typeface="+mn-ea"/>
-                          <a:ea typeface="+mn-ea"/>
-                        </a:rPr>
-                        <a:t>main - predict</a:t>
-                      </a:r>
-                      <a:endParaRPr lang="ko-KR" altLang="en-US" sz="1200" b="0">
-                        <a:solidFill>
-                          <a:schemeClr val="tx1"/>
-                        </a:solidFill>
-                        <a:latin typeface="+mn-ea"/>
-                        <a:ea typeface="+mn-ea"/>
-                      </a:endParaRPr>
-                    </a:p>
-                  </a:txBody>
-                  <a:tcPr anchor="ctr">
-                    <a:lnL w="12700" cap="flat" cmpd="sng" algn="ctr">
-                      <a:solidFill>
-                        <a:schemeClr val="tx1"/>
-                      </a:solidFill>
-                      <a:prstDash val="solid"/>
-                      <a:round/>
-                      <a:headEnd type="none" w="med" len="med"/>
-                      <a:tailEnd type="none" w="med" len="med"/>
-                    </a:lnL>
-                    <a:lnR w="12700" cap="flat" cmpd="sng" algn="ctr">
-                      <a:solidFill>
-                        <a:schemeClr val="tx1"/>
-                      </a:solidFill>
-                      <a:prstDash val="solid"/>
-                      <a:round/>
-                      <a:headEnd type="none" w="med" len="med"/>
-                      <a:tailEnd type="none" w="med" len="med"/>
-                    </a:lnR>
-                    <a:lnT w="12700" cap="flat" cmpd="sng" algn="ctr">
-                      <a:solidFill>
-                        <a:schemeClr val="tx1"/>
-                      </a:solidFill>
-                      <a:prstDash val="solid"/>
-                      <a:round/>
-                      <a:headEnd type="none" w="med" len="med"/>
-                      <a:tailEnd type="none" w="med" len="med"/>
-                    </a:lnT>
-                    <a:lnB w="12700" cap="flat" cmpd="sng" algn="ctr">
-                      <a:solidFill>
-                        <a:schemeClr val="tx1"/>
-                      </a:solidFill>
-                      <a:prstDash val="solid"/>
-                      <a:round/>
-                      <a:headEnd type="none" w="med" len="med"/>
-                      <a:tailEnd type="none" w="med" len="med"/>
-                    </a:lnB>
-                    <a:solidFill>
-                      <a:schemeClr val="bg1"/>
-                    </a:solidFill>
-                  </a:tcPr>
-                </a:tc>
-                <a:tc hMerge="1">
-                  <a:txBody>
-                    <a:bodyPr/>
-                    <a:lstStyle/>
-                    <a:p>
-                      <a:pPr latinLnBrk="1"/>
-                      <a:endParaRPr lang="ko-KR" altLang="en-US"/>
-                    </a:p>
-                  </a:txBody>
-                  <a:tcPr>
-                    <a:lnB w="12700" cap="flat" cmpd="sng" algn="ctr">
-                      <a:solidFill>
-                        <a:schemeClr val="tx1"/>
-                      </a:solidFill>
-                      <a:prstDash val="solid"/>
-                      <a:round/>
-                      <a:headEnd type="none" w="med" len="med"/>
-                      <a:tailEnd type="none" w="med" len="med"/>
-                    </a:lnB>
-                  </a:tcPr>
-                </a:tc>
-                <a:tc hMerge="1">
-                  <a:txBody>
-                    <a:bodyPr/>
-                    <a:lstStyle/>
-                    <a:p>
-                      <a:pPr latinLnBrk="1"/>
-                      <a:endParaRPr lang="ko-KR" altLang="en-US"/>
-                    </a:p>
-                  </a:txBody>
-                  <a:tcPr>
-                    <a:lnB w="12700" cap="flat" cmpd="sng" algn="ctr">
-                      <a:solidFill>
-                        <a:schemeClr val="tx1"/>
-                      </a:solidFill>
-                      <a:prstDash val="solid"/>
-                      <a:round/>
-                      <a:headEnd type="none" w="med" len="med"/>
-                      <a:tailEnd type="none" w="med" len="med"/>
-                    </a:lnB>
-                  </a:tcPr>
-                </a:tc>
-                <a:tc hMerge="1">
-                  <a:txBody>
-                    <a:bodyPr/>
-                    <a:lstStyle/>
-                    <a:p>
-                      <a:pPr latinLnBrk="1"/>
-                      <a:endParaRPr lang="ko-KR" altLang="en-US"/>
-                    </a:p>
-                  </a:txBody>
-                  <a:tcPr>
-                    <a:lnB w="12700" cap="flat" cmpd="sng" algn="ctr">
-                      <a:solidFill>
-                        <a:schemeClr val="tx1"/>
-                      </a:solidFill>
-                      <a:prstDash val="solid"/>
-                      <a:round/>
-                      <a:headEnd type="none" w="med" len="med"/>
-                      <a:tailEnd type="none" w="med" len="med"/>
-                    </a:lnB>
-                  </a:tcPr>
-                </a:tc>
-                <a:tc hMerge="1">
-                  <a:txBody>
-                    <a:bodyPr/>
-                    <a:lstStyle/>
-                    <a:p>
-                      <a:pPr latinLnBrk="1"/>
-                      <a:endParaRPr lang="ko-KR" altLang="en-US"/>
-                    </a:p>
-                  </a:txBody>
-                  <a:tcPr>
-                    <a:lnR w="12700" cap="flat" cmpd="sng" algn="ctr">
-                      <a:solidFill>
-                        <a:schemeClr val="tx1"/>
-                      </a:solidFill>
-                      <a:prstDash val="solid"/>
-                      <a:round/>
-                      <a:headEnd type="none" w="med" len="med"/>
-                      <a:tailEnd type="none" w="med" len="med"/>
-                    </a:lnR>
-                    <a:lnB w="12700" cap="flat" cmpd="sng" algn="ctr">
-                      <a:solidFill>
-                        <a:schemeClr val="tx1"/>
-                      </a:solidFill>
-                      <a:prstDash val="solid"/>
-                      <a:round/>
-                      <a:headEnd type="none" w="med" len="med"/>
-                      <a:tailEnd type="none" w="med" len="med"/>
-                    </a:lnB>
-                  </a:tcPr>
-                </a:tc>
-                <a:tc hMerge="1">
-                  <a:txBody>
-                    <a:bodyPr/>
-                    <a:lstStyle/>
-                    <a:p>
-                      <a:pPr algn="l" latinLnBrk="1"/>
-                      <a:endParaRPr lang="ko-KR" altLang="en-US" sz="1200" b="0">
-                        <a:solidFill>
-                          <a:schemeClr val="tx1"/>
-                        </a:solidFill>
-                        <a:latin typeface="+mn-ea"/>
-                        <a:ea typeface="+mn-ea"/>
-                      </a:endParaRPr>
-                    </a:p>
-                  </a:txBody>
-                  <a:tcPr anchor="ctr">
-                    <a:lnL w="12700" cap="flat" cmpd="sng" algn="ctr">
-                      <a:solidFill>
-                        <a:schemeClr val="tx1"/>
-                      </a:solidFill>
-                      <a:prstDash val="solid"/>
-                      <a:round/>
-                      <a:headEnd type="none" w="med" len="med"/>
-                      <a:tailEnd type="none" w="med" len="med"/>
-                    </a:lnL>
-                    <a:lnR w="12700" cap="flat" cmpd="sng" algn="ctr">
-                      <a:solidFill>
-                        <a:schemeClr val="tx1"/>
-                      </a:solidFill>
-                      <a:prstDash val="solid"/>
-                      <a:round/>
-                      <a:headEnd type="none" w="med" len="med"/>
-                      <a:tailEnd type="none" w="med" len="med"/>
-                    </a:lnR>
-                    <a:lnT w="12700" cap="flat" cmpd="sng" algn="ctr">
-                      <a:solidFill>
-                        <a:schemeClr val="tx1"/>
-                      </a:solidFill>
-                      <a:prstDash val="solid"/>
-                      <a:round/>
-                      <a:headEnd type="none" w="med" len="med"/>
-                      <a:tailEnd type="none" w="med" len="med"/>
-                    </a:lnT>
-                    <a:lnB w="12700" cap="flat" cmpd="sng" algn="ctr">
-                      <a:solidFill>
-                        <a:schemeClr val="tx1"/>
-                      </a:solidFill>
-                      <a:prstDash val="solid"/>
-                      <a:round/>
-                      <a:headEnd type="none" w="med" len="med"/>
-                      <a:tailEnd type="none" w="med" len="med"/>
-                    </a:lnB>
-                    <a:solidFill>
-                      <a:schemeClr val="bg1"/>
-                    </a:solidFill>
-                  </a:tcPr>
-                </a:tc>
-                <a:tc hMerge="1">
-                  <a:txBody>
-                    <a:bodyPr/>
-                    <a:lstStyle/>
-                    <a:p>
-                      <a:pPr algn="l" latinLnBrk="1"/>
-                      <a:endParaRPr lang="ko-KR" altLang="en-US" sz="1200" b="0">
-                        <a:solidFill>
-                          <a:schemeClr val="tx1"/>
-                        </a:solidFill>
-                        <a:latin typeface="+mn-ea"/>
-                        <a:ea typeface="+mn-ea"/>
-                      </a:endParaRPr>
-                    </a:p>
-                  </a:txBody>
-                  <a:tcPr anchor="ctr">
-                    <a:lnL w="12700" cap="flat" cmpd="sng" algn="ctr">
-                      <a:solidFill>
-                        <a:schemeClr val="tx1"/>
-                      </a:solidFill>
-                      <a:prstDash val="solid"/>
-                      <a:round/>
-                      <a:headEnd type="none" w="med" len="med"/>
-                      <a:tailEnd type="none" w="med" len="med"/>
-                    </a:lnL>
-                    <a:lnR w="12700" cap="flat" cmpd="sng" algn="ctr">
-                      <a:solidFill>
-                        <a:schemeClr val="tx1"/>
-                      </a:solidFill>
-                      <a:prstDash val="solid"/>
-                      <a:round/>
-                      <a:headEnd type="none" w="med" len="med"/>
-                      <a:tailEnd type="none" w="med" len="med"/>
-                    </a:lnR>
-                    <a:lnT w="12700" cap="flat" cmpd="sng" algn="ctr">
-                      <a:solidFill>
-                        <a:schemeClr val="tx1"/>
-                      </a:solidFill>
-                      <a:prstDash val="solid"/>
-                      <a:round/>
-                      <a:headEnd type="none" w="med" len="med"/>
-                      <a:tailEnd type="none" w="med" len="med"/>
-                    </a:lnT>
-                    <a:lnB w="12700" cap="flat" cmpd="sng" algn="ctr">
-                      <a:solidFill>
-                        <a:schemeClr val="tx1"/>
-                      </a:solidFill>
-                      <a:prstDash val="solid"/>
-                      <a:round/>
-                      <a:headEnd type="none" w="med" len="med"/>
-                      <a:tailEnd type="none" w="med" len="med"/>
-                    </a:lnB>
-                    <a:solidFill>
-                      <a:schemeClr val="bg1"/>
-                    </a:solidFill>
-                  </a:tcPr>
-                </a:tc>
-                <a:extLst>
-                  <a:ext uri="{0D108BD9-81ED-4DB2-BD59-A6C34878D82A}">
-                    <a16:rowId xmlns:a16="http://schemas.microsoft.com/office/drawing/2014/main" val="2990231026"/>
-                  </a:ext>
-                </a:extLst>
-              </a:tr>
-            </a:tbl>
-          </a:graphicData>
-        </a:graphic>
-      </p:graphicFrame>
-      <p:graphicFrame>
-        <p:nvGraphicFramePr>
-          <p:cNvPr id="4" name="표 3">
-            <a:extLst>
-              <a:ext uri="{FF2B5EF4-FFF2-40B4-BE49-F238E27FC236}">
-                <a16:creationId xmlns:a16="http://schemas.microsoft.com/office/drawing/2014/main" id="{7015AE86-E78D-2EC5-F218-E0ACF707DAD0}"/>
-              </a:ext>
-            </a:extLst>
-          </p:cNvPr>
-          <p:cNvGraphicFramePr>
-            <a:graphicFrameLocks noGrp="1"/>
-          </p:cNvGraphicFramePr>
-          <p:nvPr>
-            <p:extLst>
-              <p:ext uri="{D42A27DB-BD31-4B8C-83A1-F6EECF244321}">
-                <p14:modId xmlns:p14="http://schemas.microsoft.com/office/powerpoint/2010/main" val="3983425267"/>
-              </p:ext>
-            </p:extLst>
-          </p:nvPr>
-        </p:nvGraphicFramePr>
-        <p:xfrm>
-          <a:off x="9221188" y="826547"/>
-          <a:ext cx="2607296" cy="2766960"/>
-        </p:xfrm>
-        <a:graphic>
-          <a:graphicData uri="http://schemas.openxmlformats.org/drawingml/2006/table">
-            <a:tbl>
-              <a:tblPr firstRow="1" bandRow="1">
-                <a:tableStyleId>{5C22544A-7EE6-4342-B048-85BDC9FD1C3A}</a:tableStyleId>
-              </a:tblPr>
-              <a:tblGrid>
-                <a:gridCol w="324618">
-                  <a:extLst>
-                    <a:ext uri="{9D8B030D-6E8A-4147-A177-3AD203B41FA5}">
-                      <a16:colId xmlns:a16="http://schemas.microsoft.com/office/drawing/2014/main" val="3477001054"/>
-                    </a:ext>
-                  </a:extLst>
-                </a:gridCol>
-                <a:gridCol w="2282678">
-                  <a:extLst>
-                    <a:ext uri="{9D8B030D-6E8A-4147-A177-3AD203B41FA5}">
-                      <a16:colId xmlns:a16="http://schemas.microsoft.com/office/drawing/2014/main" val="2165713866"/>
-                    </a:ext>
-                  </a:extLst>
-                </a:gridCol>
-              </a:tblGrid>
-              <a:tr h="360000">
-                <a:tc gridSpan="2">
-                  <a:txBody>
-                    <a:bodyPr/>
-                    <a:lstStyle/>
-                    <a:p>
-                      <a:pPr algn="ctr" latinLnBrk="1"/>
-                      <a:r>
-                        <a:rPr lang="en-US" altLang="ko-KR" sz="1200">
-                          <a:solidFill>
-                            <a:schemeClr val="tx1"/>
-                          </a:solidFill>
-                        </a:rPr>
-                        <a:t>Description</a:t>
-                      </a:r>
-                      <a:endParaRPr lang="ko-KR" altLang="en-US" sz="1200">
-                        <a:solidFill>
-                          <a:schemeClr val="tx1"/>
-                        </a:solidFill>
-                      </a:endParaRPr>
-                    </a:p>
-                  </a:txBody>
-                  <a:tcPr anchor="ctr">
-                    <a:lnL w="12700" cap="flat" cmpd="sng" algn="ctr">
-                      <a:solidFill>
-                        <a:schemeClr val="tx1"/>
-                      </a:solidFill>
-                      <a:prstDash val="solid"/>
-                      <a:round/>
-                      <a:headEnd type="none" w="med" len="med"/>
-                      <a:tailEnd type="none" w="med" len="med"/>
-                    </a:lnL>
-                    <a:lnR w="12700" cap="flat" cmpd="sng" algn="ctr">
-                      <a:solidFill>
-                        <a:schemeClr val="tx1"/>
-                      </a:solidFill>
-                      <a:prstDash val="solid"/>
-                      <a:round/>
-                      <a:headEnd type="none" w="med" len="med"/>
-                      <a:tailEnd type="none" w="med" len="med"/>
-                    </a:lnR>
-                    <a:lnT w="12700" cap="flat" cmpd="sng" algn="ctr">
-                      <a:solidFill>
-                        <a:schemeClr val="tx1"/>
-                      </a:solidFill>
-                      <a:prstDash val="solid"/>
-                      <a:round/>
-                      <a:headEnd type="none" w="med" len="med"/>
-                      <a:tailEnd type="none" w="med" len="med"/>
-                    </a:lnT>
-                    <a:lnB w="12700" cap="flat" cmpd="sng" algn="ctr">
-                      <a:solidFill>
-                        <a:schemeClr val="tx1"/>
-                      </a:solidFill>
-                      <a:prstDash val="solid"/>
-                      <a:round/>
-                      <a:headEnd type="none" w="med" len="med"/>
-                      <a:tailEnd type="none" w="med" len="med"/>
-                    </a:lnB>
-                    <a:solidFill>
-                      <a:schemeClr val="bg1">
-                        <a:lumMod val="85000"/>
-                      </a:schemeClr>
-                    </a:solidFill>
-                  </a:tcPr>
-                </a:tc>
-                <a:tc hMerge="1">
-                  <a:txBody>
-                    <a:bodyPr/>
-                    <a:lstStyle/>
-                    <a:p>
-                      <a:pPr algn="ctr" latinLnBrk="1"/>
-                      <a:endParaRPr lang="ko-KR" altLang="en-US"/>
-                    </a:p>
-                  </a:txBody>
-                  <a:tcPr anchor="ctr"/>
-                </a:tc>
-                <a:extLst>
-                  <a:ext uri="{0D108BD9-81ED-4DB2-BD59-A6C34878D82A}">
-                    <a16:rowId xmlns:a16="http://schemas.microsoft.com/office/drawing/2014/main" val="1766262352"/>
-                  </a:ext>
-                </a:extLst>
-              </a:tr>
-              <a:tr h="612000">
-                <a:tc>
-                  <a:txBody>
-                    <a:bodyPr/>
-                    <a:lstStyle/>
-                    <a:p>
-                      <a:pPr algn="ctr" latinLnBrk="1"/>
-                      <a:r>
-                        <a:rPr lang="en-US" altLang="ko-KR" sz="1200"/>
-                        <a:t>1</a:t>
-                      </a:r>
-                      <a:endParaRPr lang="ko-KR" altLang="en-US" sz="1200"/>
-                    </a:p>
-                  </a:txBody>
-                  <a:tcPr>
-                    <a:lnL w="12700" cap="flat" cmpd="sng" algn="ctr">
-                      <a:solidFill>
-                        <a:schemeClr val="tx1"/>
-                      </a:solidFill>
-                      <a:prstDash val="solid"/>
-                      <a:round/>
-                      <a:headEnd type="none" w="med" len="med"/>
-                      <a:tailEnd type="none" w="med" len="med"/>
-                    </a:lnL>
-                    <a:lnR w="12700" cap="flat" cmpd="sng" algn="ctr">
-                      <a:solidFill>
-                        <a:schemeClr val="tx1"/>
-                      </a:solidFill>
-                      <a:prstDash val="solid"/>
-                      <a:round/>
-                      <a:headEnd type="none" w="med" len="med"/>
-                      <a:tailEnd type="none" w="med" len="med"/>
-                    </a:lnR>
-                    <a:lnT w="12700" cap="flat" cmpd="sng" algn="ctr">
-                      <a:solidFill>
-                        <a:schemeClr val="tx1"/>
-                      </a:solidFill>
-                      <a:prstDash val="solid"/>
-                      <a:round/>
-                      <a:headEnd type="none" w="med" len="med"/>
-                      <a:tailEnd type="none" w="med" len="med"/>
-                    </a:lnT>
-                    <a:lnB w="12700" cap="flat" cmpd="sng" algn="ctr">
-                      <a:solidFill>
-                        <a:schemeClr val="tx1"/>
-                      </a:solidFill>
-                      <a:prstDash val="solid"/>
-                      <a:round/>
-                      <a:headEnd type="none" w="med" len="med"/>
-                      <a:tailEnd type="none" w="med" len="med"/>
-                    </a:lnB>
-                    <a:solidFill>
-                      <a:schemeClr val="bg1"/>
-                    </a:solidFill>
-                  </a:tcPr>
-                </a:tc>
-                <a:tc>
-                  <a:txBody>
-                    <a:bodyPr/>
-                    <a:lstStyle/>
-                    <a:p>
-                      <a:pPr algn="l" latinLnBrk="1"/>
-                      <a:r>
-                        <a:rPr lang="ko-KR" altLang="en-US" sz="1200"/>
-                        <a:t>사용자 입력 데이터 저장 </a:t>
-                      </a:r>
-                      <a:r>
-                        <a:rPr lang="en-US" altLang="ko-KR" sz="1200"/>
-                        <a:t>ID</a:t>
-                      </a:r>
-                    </a:p>
-                    <a:p>
-                      <a:pPr algn="l" latinLnBrk="1"/>
-                      <a:r>
-                        <a:rPr lang="ko-KR" altLang="en-US" sz="1200"/>
-                        <a:t>상단 </a:t>
-                      </a:r>
-                      <a:r>
-                        <a:rPr lang="en-US" altLang="ko-KR" sz="1200"/>
-                        <a:t>Analysis ID</a:t>
-                      </a:r>
-                      <a:r>
-                        <a:rPr lang="ko-KR" altLang="en-US" sz="1200"/>
-                        <a:t>로 조회 가능</a:t>
-                      </a:r>
-                    </a:p>
-                  </a:txBody>
-                  <a:tcPr anchor="ctr">
-                    <a:lnL w="12700" cap="flat" cmpd="sng" algn="ctr">
-                      <a:solidFill>
-                        <a:schemeClr val="tx1"/>
-                      </a:solidFill>
-                      <a:prstDash val="solid"/>
-                      <a:round/>
-                      <a:headEnd type="none" w="med" len="med"/>
-                      <a:tailEnd type="none" w="med" len="med"/>
-                    </a:lnL>
-                    <a:lnR w="12700" cap="flat" cmpd="sng" algn="ctr">
-                      <a:solidFill>
-                        <a:schemeClr val="tx1"/>
-                      </a:solidFill>
-                      <a:prstDash val="solid"/>
-                      <a:round/>
-                      <a:headEnd type="none" w="med" len="med"/>
-                      <a:tailEnd type="none" w="med" len="med"/>
-                    </a:lnR>
-                    <a:lnT w="12700" cap="flat" cmpd="sng" algn="ctr">
-                      <a:solidFill>
-                        <a:schemeClr val="tx1"/>
-                      </a:solidFill>
-                      <a:prstDash val="solid"/>
-                      <a:round/>
-                      <a:headEnd type="none" w="med" len="med"/>
-                      <a:tailEnd type="none" w="med" len="med"/>
-                    </a:lnT>
-                    <a:lnB w="12700" cap="flat" cmpd="sng" algn="ctr">
-                      <a:solidFill>
-                        <a:schemeClr val="tx1"/>
-                      </a:solidFill>
-                      <a:prstDash val="solid"/>
-                      <a:round/>
-                      <a:headEnd type="none" w="med" len="med"/>
-                      <a:tailEnd type="none" w="med" len="med"/>
-                    </a:lnB>
-                    <a:solidFill>
-                      <a:schemeClr val="bg1"/>
-                    </a:solidFill>
-                  </a:tcPr>
-                </a:tc>
-                <a:extLst>
-                  <a:ext uri="{0D108BD9-81ED-4DB2-BD59-A6C34878D82A}">
-                    <a16:rowId xmlns:a16="http://schemas.microsoft.com/office/drawing/2014/main" val="3571744345"/>
-                  </a:ext>
-                </a:extLst>
-              </a:tr>
-              <a:tr h="612000">
-                <a:tc>
-                  <a:txBody>
-                    <a:bodyPr/>
-                    <a:lstStyle/>
-                    <a:p>
-                      <a:pPr algn="ctr" latinLnBrk="1"/>
-                      <a:r>
-                        <a:rPr lang="en-US" altLang="ko-KR" sz="1200"/>
-                        <a:t>2</a:t>
-                      </a:r>
-                      <a:endParaRPr lang="ko-KR" altLang="en-US" sz="1200"/>
-                    </a:p>
-                  </a:txBody>
-                  <a:tcPr>
-                    <a:lnL w="12700" cap="flat" cmpd="sng" algn="ctr">
-                      <a:solidFill>
-                        <a:schemeClr val="tx1"/>
-                      </a:solidFill>
-                      <a:prstDash val="solid"/>
-                      <a:round/>
-                      <a:headEnd type="none" w="med" len="med"/>
-                      <a:tailEnd type="none" w="med" len="med"/>
-                    </a:lnL>
-                    <a:lnR w="12700" cap="flat" cmpd="sng" algn="ctr">
-                      <a:solidFill>
-                        <a:schemeClr val="tx1"/>
-                      </a:solidFill>
-                      <a:prstDash val="solid"/>
-                      <a:round/>
-                      <a:headEnd type="none" w="med" len="med"/>
-                      <a:tailEnd type="none" w="med" len="med"/>
-                    </a:lnR>
-                    <a:lnT w="12700" cap="flat" cmpd="sng" algn="ctr">
-                      <a:solidFill>
-                        <a:schemeClr val="tx1"/>
-                      </a:solidFill>
-                      <a:prstDash val="solid"/>
-                      <a:round/>
-                      <a:headEnd type="none" w="med" len="med"/>
-                      <a:tailEnd type="none" w="med" len="med"/>
-                    </a:lnT>
-                    <a:lnB w="12700" cap="flat" cmpd="sng" algn="ctr">
-                      <a:solidFill>
-                        <a:schemeClr val="tx1"/>
-                      </a:solidFill>
-                      <a:prstDash val="solid"/>
-                      <a:round/>
-                      <a:headEnd type="none" w="med" len="med"/>
-                      <a:tailEnd type="none" w="med" len="med"/>
-                    </a:lnB>
-                    <a:solidFill>
-                      <a:schemeClr val="bg1"/>
-                    </a:solidFill>
-                  </a:tcPr>
-                </a:tc>
-                <a:tc>
-                  <a:txBody>
-                    <a:bodyPr/>
-                    <a:lstStyle/>
-                    <a:p>
-                      <a:pPr algn="l" latinLnBrk="1"/>
-                      <a:r>
-                        <a:rPr lang="ko-KR" altLang="en-US" sz="1200"/>
-                        <a:t>사용자 입력 데이터 예측 결과 그래프</a:t>
-                      </a:r>
-                      <a:endParaRPr lang="en-US" altLang="ko-KR" sz="1200"/>
-                    </a:p>
-                    <a:p>
-                      <a:pPr algn="l" latinLnBrk="1"/>
-                      <a:r>
-                        <a:rPr lang="en-US" altLang="ko-KR" sz="1200"/>
-                        <a:t>class0 – </a:t>
-                      </a:r>
-                      <a:r>
-                        <a:rPr lang="ko-KR" altLang="en-US" sz="1200"/>
-                        <a:t>정상</a:t>
-                      </a:r>
-                      <a:r>
-                        <a:rPr lang="en-US" altLang="ko-KR" sz="1200"/>
-                        <a:t>, class1 – </a:t>
-                      </a:r>
-                      <a:r>
-                        <a:rPr lang="ko-KR" altLang="en-US" sz="1200"/>
-                        <a:t>경계</a:t>
-                      </a:r>
-                      <a:r>
-                        <a:rPr lang="en-US" altLang="ko-KR" sz="1200"/>
-                        <a:t>, class2 - </a:t>
-                      </a:r>
-                      <a:r>
-                        <a:rPr lang="ko-KR" altLang="en-US" sz="1200"/>
-                        <a:t>위험</a:t>
-                      </a:r>
-                    </a:p>
-                  </a:txBody>
-                  <a:tcPr anchor="ctr">
-                    <a:lnL w="12700" cap="flat" cmpd="sng" algn="ctr">
-                      <a:solidFill>
-                        <a:schemeClr val="tx1"/>
-                      </a:solidFill>
-                      <a:prstDash val="solid"/>
-                      <a:round/>
-                      <a:headEnd type="none" w="med" len="med"/>
-                      <a:tailEnd type="none" w="med" len="med"/>
-                    </a:lnL>
-                    <a:lnR w="12700" cap="flat" cmpd="sng" algn="ctr">
-                      <a:solidFill>
-                        <a:schemeClr val="tx1"/>
-                      </a:solidFill>
-                      <a:prstDash val="solid"/>
-                      <a:round/>
-                      <a:headEnd type="none" w="med" len="med"/>
-                      <a:tailEnd type="none" w="med" len="med"/>
-                    </a:lnR>
-                    <a:lnT w="12700" cap="flat" cmpd="sng" algn="ctr">
-                      <a:solidFill>
-                        <a:schemeClr val="tx1"/>
-                      </a:solidFill>
-                      <a:prstDash val="solid"/>
-                      <a:round/>
-                      <a:headEnd type="none" w="med" len="med"/>
-                      <a:tailEnd type="none" w="med" len="med"/>
-                    </a:lnT>
-                    <a:lnB w="12700" cap="flat" cmpd="sng" algn="ctr">
-                      <a:solidFill>
-                        <a:schemeClr val="tx1"/>
-                      </a:solidFill>
-                      <a:prstDash val="solid"/>
-                      <a:round/>
-                      <a:headEnd type="none" w="med" len="med"/>
-                      <a:tailEnd type="none" w="med" len="med"/>
-                    </a:lnB>
-                    <a:solidFill>
-                      <a:schemeClr val="bg1"/>
-                    </a:solidFill>
-                  </a:tcPr>
-                </a:tc>
-                <a:extLst>
-                  <a:ext uri="{0D108BD9-81ED-4DB2-BD59-A6C34878D82A}">
-                    <a16:rowId xmlns:a16="http://schemas.microsoft.com/office/drawing/2014/main" val="2924856255"/>
-                  </a:ext>
-                </a:extLst>
-              </a:tr>
-              <a:tr h="360000">
-                <a:tc gridSpan="2">
-                  <a:txBody>
-                    <a:bodyPr/>
-                    <a:lstStyle/>
-                    <a:p>
-                      <a:pPr marL="0" marR="0" lvl="0" indent="0" algn="ctr" defTabSz="914400" rtl="0" eaLnBrk="1" fontAlgn="auto" latinLnBrk="1" hangingPunct="1">
-                        <a:lnSpc>
-                          <a:spcPct val="100000"/>
-                        </a:lnSpc>
-                        <a:spcBef>
-                          <a:spcPts val="0"/>
-                        </a:spcBef>
-                        <a:spcAft>
-                          <a:spcPts val="0"/>
-                        </a:spcAft>
-                        <a:buClrTx/>
-                        <a:buSzTx/>
-                        <a:buFontTx/>
-                        <a:buNone/>
-                        <a:tabLst/>
-                        <a:defRPr/>
-                      </a:pPr>
-                      <a:r>
-                        <a:rPr lang="en-US" altLang="ko-KR" sz="1200"/>
-                        <a:t>Check Point</a:t>
-                      </a:r>
-                    </a:p>
-                  </a:txBody>
-                  <a:tcPr anchor="ctr">
-                    <a:lnL w="12700" cap="flat" cmpd="sng" algn="ctr">
-                      <a:solidFill>
-                        <a:schemeClr val="tx1"/>
-                      </a:solidFill>
-                      <a:prstDash val="solid"/>
-                      <a:round/>
-                      <a:headEnd type="none" w="med" len="med"/>
-                      <a:tailEnd type="none" w="med" len="med"/>
-                    </a:lnL>
-                    <a:lnR w="12700" cap="flat" cmpd="sng" algn="ctr">
-                      <a:solidFill>
-                        <a:schemeClr val="tx1"/>
-                      </a:solidFill>
-                      <a:prstDash val="solid"/>
-                      <a:round/>
-                      <a:headEnd type="none" w="med" len="med"/>
-                      <a:tailEnd type="none" w="med" len="med"/>
-                    </a:lnR>
-                    <a:lnT w="12700" cap="flat" cmpd="sng" algn="ctr">
-                      <a:solidFill>
-                        <a:schemeClr val="tx1"/>
-                      </a:solidFill>
-                      <a:prstDash val="solid"/>
-                      <a:round/>
-                      <a:headEnd type="none" w="med" len="med"/>
-                      <a:tailEnd type="none" w="med" len="med"/>
-                    </a:lnT>
-                    <a:lnB w="12700" cap="flat" cmpd="sng" algn="ctr">
-                      <a:solidFill>
-                        <a:schemeClr val="tx1"/>
-                      </a:solidFill>
-                      <a:prstDash val="solid"/>
-                      <a:round/>
-                      <a:headEnd type="none" w="med" len="med"/>
-                      <a:tailEnd type="none" w="med" len="med"/>
-                    </a:lnB>
-                    <a:solidFill>
-                      <a:schemeClr val="bg1">
-                        <a:lumMod val="85000"/>
-                      </a:schemeClr>
-                    </a:solidFill>
-                  </a:tcPr>
-                </a:tc>
-                <a:tc hMerge="1">
-                  <a:txBody>
-                    <a:bodyPr/>
-                    <a:lstStyle/>
-                    <a:p>
-                      <a:pPr algn="l" latinLnBrk="1"/>
-                      <a:endParaRPr lang="ko-KR" altLang="en-US" sz="1200"/>
-                    </a:p>
-                  </a:txBody>
-                  <a:tcPr anchor="ctr">
-                    <a:lnL w="12700" cap="flat" cmpd="sng" algn="ctr">
-                      <a:solidFill>
-                        <a:schemeClr val="tx1"/>
-                      </a:solidFill>
-                      <a:prstDash val="solid"/>
-                      <a:round/>
-                      <a:headEnd type="none" w="med" len="med"/>
-                      <a:tailEnd type="none" w="med" len="med"/>
-                    </a:lnL>
-                    <a:lnR w="12700" cap="flat" cmpd="sng" algn="ctr">
-                      <a:solidFill>
-                        <a:schemeClr val="tx1"/>
-                      </a:solidFill>
-                      <a:prstDash val="solid"/>
-                      <a:round/>
-                      <a:headEnd type="none" w="med" len="med"/>
-                      <a:tailEnd type="none" w="med" len="med"/>
-                    </a:lnR>
-                    <a:lnT w="12700" cap="flat" cmpd="sng" algn="ctr">
-                      <a:solidFill>
-                        <a:schemeClr val="tx1"/>
-                      </a:solidFill>
-                      <a:prstDash val="solid"/>
-                      <a:round/>
-                      <a:headEnd type="none" w="med" len="med"/>
-                      <a:tailEnd type="none" w="med" len="med"/>
-                    </a:lnT>
-                    <a:lnB w="12700" cap="flat" cmpd="sng" algn="ctr">
-                      <a:solidFill>
-                        <a:schemeClr val="tx1"/>
-                      </a:solidFill>
-                      <a:prstDash val="solid"/>
-                      <a:round/>
-                      <a:headEnd type="none" w="med" len="med"/>
-                      <a:tailEnd type="none" w="med" len="med"/>
-                    </a:lnB>
-                    <a:solidFill>
-                      <a:schemeClr val="bg1"/>
-                    </a:solidFill>
-                  </a:tcPr>
-                </a:tc>
-                <a:extLst>
-                  <a:ext uri="{0D108BD9-81ED-4DB2-BD59-A6C34878D82A}">
-                    <a16:rowId xmlns:a16="http://schemas.microsoft.com/office/drawing/2014/main" val="2275643079"/>
-                  </a:ext>
-                </a:extLst>
-              </a:tr>
-              <a:tr h="612000">
-                <a:tc gridSpan="2">
-                  <a:txBody>
-                    <a:bodyPr/>
-                    <a:lstStyle/>
-                    <a:p>
-                      <a:pPr marL="0" marR="0" lvl="0" indent="0" algn="ctr" defTabSz="914400" rtl="0" eaLnBrk="1" fontAlgn="auto" latinLnBrk="1" hangingPunct="1">
-                        <a:lnSpc>
-                          <a:spcPct val="100000"/>
-                        </a:lnSpc>
-                        <a:spcBef>
-                          <a:spcPts val="0"/>
-                        </a:spcBef>
-                        <a:spcAft>
-                          <a:spcPts val="0"/>
-                        </a:spcAft>
-                        <a:buClrTx/>
-                        <a:buSzTx/>
-                        <a:buFontTx/>
-                        <a:buNone/>
-                        <a:tabLst/>
-                        <a:defRPr/>
-                      </a:pPr>
-                      <a:r>
-                        <a:rPr lang="ko-KR" altLang="en-US" sz="1200"/>
-                        <a:t>위에 </a:t>
-                      </a:r>
-                      <a:r>
-                        <a:rPr lang="en-US" altLang="ko-KR" sz="1200"/>
-                        <a:t>Look up, Predict</a:t>
-                      </a:r>
-                      <a:r>
-                        <a:rPr lang="ko-KR" altLang="en-US" sz="1200"/>
-                        <a:t>는 메인 페이지의 기능과 동일</a:t>
-                      </a:r>
-                    </a:p>
-                  </a:txBody>
-                  <a:tcPr>
-                    <a:lnL w="12700" cap="flat" cmpd="sng" algn="ctr">
-                      <a:solidFill>
-                        <a:schemeClr val="tx1"/>
-                      </a:solidFill>
-                      <a:prstDash val="solid"/>
-                      <a:round/>
-                      <a:headEnd type="none" w="med" len="med"/>
-                      <a:tailEnd type="none" w="med" len="med"/>
-                    </a:lnL>
-                    <a:lnR w="12700" cap="flat" cmpd="sng" algn="ctr">
-                      <a:solidFill>
-                        <a:schemeClr val="tx1"/>
-                      </a:solidFill>
-                      <a:prstDash val="solid"/>
-                      <a:round/>
-                      <a:headEnd type="none" w="med" len="med"/>
-                      <a:tailEnd type="none" w="med" len="med"/>
-                    </a:lnR>
-                    <a:lnT w="12700" cap="flat" cmpd="sng" algn="ctr">
-                      <a:solidFill>
-                        <a:schemeClr val="tx1"/>
-                      </a:solidFill>
-                      <a:prstDash val="solid"/>
-                      <a:round/>
-                      <a:headEnd type="none" w="med" len="med"/>
-                      <a:tailEnd type="none" w="med" len="med"/>
-                    </a:lnT>
-                    <a:lnB w="12700" cap="flat" cmpd="sng" algn="ctr">
-                      <a:solidFill>
-                        <a:schemeClr val="tx1"/>
-                      </a:solidFill>
-                      <a:prstDash val="solid"/>
-                      <a:round/>
-                      <a:headEnd type="none" w="med" len="med"/>
-                      <a:tailEnd type="none" w="med" len="med"/>
-                    </a:lnB>
-                    <a:solidFill>
-                      <a:schemeClr val="bg1"/>
-                    </a:solidFill>
-                  </a:tcPr>
-                </a:tc>
-                <a:tc hMerge="1">
-                  <a:txBody>
-                    <a:bodyPr/>
-                    <a:lstStyle/>
-                    <a:p>
-                      <a:pPr algn="l" latinLnBrk="1"/>
-                      <a:endParaRPr lang="ko-KR" altLang="en-US" sz="1200"/>
-                    </a:p>
-                  </a:txBody>
-                  <a:tcPr anchor="ctr">
-                    <a:lnL w="12700" cap="flat" cmpd="sng" algn="ctr">
-                      <a:solidFill>
-                        <a:schemeClr val="tx1"/>
-                      </a:solidFill>
-                      <a:prstDash val="solid"/>
-                      <a:round/>
-                      <a:headEnd type="none" w="med" len="med"/>
-                      <a:tailEnd type="none" w="med" len="med"/>
-                    </a:lnL>
-                    <a:lnR w="12700" cap="flat" cmpd="sng" algn="ctr">
-                      <a:solidFill>
-                        <a:schemeClr val="tx1"/>
-                      </a:solidFill>
-                      <a:prstDash val="solid"/>
-                      <a:round/>
-                      <a:headEnd type="none" w="med" len="med"/>
-                      <a:tailEnd type="none" w="med" len="med"/>
-                    </a:lnR>
-                    <a:lnT w="12700" cap="flat" cmpd="sng" algn="ctr">
-                      <a:solidFill>
-                        <a:schemeClr val="tx1"/>
-                      </a:solidFill>
-                      <a:prstDash val="solid"/>
-                      <a:round/>
-                      <a:headEnd type="none" w="med" len="med"/>
-                      <a:tailEnd type="none" w="med" len="med"/>
-                    </a:lnT>
-                    <a:lnB w="12700" cap="flat" cmpd="sng" algn="ctr">
-                      <a:solidFill>
-                        <a:schemeClr val="tx1"/>
-                      </a:solidFill>
-                      <a:prstDash val="solid"/>
-                      <a:round/>
-                      <a:headEnd type="none" w="med" len="med"/>
-                      <a:tailEnd type="none" w="med" len="med"/>
-                    </a:lnB>
-                    <a:solidFill>
-                      <a:schemeClr val="bg1"/>
-                    </a:solidFill>
-                  </a:tcPr>
-                </a:tc>
-                <a:extLst>
-                  <a:ext uri="{0D108BD9-81ED-4DB2-BD59-A6C34878D82A}">
-                    <a16:rowId xmlns:a16="http://schemas.microsoft.com/office/drawing/2014/main" val="1885486421"/>
-                  </a:ext>
-                </a:extLst>
-              </a:tr>
-            </a:tbl>
-          </a:graphicData>
-        </a:graphic>
-      </p:graphicFrame>
-      <p:sp>
-        <p:nvSpPr>
-          <p:cNvPr id="2" name="타원 1">
-            <a:extLst>
-              <a:ext uri="{FF2B5EF4-FFF2-40B4-BE49-F238E27FC236}">
-                <a16:creationId xmlns:a16="http://schemas.microsoft.com/office/drawing/2014/main" id="{CFA4621C-5EB8-811B-072B-A85ED9144CF2}"/>
-              </a:ext>
-            </a:extLst>
-          </p:cNvPr>
-          <p:cNvSpPr>
-            <a:spLocks noChangeAspect="1"/>
-          </p:cNvSpPr>
-          <p:nvPr/>
-        </p:nvSpPr>
-        <p:spPr>
-          <a:xfrm>
-            <a:off x="4901822" y="2397604"/>
-            <a:ext cx="324000" cy="324000"/>
-          </a:xfrm>
-          <a:prstGeom prst="ellipse">
-            <a:avLst/>
-          </a:prstGeom>
-          <a:solidFill>
-            <a:srgbClr val="C00000">
-              <a:alpha val="60000"/>
-            </a:srgbClr>
-          </a:solidFill>
-        </p:spPr>
-        <p:style>
-          <a:lnRef idx="2">
-            <a:schemeClr val="accent1">
-              <a:shade val="15000"/>
-            </a:schemeClr>
-          </a:lnRef>
-          <a:fillRef idx="1">
-            <a:schemeClr val="accent1"/>
-          </a:fillRef>
-          <a:effectRef idx="0">
-            <a:schemeClr val="accent1"/>
-          </a:effectRef>
-          <a:fontRef idx="minor">
-            <a:schemeClr val="lt1"/>
-          </a:fontRef>
-        </p:style>
-        <p:txBody>
-          <a:bodyPr rtlCol="0" anchor="ctr"/>
-          <a:lstStyle/>
-          <a:p>
-            <a:pPr algn="ctr"/>
-            <a:r>
-              <a:rPr lang="en-US" altLang="ko-KR" sz="2000">
-                <a:latin typeface="+mn-ea"/>
-              </a:rPr>
-              <a:t>2</a:t>
-            </a:r>
-            <a:endParaRPr lang="ko-KR" altLang="en-US" sz="2000">
-              <a:latin typeface="+mn-ea"/>
-            </a:endParaRPr>
-          </a:p>
-        </p:txBody>
-      </p:sp>
-      <p:sp>
-        <p:nvSpPr>
-          <p:cNvPr id="9" name="타원 8">
-            <a:extLst>
-              <a:ext uri="{FF2B5EF4-FFF2-40B4-BE49-F238E27FC236}">
-                <a16:creationId xmlns:a16="http://schemas.microsoft.com/office/drawing/2014/main" id="{D4E14AD0-C0F5-B974-6574-7EBB78BAB894}"/>
-              </a:ext>
-            </a:extLst>
-          </p:cNvPr>
-          <p:cNvSpPr>
-            <a:spLocks noChangeAspect="1"/>
-          </p:cNvSpPr>
-          <p:nvPr/>
-        </p:nvSpPr>
-        <p:spPr>
-          <a:xfrm>
-            <a:off x="2885634" y="2400647"/>
+            <a:off x="546491" y="2628983"/>
             <a:ext cx="324000" cy="324000"/>
           </a:xfrm>
           <a:prstGeom prst="ellipse">
@@ -15666,7 +13204,7 @@
     </p:spTree>
     <p:extLst>
       <p:ext uri="{BB962C8B-B14F-4D97-AF65-F5344CB8AC3E}">
-        <p14:creationId xmlns:p14="http://schemas.microsoft.com/office/powerpoint/2010/main" val="1428151794"/>
+        <p14:creationId xmlns:p14="http://schemas.microsoft.com/office/powerpoint/2010/main" val="710167497"/>
       </p:ext>
     </p:extLst>
   </p:cSld>
